--- a/Lecture_Slides/PH 123 Lecture 36.pptx
+++ b/Lecture_Slides/PH 123 Lecture 36.pptx
@@ -6,12 +6,13 @@
   </p:sldMasterIdLst>
   <p:sldIdLst>
     <p:sldId id="256" r:id="rId2"/>
-    <p:sldId id="341" r:id="rId3"/>
-    <p:sldId id="265" r:id="rId4"/>
-    <p:sldId id="285" r:id="rId5"/>
-    <p:sldId id="340" r:id="rId6"/>
-    <p:sldId id="283" r:id="rId7"/>
-    <p:sldId id="257" r:id="rId8"/>
+    <p:sldId id="484" r:id="rId3"/>
+    <p:sldId id="341" r:id="rId4"/>
+    <p:sldId id="265" r:id="rId5"/>
+    <p:sldId id="285" r:id="rId6"/>
+    <p:sldId id="340" r:id="rId7"/>
+    <p:sldId id="283" r:id="rId8"/>
+    <p:sldId id="257" r:id="rId9"/>
   </p:sldIdLst>
   <p:sldSz cx="12192000" cy="6858000"/>
   <p:notesSz cx="6858000" cy="9144000"/>
@@ -110,13 +111,18 @@
       </a:defRPr>
     </a:lvl9pPr>
   </p:defaultTextStyle>
+  <p:extLst>
+    <p:ext uri="{EFAFB233-063F-42B5-8137-9DF3F51BA10A}">
+      <p15:sldGuideLst xmlns:p15="http://schemas.microsoft.com/office/powerpoint/2012/main"/>
+    </p:ext>
+  </p:extLst>
 </p:presentation>
 </file>
 
 <file path=ppt/revisionInfo.xml><?xml version="1.0" encoding="utf-8"?>
 <p1510:revInfo xmlns:a="http://schemas.openxmlformats.org/drawingml/2006/main" xmlns:r="http://schemas.openxmlformats.org/officeDocument/2006/relationships" xmlns:p1510="http://schemas.microsoft.com/office/powerpoint/2015/10/main">
   <p1510:revLst>
-    <p1510:client id="{19433E2F-A7AC-4341-9FA4-5680B2C19CE3}" v="1" dt="2025-07-03T22:45:43.068"/>
+    <p1510:client id="{19433E2F-A7AC-4341-9FA4-5680B2C19CE3}" v="2" dt="2025-07-08T19:01:42.760"/>
   </p1510:revLst>
 </p1510:revInfo>
 </file>
@@ -126,7 +132,7 @@
   <pc:docChgLst>
     <pc:chgData name="Lines, Todd" userId="afaf7c3a-e8aa-4568-882a-02ad8f9e19b0" providerId="ADAL" clId="{19433E2F-A7AC-4341-9FA4-5680B2C19CE3}"/>
     <pc:docChg chg="custSel addSld modSld">
-      <pc:chgData name="Lines, Todd" userId="afaf7c3a-e8aa-4568-882a-02ad8f9e19b0" providerId="ADAL" clId="{19433E2F-A7AC-4341-9FA4-5680B2C19CE3}" dt="2025-07-03T22:45:43.067" v="5"/>
+      <pc:chgData name="Lines, Todd" userId="afaf7c3a-e8aa-4568-882a-02ad8f9e19b0" providerId="ADAL" clId="{19433E2F-A7AC-4341-9FA4-5680B2C19CE3}" dt="2025-07-08T19:01:50.896" v="8" actId="20577"/>
       <pc:docMkLst>
         <pc:docMk/>
       </pc:docMkLst>
@@ -143,22 +149,6 @@
           <pc:docMk/>
           <pc:sldMk cId="3556862412" sldId="341"/>
         </pc:sldMkLst>
-        <pc:spChg chg="del">
-          <ac:chgData name="Lines, Todd" userId="afaf7c3a-e8aa-4568-882a-02ad8f9e19b0" providerId="ADAL" clId="{19433E2F-A7AC-4341-9FA4-5680B2C19CE3}" dt="2025-07-03T22:44:05.329" v="1" actId="478"/>
-          <ac:spMkLst>
-            <pc:docMk/>
-            <pc:sldMk cId="3556862412" sldId="341"/>
-            <ac:spMk id="2" creationId="{13CF5273-D19C-028C-5362-9A89FB01E951}"/>
-          </ac:spMkLst>
-        </pc:spChg>
-        <pc:spChg chg="del">
-          <ac:chgData name="Lines, Todd" userId="afaf7c3a-e8aa-4568-882a-02ad8f9e19b0" providerId="ADAL" clId="{19433E2F-A7AC-4341-9FA4-5680B2C19CE3}" dt="2025-07-03T22:44:05.329" v="1" actId="478"/>
-          <ac:spMkLst>
-            <pc:docMk/>
-            <pc:sldMk cId="3556862412" sldId="341"/>
-            <ac:spMk id="3" creationId="{E7A8934F-4B16-04B2-D208-E2FEE78C8BBB}"/>
-          </ac:spMkLst>
-        </pc:spChg>
         <pc:picChg chg="add mod">
           <ac:chgData name="Lines, Todd" userId="afaf7c3a-e8aa-4568-882a-02ad8f9e19b0" providerId="ADAL" clId="{19433E2F-A7AC-4341-9FA4-5680B2C19CE3}" dt="2025-07-03T22:44:15.552" v="4" actId="14100"/>
           <ac:picMkLst>
@@ -167,6 +157,21 @@
             <ac:picMk id="5" creationId="{FE9C3FC7-9DC0-D72B-55CE-8DD1D7DED647}"/>
           </ac:picMkLst>
         </pc:picChg>
+      </pc:sldChg>
+      <pc:sldChg chg="modSp add mod">
+        <pc:chgData name="Lines, Todd" userId="afaf7c3a-e8aa-4568-882a-02ad8f9e19b0" providerId="ADAL" clId="{19433E2F-A7AC-4341-9FA4-5680B2C19CE3}" dt="2025-07-08T19:01:50.896" v="8" actId="20577"/>
+        <pc:sldMkLst>
+          <pc:docMk/>
+          <pc:sldMk cId="0" sldId="484"/>
+        </pc:sldMkLst>
+        <pc:spChg chg="mod">
+          <ac:chgData name="Lines, Todd" userId="afaf7c3a-e8aa-4568-882a-02ad8f9e19b0" providerId="ADAL" clId="{19433E2F-A7AC-4341-9FA4-5680B2C19CE3}" dt="2025-07-08T19:01:50.896" v="8" actId="20577"/>
+          <ac:spMkLst>
+            <pc:docMk/>
+            <pc:sldMk cId="0" sldId="484"/>
+            <ac:spMk id="35843" creationId="{25E6F564-0ACC-BFA0-5D1C-098F0645008F}"/>
+          </ac:spMkLst>
+        </pc:spChg>
       </pc:sldChg>
     </pc:docChg>
   </pc:docChgLst>
@@ -320,7 +325,7 @@
           <a:p>
             <a:fld id="{5D14FE54-3E4B-43AC-AC6A-78E009FC7A62}" type="datetimeFigureOut">
               <a:rPr lang="en-US" smtClean="0"/>
-              <a:t>7/3/2025</a:t>
+              <a:t>7/8/2025</a:t>
             </a:fld>
             <a:endParaRPr lang="en-US"/>
           </a:p>
@@ -518,7 +523,7 @@
           <a:p>
             <a:fld id="{5D14FE54-3E4B-43AC-AC6A-78E009FC7A62}" type="datetimeFigureOut">
               <a:rPr lang="en-US" smtClean="0"/>
-              <a:t>7/3/2025</a:t>
+              <a:t>7/8/2025</a:t>
             </a:fld>
             <a:endParaRPr lang="en-US"/>
           </a:p>
@@ -726,7 +731,7 @@
           <a:p>
             <a:fld id="{5D14FE54-3E4B-43AC-AC6A-78E009FC7A62}" type="datetimeFigureOut">
               <a:rPr lang="en-US" smtClean="0"/>
-              <a:t>7/3/2025</a:t>
+              <a:t>7/8/2025</a:t>
             </a:fld>
             <a:endParaRPr lang="en-US"/>
           </a:p>
@@ -924,7 +929,7 @@
           <a:p>
             <a:fld id="{5D14FE54-3E4B-43AC-AC6A-78E009FC7A62}" type="datetimeFigureOut">
               <a:rPr lang="en-US" smtClean="0"/>
-              <a:t>7/3/2025</a:t>
+              <a:t>7/8/2025</a:t>
             </a:fld>
             <a:endParaRPr lang="en-US"/>
           </a:p>
@@ -1199,7 +1204,7 @@
           <a:p>
             <a:fld id="{5D14FE54-3E4B-43AC-AC6A-78E009FC7A62}" type="datetimeFigureOut">
               <a:rPr lang="en-US" smtClean="0"/>
-              <a:t>7/3/2025</a:t>
+              <a:t>7/8/2025</a:t>
             </a:fld>
             <a:endParaRPr lang="en-US"/>
           </a:p>
@@ -1464,7 +1469,7 @@
           <a:p>
             <a:fld id="{5D14FE54-3E4B-43AC-AC6A-78E009FC7A62}" type="datetimeFigureOut">
               <a:rPr lang="en-US" smtClean="0"/>
-              <a:t>7/3/2025</a:t>
+              <a:t>7/8/2025</a:t>
             </a:fld>
             <a:endParaRPr lang="en-US"/>
           </a:p>
@@ -1876,7 +1881,7 @@
           <a:p>
             <a:fld id="{5D14FE54-3E4B-43AC-AC6A-78E009FC7A62}" type="datetimeFigureOut">
               <a:rPr lang="en-US" smtClean="0"/>
-              <a:t>7/3/2025</a:t>
+              <a:t>7/8/2025</a:t>
             </a:fld>
             <a:endParaRPr lang="en-US"/>
           </a:p>
@@ -2017,7 +2022,7 @@
           <a:p>
             <a:fld id="{5D14FE54-3E4B-43AC-AC6A-78E009FC7A62}" type="datetimeFigureOut">
               <a:rPr lang="en-US" smtClean="0"/>
-              <a:t>7/3/2025</a:t>
+              <a:t>7/8/2025</a:t>
             </a:fld>
             <a:endParaRPr lang="en-US"/>
           </a:p>
@@ -2130,7 +2135,7 @@
           <a:p>
             <a:fld id="{5D14FE54-3E4B-43AC-AC6A-78E009FC7A62}" type="datetimeFigureOut">
               <a:rPr lang="en-US" smtClean="0"/>
-              <a:t>7/3/2025</a:t>
+              <a:t>7/8/2025</a:t>
             </a:fld>
             <a:endParaRPr lang="en-US"/>
           </a:p>
@@ -2441,7 +2446,7 @@
           <a:p>
             <a:fld id="{5D14FE54-3E4B-43AC-AC6A-78E009FC7A62}" type="datetimeFigureOut">
               <a:rPr lang="en-US" smtClean="0"/>
-              <a:t>7/3/2025</a:t>
+              <a:t>7/8/2025</a:t>
             </a:fld>
             <a:endParaRPr lang="en-US"/>
           </a:p>
@@ -2729,7 +2734,7 @@
           <a:p>
             <a:fld id="{5D14FE54-3E4B-43AC-AC6A-78E009FC7A62}" type="datetimeFigureOut">
               <a:rPr lang="en-US" smtClean="0"/>
-              <a:t>7/3/2025</a:t>
+              <a:t>7/8/2025</a:t>
             </a:fld>
             <a:endParaRPr lang="en-US"/>
           </a:p>
@@ -2970,7 +2975,7 @@
           <a:p>
             <a:fld id="{5D14FE54-3E4B-43AC-AC6A-78E009FC7A62}" type="datetimeFigureOut">
               <a:rPr lang="en-US" smtClean="0"/>
-              <a:t>7/3/2025</a:t>
+              <a:t>7/8/2025</a:t>
             </a:fld>
             <a:endParaRPr lang="en-US"/>
           </a:p>
@@ -3470,6 +3475,314 @@
           <a:chExt cx="0" cy="0"/>
         </a:xfrm>
       </p:grpSpPr>
+      <p:sp>
+        <p:nvSpPr>
+          <p:cNvPr id="35842" name="Title 1">
+            <a:extLst>
+              <a:ext uri="{FF2B5EF4-FFF2-40B4-BE49-F238E27FC236}">
+                <a16:creationId xmlns:a16="http://schemas.microsoft.com/office/drawing/2014/main" id="{F43ACF25-DEF1-F1E0-E112-C04FCEC49AE5}"/>
+              </a:ext>
+            </a:extLst>
+          </p:cNvPr>
+          <p:cNvSpPr>
+            <a:spLocks noGrp="1" noChangeArrowheads="1"/>
+          </p:cNvSpPr>
+          <p:nvPr>
+            <p:ph type="title"/>
+          </p:nvPr>
+        </p:nvSpPr>
+        <p:spPr/>
+        <p:txBody>
+          <a:bodyPr/>
+          <a:lstStyle/>
+          <a:p>
+            <a:r>
+              <a:rPr lang="en-US" altLang="en-US"/>
+              <a:t>Question 123.11.4</a:t>
+            </a:r>
+          </a:p>
+        </p:txBody>
+      </p:sp>
+      <p:sp>
+        <p:nvSpPr>
+          <p:cNvPr id="35843" name="Content Placeholder 2">
+            <a:extLst>
+              <a:ext uri="{FF2B5EF4-FFF2-40B4-BE49-F238E27FC236}">
+                <a16:creationId xmlns:a16="http://schemas.microsoft.com/office/drawing/2014/main" id="{25E6F564-0ACC-BFA0-5D1C-098F0645008F}"/>
+              </a:ext>
+            </a:extLst>
+          </p:cNvPr>
+          <p:cNvSpPr>
+            <a:spLocks noGrp="1" noChangeArrowheads="1"/>
+          </p:cNvSpPr>
+          <p:nvPr>
+            <p:ph idx="1"/>
+          </p:nvPr>
+        </p:nvSpPr>
+        <p:spPr/>
+        <p:txBody>
+          <a:bodyPr/>
+          <a:lstStyle/>
+          <a:p>
+            <a:pPr>
+              <a:buFontTx/>
+              <a:buNone/>
+            </a:pPr>
+            <a:r>
+              <a:rPr lang="en-US" altLang="en-US" dirty="0"/>
+              <a:t>You put a gas in a cylinder with a piston through a process that changes the temperature. </a:t>
+            </a:r>
+            <a:r>
+              <a:rPr lang="en-US" altLang="en-US"/>
+              <a:t>Can Q = 0</a:t>
+            </a:r>
+            <a:r>
+              <a:rPr lang="en-US" altLang="en-US" dirty="0"/>
+              <a:t>?</a:t>
+            </a:r>
+          </a:p>
+          <a:p>
+            <a:pPr>
+              <a:buFontTx/>
+              <a:buAutoNum type="alphaLcParenR"/>
+            </a:pPr>
+            <a:r>
+              <a:rPr lang="en-US" altLang="en-US" dirty="0"/>
+              <a:t>Yes, if it is the right process</a:t>
+            </a:r>
+          </a:p>
+          <a:p>
+            <a:pPr>
+              <a:buFontTx/>
+              <a:buAutoNum type="alphaLcParenR"/>
+            </a:pPr>
+            <a:r>
+              <a:rPr lang="en-US" altLang="en-US" dirty="0"/>
+              <a:t>No</a:t>
+            </a:r>
+          </a:p>
+          <a:p>
+            <a:pPr>
+              <a:buFontTx/>
+              <a:buAutoNum type="alphaLcParenR"/>
+            </a:pPr>
+            <a:r>
+              <a:rPr lang="en-US" altLang="en-US" dirty="0"/>
+              <a:t>Maybe</a:t>
+            </a:r>
+          </a:p>
+        </p:txBody>
+      </p:sp>
+      <p:sp>
+        <p:nvSpPr>
+          <p:cNvPr id="35844" name="Slide Number Placeholder 3">
+            <a:extLst>
+              <a:ext uri="{FF2B5EF4-FFF2-40B4-BE49-F238E27FC236}">
+                <a16:creationId xmlns:a16="http://schemas.microsoft.com/office/drawing/2014/main" id="{57E8B4B4-1F76-2700-68DE-DCC42345C396}"/>
+              </a:ext>
+            </a:extLst>
+          </p:cNvPr>
+          <p:cNvSpPr>
+            <a:spLocks noGrp="1"/>
+          </p:cNvSpPr>
+          <p:nvPr>
+            <p:ph type="sldNum" sz="quarter" idx="12"/>
+          </p:nvPr>
+        </p:nvSpPr>
+        <p:spPr bwMode="auto">
+          <a:noFill/>
+          <a:extLst>
+            <a:ext uri="{909E8E84-426E-40DD-AFC4-6F175D3DCCD1}">
+              <a14:hiddenFill xmlns:a14="http://schemas.microsoft.com/office/drawing/2010/main">
+                <a:solidFill>
+                  <a:srgbClr val="FFFFFF"/>
+                </a:solidFill>
+              </a14:hiddenFill>
+            </a:ext>
+            <a:ext uri="{91240B29-F687-4F45-9708-019B960494DF}">
+              <a14:hiddenLine xmlns:a14="http://schemas.microsoft.com/office/drawing/2010/main" w="9525">
+                <a:solidFill>
+                  <a:srgbClr val="000000"/>
+                </a:solidFill>
+                <a:miter lim="800000"/>
+                <a:headEnd/>
+                <a:tailEnd/>
+              </a14:hiddenLine>
+            </a:ext>
+          </a:extLst>
+        </p:spPr>
+        <p:txBody>
+          <a:bodyPr/>
+          <a:lstStyle>
+            <a:lvl1pPr>
+              <a:spcBef>
+                <a:spcPct val="20000"/>
+              </a:spcBef>
+              <a:buChar char="•"/>
+              <a:defRPr sz="3200">
+                <a:solidFill>
+                  <a:schemeClr val="tx1"/>
+                </a:solidFill>
+                <a:latin typeface="Arial" panose="020B0604020202020204" pitchFamily="34" charset="0"/>
+              </a:defRPr>
+            </a:lvl1pPr>
+            <a:lvl2pPr marL="742950" indent="-285750">
+              <a:spcBef>
+                <a:spcPct val="20000"/>
+              </a:spcBef>
+              <a:buChar char="–"/>
+              <a:defRPr sz="2800">
+                <a:solidFill>
+                  <a:schemeClr val="tx1"/>
+                </a:solidFill>
+                <a:latin typeface="Arial" panose="020B0604020202020204" pitchFamily="34" charset="0"/>
+              </a:defRPr>
+            </a:lvl2pPr>
+            <a:lvl3pPr marL="1143000" indent="-228600">
+              <a:spcBef>
+                <a:spcPct val="20000"/>
+              </a:spcBef>
+              <a:buChar char="•"/>
+              <a:defRPr sz="2400">
+                <a:solidFill>
+                  <a:schemeClr val="tx1"/>
+                </a:solidFill>
+                <a:latin typeface="Arial" panose="020B0604020202020204" pitchFamily="34" charset="0"/>
+              </a:defRPr>
+            </a:lvl3pPr>
+            <a:lvl4pPr marL="1600200" indent="-228600">
+              <a:spcBef>
+                <a:spcPct val="20000"/>
+              </a:spcBef>
+              <a:buChar char="–"/>
+              <a:defRPr sz="2000">
+                <a:solidFill>
+                  <a:schemeClr val="tx1"/>
+                </a:solidFill>
+                <a:latin typeface="Arial" panose="020B0604020202020204" pitchFamily="34" charset="0"/>
+              </a:defRPr>
+            </a:lvl4pPr>
+            <a:lvl5pPr marL="2057400" indent="-228600">
+              <a:spcBef>
+                <a:spcPct val="20000"/>
+              </a:spcBef>
+              <a:buChar char="»"/>
+              <a:defRPr sz="2000">
+                <a:solidFill>
+                  <a:schemeClr val="tx1"/>
+                </a:solidFill>
+                <a:latin typeface="Arial" panose="020B0604020202020204" pitchFamily="34" charset="0"/>
+              </a:defRPr>
+            </a:lvl5pPr>
+            <a:lvl6pPr marL="2514600" indent="-228600" eaLnBrk="0" fontAlgn="base" hangingPunct="0">
+              <a:spcBef>
+                <a:spcPct val="20000"/>
+              </a:spcBef>
+              <a:spcAft>
+                <a:spcPct val="0"/>
+              </a:spcAft>
+              <a:buChar char="»"/>
+              <a:defRPr sz="2000">
+                <a:solidFill>
+                  <a:schemeClr val="tx1"/>
+                </a:solidFill>
+                <a:latin typeface="Arial" panose="020B0604020202020204" pitchFamily="34" charset="0"/>
+              </a:defRPr>
+            </a:lvl6pPr>
+            <a:lvl7pPr marL="2971800" indent="-228600" eaLnBrk="0" fontAlgn="base" hangingPunct="0">
+              <a:spcBef>
+                <a:spcPct val="20000"/>
+              </a:spcBef>
+              <a:spcAft>
+                <a:spcPct val="0"/>
+              </a:spcAft>
+              <a:buChar char="»"/>
+              <a:defRPr sz="2000">
+                <a:solidFill>
+                  <a:schemeClr val="tx1"/>
+                </a:solidFill>
+                <a:latin typeface="Arial" panose="020B0604020202020204" pitchFamily="34" charset="0"/>
+              </a:defRPr>
+            </a:lvl7pPr>
+            <a:lvl8pPr marL="3429000" indent="-228600" eaLnBrk="0" fontAlgn="base" hangingPunct="0">
+              <a:spcBef>
+                <a:spcPct val="20000"/>
+              </a:spcBef>
+              <a:spcAft>
+                <a:spcPct val="0"/>
+              </a:spcAft>
+              <a:buChar char="»"/>
+              <a:defRPr sz="2000">
+                <a:solidFill>
+                  <a:schemeClr val="tx1"/>
+                </a:solidFill>
+                <a:latin typeface="Arial" panose="020B0604020202020204" pitchFamily="34" charset="0"/>
+              </a:defRPr>
+            </a:lvl8pPr>
+            <a:lvl9pPr marL="3886200" indent="-228600" eaLnBrk="0" fontAlgn="base" hangingPunct="0">
+              <a:spcBef>
+                <a:spcPct val="20000"/>
+              </a:spcBef>
+              <a:spcAft>
+                <a:spcPct val="0"/>
+              </a:spcAft>
+              <a:buChar char="»"/>
+              <a:defRPr sz="2000">
+                <a:solidFill>
+                  <a:schemeClr val="tx1"/>
+                </a:solidFill>
+                <a:latin typeface="Arial" panose="020B0604020202020204" pitchFamily="34" charset="0"/>
+              </a:defRPr>
+            </a:lvl9pPr>
+          </a:lstStyle>
+          <a:p>
+            <a:pPr>
+              <a:spcBef>
+                <a:spcPct val="0"/>
+              </a:spcBef>
+              <a:buFontTx/>
+              <a:buNone/>
+            </a:pPr>
+            <a:fld id="{6DC6CAC7-B115-4CA8-825E-3F1ADFC365D7}" type="slidenum">
+              <a:rPr lang="en-US" altLang="en-US" sz="1800"/>
+              <a:pPr>
+                <a:spcBef>
+                  <a:spcPct val="0"/>
+                </a:spcBef>
+                <a:buFontTx/>
+                <a:buNone/>
+              </a:pPr>
+              <a:t>2</a:t>
+            </a:fld>
+            <a:endParaRPr lang="en-US" altLang="en-US" sz="1800"/>
+          </a:p>
+        </p:txBody>
+      </p:sp>
+    </p:spTree>
+  </p:cSld>
+  <p:clrMapOvr>
+    <a:masterClrMapping/>
+  </p:clrMapOvr>
+</p:sld>
+</file>
+
+<file path=ppt/slides/slide3.xml><?xml version="1.0" encoding="utf-8"?>
+<p:sld xmlns:a="http://schemas.openxmlformats.org/drawingml/2006/main" xmlns:r="http://schemas.openxmlformats.org/officeDocument/2006/relationships" xmlns:p="http://schemas.openxmlformats.org/presentationml/2006/main">
+  <p:cSld>
+    <p:spTree>
+      <p:nvGrpSpPr>
+        <p:cNvPr id="1" name=""/>
+        <p:cNvGrpSpPr/>
+        <p:nvPr/>
+      </p:nvGrpSpPr>
+      <p:grpSpPr>
+        <a:xfrm>
+          <a:off x="0" y="0"/>
+          <a:ext cx="0" cy="0"/>
+          <a:chOff x="0" y="0"/>
+          <a:chExt cx="0" cy="0"/>
+        </a:xfrm>
+      </p:grpSpPr>
       <p:pic>
         <p:nvPicPr>
           <p:cNvPr id="5" name="Picture 4">
@@ -3513,7 +3826,7 @@
 </p:sld>
 </file>
 
-<file path=ppt/slides/slide3.xml><?xml version="1.0" encoding="utf-8"?>
+<file path=ppt/slides/slide4.xml><?xml version="1.0" encoding="utf-8"?>
 <p:sld xmlns:a="http://schemas.openxmlformats.org/drawingml/2006/main" xmlns:r="http://schemas.openxmlformats.org/officeDocument/2006/relationships" xmlns:p="http://schemas.openxmlformats.org/presentationml/2006/main">
   <p:cSld>
     <p:spTree>
@@ -3609,7 +3922,7 @@
 </p:sld>
 </file>
 
-<file path=ppt/slides/slide4.xml><?xml version="1.0" encoding="utf-8"?>
+<file path=ppt/slides/slide5.xml><?xml version="1.0" encoding="utf-8"?>
 <p:sld xmlns:a="http://schemas.openxmlformats.org/drawingml/2006/main" xmlns:r="http://schemas.openxmlformats.org/officeDocument/2006/relationships" xmlns:p="http://schemas.openxmlformats.org/presentationml/2006/main">
   <p:cSld>
     <p:spTree>
@@ -4158,7 +4471,7 @@
 </p:sld>
 </file>
 
-<file path=ppt/slides/slide5.xml><?xml version="1.0" encoding="utf-8"?>
+<file path=ppt/slides/slide6.xml><?xml version="1.0" encoding="utf-8"?>
 <p:sld xmlns:a="http://schemas.openxmlformats.org/drawingml/2006/main" xmlns:r="http://schemas.openxmlformats.org/officeDocument/2006/relationships" xmlns:p="http://schemas.openxmlformats.org/presentationml/2006/main">
   <p:cSld>
     <p:spTree>
@@ -4254,7 +4567,7 @@
 </p:sld>
 </file>
 
-<file path=ppt/slides/slide6.xml><?xml version="1.0" encoding="utf-8"?>
+<file path=ppt/slides/slide7.xml><?xml version="1.0" encoding="utf-8"?>
 <p:sld xmlns:a="http://schemas.openxmlformats.org/drawingml/2006/main" xmlns:r="http://schemas.openxmlformats.org/officeDocument/2006/relationships" xmlns:p="http://schemas.openxmlformats.org/presentationml/2006/main">
   <p:cSld>
     <p:spTree>
@@ -4291,7 +4604,7 @@
             <a:fld id="{C2812B8D-E844-4807-B20D-B92C141DEBC2}" type="slidenum">
               <a:rPr lang="en-US" smtClean="0"/>
               <a:pPr/>
-              <a:t>6</a:t>
+              <a:t>7</a:t>
             </a:fld>
             <a:endParaRPr lang="en-US"/>
           </a:p>
@@ -4638,7 +4951,7 @@
 </p:sld>
 </file>
 
-<file path=ppt/slides/slide7.xml><?xml version="1.0" encoding="utf-8"?>
+<file path=ppt/slides/slide8.xml><?xml version="1.0" encoding="utf-8"?>
 <p:sld xmlns:a="http://schemas.openxmlformats.org/drawingml/2006/main" xmlns:r="http://schemas.openxmlformats.org/officeDocument/2006/relationships" xmlns:p="http://schemas.openxmlformats.org/presentationml/2006/main">
   <p:cSld>
     <p:spTree>

--- a/Lecture_Slides/PH 123 Lecture 36.pptx
+++ b/Lecture_Slides/PH 123 Lecture 36.pptx
@@ -7,12 +7,18 @@
   <p:sldIdLst>
     <p:sldId id="256" r:id="rId2"/>
     <p:sldId id="484" r:id="rId3"/>
-    <p:sldId id="341" r:id="rId4"/>
-    <p:sldId id="265" r:id="rId5"/>
-    <p:sldId id="285" r:id="rId6"/>
-    <p:sldId id="340" r:id="rId7"/>
-    <p:sldId id="283" r:id="rId8"/>
-    <p:sldId id="257" r:id="rId9"/>
+    <p:sldId id="485" r:id="rId4"/>
+    <p:sldId id="341" r:id="rId5"/>
+    <p:sldId id="487" r:id="rId6"/>
+    <p:sldId id="486" r:id="rId7"/>
+    <p:sldId id="488" r:id="rId8"/>
+    <p:sldId id="489" r:id="rId9"/>
+    <p:sldId id="490" r:id="rId10"/>
+    <p:sldId id="265" r:id="rId11"/>
+    <p:sldId id="285" r:id="rId12"/>
+    <p:sldId id="340" r:id="rId13"/>
+    <p:sldId id="283" r:id="rId14"/>
+    <p:sldId id="257" r:id="rId15"/>
   </p:sldIdLst>
   <p:sldSz cx="12192000" cy="6858000"/>
   <p:notesSz cx="6858000" cy="9144000"/>
@@ -122,7 +128,7 @@
 <file path=ppt/revisionInfo.xml><?xml version="1.0" encoding="utf-8"?>
 <p1510:revInfo xmlns:a="http://schemas.openxmlformats.org/drawingml/2006/main" xmlns:r="http://schemas.openxmlformats.org/officeDocument/2006/relationships" xmlns:p1510="http://schemas.microsoft.com/office/powerpoint/2015/10/main">
   <p1510:revLst>
-    <p1510:client id="{19433E2F-A7AC-4341-9FA4-5680B2C19CE3}" v="2" dt="2025-07-08T19:01:42.760"/>
+    <p1510:client id="{19433E2F-A7AC-4341-9FA4-5680B2C19CE3}" v="100" dt="2025-07-11T15:59:09.548"/>
   </p1510:revLst>
 </p1510:revInfo>
 </file>
@@ -131,8 +137,8 @@
 <pc:chgInfo xmlns:a="http://schemas.openxmlformats.org/drawingml/2006/main" xmlns:r="http://schemas.openxmlformats.org/officeDocument/2006/relationships" xmlns:ac="http://schemas.microsoft.com/office/drawing/2013/main/command" xmlns:pc="http://schemas.microsoft.com/office/powerpoint/2013/main/command">
   <pc:docChgLst>
     <pc:chgData name="Lines, Todd" userId="afaf7c3a-e8aa-4568-882a-02ad8f9e19b0" providerId="ADAL" clId="{19433E2F-A7AC-4341-9FA4-5680B2C19CE3}"/>
-    <pc:docChg chg="custSel addSld modSld">
-      <pc:chgData name="Lines, Todd" userId="afaf7c3a-e8aa-4568-882a-02ad8f9e19b0" providerId="ADAL" clId="{19433E2F-A7AC-4341-9FA4-5680B2C19CE3}" dt="2025-07-08T19:01:50.896" v="8" actId="20577"/>
+    <pc:docChg chg="custSel addSld delSld modSld">
+      <pc:chgData name="Lines, Todd" userId="afaf7c3a-e8aa-4568-882a-02ad8f9e19b0" providerId="ADAL" clId="{19433E2F-A7AC-4341-9FA4-5680B2C19CE3}" dt="2025-07-11T16:01:48.824" v="624" actId="20577"/>
       <pc:docMkLst>
         <pc:docMk/>
       </pc:docMkLst>
@@ -173,6 +179,126 @@
           </ac:spMkLst>
         </pc:spChg>
       </pc:sldChg>
+      <pc:sldChg chg="modSp add mod">
+        <pc:chgData name="Lines, Todd" userId="afaf7c3a-e8aa-4568-882a-02ad8f9e19b0" providerId="ADAL" clId="{19433E2F-A7AC-4341-9FA4-5680B2C19CE3}" dt="2025-07-10T19:08:35.353" v="84"/>
+        <pc:sldMkLst>
+          <pc:docMk/>
+          <pc:sldMk cId="3842804923" sldId="485"/>
+        </pc:sldMkLst>
+        <pc:spChg chg="mod">
+          <ac:chgData name="Lines, Todd" userId="afaf7c3a-e8aa-4568-882a-02ad8f9e19b0" providerId="ADAL" clId="{19433E2F-A7AC-4341-9FA4-5680B2C19CE3}" dt="2025-07-10T19:08:35.353" v="84"/>
+          <ac:spMkLst>
+            <pc:docMk/>
+            <pc:sldMk cId="3842804923" sldId="485"/>
+            <ac:spMk id="35843" creationId="{0880A836-F3E8-694F-BE88-C7B0C83B8377}"/>
+          </ac:spMkLst>
+        </pc:spChg>
+      </pc:sldChg>
+      <pc:sldChg chg="add">
+        <pc:chgData name="Lines, Todd" userId="afaf7c3a-e8aa-4568-882a-02ad8f9e19b0" providerId="ADAL" clId="{19433E2F-A7AC-4341-9FA4-5680B2C19CE3}" dt="2025-07-11T15:52:07.899" v="85"/>
+        <pc:sldMkLst>
+          <pc:docMk/>
+          <pc:sldMk cId="3465067879" sldId="486"/>
+        </pc:sldMkLst>
+      </pc:sldChg>
+      <pc:sldChg chg="modSp new mod">
+        <pc:chgData name="Lines, Todd" userId="afaf7c3a-e8aa-4568-882a-02ad8f9e19b0" providerId="ADAL" clId="{19433E2F-A7AC-4341-9FA4-5680B2C19CE3}" dt="2025-07-11T15:55:05.868" v="219" actId="20577"/>
+        <pc:sldMkLst>
+          <pc:docMk/>
+          <pc:sldMk cId="1446333334" sldId="487"/>
+        </pc:sldMkLst>
+        <pc:spChg chg="mod">
+          <ac:chgData name="Lines, Todd" userId="afaf7c3a-e8aa-4568-882a-02ad8f9e19b0" providerId="ADAL" clId="{19433E2F-A7AC-4341-9FA4-5680B2C19CE3}" dt="2025-07-11T15:52:13.279" v="94" actId="20577"/>
+          <ac:spMkLst>
+            <pc:docMk/>
+            <pc:sldMk cId="1446333334" sldId="487"/>
+            <ac:spMk id="2" creationId="{54610E40-E486-E84C-682C-6002987BB624}"/>
+          </ac:spMkLst>
+        </pc:spChg>
+        <pc:spChg chg="mod">
+          <ac:chgData name="Lines, Todd" userId="afaf7c3a-e8aa-4568-882a-02ad8f9e19b0" providerId="ADAL" clId="{19433E2F-A7AC-4341-9FA4-5680B2C19CE3}" dt="2025-07-11T15:55:05.868" v="219" actId="20577"/>
+          <ac:spMkLst>
+            <pc:docMk/>
+            <pc:sldMk cId="1446333334" sldId="487"/>
+            <ac:spMk id="3" creationId="{08537D8D-6AC6-1433-021B-54F0CF486FA0}"/>
+          </ac:spMkLst>
+        </pc:spChg>
+      </pc:sldChg>
+      <pc:sldChg chg="modSp add mod">
+        <pc:chgData name="Lines, Todd" userId="afaf7c3a-e8aa-4568-882a-02ad8f9e19b0" providerId="ADAL" clId="{19433E2F-A7AC-4341-9FA4-5680B2C19CE3}" dt="2025-07-11T15:59:20.973" v="355" actId="20577"/>
+        <pc:sldMkLst>
+          <pc:docMk/>
+          <pc:sldMk cId="2389341818" sldId="488"/>
+        </pc:sldMkLst>
+        <pc:spChg chg="mod">
+          <ac:chgData name="Lines, Todd" userId="afaf7c3a-e8aa-4568-882a-02ad8f9e19b0" providerId="ADAL" clId="{19433E2F-A7AC-4341-9FA4-5680B2C19CE3}" dt="2025-07-11T15:59:20.973" v="355" actId="20577"/>
+          <ac:spMkLst>
+            <pc:docMk/>
+            <pc:sldMk cId="2389341818" sldId="488"/>
+            <ac:spMk id="3" creationId="{6F64307E-3582-259B-6FFF-E34800D93684}"/>
+          </ac:spMkLst>
+        </pc:spChg>
+      </pc:sldChg>
+      <pc:sldChg chg="add del">
+        <pc:chgData name="Lines, Todd" userId="afaf7c3a-e8aa-4568-882a-02ad8f9e19b0" providerId="ADAL" clId="{19433E2F-A7AC-4341-9FA4-5680B2C19CE3}" dt="2025-07-11T15:55:56.334" v="221" actId="47"/>
+        <pc:sldMkLst>
+          <pc:docMk/>
+          <pc:sldMk cId="3237716521" sldId="488"/>
+        </pc:sldMkLst>
+      </pc:sldChg>
+      <pc:sldChg chg="add del">
+        <pc:chgData name="Lines, Todd" userId="afaf7c3a-e8aa-4568-882a-02ad8f9e19b0" providerId="ADAL" clId="{19433E2F-A7AC-4341-9FA4-5680B2C19CE3}" dt="2025-07-11T15:57:59.888" v="269"/>
+        <pc:sldMkLst>
+          <pc:docMk/>
+          <pc:sldMk cId="1831025676" sldId="489"/>
+        </pc:sldMkLst>
+      </pc:sldChg>
+      <pc:sldChg chg="modSp new mod">
+        <pc:chgData name="Lines, Todd" userId="afaf7c3a-e8aa-4568-882a-02ad8f9e19b0" providerId="ADAL" clId="{19433E2F-A7AC-4341-9FA4-5680B2C19CE3}" dt="2025-07-11T16:00:13.225" v="435" actId="20577"/>
+        <pc:sldMkLst>
+          <pc:docMk/>
+          <pc:sldMk cId="2851887090" sldId="489"/>
+        </pc:sldMkLst>
+        <pc:spChg chg="mod">
+          <ac:chgData name="Lines, Todd" userId="afaf7c3a-e8aa-4568-882a-02ad8f9e19b0" providerId="ADAL" clId="{19433E2F-A7AC-4341-9FA4-5680B2C19CE3}" dt="2025-07-11T15:59:42.281" v="364" actId="20577"/>
+          <ac:spMkLst>
+            <pc:docMk/>
+            <pc:sldMk cId="2851887090" sldId="489"/>
+            <ac:spMk id="2" creationId="{7D432002-FF55-F810-0DAE-FAE499C324E4}"/>
+          </ac:spMkLst>
+        </pc:spChg>
+        <pc:spChg chg="mod">
+          <ac:chgData name="Lines, Todd" userId="afaf7c3a-e8aa-4568-882a-02ad8f9e19b0" providerId="ADAL" clId="{19433E2F-A7AC-4341-9FA4-5680B2C19CE3}" dt="2025-07-11T16:00:13.225" v="435" actId="20577"/>
+          <ac:spMkLst>
+            <pc:docMk/>
+            <pc:sldMk cId="2851887090" sldId="489"/>
+            <ac:spMk id="3" creationId="{029605CA-880A-29C8-6C74-7E7688FE48C5}"/>
+          </ac:spMkLst>
+        </pc:spChg>
+      </pc:sldChg>
+      <pc:sldChg chg="modSp new mod">
+        <pc:chgData name="Lines, Todd" userId="afaf7c3a-e8aa-4568-882a-02ad8f9e19b0" providerId="ADAL" clId="{19433E2F-A7AC-4341-9FA4-5680B2C19CE3}" dt="2025-07-11T16:01:48.824" v="624" actId="20577"/>
+        <pc:sldMkLst>
+          <pc:docMk/>
+          <pc:sldMk cId="3378814276" sldId="490"/>
+        </pc:sldMkLst>
+        <pc:spChg chg="mod">
+          <ac:chgData name="Lines, Todd" userId="afaf7c3a-e8aa-4568-882a-02ad8f9e19b0" providerId="ADAL" clId="{19433E2F-A7AC-4341-9FA4-5680B2C19CE3}" dt="2025-07-11T16:00:45.529" v="444" actId="20577"/>
+          <ac:spMkLst>
+            <pc:docMk/>
+            <pc:sldMk cId="3378814276" sldId="490"/>
+            <ac:spMk id="2" creationId="{36C05A08-BBAD-733F-9214-FFCA080F07AC}"/>
+          </ac:spMkLst>
+        </pc:spChg>
+        <pc:spChg chg="mod">
+          <ac:chgData name="Lines, Todd" userId="afaf7c3a-e8aa-4568-882a-02ad8f9e19b0" providerId="ADAL" clId="{19433E2F-A7AC-4341-9FA4-5680B2C19CE3}" dt="2025-07-11T16:01:48.824" v="624" actId="20577"/>
+          <ac:spMkLst>
+            <pc:docMk/>
+            <pc:sldMk cId="3378814276" sldId="490"/>
+            <ac:spMk id="3" creationId="{857BFD40-4C1B-BCE6-1015-757E5ACBD398}"/>
+          </ac:spMkLst>
+        </pc:spChg>
+      </pc:sldChg>
     </pc:docChg>
   </pc:docChgLst>
 </pc:chgInfo>
@@ -325,7 +451,7 @@
           <a:p>
             <a:fld id="{5D14FE54-3E4B-43AC-AC6A-78E009FC7A62}" type="datetimeFigureOut">
               <a:rPr lang="en-US" smtClean="0"/>
-              <a:t>7/8/2025</a:t>
+              <a:t>7/11/2025</a:t>
             </a:fld>
             <a:endParaRPr lang="en-US"/>
           </a:p>
@@ -523,7 +649,7 @@
           <a:p>
             <a:fld id="{5D14FE54-3E4B-43AC-AC6A-78E009FC7A62}" type="datetimeFigureOut">
               <a:rPr lang="en-US" smtClean="0"/>
-              <a:t>7/8/2025</a:t>
+              <a:t>7/11/2025</a:t>
             </a:fld>
             <a:endParaRPr lang="en-US"/>
           </a:p>
@@ -731,7 +857,7 @@
           <a:p>
             <a:fld id="{5D14FE54-3E4B-43AC-AC6A-78E009FC7A62}" type="datetimeFigureOut">
               <a:rPr lang="en-US" smtClean="0"/>
-              <a:t>7/8/2025</a:t>
+              <a:t>7/11/2025</a:t>
             </a:fld>
             <a:endParaRPr lang="en-US"/>
           </a:p>
@@ -929,7 +1055,7 @@
           <a:p>
             <a:fld id="{5D14FE54-3E4B-43AC-AC6A-78E009FC7A62}" type="datetimeFigureOut">
               <a:rPr lang="en-US" smtClean="0"/>
-              <a:t>7/8/2025</a:t>
+              <a:t>7/11/2025</a:t>
             </a:fld>
             <a:endParaRPr lang="en-US"/>
           </a:p>
@@ -1204,7 +1330,7 @@
           <a:p>
             <a:fld id="{5D14FE54-3E4B-43AC-AC6A-78E009FC7A62}" type="datetimeFigureOut">
               <a:rPr lang="en-US" smtClean="0"/>
-              <a:t>7/8/2025</a:t>
+              <a:t>7/11/2025</a:t>
             </a:fld>
             <a:endParaRPr lang="en-US"/>
           </a:p>
@@ -1469,7 +1595,7 @@
           <a:p>
             <a:fld id="{5D14FE54-3E4B-43AC-AC6A-78E009FC7A62}" type="datetimeFigureOut">
               <a:rPr lang="en-US" smtClean="0"/>
-              <a:t>7/8/2025</a:t>
+              <a:t>7/11/2025</a:t>
             </a:fld>
             <a:endParaRPr lang="en-US"/>
           </a:p>
@@ -1881,7 +2007,7 @@
           <a:p>
             <a:fld id="{5D14FE54-3E4B-43AC-AC6A-78E009FC7A62}" type="datetimeFigureOut">
               <a:rPr lang="en-US" smtClean="0"/>
-              <a:t>7/8/2025</a:t>
+              <a:t>7/11/2025</a:t>
             </a:fld>
             <a:endParaRPr lang="en-US"/>
           </a:p>
@@ -2022,7 +2148,7 @@
           <a:p>
             <a:fld id="{5D14FE54-3E4B-43AC-AC6A-78E009FC7A62}" type="datetimeFigureOut">
               <a:rPr lang="en-US" smtClean="0"/>
-              <a:t>7/8/2025</a:t>
+              <a:t>7/11/2025</a:t>
             </a:fld>
             <a:endParaRPr lang="en-US"/>
           </a:p>
@@ -2135,7 +2261,7 @@
           <a:p>
             <a:fld id="{5D14FE54-3E4B-43AC-AC6A-78E009FC7A62}" type="datetimeFigureOut">
               <a:rPr lang="en-US" smtClean="0"/>
-              <a:t>7/8/2025</a:t>
+              <a:t>7/11/2025</a:t>
             </a:fld>
             <a:endParaRPr lang="en-US"/>
           </a:p>
@@ -2446,7 +2572,7 @@
           <a:p>
             <a:fld id="{5D14FE54-3E4B-43AC-AC6A-78E009FC7A62}" type="datetimeFigureOut">
               <a:rPr lang="en-US" smtClean="0"/>
-              <a:t>7/8/2025</a:t>
+              <a:t>7/11/2025</a:t>
             </a:fld>
             <a:endParaRPr lang="en-US"/>
           </a:p>
@@ -2734,7 +2860,7 @@
           <a:p>
             <a:fld id="{5D14FE54-3E4B-43AC-AC6A-78E009FC7A62}" type="datetimeFigureOut">
               <a:rPr lang="en-US" smtClean="0"/>
-              <a:t>7/8/2025</a:t>
+              <a:t>7/11/2025</a:t>
             </a:fld>
             <a:endParaRPr lang="en-US"/>
           </a:p>
@@ -2975,7 +3101,7 @@
           <a:p>
             <a:fld id="{5D14FE54-3E4B-43AC-AC6A-78E009FC7A62}" type="datetimeFigureOut">
               <a:rPr lang="en-US" smtClean="0"/>
-              <a:t>7/8/2025</a:t>
+              <a:t>7/11/2025</a:t>
             </a:fld>
             <a:endParaRPr lang="en-US"/>
           </a:p>
@@ -3458,6 +3584,1214 @@
 </p:sld>
 </file>
 
+<file path=ppt/slides/slide10.xml><?xml version="1.0" encoding="utf-8"?>
+<p:sld xmlns:a="http://schemas.openxmlformats.org/drawingml/2006/main" xmlns:r="http://schemas.openxmlformats.org/officeDocument/2006/relationships" xmlns:p="http://schemas.openxmlformats.org/presentationml/2006/main">
+  <p:cSld>
+    <p:spTree>
+      <p:nvGrpSpPr>
+        <p:cNvPr id="1" name=""/>
+        <p:cNvGrpSpPr/>
+        <p:nvPr/>
+      </p:nvGrpSpPr>
+      <p:grpSpPr>
+        <a:xfrm>
+          <a:off x="0" y="0"/>
+          <a:ext cx="0" cy="0"/>
+          <a:chOff x="0" y="0"/>
+          <a:chExt cx="0" cy="0"/>
+        </a:xfrm>
+      </p:grpSpPr>
+      <p:sp>
+        <p:nvSpPr>
+          <p:cNvPr id="2" name="Title 1"/>
+          <p:cNvSpPr>
+            <a:spLocks noGrp="1"/>
+          </p:cNvSpPr>
+          <p:nvPr>
+            <p:ph type="title"/>
+          </p:nvPr>
+        </p:nvSpPr>
+        <p:spPr/>
+        <p:txBody>
+          <a:bodyPr/>
+          <a:lstStyle/>
+          <a:p>
+            <a:endParaRPr lang="en-US"/>
+          </a:p>
+        </p:txBody>
+      </p:sp>
+      <p:sp>
+        <p:nvSpPr>
+          <p:cNvPr id="3" name="Content Placeholder 2"/>
+          <p:cNvSpPr>
+            <a:spLocks noGrp="1"/>
+          </p:cNvSpPr>
+          <p:nvPr>
+            <p:ph idx="1"/>
+          </p:nvPr>
+        </p:nvSpPr>
+        <p:spPr/>
+        <p:txBody>
+          <a:bodyPr/>
+          <a:lstStyle/>
+          <a:p>
+            <a:endParaRPr lang="en-US"/>
+          </a:p>
+        </p:txBody>
+      </p:sp>
+      <p:pic>
+        <p:nvPicPr>
+          <p:cNvPr id="7170" name="Picture 2"/>
+          <p:cNvPicPr>
+            <a:picLocks noChangeAspect="1" noChangeArrowheads="1"/>
+          </p:cNvPicPr>
+          <p:nvPr/>
+        </p:nvPicPr>
+        <p:blipFill>
+          <a:blip r:embed="rId2" cstate="print"/>
+          <a:srcRect/>
+          <a:stretch>
+            <a:fillRect/>
+          </a:stretch>
+        </p:blipFill>
+        <p:spPr bwMode="auto">
+          <a:xfrm>
+            <a:off x="1905000" y="642082"/>
+            <a:ext cx="8650174" cy="5758718"/>
+          </a:xfrm>
+          <a:prstGeom prst="rect">
+            <a:avLst/>
+          </a:prstGeom>
+          <a:noFill/>
+          <a:ln w="9525">
+            <a:noFill/>
+            <a:miter lim="800000"/>
+            <a:headEnd/>
+            <a:tailEnd/>
+          </a:ln>
+          <a:effectLst/>
+        </p:spPr>
+      </p:pic>
+    </p:spTree>
+  </p:cSld>
+  <p:clrMapOvr>
+    <a:masterClrMapping/>
+  </p:clrMapOvr>
+</p:sld>
+</file>
+
+<file path=ppt/slides/slide11.xml><?xml version="1.0" encoding="utf-8"?>
+<p:sld xmlns:a="http://schemas.openxmlformats.org/drawingml/2006/main" xmlns:r="http://schemas.openxmlformats.org/officeDocument/2006/relationships" xmlns:p="http://schemas.openxmlformats.org/presentationml/2006/main">
+  <p:cSld>
+    <p:spTree>
+      <p:nvGrpSpPr>
+        <p:cNvPr id="1" name=""/>
+        <p:cNvGrpSpPr/>
+        <p:nvPr/>
+      </p:nvGrpSpPr>
+      <p:grpSpPr>
+        <a:xfrm>
+          <a:off x="0" y="0"/>
+          <a:ext cx="0" cy="0"/>
+          <a:chOff x="0" y="0"/>
+          <a:chExt cx="0" cy="0"/>
+        </a:xfrm>
+      </p:grpSpPr>
+      <p:pic>
+        <p:nvPicPr>
+          <p:cNvPr id="1030" name="Picture 6"/>
+          <p:cNvPicPr>
+            <a:picLocks noChangeAspect="1" noChangeArrowheads="1"/>
+          </p:cNvPicPr>
+          <p:nvPr/>
+        </p:nvPicPr>
+        <p:blipFill>
+          <a:blip r:embed="rId2" cstate="print"/>
+          <a:srcRect/>
+          <a:stretch>
+            <a:fillRect/>
+          </a:stretch>
+        </p:blipFill>
+        <p:spPr bwMode="auto">
+          <a:xfrm>
+            <a:off x="7162801" y="1828800"/>
+            <a:ext cx="1869243" cy="1822450"/>
+          </a:xfrm>
+          <a:prstGeom prst="rect">
+            <a:avLst/>
+          </a:prstGeom>
+          <a:noFill/>
+          <a:ln w="9525">
+            <a:noFill/>
+            <a:miter lim="800000"/>
+            <a:headEnd/>
+            <a:tailEnd/>
+          </a:ln>
+          <a:effectLst/>
+        </p:spPr>
+      </p:pic>
+      <p:sp>
+        <p:nvSpPr>
+          <p:cNvPr id="2" name="Title 1"/>
+          <p:cNvSpPr>
+            <a:spLocks noGrp="1"/>
+          </p:cNvSpPr>
+          <p:nvPr>
+            <p:ph type="title"/>
+          </p:nvPr>
+        </p:nvSpPr>
+        <p:spPr/>
+        <p:txBody>
+          <a:bodyPr/>
+          <a:lstStyle/>
+          <a:p>
+            <a:endParaRPr lang="en-US" dirty="0"/>
+          </a:p>
+        </p:txBody>
+      </p:sp>
+      <p:sp>
+        <p:nvSpPr>
+          <p:cNvPr id="4" name="Rectangle 2"/>
+          <p:cNvSpPr>
+            <a:spLocks noChangeArrowheads="1"/>
+          </p:cNvSpPr>
+          <p:nvPr/>
+        </p:nvSpPr>
+        <p:spPr bwMode="auto">
+          <a:xfrm>
+            <a:off x="2743201" y="3519488"/>
+            <a:ext cx="2511425" cy="1871663"/>
+          </a:xfrm>
+          <a:prstGeom prst="rect">
+            <a:avLst/>
+          </a:prstGeom>
+          <a:gradFill rotWithShape="1">
+            <a:gsLst>
+              <a:gs pos="0">
+                <a:schemeClr val="bg1"/>
+              </a:gs>
+              <a:gs pos="100000">
+                <a:schemeClr val="accent1"/>
+              </a:gs>
+            </a:gsLst>
+            <a:path path="shape">
+              <a:fillToRect l="50000" t="50000" r="50000" b="50000"/>
+            </a:path>
+          </a:gradFill>
+          <a:ln w="9525" algn="ctr">
+            <a:solidFill>
+              <a:schemeClr val="tx1"/>
+            </a:solidFill>
+            <a:miter lim="800000"/>
+            <a:headEnd/>
+            <a:tailEnd/>
+          </a:ln>
+        </p:spPr>
+        <p:txBody>
+          <a:bodyPr wrap="none" anchor="ctr"/>
+          <a:lstStyle/>
+          <a:p>
+            <a:pPr algn="ctr"/>
+            <a:r>
+              <a:rPr lang="en-US"/>
+              <a:t>Gas at T</a:t>
+            </a:r>
+            <a:r>
+              <a:rPr lang="en-US" baseline="-25000"/>
+              <a:t>i</a:t>
+            </a:r>
+          </a:p>
+        </p:txBody>
+      </p:sp>
+      <p:sp>
+        <p:nvSpPr>
+          <p:cNvPr id="5" name="Rectangle 5"/>
+          <p:cNvSpPr>
+            <a:spLocks noChangeArrowheads="1"/>
+          </p:cNvSpPr>
+          <p:nvPr/>
+        </p:nvSpPr>
+        <p:spPr bwMode="auto">
+          <a:xfrm>
+            <a:off x="2743201" y="1676401"/>
+            <a:ext cx="2511425" cy="3730625"/>
+          </a:xfrm>
+          <a:prstGeom prst="rect">
+            <a:avLst/>
+          </a:prstGeom>
+          <a:noFill/>
+          <a:ln w="53975" algn="ctr">
+            <a:solidFill>
+              <a:srgbClr val="FF9900"/>
+            </a:solidFill>
+            <a:miter lim="800000"/>
+            <a:headEnd/>
+            <a:tailEnd/>
+          </a:ln>
+        </p:spPr>
+        <p:txBody>
+          <a:bodyPr wrap="none" anchor="ctr"/>
+          <a:lstStyle/>
+          <a:p>
+            <a:endParaRPr lang="en-US"/>
+          </a:p>
+        </p:txBody>
+      </p:sp>
+      <p:sp>
+        <p:nvSpPr>
+          <p:cNvPr id="6" name="Line 6"/>
+          <p:cNvSpPr>
+            <a:spLocks noChangeShapeType="1"/>
+          </p:cNvSpPr>
+          <p:nvPr/>
+        </p:nvSpPr>
+        <p:spPr bwMode="auto">
+          <a:xfrm>
+            <a:off x="2728913" y="3533775"/>
+            <a:ext cx="2525713" cy="0"/>
+          </a:xfrm>
+          <a:prstGeom prst="line">
+            <a:avLst/>
+          </a:prstGeom>
+          <a:noFill/>
+          <a:ln w="9525">
+            <a:solidFill>
+              <a:srgbClr val="FF0000"/>
+            </a:solidFill>
+            <a:round/>
+            <a:headEnd/>
+            <a:tailEnd/>
+          </a:ln>
+        </p:spPr>
+        <p:txBody>
+          <a:bodyPr wrap="none" anchor="ctr"/>
+          <a:lstStyle/>
+          <a:p>
+            <a:endParaRPr lang="en-US"/>
+          </a:p>
+        </p:txBody>
+      </p:sp>
+      <p:sp>
+        <p:nvSpPr>
+          <p:cNvPr id="7" name="Text Box 7"/>
+          <p:cNvSpPr txBox="1">
+            <a:spLocks noChangeArrowheads="1"/>
+          </p:cNvSpPr>
+          <p:nvPr/>
+        </p:nvSpPr>
+        <p:spPr bwMode="auto">
+          <a:xfrm>
+            <a:off x="3438525" y="2147888"/>
+            <a:ext cx="1136650" cy="366713"/>
+          </a:xfrm>
+          <a:prstGeom prst="rect">
+            <a:avLst/>
+          </a:prstGeom>
+          <a:noFill/>
+          <a:ln w="9525" algn="ctr">
+            <a:noFill/>
+            <a:miter lim="800000"/>
+            <a:headEnd/>
+            <a:tailEnd/>
+          </a:ln>
+        </p:spPr>
+        <p:txBody>
+          <a:bodyPr>
+            <a:spAutoFit/>
+          </a:bodyPr>
+          <a:lstStyle/>
+          <a:p>
+            <a:pPr algn="ctr"/>
+            <a:r>
+              <a:rPr lang="en-US"/>
+              <a:t>Vacuum</a:t>
+            </a:r>
+          </a:p>
+        </p:txBody>
+      </p:sp>
+      <p:sp>
+        <p:nvSpPr>
+          <p:cNvPr id="8" name="Text Box 8"/>
+          <p:cNvSpPr txBox="1">
+            <a:spLocks noChangeArrowheads="1"/>
+          </p:cNvSpPr>
+          <p:nvPr/>
+        </p:nvSpPr>
+        <p:spPr bwMode="auto">
+          <a:xfrm>
+            <a:off x="2619376" y="2954338"/>
+            <a:ext cx="1920875" cy="366713"/>
+          </a:xfrm>
+          <a:prstGeom prst="rect">
+            <a:avLst/>
+          </a:prstGeom>
+          <a:noFill/>
+          <a:ln w="9525" algn="ctr">
+            <a:noFill/>
+            <a:miter lim="800000"/>
+            <a:headEnd/>
+            <a:tailEnd/>
+          </a:ln>
+        </p:spPr>
+        <p:txBody>
+          <a:bodyPr>
+            <a:spAutoFit/>
+          </a:bodyPr>
+          <a:lstStyle/>
+          <a:p>
+            <a:pPr algn="ctr"/>
+            <a:r>
+              <a:rPr lang="en-US"/>
+              <a:t>Membrane</a:t>
+            </a:r>
+          </a:p>
+        </p:txBody>
+      </p:sp>
+      <p:sp>
+        <p:nvSpPr>
+          <p:cNvPr id="9" name="Line 9"/>
+          <p:cNvSpPr>
+            <a:spLocks noChangeShapeType="1"/>
+          </p:cNvSpPr>
+          <p:nvPr/>
+        </p:nvSpPr>
+        <p:spPr bwMode="auto">
+          <a:xfrm flipH="1">
+            <a:off x="3367087" y="3243263"/>
+            <a:ext cx="115888" cy="276225"/>
+          </a:xfrm>
+          <a:prstGeom prst="line">
+            <a:avLst/>
+          </a:prstGeom>
+          <a:noFill/>
+          <a:ln w="9525">
+            <a:solidFill>
+              <a:schemeClr val="tx1"/>
+            </a:solidFill>
+            <a:round/>
+            <a:headEnd/>
+            <a:tailEnd type="triangle" w="med" len="med"/>
+          </a:ln>
+        </p:spPr>
+        <p:txBody>
+          <a:bodyPr wrap="none" anchor="ctr"/>
+          <a:lstStyle/>
+          <a:p>
+            <a:endParaRPr lang="en-US"/>
+          </a:p>
+        </p:txBody>
+      </p:sp>
+      <p:sp>
+        <p:nvSpPr>
+          <p:cNvPr id="11" name="Rectangle 5"/>
+          <p:cNvSpPr>
+            <a:spLocks noChangeArrowheads="1"/>
+          </p:cNvSpPr>
+          <p:nvPr/>
+        </p:nvSpPr>
+        <p:spPr bwMode="auto">
+          <a:xfrm>
+            <a:off x="6629401" y="1676401"/>
+            <a:ext cx="2511425" cy="3730625"/>
+          </a:xfrm>
+          <a:prstGeom prst="rect">
+            <a:avLst/>
+          </a:prstGeom>
+          <a:noFill/>
+          <a:ln w="53975" algn="ctr">
+            <a:solidFill>
+              <a:srgbClr val="FF9900"/>
+            </a:solidFill>
+            <a:miter lim="800000"/>
+            <a:headEnd/>
+            <a:tailEnd/>
+          </a:ln>
+        </p:spPr>
+        <p:txBody>
+          <a:bodyPr wrap="none" anchor="ctr"/>
+          <a:lstStyle/>
+          <a:p>
+            <a:endParaRPr lang="en-US"/>
+          </a:p>
+        </p:txBody>
+      </p:sp>
+      <p:sp>
+        <p:nvSpPr>
+          <p:cNvPr id="12" name="Line 6"/>
+          <p:cNvSpPr>
+            <a:spLocks noChangeShapeType="1"/>
+          </p:cNvSpPr>
+          <p:nvPr/>
+        </p:nvSpPr>
+        <p:spPr bwMode="auto">
+          <a:xfrm>
+            <a:off x="6615113" y="3533775"/>
+            <a:ext cx="2525713" cy="0"/>
+          </a:xfrm>
+          <a:prstGeom prst="line">
+            <a:avLst/>
+          </a:prstGeom>
+          <a:noFill/>
+          <a:ln w="9525">
+            <a:solidFill>
+              <a:srgbClr val="FF0000"/>
+            </a:solidFill>
+            <a:round/>
+            <a:headEnd/>
+            <a:tailEnd/>
+          </a:ln>
+        </p:spPr>
+        <p:txBody>
+          <a:bodyPr wrap="none" anchor="ctr"/>
+          <a:lstStyle/>
+          <a:p>
+            <a:endParaRPr lang="en-US"/>
+          </a:p>
+        </p:txBody>
+      </p:sp>
+      <p:sp>
+        <p:nvSpPr>
+          <p:cNvPr id="14" name="Text Box 8"/>
+          <p:cNvSpPr txBox="1">
+            <a:spLocks noChangeArrowheads="1"/>
+          </p:cNvSpPr>
+          <p:nvPr/>
+        </p:nvSpPr>
+        <p:spPr bwMode="auto">
+          <a:xfrm>
+            <a:off x="6505576" y="2954338"/>
+            <a:ext cx="1920875" cy="366713"/>
+          </a:xfrm>
+          <a:prstGeom prst="rect">
+            <a:avLst/>
+          </a:prstGeom>
+          <a:noFill/>
+          <a:ln w="9525" algn="ctr">
+            <a:noFill/>
+            <a:miter lim="800000"/>
+            <a:headEnd/>
+            <a:tailEnd/>
+          </a:ln>
+        </p:spPr>
+        <p:txBody>
+          <a:bodyPr>
+            <a:spAutoFit/>
+          </a:bodyPr>
+          <a:lstStyle/>
+          <a:p>
+            <a:pPr algn="ctr"/>
+            <a:r>
+              <a:rPr lang="en-US"/>
+              <a:t>Membrane</a:t>
+            </a:r>
+          </a:p>
+        </p:txBody>
+      </p:sp>
+      <p:sp>
+        <p:nvSpPr>
+          <p:cNvPr id="15" name="Line 9"/>
+          <p:cNvSpPr>
+            <a:spLocks noChangeShapeType="1"/>
+          </p:cNvSpPr>
+          <p:nvPr/>
+        </p:nvSpPr>
+        <p:spPr bwMode="auto">
+          <a:xfrm flipH="1">
+            <a:off x="7253287" y="3243263"/>
+            <a:ext cx="115888" cy="276225"/>
+          </a:xfrm>
+          <a:prstGeom prst="line">
+            <a:avLst/>
+          </a:prstGeom>
+          <a:noFill/>
+          <a:ln w="9525">
+            <a:solidFill>
+              <a:schemeClr val="tx1"/>
+            </a:solidFill>
+            <a:round/>
+            <a:headEnd/>
+            <a:tailEnd type="triangle" w="med" len="med"/>
+          </a:ln>
+        </p:spPr>
+        <p:txBody>
+          <a:bodyPr wrap="none" anchor="ctr"/>
+          <a:lstStyle/>
+          <a:p>
+            <a:endParaRPr lang="en-US"/>
+          </a:p>
+        </p:txBody>
+      </p:sp>
+      <p:sp>
+        <p:nvSpPr>
+          <p:cNvPr id="10" name="Rectangle 2"/>
+          <p:cNvSpPr>
+            <a:spLocks noChangeArrowheads="1"/>
+          </p:cNvSpPr>
+          <p:nvPr/>
+        </p:nvSpPr>
+        <p:spPr bwMode="auto">
+          <a:xfrm>
+            <a:off x="6629401" y="3519488"/>
+            <a:ext cx="2511425" cy="1871663"/>
+          </a:xfrm>
+          <a:prstGeom prst="rect">
+            <a:avLst/>
+          </a:prstGeom>
+          <a:gradFill rotWithShape="1">
+            <a:gsLst>
+              <a:gs pos="0">
+                <a:schemeClr val="bg1"/>
+              </a:gs>
+              <a:gs pos="100000">
+                <a:schemeClr val="accent1"/>
+              </a:gs>
+            </a:gsLst>
+            <a:path path="shape">
+              <a:fillToRect l="50000" t="50000" r="50000" b="50000"/>
+            </a:path>
+          </a:gradFill>
+          <a:ln w="9525" algn="ctr">
+            <a:solidFill>
+              <a:schemeClr val="tx1"/>
+            </a:solidFill>
+            <a:miter lim="800000"/>
+            <a:headEnd/>
+            <a:tailEnd/>
+          </a:ln>
+        </p:spPr>
+        <p:txBody>
+          <a:bodyPr wrap="none" anchor="ctr"/>
+          <a:lstStyle/>
+          <a:p>
+            <a:pPr algn="ctr"/>
+            <a:r>
+              <a:rPr lang="en-US"/>
+              <a:t>Gas at T</a:t>
+            </a:r>
+            <a:r>
+              <a:rPr lang="en-US" baseline="-25000"/>
+              <a:t>i</a:t>
+            </a:r>
+          </a:p>
+        </p:txBody>
+      </p:sp>
+      <p:sp>
+        <p:nvSpPr>
+          <p:cNvPr id="16" name="Rectangle 15"/>
+          <p:cNvSpPr/>
+          <p:nvPr/>
+        </p:nvSpPr>
+        <p:spPr>
+          <a:xfrm>
+            <a:off x="8382000" y="3505200"/>
+            <a:ext cx="152400" cy="76200"/>
+          </a:xfrm>
+          <a:prstGeom prst="rect">
+            <a:avLst/>
+          </a:prstGeom>
+          <a:solidFill>
+            <a:schemeClr val="accent1"/>
+          </a:solidFill>
+          <a:ln>
+            <a:noFill/>
+          </a:ln>
+        </p:spPr>
+        <p:style>
+          <a:lnRef idx="2">
+            <a:schemeClr val="accent1">
+              <a:shade val="50000"/>
+            </a:schemeClr>
+          </a:lnRef>
+          <a:fillRef idx="1">
+            <a:schemeClr val="accent1"/>
+          </a:fillRef>
+          <a:effectRef idx="0">
+            <a:schemeClr val="accent1"/>
+          </a:effectRef>
+          <a:fontRef idx="minor">
+            <a:schemeClr val="lt1"/>
+          </a:fontRef>
+        </p:style>
+        <p:txBody>
+          <a:bodyPr rtlCol="0" anchor="ctr"/>
+          <a:lstStyle/>
+          <a:p>
+            <a:pPr algn="ctr"/>
+            <a:endParaRPr lang="en-US"/>
+          </a:p>
+        </p:txBody>
+      </p:sp>
+    </p:spTree>
+  </p:cSld>
+  <p:clrMapOvr>
+    <a:masterClrMapping/>
+  </p:clrMapOvr>
+</p:sld>
+</file>
+
+<file path=ppt/slides/slide12.xml><?xml version="1.0" encoding="utf-8"?>
+<p:sld xmlns:a="http://schemas.openxmlformats.org/drawingml/2006/main" xmlns:r="http://schemas.openxmlformats.org/officeDocument/2006/relationships" xmlns:p="http://schemas.openxmlformats.org/presentationml/2006/main">
+  <p:cSld>
+    <p:spTree>
+      <p:nvGrpSpPr>
+        <p:cNvPr id="1" name=""/>
+        <p:cNvGrpSpPr/>
+        <p:nvPr/>
+      </p:nvGrpSpPr>
+      <p:grpSpPr>
+        <a:xfrm>
+          <a:off x="0" y="0"/>
+          <a:ext cx="0" cy="0"/>
+          <a:chOff x="0" y="0"/>
+          <a:chExt cx="0" cy="0"/>
+        </a:xfrm>
+      </p:grpSpPr>
+      <p:sp>
+        <p:nvSpPr>
+          <p:cNvPr id="2" name="Title 1"/>
+          <p:cNvSpPr>
+            <a:spLocks noGrp="1"/>
+          </p:cNvSpPr>
+          <p:nvPr>
+            <p:ph type="title"/>
+          </p:nvPr>
+        </p:nvSpPr>
+        <p:spPr/>
+        <p:txBody>
+          <a:bodyPr/>
+          <a:lstStyle/>
+          <a:p>
+            <a:endParaRPr lang="en-US"/>
+          </a:p>
+        </p:txBody>
+      </p:sp>
+      <p:sp>
+        <p:nvSpPr>
+          <p:cNvPr id="3" name="Content Placeholder 2"/>
+          <p:cNvSpPr>
+            <a:spLocks noGrp="1"/>
+          </p:cNvSpPr>
+          <p:nvPr>
+            <p:ph idx="1"/>
+          </p:nvPr>
+        </p:nvSpPr>
+        <p:spPr/>
+        <p:txBody>
+          <a:bodyPr/>
+          <a:lstStyle/>
+          <a:p>
+            <a:endParaRPr lang="en-US"/>
+          </a:p>
+        </p:txBody>
+      </p:sp>
+      <p:pic>
+        <p:nvPicPr>
+          <p:cNvPr id="6146" name="Picture 2"/>
+          <p:cNvPicPr>
+            <a:picLocks noChangeAspect="1" noChangeArrowheads="1"/>
+          </p:cNvPicPr>
+          <p:nvPr/>
+        </p:nvPicPr>
+        <p:blipFill>
+          <a:blip r:embed="rId2" cstate="print"/>
+          <a:srcRect/>
+          <a:stretch>
+            <a:fillRect/>
+          </a:stretch>
+        </p:blipFill>
+        <p:spPr bwMode="auto">
+          <a:xfrm>
+            <a:off x="2971800" y="533401"/>
+            <a:ext cx="5181600" cy="5252339"/>
+          </a:xfrm>
+          <a:prstGeom prst="rect">
+            <a:avLst/>
+          </a:prstGeom>
+          <a:noFill/>
+          <a:ln w="9525">
+            <a:noFill/>
+            <a:miter lim="800000"/>
+            <a:headEnd/>
+            <a:tailEnd/>
+          </a:ln>
+          <a:effectLst/>
+        </p:spPr>
+      </p:pic>
+    </p:spTree>
+  </p:cSld>
+  <p:clrMapOvr>
+    <a:masterClrMapping/>
+  </p:clrMapOvr>
+</p:sld>
+</file>
+
+<file path=ppt/slides/slide13.xml><?xml version="1.0" encoding="utf-8"?>
+<p:sld xmlns:a="http://schemas.openxmlformats.org/drawingml/2006/main" xmlns:r="http://schemas.openxmlformats.org/officeDocument/2006/relationships" xmlns:p="http://schemas.openxmlformats.org/presentationml/2006/main">
+  <p:cSld>
+    <p:spTree>
+      <p:nvGrpSpPr>
+        <p:cNvPr id="1" name=""/>
+        <p:cNvGrpSpPr/>
+        <p:nvPr/>
+      </p:nvGrpSpPr>
+      <p:grpSpPr>
+        <a:xfrm>
+          <a:off x="0" y="0"/>
+          <a:ext cx="0" cy="0"/>
+          <a:chOff x="0" y="0"/>
+          <a:chExt cx="0" cy="0"/>
+        </a:xfrm>
+      </p:grpSpPr>
+      <p:sp>
+        <p:nvSpPr>
+          <p:cNvPr id="183298" name="Slide Number Placeholder 5"/>
+          <p:cNvSpPr>
+            <a:spLocks noGrp="1"/>
+          </p:cNvSpPr>
+          <p:nvPr>
+            <p:ph type="sldNum" sz="quarter" idx="12"/>
+          </p:nvPr>
+        </p:nvSpPr>
+        <p:spPr>
+          <a:noFill/>
+        </p:spPr>
+        <p:txBody>
+          <a:bodyPr/>
+          <a:lstStyle/>
+          <a:p>
+            <a:fld id="{C2812B8D-E844-4807-B20D-B92C141DEBC2}" type="slidenum">
+              <a:rPr lang="en-US" smtClean="0"/>
+              <a:pPr/>
+              <a:t>13</a:t>
+            </a:fld>
+            <a:endParaRPr lang="en-US"/>
+          </a:p>
+        </p:txBody>
+      </p:sp>
+      <p:sp>
+        <p:nvSpPr>
+          <p:cNvPr id="183299" name="Rectangle 2"/>
+          <p:cNvSpPr>
+            <a:spLocks noChangeArrowheads="1"/>
+          </p:cNvSpPr>
+          <p:nvPr/>
+        </p:nvSpPr>
+        <p:spPr bwMode="auto">
+          <a:xfrm>
+            <a:off x="7402514" y="3657601"/>
+            <a:ext cx="2511425" cy="1871663"/>
+          </a:xfrm>
+          <a:prstGeom prst="rect">
+            <a:avLst/>
+          </a:prstGeom>
+          <a:gradFill rotWithShape="1">
+            <a:gsLst>
+              <a:gs pos="0">
+                <a:schemeClr val="bg1"/>
+              </a:gs>
+              <a:gs pos="100000">
+                <a:schemeClr val="accent1"/>
+              </a:gs>
+            </a:gsLst>
+            <a:path path="shape">
+              <a:fillToRect l="50000" t="50000" r="50000" b="50000"/>
+            </a:path>
+          </a:gradFill>
+          <a:ln w="9525" algn="ctr">
+            <a:solidFill>
+              <a:schemeClr val="tx1"/>
+            </a:solidFill>
+            <a:miter lim="800000"/>
+            <a:headEnd/>
+            <a:tailEnd/>
+          </a:ln>
+        </p:spPr>
+        <p:txBody>
+          <a:bodyPr wrap="none" anchor="ctr"/>
+          <a:lstStyle/>
+          <a:p>
+            <a:pPr algn="ctr"/>
+            <a:r>
+              <a:rPr lang="en-US"/>
+              <a:t>Gas at T</a:t>
+            </a:r>
+            <a:r>
+              <a:rPr lang="en-US" baseline="-25000"/>
+              <a:t>i</a:t>
+            </a:r>
+          </a:p>
+        </p:txBody>
+      </p:sp>
+      <p:sp>
+        <p:nvSpPr>
+          <p:cNvPr id="183300" name="Rectangle 3"/>
+          <p:cNvSpPr>
+            <a:spLocks noGrp="1" noChangeArrowheads="1"/>
+          </p:cNvSpPr>
+          <p:nvPr>
+            <p:ph type="title"/>
+          </p:nvPr>
+        </p:nvSpPr>
+        <p:spPr/>
+        <p:txBody>
+          <a:bodyPr/>
+          <a:lstStyle/>
+          <a:p>
+            <a:pPr eaLnBrk="1" hangingPunct="1"/>
+            <a:r>
+              <a:rPr lang="en-US"/>
+              <a:t>Question 123.10.7</a:t>
+            </a:r>
+            <a:endParaRPr lang="en-US" dirty="0"/>
+          </a:p>
+        </p:txBody>
+      </p:sp>
+      <p:sp>
+        <p:nvSpPr>
+          <p:cNvPr id="183301" name="Rectangle 4"/>
+          <p:cNvSpPr>
+            <a:spLocks noGrp="1" noChangeArrowheads="1"/>
+          </p:cNvSpPr>
+          <p:nvPr>
+            <p:ph type="body" idx="1"/>
+          </p:nvPr>
+        </p:nvSpPr>
+        <p:spPr>
+          <a:xfrm>
+            <a:off x="1981201" y="1600201"/>
+            <a:ext cx="3978275" cy="4525963"/>
+          </a:xfrm>
+        </p:spPr>
+        <p:txBody>
+          <a:bodyPr/>
+          <a:lstStyle/>
+          <a:p>
+            <a:pPr marL="609600" indent="-609600">
+              <a:lnSpc>
+                <a:spcPct val="80000"/>
+              </a:lnSpc>
+              <a:buNone/>
+            </a:pPr>
+            <a:r>
+              <a:rPr lang="en-US"/>
+              <a:t>The initial state of a system is shown, if the membrane is broken, the gas fills the entire container. Is there work done by the gas in filling the container?</a:t>
+            </a:r>
+          </a:p>
+          <a:p>
+            <a:pPr marL="609600" indent="-609600">
+              <a:lnSpc>
+                <a:spcPct val="80000"/>
+              </a:lnSpc>
+              <a:buFontTx/>
+              <a:buAutoNum type="alphaLcParenR"/>
+            </a:pPr>
+            <a:r>
+              <a:rPr lang="en-US"/>
+              <a:t>Yes</a:t>
+            </a:r>
+          </a:p>
+          <a:p>
+            <a:pPr marL="609600" indent="-609600">
+              <a:lnSpc>
+                <a:spcPct val="80000"/>
+              </a:lnSpc>
+              <a:buFontTx/>
+              <a:buAutoNum type="alphaLcParenR"/>
+            </a:pPr>
+            <a:r>
+              <a:rPr lang="en-US"/>
+              <a:t>No</a:t>
+            </a:r>
+          </a:p>
+          <a:p>
+            <a:pPr marL="609600" indent="-609600">
+              <a:lnSpc>
+                <a:spcPct val="80000"/>
+              </a:lnSpc>
+              <a:buFontTx/>
+              <a:buAutoNum type="alphaLcParenR"/>
+            </a:pPr>
+            <a:r>
+              <a:rPr lang="en-US"/>
+              <a:t>Can’t Tell</a:t>
+            </a:r>
+          </a:p>
+        </p:txBody>
+      </p:sp>
+      <p:sp>
+        <p:nvSpPr>
+          <p:cNvPr id="183302" name="Rectangle 5"/>
+          <p:cNvSpPr>
+            <a:spLocks noChangeArrowheads="1"/>
+          </p:cNvSpPr>
+          <p:nvPr/>
+        </p:nvSpPr>
+        <p:spPr bwMode="auto">
+          <a:xfrm>
+            <a:off x="7402514" y="1814514"/>
+            <a:ext cx="2511425" cy="3730625"/>
+          </a:xfrm>
+          <a:prstGeom prst="rect">
+            <a:avLst/>
+          </a:prstGeom>
+          <a:noFill/>
+          <a:ln w="53975" algn="ctr">
+            <a:solidFill>
+              <a:srgbClr val="FF9900"/>
+            </a:solidFill>
+            <a:miter lim="800000"/>
+            <a:headEnd/>
+            <a:tailEnd/>
+          </a:ln>
+        </p:spPr>
+        <p:txBody>
+          <a:bodyPr wrap="none" anchor="ctr"/>
+          <a:lstStyle/>
+          <a:p>
+            <a:endParaRPr lang="en-US"/>
+          </a:p>
+        </p:txBody>
+      </p:sp>
+      <p:sp>
+        <p:nvSpPr>
+          <p:cNvPr id="183303" name="Line 6"/>
+          <p:cNvSpPr>
+            <a:spLocks noChangeShapeType="1"/>
+          </p:cNvSpPr>
+          <p:nvPr/>
+        </p:nvSpPr>
+        <p:spPr bwMode="auto">
+          <a:xfrm>
+            <a:off x="7388226" y="3671888"/>
+            <a:ext cx="2525713" cy="0"/>
+          </a:xfrm>
+          <a:prstGeom prst="line">
+            <a:avLst/>
+          </a:prstGeom>
+          <a:noFill/>
+          <a:ln w="9525">
+            <a:solidFill>
+              <a:srgbClr val="FF0000"/>
+            </a:solidFill>
+            <a:round/>
+            <a:headEnd/>
+            <a:tailEnd/>
+          </a:ln>
+        </p:spPr>
+        <p:txBody>
+          <a:bodyPr wrap="none" anchor="ctr"/>
+          <a:lstStyle/>
+          <a:p>
+            <a:endParaRPr lang="en-US"/>
+          </a:p>
+        </p:txBody>
+      </p:sp>
+      <p:sp>
+        <p:nvSpPr>
+          <p:cNvPr id="183304" name="Text Box 7"/>
+          <p:cNvSpPr txBox="1">
+            <a:spLocks noChangeArrowheads="1"/>
+          </p:cNvSpPr>
+          <p:nvPr/>
+        </p:nvSpPr>
+        <p:spPr bwMode="auto">
+          <a:xfrm>
+            <a:off x="8097838" y="2286001"/>
+            <a:ext cx="1136650" cy="366713"/>
+          </a:xfrm>
+          <a:prstGeom prst="rect">
+            <a:avLst/>
+          </a:prstGeom>
+          <a:noFill/>
+          <a:ln w="9525" algn="ctr">
+            <a:noFill/>
+            <a:miter lim="800000"/>
+            <a:headEnd/>
+            <a:tailEnd/>
+          </a:ln>
+        </p:spPr>
+        <p:txBody>
+          <a:bodyPr>
+            <a:spAutoFit/>
+          </a:bodyPr>
+          <a:lstStyle/>
+          <a:p>
+            <a:pPr algn="ctr"/>
+            <a:r>
+              <a:rPr lang="en-US"/>
+              <a:t>Vacuum</a:t>
+            </a:r>
+          </a:p>
+        </p:txBody>
+      </p:sp>
+      <p:sp>
+        <p:nvSpPr>
+          <p:cNvPr id="183305" name="Text Box 8"/>
+          <p:cNvSpPr txBox="1">
+            <a:spLocks noChangeArrowheads="1"/>
+          </p:cNvSpPr>
+          <p:nvPr/>
+        </p:nvSpPr>
+        <p:spPr bwMode="auto">
+          <a:xfrm>
+            <a:off x="7278689" y="3092451"/>
+            <a:ext cx="1920875" cy="366713"/>
+          </a:xfrm>
+          <a:prstGeom prst="rect">
+            <a:avLst/>
+          </a:prstGeom>
+          <a:noFill/>
+          <a:ln w="9525" algn="ctr">
+            <a:noFill/>
+            <a:miter lim="800000"/>
+            <a:headEnd/>
+            <a:tailEnd/>
+          </a:ln>
+        </p:spPr>
+        <p:txBody>
+          <a:bodyPr>
+            <a:spAutoFit/>
+          </a:bodyPr>
+          <a:lstStyle/>
+          <a:p>
+            <a:pPr algn="ctr"/>
+            <a:r>
+              <a:rPr lang="en-US"/>
+              <a:t>Membrane</a:t>
+            </a:r>
+          </a:p>
+        </p:txBody>
+      </p:sp>
+      <p:sp>
+        <p:nvSpPr>
+          <p:cNvPr id="183306" name="Line 9"/>
+          <p:cNvSpPr>
+            <a:spLocks noChangeShapeType="1"/>
+          </p:cNvSpPr>
+          <p:nvPr/>
+        </p:nvSpPr>
+        <p:spPr bwMode="auto">
+          <a:xfrm flipH="1">
+            <a:off x="8026400" y="3381376"/>
+            <a:ext cx="115888" cy="276225"/>
+          </a:xfrm>
+          <a:prstGeom prst="line">
+            <a:avLst/>
+          </a:prstGeom>
+          <a:noFill/>
+          <a:ln w="9525">
+            <a:solidFill>
+              <a:schemeClr val="tx1"/>
+            </a:solidFill>
+            <a:round/>
+            <a:headEnd/>
+            <a:tailEnd type="triangle" w="med" len="med"/>
+          </a:ln>
+        </p:spPr>
+        <p:txBody>
+          <a:bodyPr wrap="none" anchor="ctr"/>
+          <a:lstStyle/>
+          <a:p>
+            <a:endParaRPr lang="en-US"/>
+          </a:p>
+        </p:txBody>
+      </p:sp>
+    </p:spTree>
+    <p:extLst>
+      <p:ext uri="{BB962C8B-B14F-4D97-AF65-F5344CB8AC3E}">
+        <p14:creationId xmlns:p14="http://schemas.microsoft.com/office/powerpoint/2010/main" val="3786188879"/>
+      </p:ext>
+    </p:extLst>
+  </p:cSld>
+  <p:clrMapOvr>
+    <a:masterClrMapping/>
+  </p:clrMapOvr>
+</p:sld>
+</file>
+
+<file path=ppt/slides/slide14.xml><?xml version="1.0" encoding="utf-8"?>
+<p:sld xmlns:a="http://schemas.openxmlformats.org/drawingml/2006/main" xmlns:r="http://schemas.openxmlformats.org/officeDocument/2006/relationships" xmlns:p="http://schemas.openxmlformats.org/presentationml/2006/main">
+  <p:cSld>
+    <p:spTree>
+      <p:nvGrpSpPr>
+        <p:cNvPr id="1" name=""/>
+        <p:cNvGrpSpPr/>
+        <p:nvPr/>
+      </p:nvGrpSpPr>
+      <p:grpSpPr>
+        <a:xfrm>
+          <a:off x="0" y="0"/>
+          <a:ext cx="0" cy="0"/>
+          <a:chOff x="0" y="0"/>
+          <a:chExt cx="0" cy="0"/>
+        </a:xfrm>
+      </p:grpSpPr>
+      <p:sp>
+        <p:nvSpPr>
+          <p:cNvPr id="4" name="Title 3">
+            <a:extLst>
+              <a:ext uri="{FF2B5EF4-FFF2-40B4-BE49-F238E27FC236}">
+                <a16:creationId xmlns:a16="http://schemas.microsoft.com/office/drawing/2014/main" id="{278E2971-ABB3-3665-9E07-6648A45C5EA1}"/>
+              </a:ext>
+            </a:extLst>
+          </p:cNvPr>
+          <p:cNvSpPr>
+            <a:spLocks noGrp="1"/>
+          </p:cNvSpPr>
+          <p:nvPr>
+            <p:ph type="ctrTitle"/>
+          </p:nvPr>
+        </p:nvSpPr>
+        <p:spPr/>
+        <p:txBody>
+          <a:bodyPr/>
+          <a:lstStyle/>
+          <a:p>
+            <a:r>
+              <a:rPr lang="en-US" dirty="0"/>
+              <a:t>END</a:t>
+            </a:r>
+          </a:p>
+        </p:txBody>
+      </p:sp>
+      <p:sp>
+        <p:nvSpPr>
+          <p:cNvPr id="5" name="Subtitle 4">
+            <a:extLst>
+              <a:ext uri="{FF2B5EF4-FFF2-40B4-BE49-F238E27FC236}">
+                <a16:creationId xmlns:a16="http://schemas.microsoft.com/office/drawing/2014/main" id="{0D541E2D-86A8-F412-3392-CC7332FB94CE}"/>
+              </a:ext>
+            </a:extLst>
+          </p:cNvPr>
+          <p:cNvSpPr>
+            <a:spLocks noGrp="1"/>
+          </p:cNvSpPr>
+          <p:nvPr>
+            <p:ph type="subTitle" idx="1"/>
+          </p:nvPr>
+        </p:nvSpPr>
+        <p:spPr/>
+        <p:txBody>
+          <a:bodyPr/>
+          <a:lstStyle/>
+          <a:p>
+            <a:endParaRPr lang="en-US"/>
+          </a:p>
+        </p:txBody>
+      </p:sp>
+    </p:spTree>
+    <p:extLst>
+      <p:ext uri="{BB962C8B-B14F-4D97-AF65-F5344CB8AC3E}">
+        <p14:creationId xmlns:p14="http://schemas.microsoft.com/office/powerpoint/2010/main" val="1532625996"/>
+      </p:ext>
+    </p:extLst>
+  </p:cSld>
+  <p:clrMapOvr>
+    <a:masterClrMapping/>
+  </p:clrMapOvr>
+</p:sld>
+</file>
+
 <file path=ppt/slides/slide2.xml><?xml version="1.0" encoding="utf-8"?>
 <p:sld xmlns:a="http://schemas.openxmlformats.org/drawingml/2006/main" xmlns:r="http://schemas.openxmlformats.org/officeDocument/2006/relationships" xmlns:p="http://schemas.openxmlformats.org/presentationml/2006/main">
   <p:cSld>
@@ -3771,6 +5105,327 @@
   <p:cSld>
     <p:spTree>
       <p:nvGrpSpPr>
+        <p:cNvPr id="1" name="">
+          <a:extLst>
+            <a:ext uri="{FF2B5EF4-FFF2-40B4-BE49-F238E27FC236}">
+              <a16:creationId xmlns:a16="http://schemas.microsoft.com/office/drawing/2014/main" id="{5915F1B2-C636-F26E-1AE6-A14E36C7BDCC}"/>
+            </a:ext>
+          </a:extLst>
+        </p:cNvPr>
+        <p:cNvGrpSpPr/>
+        <p:nvPr/>
+      </p:nvGrpSpPr>
+      <p:grpSpPr>
+        <a:xfrm>
+          <a:off x="0" y="0"/>
+          <a:ext cx="0" cy="0"/>
+          <a:chOff x="0" y="0"/>
+          <a:chExt cx="0" cy="0"/>
+        </a:xfrm>
+      </p:grpSpPr>
+      <p:sp>
+        <p:nvSpPr>
+          <p:cNvPr id="35842" name="Title 1">
+            <a:extLst>
+              <a:ext uri="{FF2B5EF4-FFF2-40B4-BE49-F238E27FC236}">
+                <a16:creationId xmlns:a16="http://schemas.microsoft.com/office/drawing/2014/main" id="{E5D43F17-A7AA-2648-7985-50828A29E95D}"/>
+              </a:ext>
+            </a:extLst>
+          </p:cNvPr>
+          <p:cNvSpPr>
+            <a:spLocks noGrp="1" noChangeArrowheads="1"/>
+          </p:cNvSpPr>
+          <p:nvPr>
+            <p:ph type="title"/>
+          </p:nvPr>
+        </p:nvSpPr>
+        <p:spPr/>
+        <p:txBody>
+          <a:bodyPr/>
+          <a:lstStyle/>
+          <a:p>
+            <a:r>
+              <a:rPr lang="en-US" altLang="en-US"/>
+              <a:t>Question 123.11.4</a:t>
+            </a:r>
+          </a:p>
+        </p:txBody>
+      </p:sp>
+      <p:sp>
+        <p:nvSpPr>
+          <p:cNvPr id="35843" name="Content Placeholder 2">
+            <a:extLst>
+              <a:ext uri="{FF2B5EF4-FFF2-40B4-BE49-F238E27FC236}">
+                <a16:creationId xmlns:a16="http://schemas.microsoft.com/office/drawing/2014/main" id="{0880A836-F3E8-694F-BE88-C7B0C83B8377}"/>
+              </a:ext>
+            </a:extLst>
+          </p:cNvPr>
+          <p:cNvSpPr>
+            <a:spLocks noGrp="1" noChangeArrowheads="1"/>
+          </p:cNvSpPr>
+          <p:nvPr>
+            <p:ph idx="1"/>
+          </p:nvPr>
+        </p:nvSpPr>
+        <p:spPr/>
+        <p:txBody>
+          <a:bodyPr/>
+          <a:lstStyle/>
+          <a:p>
+            <a:pPr>
+              <a:buFontTx/>
+              <a:buNone/>
+            </a:pPr>
+            <a:r>
+              <a:rPr lang="en-US" altLang="en-US" dirty="0"/>
+              <a:t>We can have a process where Q = 0? What do we call that process?</a:t>
+            </a:r>
+          </a:p>
+          <a:p>
+            <a:pPr marL="514350" indent="-514350">
+              <a:buFont typeface="+mj-lt"/>
+              <a:buAutoNum type="alphaLcParenR"/>
+            </a:pPr>
+            <a:r>
+              <a:rPr lang="en-US" dirty="0"/>
+              <a:t>Isobaric</a:t>
+            </a:r>
+          </a:p>
+          <a:p>
+            <a:pPr marL="514350" indent="-514350">
+              <a:buFont typeface="+mj-lt"/>
+              <a:buAutoNum type="alphaLcParenR"/>
+            </a:pPr>
+            <a:r>
+              <a:rPr lang="en-US" dirty="0"/>
+              <a:t>Isochoric</a:t>
+            </a:r>
+          </a:p>
+          <a:p>
+            <a:pPr marL="514350" indent="-514350">
+              <a:buFont typeface="+mj-lt"/>
+              <a:buAutoNum type="alphaLcParenR"/>
+            </a:pPr>
+            <a:r>
+              <a:rPr lang="en-US" dirty="0"/>
+              <a:t>Adiabatic</a:t>
+            </a:r>
+          </a:p>
+          <a:p>
+            <a:pPr marL="514350" indent="-514350">
+              <a:buFont typeface="+mj-lt"/>
+              <a:buAutoNum type="alphaLcParenR"/>
+            </a:pPr>
+            <a:r>
+              <a:rPr lang="en-US" dirty="0"/>
+              <a:t>Isothermal</a:t>
+            </a:r>
+          </a:p>
+        </p:txBody>
+      </p:sp>
+      <p:sp>
+        <p:nvSpPr>
+          <p:cNvPr id="35844" name="Slide Number Placeholder 3">
+            <a:extLst>
+              <a:ext uri="{FF2B5EF4-FFF2-40B4-BE49-F238E27FC236}">
+                <a16:creationId xmlns:a16="http://schemas.microsoft.com/office/drawing/2014/main" id="{1F23F20B-1AE1-D064-E6B6-EA8701D98B9F}"/>
+              </a:ext>
+            </a:extLst>
+          </p:cNvPr>
+          <p:cNvSpPr>
+            <a:spLocks noGrp="1"/>
+          </p:cNvSpPr>
+          <p:nvPr>
+            <p:ph type="sldNum" sz="quarter" idx="12"/>
+          </p:nvPr>
+        </p:nvSpPr>
+        <p:spPr bwMode="auto">
+          <a:noFill/>
+          <a:extLst>
+            <a:ext uri="{909E8E84-426E-40DD-AFC4-6F175D3DCCD1}">
+              <a14:hiddenFill xmlns:a14="http://schemas.microsoft.com/office/drawing/2010/main">
+                <a:solidFill>
+                  <a:srgbClr val="FFFFFF"/>
+                </a:solidFill>
+              </a14:hiddenFill>
+            </a:ext>
+            <a:ext uri="{91240B29-F687-4F45-9708-019B960494DF}">
+              <a14:hiddenLine xmlns:a14="http://schemas.microsoft.com/office/drawing/2010/main" w="9525">
+                <a:solidFill>
+                  <a:srgbClr val="000000"/>
+                </a:solidFill>
+                <a:miter lim="800000"/>
+                <a:headEnd/>
+                <a:tailEnd/>
+              </a14:hiddenLine>
+            </a:ext>
+          </a:extLst>
+        </p:spPr>
+        <p:txBody>
+          <a:bodyPr/>
+          <a:lstStyle>
+            <a:lvl1pPr>
+              <a:spcBef>
+                <a:spcPct val="20000"/>
+              </a:spcBef>
+              <a:buChar char="•"/>
+              <a:defRPr sz="3200">
+                <a:solidFill>
+                  <a:schemeClr val="tx1"/>
+                </a:solidFill>
+                <a:latin typeface="Arial" panose="020B0604020202020204" pitchFamily="34" charset="0"/>
+              </a:defRPr>
+            </a:lvl1pPr>
+            <a:lvl2pPr marL="742950" indent="-285750">
+              <a:spcBef>
+                <a:spcPct val="20000"/>
+              </a:spcBef>
+              <a:buChar char="–"/>
+              <a:defRPr sz="2800">
+                <a:solidFill>
+                  <a:schemeClr val="tx1"/>
+                </a:solidFill>
+                <a:latin typeface="Arial" panose="020B0604020202020204" pitchFamily="34" charset="0"/>
+              </a:defRPr>
+            </a:lvl2pPr>
+            <a:lvl3pPr marL="1143000" indent="-228600">
+              <a:spcBef>
+                <a:spcPct val="20000"/>
+              </a:spcBef>
+              <a:buChar char="•"/>
+              <a:defRPr sz="2400">
+                <a:solidFill>
+                  <a:schemeClr val="tx1"/>
+                </a:solidFill>
+                <a:latin typeface="Arial" panose="020B0604020202020204" pitchFamily="34" charset="0"/>
+              </a:defRPr>
+            </a:lvl3pPr>
+            <a:lvl4pPr marL="1600200" indent="-228600">
+              <a:spcBef>
+                <a:spcPct val="20000"/>
+              </a:spcBef>
+              <a:buChar char="–"/>
+              <a:defRPr sz="2000">
+                <a:solidFill>
+                  <a:schemeClr val="tx1"/>
+                </a:solidFill>
+                <a:latin typeface="Arial" panose="020B0604020202020204" pitchFamily="34" charset="0"/>
+              </a:defRPr>
+            </a:lvl4pPr>
+            <a:lvl5pPr marL="2057400" indent="-228600">
+              <a:spcBef>
+                <a:spcPct val="20000"/>
+              </a:spcBef>
+              <a:buChar char="»"/>
+              <a:defRPr sz="2000">
+                <a:solidFill>
+                  <a:schemeClr val="tx1"/>
+                </a:solidFill>
+                <a:latin typeface="Arial" panose="020B0604020202020204" pitchFamily="34" charset="0"/>
+              </a:defRPr>
+            </a:lvl5pPr>
+            <a:lvl6pPr marL="2514600" indent="-228600" eaLnBrk="0" fontAlgn="base" hangingPunct="0">
+              <a:spcBef>
+                <a:spcPct val="20000"/>
+              </a:spcBef>
+              <a:spcAft>
+                <a:spcPct val="0"/>
+              </a:spcAft>
+              <a:buChar char="»"/>
+              <a:defRPr sz="2000">
+                <a:solidFill>
+                  <a:schemeClr val="tx1"/>
+                </a:solidFill>
+                <a:latin typeface="Arial" panose="020B0604020202020204" pitchFamily="34" charset="0"/>
+              </a:defRPr>
+            </a:lvl6pPr>
+            <a:lvl7pPr marL="2971800" indent="-228600" eaLnBrk="0" fontAlgn="base" hangingPunct="0">
+              <a:spcBef>
+                <a:spcPct val="20000"/>
+              </a:spcBef>
+              <a:spcAft>
+                <a:spcPct val="0"/>
+              </a:spcAft>
+              <a:buChar char="»"/>
+              <a:defRPr sz="2000">
+                <a:solidFill>
+                  <a:schemeClr val="tx1"/>
+                </a:solidFill>
+                <a:latin typeface="Arial" panose="020B0604020202020204" pitchFamily="34" charset="0"/>
+              </a:defRPr>
+            </a:lvl7pPr>
+            <a:lvl8pPr marL="3429000" indent="-228600" eaLnBrk="0" fontAlgn="base" hangingPunct="0">
+              <a:spcBef>
+                <a:spcPct val="20000"/>
+              </a:spcBef>
+              <a:spcAft>
+                <a:spcPct val="0"/>
+              </a:spcAft>
+              <a:buChar char="»"/>
+              <a:defRPr sz="2000">
+                <a:solidFill>
+                  <a:schemeClr val="tx1"/>
+                </a:solidFill>
+                <a:latin typeface="Arial" panose="020B0604020202020204" pitchFamily="34" charset="0"/>
+              </a:defRPr>
+            </a:lvl8pPr>
+            <a:lvl9pPr marL="3886200" indent="-228600" eaLnBrk="0" fontAlgn="base" hangingPunct="0">
+              <a:spcBef>
+                <a:spcPct val="20000"/>
+              </a:spcBef>
+              <a:spcAft>
+                <a:spcPct val="0"/>
+              </a:spcAft>
+              <a:buChar char="»"/>
+              <a:defRPr sz="2000">
+                <a:solidFill>
+                  <a:schemeClr val="tx1"/>
+                </a:solidFill>
+                <a:latin typeface="Arial" panose="020B0604020202020204" pitchFamily="34" charset="0"/>
+              </a:defRPr>
+            </a:lvl9pPr>
+          </a:lstStyle>
+          <a:p>
+            <a:pPr>
+              <a:spcBef>
+                <a:spcPct val="0"/>
+              </a:spcBef>
+              <a:buFontTx/>
+              <a:buNone/>
+            </a:pPr>
+            <a:fld id="{6DC6CAC7-B115-4CA8-825E-3F1ADFC365D7}" type="slidenum">
+              <a:rPr lang="en-US" altLang="en-US" sz="1800"/>
+              <a:pPr>
+                <a:spcBef>
+                  <a:spcPct val="0"/>
+                </a:spcBef>
+                <a:buFontTx/>
+                <a:buNone/>
+              </a:pPr>
+              <a:t>3</a:t>
+            </a:fld>
+            <a:endParaRPr lang="en-US" altLang="en-US" sz="1800"/>
+          </a:p>
+        </p:txBody>
+      </p:sp>
+    </p:spTree>
+    <p:extLst>
+      <p:ext uri="{BB962C8B-B14F-4D97-AF65-F5344CB8AC3E}">
+        <p14:creationId xmlns:p14="http://schemas.microsoft.com/office/powerpoint/2010/main" val="3842804923"/>
+      </p:ext>
+    </p:extLst>
+  </p:cSld>
+  <p:clrMapOvr>
+    <a:masterClrMapping/>
+  </p:clrMapOvr>
+</p:sld>
+</file>
+
+<file path=ppt/slides/slide4.xml><?xml version="1.0" encoding="utf-8"?>
+<p:sld xmlns:a="http://schemas.openxmlformats.org/drawingml/2006/main" xmlns:r="http://schemas.openxmlformats.org/officeDocument/2006/relationships" xmlns:p="http://schemas.openxmlformats.org/presentationml/2006/main">
+  <p:cSld>
+    <p:spTree>
+      <p:nvGrpSpPr>
         <p:cNvPr id="1" name=""/>
         <p:cNvGrpSpPr/>
         <p:nvPr/>
@@ -3826,102 +5481,6 @@
 </p:sld>
 </file>
 
-<file path=ppt/slides/slide4.xml><?xml version="1.0" encoding="utf-8"?>
-<p:sld xmlns:a="http://schemas.openxmlformats.org/drawingml/2006/main" xmlns:r="http://schemas.openxmlformats.org/officeDocument/2006/relationships" xmlns:p="http://schemas.openxmlformats.org/presentationml/2006/main">
-  <p:cSld>
-    <p:spTree>
-      <p:nvGrpSpPr>
-        <p:cNvPr id="1" name=""/>
-        <p:cNvGrpSpPr/>
-        <p:nvPr/>
-      </p:nvGrpSpPr>
-      <p:grpSpPr>
-        <a:xfrm>
-          <a:off x="0" y="0"/>
-          <a:ext cx="0" cy="0"/>
-          <a:chOff x="0" y="0"/>
-          <a:chExt cx="0" cy="0"/>
-        </a:xfrm>
-      </p:grpSpPr>
-      <p:sp>
-        <p:nvSpPr>
-          <p:cNvPr id="2" name="Title 1"/>
-          <p:cNvSpPr>
-            <a:spLocks noGrp="1"/>
-          </p:cNvSpPr>
-          <p:nvPr>
-            <p:ph type="title"/>
-          </p:nvPr>
-        </p:nvSpPr>
-        <p:spPr/>
-        <p:txBody>
-          <a:bodyPr/>
-          <a:lstStyle/>
-          <a:p>
-            <a:endParaRPr lang="en-US"/>
-          </a:p>
-        </p:txBody>
-      </p:sp>
-      <p:sp>
-        <p:nvSpPr>
-          <p:cNvPr id="3" name="Content Placeholder 2"/>
-          <p:cNvSpPr>
-            <a:spLocks noGrp="1"/>
-          </p:cNvSpPr>
-          <p:nvPr>
-            <p:ph idx="1"/>
-          </p:nvPr>
-        </p:nvSpPr>
-        <p:spPr/>
-        <p:txBody>
-          <a:bodyPr/>
-          <a:lstStyle/>
-          <a:p>
-            <a:endParaRPr lang="en-US"/>
-          </a:p>
-        </p:txBody>
-      </p:sp>
-      <p:pic>
-        <p:nvPicPr>
-          <p:cNvPr id="7170" name="Picture 2"/>
-          <p:cNvPicPr>
-            <a:picLocks noChangeAspect="1" noChangeArrowheads="1"/>
-          </p:cNvPicPr>
-          <p:nvPr/>
-        </p:nvPicPr>
-        <p:blipFill>
-          <a:blip r:embed="rId2" cstate="print"/>
-          <a:srcRect/>
-          <a:stretch>
-            <a:fillRect/>
-          </a:stretch>
-        </p:blipFill>
-        <p:spPr bwMode="auto">
-          <a:xfrm>
-            <a:off x="1905000" y="642082"/>
-            <a:ext cx="8650174" cy="5758718"/>
-          </a:xfrm>
-          <a:prstGeom prst="rect">
-            <a:avLst/>
-          </a:prstGeom>
-          <a:noFill/>
-          <a:ln w="9525">
-            <a:noFill/>
-            <a:miter lim="800000"/>
-            <a:headEnd/>
-            <a:tailEnd/>
-          </a:ln>
-          <a:effectLst/>
-        </p:spPr>
-      </p:pic>
-    </p:spTree>
-  </p:cSld>
-  <p:clrMapOvr>
-    <a:masterClrMapping/>
-  </p:clrMapOvr>
-</p:sld>
-</file>
-
 <file path=ppt/slides/slide5.xml><?xml version="1.0" encoding="utf-8"?>
 <p:sld xmlns:a="http://schemas.openxmlformats.org/drawingml/2006/main" xmlns:r="http://schemas.openxmlformats.org/officeDocument/2006/relationships" xmlns:p="http://schemas.openxmlformats.org/presentationml/2006/main">
   <p:cSld>
@@ -3939,42 +5498,15 @@
           <a:chExt cx="0" cy="0"/>
         </a:xfrm>
       </p:grpSpPr>
-      <p:pic>
-        <p:nvPicPr>
-          <p:cNvPr id="1030" name="Picture 6"/>
-          <p:cNvPicPr>
-            <a:picLocks noChangeAspect="1" noChangeArrowheads="1"/>
-          </p:cNvPicPr>
-          <p:nvPr/>
-        </p:nvPicPr>
-        <p:blipFill>
-          <a:blip r:embed="rId2" cstate="print"/>
-          <a:srcRect/>
-          <a:stretch>
-            <a:fillRect/>
-          </a:stretch>
-        </p:blipFill>
-        <p:spPr bwMode="auto">
-          <a:xfrm>
-            <a:off x="7162801" y="1828800"/>
-            <a:ext cx="1869243" cy="1822450"/>
-          </a:xfrm>
-          <a:prstGeom prst="rect">
-            <a:avLst/>
-          </a:prstGeom>
-          <a:noFill/>
-          <a:ln w="9525">
-            <a:noFill/>
-            <a:miter lim="800000"/>
-            <a:headEnd/>
-            <a:tailEnd/>
-          </a:ln>
-          <a:effectLst/>
-        </p:spPr>
-      </p:pic>
-      <p:sp>
-        <p:nvSpPr>
-          <p:cNvPr id="2" name="Title 1"/>
+      <p:sp>
+        <p:nvSpPr>
+          <p:cNvPr id="2" name="Title 1">
+            <a:extLst>
+              <a:ext uri="{FF2B5EF4-FFF2-40B4-BE49-F238E27FC236}">
+                <a16:creationId xmlns:a16="http://schemas.microsoft.com/office/drawing/2014/main" id="{54610E40-E486-E84C-682C-6002987BB624}"/>
+              </a:ext>
+            </a:extLst>
+          </p:cNvPr>
           <p:cNvSpPr>
             <a:spLocks noGrp="1"/>
           </p:cNvSpPr>
@@ -3987,483 +5519,279 @@
           <a:bodyPr/>
           <a:lstStyle/>
           <a:p>
-            <a:endParaRPr lang="en-US" dirty="0"/>
-          </a:p>
-        </p:txBody>
-      </p:sp>
-      <p:sp>
-        <p:nvSpPr>
-          <p:cNvPr id="4" name="Rectangle 2"/>
-          <p:cNvSpPr>
-            <a:spLocks noChangeArrowheads="1"/>
-          </p:cNvSpPr>
-          <p:nvPr/>
-        </p:nvSpPr>
-        <p:spPr bwMode="auto">
-          <a:xfrm>
-            <a:off x="2743201" y="3519488"/>
-            <a:ext cx="2511425" cy="1871663"/>
-          </a:xfrm>
-          <a:prstGeom prst="rect">
-            <a:avLst/>
-          </a:prstGeom>
-          <a:gradFill rotWithShape="1">
-            <a:gsLst>
-              <a:gs pos="0">
-                <a:schemeClr val="bg1"/>
-              </a:gs>
-              <a:gs pos="100000">
-                <a:schemeClr val="accent1"/>
-              </a:gs>
-            </a:gsLst>
-            <a:path path="shape">
-              <a:fillToRect l="50000" t="50000" r="50000" b="50000"/>
-            </a:path>
-          </a:gradFill>
-          <a:ln w="9525" algn="ctr">
-            <a:solidFill>
-              <a:schemeClr val="tx1"/>
-            </a:solidFill>
-            <a:miter lim="800000"/>
-            <a:headEnd/>
-            <a:tailEnd/>
-          </a:ln>
-        </p:spPr>
-        <p:txBody>
-          <a:bodyPr wrap="none" anchor="ctr"/>
-          <a:lstStyle/>
-          <a:p>
-            <a:pPr algn="ctr"/>
-            <a:r>
-              <a:rPr lang="en-US"/>
-              <a:t>Gas at T</a:t>
-            </a:r>
-            <a:r>
-              <a:rPr lang="en-US" baseline="-25000"/>
-              <a:t>i</a:t>
-            </a:r>
-          </a:p>
-        </p:txBody>
-      </p:sp>
-      <p:sp>
-        <p:nvSpPr>
-          <p:cNvPr id="5" name="Rectangle 5"/>
-          <p:cNvSpPr>
-            <a:spLocks noChangeArrowheads="1"/>
-          </p:cNvSpPr>
-          <p:nvPr/>
-        </p:nvSpPr>
-        <p:spPr bwMode="auto">
-          <a:xfrm>
-            <a:off x="2743201" y="1676401"/>
-            <a:ext cx="2511425" cy="3730625"/>
-          </a:xfrm>
-          <a:prstGeom prst="rect">
-            <a:avLst/>
-          </a:prstGeom>
-          <a:noFill/>
-          <a:ln w="53975" algn="ctr">
-            <a:solidFill>
-              <a:srgbClr val="FF9900"/>
-            </a:solidFill>
-            <a:miter lim="800000"/>
-            <a:headEnd/>
-            <a:tailEnd/>
-          </a:ln>
-        </p:spPr>
-        <p:txBody>
-          <a:bodyPr wrap="none" anchor="ctr"/>
-          <a:lstStyle/>
-          <a:p>
-            <a:endParaRPr lang="en-US"/>
-          </a:p>
-        </p:txBody>
-      </p:sp>
-      <p:sp>
-        <p:nvSpPr>
-          <p:cNvPr id="6" name="Line 6"/>
-          <p:cNvSpPr>
-            <a:spLocks noChangeShapeType="1"/>
-          </p:cNvSpPr>
-          <p:nvPr/>
-        </p:nvSpPr>
-        <p:spPr bwMode="auto">
-          <a:xfrm>
-            <a:off x="2728913" y="3533775"/>
-            <a:ext cx="2525713" cy="0"/>
-          </a:xfrm>
-          <a:prstGeom prst="line">
-            <a:avLst/>
-          </a:prstGeom>
-          <a:noFill/>
-          <a:ln w="9525">
-            <a:solidFill>
-              <a:srgbClr val="FF0000"/>
-            </a:solidFill>
-            <a:round/>
-            <a:headEnd/>
-            <a:tailEnd/>
-          </a:ln>
-        </p:spPr>
-        <p:txBody>
-          <a:bodyPr wrap="none" anchor="ctr"/>
-          <a:lstStyle/>
-          <a:p>
-            <a:endParaRPr lang="en-US"/>
-          </a:p>
-        </p:txBody>
-      </p:sp>
-      <p:sp>
-        <p:nvSpPr>
-          <p:cNvPr id="7" name="Text Box 7"/>
-          <p:cNvSpPr txBox="1">
-            <a:spLocks noChangeArrowheads="1"/>
-          </p:cNvSpPr>
-          <p:nvPr/>
-        </p:nvSpPr>
-        <p:spPr bwMode="auto">
-          <a:xfrm>
-            <a:off x="3438525" y="2147888"/>
-            <a:ext cx="1136650" cy="366713"/>
-          </a:xfrm>
-          <a:prstGeom prst="rect">
-            <a:avLst/>
-          </a:prstGeom>
-          <a:noFill/>
-          <a:ln w="9525" algn="ctr">
-            <a:noFill/>
-            <a:miter lim="800000"/>
-            <a:headEnd/>
-            <a:tailEnd/>
-          </a:ln>
-        </p:spPr>
-        <p:txBody>
-          <a:bodyPr>
-            <a:spAutoFit/>
-          </a:bodyPr>
-          <a:lstStyle/>
-          <a:p>
-            <a:pPr algn="ctr"/>
-            <a:r>
-              <a:rPr lang="en-US"/>
-              <a:t>Vacuum</a:t>
-            </a:r>
-          </a:p>
-        </p:txBody>
-      </p:sp>
-      <p:sp>
-        <p:nvSpPr>
-          <p:cNvPr id="8" name="Text Box 8"/>
-          <p:cNvSpPr txBox="1">
-            <a:spLocks noChangeArrowheads="1"/>
-          </p:cNvSpPr>
-          <p:nvPr/>
-        </p:nvSpPr>
-        <p:spPr bwMode="auto">
-          <a:xfrm>
-            <a:off x="2619376" y="2954338"/>
-            <a:ext cx="1920875" cy="366713"/>
-          </a:xfrm>
-          <a:prstGeom prst="rect">
-            <a:avLst/>
-          </a:prstGeom>
-          <a:noFill/>
-          <a:ln w="9525" algn="ctr">
-            <a:noFill/>
-            <a:miter lim="800000"/>
-            <a:headEnd/>
-            <a:tailEnd/>
-          </a:ln>
-        </p:spPr>
-        <p:txBody>
-          <a:bodyPr>
-            <a:spAutoFit/>
-          </a:bodyPr>
-          <a:lstStyle/>
-          <a:p>
-            <a:pPr algn="ctr"/>
-            <a:r>
-              <a:rPr lang="en-US"/>
-              <a:t>Membrane</a:t>
-            </a:r>
-          </a:p>
-        </p:txBody>
-      </p:sp>
-      <p:sp>
-        <p:nvSpPr>
-          <p:cNvPr id="9" name="Line 9"/>
-          <p:cNvSpPr>
-            <a:spLocks noChangeShapeType="1"/>
-          </p:cNvSpPr>
-          <p:nvPr/>
-        </p:nvSpPr>
-        <p:spPr bwMode="auto">
-          <a:xfrm flipH="1">
-            <a:off x="3367087" y="3243263"/>
-            <a:ext cx="115888" cy="276225"/>
-          </a:xfrm>
-          <a:prstGeom prst="line">
-            <a:avLst/>
-          </a:prstGeom>
-          <a:noFill/>
-          <a:ln w="9525">
-            <a:solidFill>
-              <a:schemeClr val="tx1"/>
-            </a:solidFill>
-            <a:round/>
-            <a:headEnd/>
-            <a:tailEnd type="triangle" w="med" len="med"/>
-          </a:ln>
-        </p:spPr>
-        <p:txBody>
-          <a:bodyPr wrap="none" anchor="ctr"/>
-          <a:lstStyle/>
-          <a:p>
-            <a:endParaRPr lang="en-US"/>
-          </a:p>
-        </p:txBody>
-      </p:sp>
-      <p:sp>
-        <p:nvSpPr>
-          <p:cNvPr id="11" name="Rectangle 5"/>
-          <p:cNvSpPr>
-            <a:spLocks noChangeArrowheads="1"/>
-          </p:cNvSpPr>
-          <p:nvPr/>
-        </p:nvSpPr>
-        <p:spPr bwMode="auto">
-          <a:xfrm>
-            <a:off x="6629401" y="1676401"/>
-            <a:ext cx="2511425" cy="3730625"/>
-          </a:xfrm>
-          <a:prstGeom prst="rect">
-            <a:avLst/>
-          </a:prstGeom>
-          <a:noFill/>
-          <a:ln w="53975" algn="ctr">
-            <a:solidFill>
-              <a:srgbClr val="FF9900"/>
-            </a:solidFill>
-            <a:miter lim="800000"/>
-            <a:headEnd/>
-            <a:tailEnd/>
-          </a:ln>
-        </p:spPr>
-        <p:txBody>
-          <a:bodyPr wrap="none" anchor="ctr"/>
-          <a:lstStyle/>
-          <a:p>
-            <a:endParaRPr lang="en-US"/>
-          </a:p>
-        </p:txBody>
-      </p:sp>
-      <p:sp>
-        <p:nvSpPr>
-          <p:cNvPr id="12" name="Line 6"/>
-          <p:cNvSpPr>
-            <a:spLocks noChangeShapeType="1"/>
-          </p:cNvSpPr>
-          <p:nvPr/>
-        </p:nvSpPr>
-        <p:spPr bwMode="auto">
-          <a:xfrm>
-            <a:off x="6615113" y="3533775"/>
-            <a:ext cx="2525713" cy="0"/>
-          </a:xfrm>
-          <a:prstGeom prst="line">
-            <a:avLst/>
-          </a:prstGeom>
-          <a:noFill/>
-          <a:ln w="9525">
-            <a:solidFill>
-              <a:srgbClr val="FF0000"/>
-            </a:solidFill>
-            <a:round/>
-            <a:headEnd/>
-            <a:tailEnd/>
-          </a:ln>
-        </p:spPr>
-        <p:txBody>
-          <a:bodyPr wrap="none" anchor="ctr"/>
-          <a:lstStyle/>
-          <a:p>
-            <a:endParaRPr lang="en-US"/>
-          </a:p>
-        </p:txBody>
-      </p:sp>
-      <p:sp>
-        <p:nvSpPr>
-          <p:cNvPr id="14" name="Text Box 8"/>
-          <p:cNvSpPr txBox="1">
-            <a:spLocks noChangeArrowheads="1"/>
-          </p:cNvSpPr>
-          <p:nvPr/>
-        </p:nvSpPr>
-        <p:spPr bwMode="auto">
-          <a:xfrm>
-            <a:off x="6505576" y="2954338"/>
-            <a:ext cx="1920875" cy="366713"/>
-          </a:xfrm>
-          <a:prstGeom prst="rect">
-            <a:avLst/>
-          </a:prstGeom>
-          <a:noFill/>
-          <a:ln w="9525" algn="ctr">
-            <a:noFill/>
-            <a:miter lim="800000"/>
-            <a:headEnd/>
-            <a:tailEnd/>
-          </a:ln>
-        </p:spPr>
-        <p:txBody>
-          <a:bodyPr>
-            <a:spAutoFit/>
-          </a:bodyPr>
-          <a:lstStyle/>
-          <a:p>
-            <a:pPr algn="ctr"/>
-            <a:r>
-              <a:rPr lang="en-US"/>
-              <a:t>Membrane</a:t>
-            </a:r>
-          </a:p>
-        </p:txBody>
-      </p:sp>
-      <p:sp>
-        <p:nvSpPr>
-          <p:cNvPr id="15" name="Line 9"/>
-          <p:cNvSpPr>
-            <a:spLocks noChangeShapeType="1"/>
-          </p:cNvSpPr>
-          <p:nvPr/>
-        </p:nvSpPr>
-        <p:spPr bwMode="auto">
-          <a:xfrm flipH="1">
-            <a:off x="7253287" y="3243263"/>
-            <a:ext cx="115888" cy="276225"/>
-          </a:xfrm>
-          <a:prstGeom prst="line">
-            <a:avLst/>
-          </a:prstGeom>
-          <a:noFill/>
-          <a:ln w="9525">
-            <a:solidFill>
-              <a:schemeClr val="tx1"/>
-            </a:solidFill>
-            <a:round/>
-            <a:headEnd/>
-            <a:tailEnd type="triangle" w="med" len="med"/>
-          </a:ln>
-        </p:spPr>
-        <p:txBody>
-          <a:bodyPr wrap="none" anchor="ctr"/>
-          <a:lstStyle/>
-          <a:p>
-            <a:endParaRPr lang="en-US"/>
-          </a:p>
-        </p:txBody>
-      </p:sp>
-      <p:sp>
-        <p:nvSpPr>
-          <p:cNvPr id="10" name="Rectangle 2"/>
-          <p:cNvSpPr>
-            <a:spLocks noChangeArrowheads="1"/>
-          </p:cNvSpPr>
-          <p:nvPr/>
-        </p:nvSpPr>
-        <p:spPr bwMode="auto">
-          <a:xfrm>
-            <a:off x="6629401" y="3519488"/>
-            <a:ext cx="2511425" cy="1871663"/>
-          </a:xfrm>
-          <a:prstGeom prst="rect">
-            <a:avLst/>
-          </a:prstGeom>
-          <a:gradFill rotWithShape="1">
-            <a:gsLst>
-              <a:gs pos="0">
-                <a:schemeClr val="bg1"/>
-              </a:gs>
-              <a:gs pos="100000">
-                <a:schemeClr val="accent1"/>
-              </a:gs>
-            </a:gsLst>
-            <a:path path="shape">
-              <a:fillToRect l="50000" t="50000" r="50000" b="50000"/>
-            </a:path>
-          </a:gradFill>
-          <a:ln w="9525" algn="ctr">
-            <a:solidFill>
-              <a:schemeClr val="tx1"/>
-            </a:solidFill>
-            <a:miter lim="800000"/>
-            <a:headEnd/>
-            <a:tailEnd/>
-          </a:ln>
-        </p:spPr>
-        <p:txBody>
-          <a:bodyPr wrap="none" anchor="ctr"/>
-          <a:lstStyle/>
-          <a:p>
-            <a:pPr algn="ctr"/>
-            <a:r>
-              <a:rPr lang="en-US"/>
-              <a:t>Gas at T</a:t>
-            </a:r>
-            <a:r>
-              <a:rPr lang="en-US" baseline="-25000"/>
-              <a:t>i</a:t>
-            </a:r>
-          </a:p>
-        </p:txBody>
-      </p:sp>
-      <p:sp>
-        <p:nvSpPr>
-          <p:cNvPr id="16" name="Rectangle 15"/>
-          <p:cNvSpPr/>
-          <p:nvPr/>
-        </p:nvSpPr>
-        <p:spPr>
-          <a:xfrm>
-            <a:off x="8382000" y="3505200"/>
-            <a:ext cx="152400" cy="76200"/>
-          </a:xfrm>
-          <a:prstGeom prst="rect">
-            <a:avLst/>
-          </a:prstGeom>
-          <a:solidFill>
-            <a:schemeClr val="accent1"/>
-          </a:solidFill>
-          <a:ln>
-            <a:noFill/>
-          </a:ln>
-        </p:spPr>
-        <p:style>
-          <a:lnRef idx="2">
-            <a:schemeClr val="accent1">
-              <a:shade val="50000"/>
-            </a:schemeClr>
-          </a:lnRef>
-          <a:fillRef idx="1">
-            <a:schemeClr val="accent1"/>
-          </a:fillRef>
-          <a:effectRef idx="0">
-            <a:schemeClr val="accent1"/>
-          </a:effectRef>
-          <a:fontRef idx="minor">
-            <a:schemeClr val="lt1"/>
-          </a:fontRef>
-        </p:style>
-        <p:txBody>
-          <a:bodyPr rtlCol="0" anchor="ctr"/>
-          <a:lstStyle/>
-          <a:p>
-            <a:pPr algn="ctr"/>
-            <a:endParaRPr lang="en-US"/>
-          </a:p>
-        </p:txBody>
-      </p:sp>
+            <a:r>
+              <a:rPr lang="en-US" dirty="0"/>
+              <a:t>Question</a:t>
+            </a:r>
+          </a:p>
+        </p:txBody>
+      </p:sp>
+      <mc:AlternateContent xmlns:mc="http://schemas.openxmlformats.org/markup-compatibility/2006">
+        <mc:Choice xmlns:a14="http://schemas.microsoft.com/office/drawing/2010/main" Requires="a14">
+          <p:sp>
+            <p:nvSpPr>
+              <p:cNvPr id="3" name="Content Placeholder 2">
+                <a:extLst>
+                  <a:ext uri="{FF2B5EF4-FFF2-40B4-BE49-F238E27FC236}">
+                    <a16:creationId xmlns:a16="http://schemas.microsoft.com/office/drawing/2014/main" id="{08537D8D-6AC6-1433-021B-54F0CF486FA0}"/>
+                  </a:ext>
+                </a:extLst>
+              </p:cNvPr>
+              <p:cNvSpPr>
+                <a:spLocks noGrp="1"/>
+              </p:cNvSpPr>
+              <p:nvPr>
+                <p:ph idx="1"/>
+              </p:nvPr>
+            </p:nvSpPr>
+            <p:spPr/>
+            <p:txBody>
+              <a:bodyPr/>
+              <a:lstStyle/>
+              <a:p>
+                <a:pPr marL="0" indent="0">
+                  <a:buNone/>
+                </a:pPr>
+                <a:r>
+                  <a:rPr lang="en-US" dirty="0"/>
+                  <a:t>For an adiabatic path, how does P depend on V?</a:t>
+                </a:r>
+              </a:p>
+              <a:p>
+                <a:pPr marL="514350" indent="-514350">
+                  <a:buFont typeface="+mj-lt"/>
+                  <a:buAutoNum type="alphaLcParenR"/>
+                </a:pPr>
+                <a:r>
+                  <a:rPr lang="en-US" dirty="0"/>
+                  <a:t> </a:t>
+                </a:r>
+                <a14:m>
+                  <m:oMath xmlns:m="http://schemas.openxmlformats.org/officeDocument/2006/math">
+                    <m:r>
+                      <a:rPr lang="en-US" b="0" i="1" smtClean="0">
+                        <a:latin typeface="Cambria Math" panose="02040503050406030204" pitchFamily="18" charset="0"/>
+                      </a:rPr>
+                      <m:t>𝑃</m:t>
+                    </m:r>
+                    <m:r>
+                      <a:rPr lang="en-US" b="0" i="1" smtClean="0">
+                        <a:latin typeface="Cambria Math" panose="02040503050406030204" pitchFamily="18" charset="0"/>
+                      </a:rPr>
+                      <m:t>=</m:t>
+                    </m:r>
+                    <m:f>
+                      <m:fPr>
+                        <m:ctrlPr>
+                          <a:rPr lang="en-US" b="0" i="1" smtClean="0">
+                            <a:latin typeface="Cambria Math" panose="02040503050406030204" pitchFamily="18" charset="0"/>
+                          </a:rPr>
+                        </m:ctrlPr>
+                      </m:fPr>
+                      <m:num>
+                        <m:r>
+                          <a:rPr lang="en-US" b="0" i="1" smtClean="0">
+                            <a:latin typeface="Cambria Math" panose="02040503050406030204" pitchFamily="18" charset="0"/>
+                          </a:rPr>
+                          <m:t>𝑛𝑅𝑇</m:t>
+                        </m:r>
+                      </m:num>
+                      <m:den>
+                        <m:r>
+                          <a:rPr lang="en-US" b="0" i="1" smtClean="0">
+                            <a:latin typeface="Cambria Math" panose="02040503050406030204" pitchFamily="18" charset="0"/>
+                          </a:rPr>
+                          <m:t>𝑉</m:t>
+                        </m:r>
+                      </m:den>
+                    </m:f>
+                  </m:oMath>
+                </a14:m>
+                <a:endParaRPr lang="en-US" dirty="0"/>
+              </a:p>
+              <a:p>
+                <a:pPr marL="514350" indent="-514350">
+                  <a:buFont typeface="+mj-lt"/>
+                  <a:buAutoNum type="alphaLcParenR"/>
+                </a:pPr>
+                <a:r>
+                  <a:rPr lang="en-US" dirty="0"/>
+                  <a:t> </a:t>
+                </a:r>
+                <a14:m>
+                  <m:oMath xmlns:m="http://schemas.openxmlformats.org/officeDocument/2006/math">
+                    <m:r>
+                      <a:rPr lang="en-US" i="1">
+                        <a:latin typeface="Cambria Math" panose="02040503050406030204" pitchFamily="18" charset="0"/>
+                      </a:rPr>
+                      <m:t>𝑃</m:t>
+                    </m:r>
+                    <m:r>
+                      <a:rPr lang="en-US" i="1">
+                        <a:latin typeface="Cambria Math" panose="02040503050406030204" pitchFamily="18" charset="0"/>
+                      </a:rPr>
+                      <m:t>=</m:t>
+                    </m:r>
+                    <m:f>
+                      <m:fPr>
+                        <m:ctrlPr>
+                          <a:rPr lang="en-US" i="1">
+                            <a:latin typeface="Cambria Math" panose="02040503050406030204" pitchFamily="18" charset="0"/>
+                          </a:rPr>
+                        </m:ctrlPr>
+                      </m:fPr>
+                      <m:num>
+                        <m:r>
+                          <a:rPr lang="en-US" b="0" i="1" smtClean="0">
+                            <a:latin typeface="Cambria Math" panose="02040503050406030204" pitchFamily="18" charset="0"/>
+                          </a:rPr>
+                          <m:t>𝑉</m:t>
+                        </m:r>
+                      </m:num>
+                      <m:den>
+                        <m:r>
+                          <a:rPr lang="en-US" b="0" i="1" smtClean="0">
+                            <a:latin typeface="Cambria Math" panose="02040503050406030204" pitchFamily="18" charset="0"/>
+                          </a:rPr>
+                          <m:t>𝑛𝑅𝑇</m:t>
+                        </m:r>
+                      </m:den>
+                    </m:f>
+                  </m:oMath>
+                </a14:m>
+                <a:endParaRPr lang="en-US" dirty="0"/>
+              </a:p>
+              <a:p>
+                <a:pPr marL="514350" indent="-514350">
+                  <a:buFont typeface="+mj-lt"/>
+                  <a:buAutoNum type="alphaLcParenR"/>
+                </a:pPr>
+                <a:r>
+                  <a:rPr lang="en-US" dirty="0"/>
+                  <a:t> </a:t>
+                </a:r>
+                <a14:m>
+                  <m:oMath xmlns:m="http://schemas.openxmlformats.org/officeDocument/2006/math">
+                    <m:r>
+                      <a:rPr lang="en-US" i="1">
+                        <a:latin typeface="Cambria Math" panose="02040503050406030204" pitchFamily="18" charset="0"/>
+                      </a:rPr>
+                      <m:t>𝑃</m:t>
+                    </m:r>
+                    <m:r>
+                      <a:rPr lang="en-US" i="1">
+                        <a:latin typeface="Cambria Math" panose="02040503050406030204" pitchFamily="18" charset="0"/>
+                      </a:rPr>
+                      <m:t>=</m:t>
+                    </m:r>
+                    <m:f>
+                      <m:fPr>
+                        <m:ctrlPr>
+                          <a:rPr lang="en-US" i="1">
+                            <a:latin typeface="Cambria Math" panose="02040503050406030204" pitchFamily="18" charset="0"/>
+                          </a:rPr>
+                        </m:ctrlPr>
+                      </m:fPr>
+                      <m:num>
+                        <m:r>
+                          <a:rPr lang="en-US" b="0" i="1" smtClean="0">
+                            <a:latin typeface="Cambria Math" panose="02040503050406030204" pitchFamily="18" charset="0"/>
+                          </a:rPr>
+                          <m:t>𝐶</m:t>
+                        </m:r>
+                      </m:num>
+                      <m:den>
+                        <m:sSup>
+                          <m:sSupPr>
+                            <m:ctrlPr>
+                              <a:rPr lang="en-US" i="1" smtClean="0">
+                                <a:latin typeface="Cambria Math" panose="02040503050406030204" pitchFamily="18" charset="0"/>
+                              </a:rPr>
+                            </m:ctrlPr>
+                          </m:sSupPr>
+                          <m:e>
+                            <m:r>
+                              <a:rPr lang="en-US" b="0" i="1" smtClean="0">
+                                <a:latin typeface="Cambria Math" panose="02040503050406030204" pitchFamily="18" charset="0"/>
+                              </a:rPr>
+                              <m:t>𝑉</m:t>
+                            </m:r>
+                          </m:e>
+                          <m:sup>
+                            <m:r>
+                              <a:rPr lang="en-US" i="1" smtClean="0">
+                                <a:latin typeface="Cambria Math" panose="02040503050406030204" pitchFamily="18" charset="0"/>
+                                <a:ea typeface="Cambria Math" panose="02040503050406030204" pitchFamily="18" charset="0"/>
+                              </a:rPr>
+                              <m:t>𝛾</m:t>
+                            </m:r>
+                          </m:sup>
+                        </m:sSup>
+                      </m:den>
+                    </m:f>
+                  </m:oMath>
+                </a14:m>
+                <a:endParaRPr lang="en-US" dirty="0"/>
+              </a:p>
+              <a:p>
+                <a:pPr marL="514350" indent="-514350">
+                  <a:buFont typeface="+mj-lt"/>
+                  <a:buAutoNum type="alphaLcParenR"/>
+                </a:pPr>
+                <a:r>
+                  <a:rPr lang="en-US" dirty="0"/>
+                  <a:t>P is a constant</a:t>
+                </a:r>
+              </a:p>
+            </p:txBody>
+          </p:sp>
+        </mc:Choice>
+        <mc:Fallback>
+          <p:sp>
+            <p:nvSpPr>
+              <p:cNvPr id="3" name="Content Placeholder 2">
+                <a:extLst>
+                  <a:ext uri="{FF2B5EF4-FFF2-40B4-BE49-F238E27FC236}">
+                    <a16:creationId xmlns:a16="http://schemas.microsoft.com/office/drawing/2014/main" id="{08537D8D-6AC6-1433-021B-54F0CF486FA0}"/>
+                  </a:ext>
+                </a:extLst>
+              </p:cNvPr>
+              <p:cNvSpPr>
+                <a:spLocks noGrp="1" noRot="1" noChangeAspect="1" noMove="1" noResize="1" noEditPoints="1" noAdjustHandles="1" noChangeArrowheads="1" noChangeShapeType="1" noTextEdit="1"/>
+              </p:cNvSpPr>
+              <p:nvPr>
+                <p:ph idx="1"/>
+              </p:nvPr>
+            </p:nvSpPr>
+            <p:spPr>
+              <a:blipFill>
+                <a:blip r:embed="rId2"/>
+                <a:stretch>
+                  <a:fillRect l="-1217" t="-2381"/>
+                </a:stretch>
+              </a:blipFill>
+            </p:spPr>
+            <p:txBody>
+              <a:bodyPr/>
+              <a:lstStyle/>
+              <a:p>
+                <a:r>
+                  <a:rPr lang="en-US">
+                    <a:noFill/>
+                  </a:rPr>
+                  <a:t> </a:t>
+                </a:r>
+              </a:p>
+            </p:txBody>
+          </p:sp>
+        </mc:Fallback>
+      </mc:AlternateContent>
     </p:spTree>
+    <p:extLst>
+      <p:ext uri="{BB962C8B-B14F-4D97-AF65-F5344CB8AC3E}">
+        <p14:creationId xmlns:p14="http://schemas.microsoft.com/office/powerpoint/2010/main" val="1446333334"/>
+      </p:ext>
+    </p:extLst>
   </p:cSld>
   <p:clrMapOvr>
     <a:masterClrMapping/>
@@ -4476,7 +5804,13 @@
   <p:cSld>
     <p:spTree>
       <p:nvGrpSpPr>
-        <p:cNvPr id="1" name=""/>
+        <p:cNvPr id="1" name="">
+          <a:extLst>
+            <a:ext uri="{FF2B5EF4-FFF2-40B4-BE49-F238E27FC236}">
+              <a16:creationId xmlns:a16="http://schemas.microsoft.com/office/drawing/2014/main" id="{977CBB96-8612-AF3D-29E1-BC5BEC30954E}"/>
+            </a:ext>
+          </a:extLst>
+        </p:cNvPr>
         <p:cNvGrpSpPr/>
         <p:nvPr/>
       </p:nvGrpSpPr>
@@ -4488,78 +5822,42 @@
           <a:chExt cx="0" cy="0"/>
         </a:xfrm>
       </p:grpSpPr>
-      <p:sp>
-        <p:nvSpPr>
-          <p:cNvPr id="2" name="Title 1"/>
-          <p:cNvSpPr>
-            <a:spLocks noGrp="1"/>
-          </p:cNvSpPr>
-          <p:nvPr>
-            <p:ph type="title"/>
-          </p:nvPr>
-        </p:nvSpPr>
-        <p:spPr/>
-        <p:txBody>
-          <a:bodyPr/>
-          <a:lstStyle/>
-          <a:p>
-            <a:endParaRPr lang="en-US"/>
-          </a:p>
-        </p:txBody>
-      </p:sp>
-      <p:sp>
-        <p:nvSpPr>
-          <p:cNvPr id="3" name="Content Placeholder 2"/>
-          <p:cNvSpPr>
-            <a:spLocks noGrp="1"/>
-          </p:cNvSpPr>
-          <p:nvPr>
-            <p:ph idx="1"/>
-          </p:nvPr>
-        </p:nvSpPr>
-        <p:spPr/>
-        <p:txBody>
-          <a:bodyPr/>
-          <a:lstStyle/>
-          <a:p>
-            <a:endParaRPr lang="en-US"/>
-          </a:p>
-        </p:txBody>
-      </p:sp>
       <p:pic>
         <p:nvPicPr>
-          <p:cNvPr id="6146" name="Picture 2"/>
+          <p:cNvPr id="5" name="Picture 4">
+            <a:extLst>
+              <a:ext uri="{FF2B5EF4-FFF2-40B4-BE49-F238E27FC236}">
+                <a16:creationId xmlns:a16="http://schemas.microsoft.com/office/drawing/2014/main" id="{AE903580-2AB8-B212-8019-F97B758FEAEF}"/>
+              </a:ext>
+            </a:extLst>
+          </p:cNvPr>
           <p:cNvPicPr>
-            <a:picLocks noChangeAspect="1" noChangeArrowheads="1"/>
+            <a:picLocks noChangeAspect="1"/>
           </p:cNvPicPr>
           <p:nvPr/>
         </p:nvPicPr>
         <p:blipFill>
-          <a:blip r:embed="rId2" cstate="print"/>
-          <a:srcRect/>
+          <a:blip r:embed="rId2"/>
           <a:stretch>
             <a:fillRect/>
           </a:stretch>
         </p:blipFill>
-        <p:spPr bwMode="auto">
+        <p:spPr>
           <a:xfrm>
-            <a:off x="2971800" y="533401"/>
-            <a:ext cx="5181600" cy="5252339"/>
+            <a:off x="2147772" y="809625"/>
+            <a:ext cx="7224827" cy="4793170"/>
           </a:xfrm>
           <a:prstGeom prst="rect">
             <a:avLst/>
           </a:prstGeom>
-          <a:noFill/>
-          <a:ln w="9525">
-            <a:noFill/>
-            <a:miter lim="800000"/>
-            <a:headEnd/>
-            <a:tailEnd/>
-          </a:ln>
-          <a:effectLst/>
         </p:spPr>
       </p:pic>
     </p:spTree>
+    <p:extLst>
+      <p:ext uri="{BB962C8B-B14F-4D97-AF65-F5344CB8AC3E}">
+        <p14:creationId xmlns:p14="http://schemas.microsoft.com/office/powerpoint/2010/main" val="3465067879"/>
+      </p:ext>
+    </p:extLst>
   </p:cSld>
   <p:clrMapOvr>
     <a:masterClrMapping/>
@@ -4572,7 +5870,13 @@
   <p:cSld>
     <p:spTree>
       <p:nvGrpSpPr>
-        <p:cNvPr id="1" name=""/>
+        <p:cNvPr id="1" name="">
+          <a:extLst>
+            <a:ext uri="{FF2B5EF4-FFF2-40B4-BE49-F238E27FC236}">
+              <a16:creationId xmlns:a16="http://schemas.microsoft.com/office/drawing/2014/main" id="{1EA6703A-134E-E542-D780-AF3EE16C5868}"/>
+            </a:ext>
+          </a:extLst>
+        </p:cNvPr>
         <p:cNvGrpSpPr/>
         <p:nvPr/>
       </p:nvGrpSpPr>
@@ -4586,89 +5890,15 @@
       </p:grpSpPr>
       <p:sp>
         <p:nvSpPr>
-          <p:cNvPr id="183298" name="Slide Number Placeholder 5"/>
-          <p:cNvSpPr>
-            <a:spLocks noGrp="1"/>
-          </p:cNvSpPr>
-          <p:nvPr>
-            <p:ph type="sldNum" sz="quarter" idx="12"/>
-          </p:nvPr>
-        </p:nvSpPr>
-        <p:spPr>
-          <a:noFill/>
-        </p:spPr>
-        <p:txBody>
-          <a:bodyPr/>
-          <a:lstStyle/>
-          <a:p>
-            <a:fld id="{C2812B8D-E844-4807-B20D-B92C141DEBC2}" type="slidenum">
-              <a:rPr lang="en-US" smtClean="0"/>
-              <a:pPr/>
-              <a:t>7</a:t>
-            </a:fld>
-            <a:endParaRPr lang="en-US"/>
-          </a:p>
-        </p:txBody>
-      </p:sp>
-      <p:sp>
-        <p:nvSpPr>
-          <p:cNvPr id="183299" name="Rectangle 2"/>
-          <p:cNvSpPr>
-            <a:spLocks noChangeArrowheads="1"/>
-          </p:cNvSpPr>
-          <p:nvPr/>
-        </p:nvSpPr>
-        <p:spPr bwMode="auto">
-          <a:xfrm>
-            <a:off x="7402514" y="3657601"/>
-            <a:ext cx="2511425" cy="1871663"/>
-          </a:xfrm>
-          <a:prstGeom prst="rect">
-            <a:avLst/>
-          </a:prstGeom>
-          <a:gradFill rotWithShape="1">
-            <a:gsLst>
-              <a:gs pos="0">
-                <a:schemeClr val="bg1"/>
-              </a:gs>
-              <a:gs pos="100000">
-                <a:schemeClr val="accent1"/>
-              </a:gs>
-            </a:gsLst>
-            <a:path path="shape">
-              <a:fillToRect l="50000" t="50000" r="50000" b="50000"/>
-            </a:path>
-          </a:gradFill>
-          <a:ln w="9525" algn="ctr">
-            <a:solidFill>
-              <a:schemeClr val="tx1"/>
-            </a:solidFill>
-            <a:miter lim="800000"/>
-            <a:headEnd/>
-            <a:tailEnd/>
-          </a:ln>
-        </p:spPr>
-        <p:txBody>
-          <a:bodyPr wrap="none" anchor="ctr"/>
-          <a:lstStyle/>
-          <a:p>
-            <a:pPr algn="ctr"/>
-            <a:r>
-              <a:rPr lang="en-US"/>
-              <a:t>Gas at T</a:t>
-            </a:r>
-            <a:r>
-              <a:rPr lang="en-US" baseline="-25000"/>
-              <a:t>i</a:t>
-            </a:r>
-          </a:p>
-        </p:txBody>
-      </p:sp>
-      <p:sp>
-        <p:nvSpPr>
-          <p:cNvPr id="183300" name="Rectangle 3"/>
-          <p:cNvSpPr>
-            <a:spLocks noGrp="1" noChangeArrowheads="1"/>
+          <p:cNvPr id="2" name="Title 1">
+            <a:extLst>
+              <a:ext uri="{FF2B5EF4-FFF2-40B4-BE49-F238E27FC236}">
+                <a16:creationId xmlns:a16="http://schemas.microsoft.com/office/drawing/2014/main" id="{C0882AB9-9123-611E-824E-4DB8A8649A54}"/>
+              </a:ext>
+            </a:extLst>
+          </p:cNvPr>
+          <p:cNvSpPr>
+            <a:spLocks noGrp="1"/>
           </p:cNvSpPr>
           <p:nvPr>
             <p:ph type="title"/>
@@ -4679,269 +5909,369 @@
           <a:bodyPr/>
           <a:lstStyle/>
           <a:p>
-            <a:pPr eaLnBrk="1" hangingPunct="1"/>
-            <a:r>
-              <a:rPr lang="en-US"/>
-              <a:t>Question 123.10.7</a:t>
-            </a:r>
-            <a:endParaRPr lang="en-US" dirty="0"/>
-          </a:p>
-        </p:txBody>
-      </p:sp>
-      <p:sp>
-        <p:nvSpPr>
-          <p:cNvPr id="183301" name="Rectangle 4"/>
-          <p:cNvSpPr>
-            <a:spLocks noGrp="1" noChangeArrowheads="1"/>
-          </p:cNvSpPr>
-          <p:nvPr>
-            <p:ph type="body" idx="1"/>
-          </p:nvPr>
-        </p:nvSpPr>
-        <p:spPr>
-          <a:xfrm>
-            <a:off x="1981201" y="1600201"/>
-            <a:ext cx="3978275" cy="4525963"/>
-          </a:xfrm>
-        </p:spPr>
-        <p:txBody>
-          <a:bodyPr/>
-          <a:lstStyle/>
-          <a:p>
-            <a:pPr marL="609600" indent="-609600">
-              <a:lnSpc>
-                <a:spcPct val="80000"/>
-              </a:lnSpc>
-              <a:buNone/>
-            </a:pPr>
-            <a:r>
-              <a:rPr lang="en-US"/>
-              <a:t>The initial state of a system is shown, if the membrane is broken, the gas fills the entire container. Is there work done by the gas in filling the container?</a:t>
-            </a:r>
-          </a:p>
-          <a:p>
-            <a:pPr marL="609600" indent="-609600">
-              <a:lnSpc>
-                <a:spcPct val="80000"/>
-              </a:lnSpc>
-              <a:buFontTx/>
-              <a:buAutoNum type="alphaLcParenR"/>
-            </a:pPr>
-            <a:r>
-              <a:rPr lang="en-US"/>
-              <a:t>Yes</a:t>
-            </a:r>
-          </a:p>
-          <a:p>
-            <a:pPr marL="609600" indent="-609600">
-              <a:lnSpc>
-                <a:spcPct val="80000"/>
-              </a:lnSpc>
-              <a:buFontTx/>
-              <a:buAutoNum type="alphaLcParenR"/>
-            </a:pPr>
-            <a:r>
-              <a:rPr lang="en-US"/>
-              <a:t>No</a:t>
-            </a:r>
-          </a:p>
-          <a:p>
-            <a:pPr marL="609600" indent="-609600">
-              <a:lnSpc>
-                <a:spcPct val="80000"/>
-              </a:lnSpc>
-              <a:buFontTx/>
-              <a:buAutoNum type="alphaLcParenR"/>
-            </a:pPr>
-            <a:r>
-              <a:rPr lang="en-US"/>
-              <a:t>Can’t Tell</a:t>
-            </a:r>
-          </a:p>
-        </p:txBody>
-      </p:sp>
-      <p:sp>
-        <p:nvSpPr>
-          <p:cNvPr id="183302" name="Rectangle 5"/>
-          <p:cNvSpPr>
-            <a:spLocks noChangeArrowheads="1"/>
-          </p:cNvSpPr>
-          <p:nvPr/>
-        </p:nvSpPr>
-        <p:spPr bwMode="auto">
-          <a:xfrm>
-            <a:off x="7402514" y="1814514"/>
-            <a:ext cx="2511425" cy="3730625"/>
-          </a:xfrm>
-          <a:prstGeom prst="rect">
-            <a:avLst/>
-          </a:prstGeom>
-          <a:noFill/>
-          <a:ln w="53975" algn="ctr">
-            <a:solidFill>
-              <a:srgbClr val="FF9900"/>
-            </a:solidFill>
-            <a:miter lim="800000"/>
-            <a:headEnd/>
-            <a:tailEnd/>
-          </a:ln>
-        </p:spPr>
-        <p:txBody>
-          <a:bodyPr wrap="none" anchor="ctr"/>
-          <a:lstStyle/>
-          <a:p>
-            <a:endParaRPr lang="en-US"/>
-          </a:p>
-        </p:txBody>
-      </p:sp>
-      <p:sp>
-        <p:nvSpPr>
-          <p:cNvPr id="183303" name="Line 6"/>
-          <p:cNvSpPr>
-            <a:spLocks noChangeShapeType="1"/>
-          </p:cNvSpPr>
-          <p:nvPr/>
-        </p:nvSpPr>
-        <p:spPr bwMode="auto">
-          <a:xfrm>
-            <a:off x="7388226" y="3671888"/>
-            <a:ext cx="2525713" cy="0"/>
-          </a:xfrm>
-          <a:prstGeom prst="line">
-            <a:avLst/>
-          </a:prstGeom>
-          <a:noFill/>
-          <a:ln w="9525">
-            <a:solidFill>
-              <a:srgbClr val="FF0000"/>
-            </a:solidFill>
-            <a:round/>
-            <a:headEnd/>
-            <a:tailEnd/>
-          </a:ln>
-        </p:spPr>
-        <p:txBody>
-          <a:bodyPr wrap="none" anchor="ctr"/>
-          <a:lstStyle/>
-          <a:p>
-            <a:endParaRPr lang="en-US"/>
-          </a:p>
-        </p:txBody>
-      </p:sp>
-      <p:sp>
-        <p:nvSpPr>
-          <p:cNvPr id="183304" name="Text Box 7"/>
-          <p:cNvSpPr txBox="1">
-            <a:spLocks noChangeArrowheads="1"/>
-          </p:cNvSpPr>
-          <p:nvPr/>
-        </p:nvSpPr>
-        <p:spPr bwMode="auto">
-          <a:xfrm>
-            <a:off x="8097838" y="2286001"/>
-            <a:ext cx="1136650" cy="366713"/>
-          </a:xfrm>
-          <a:prstGeom prst="rect">
-            <a:avLst/>
-          </a:prstGeom>
-          <a:noFill/>
-          <a:ln w="9525" algn="ctr">
-            <a:noFill/>
-            <a:miter lim="800000"/>
-            <a:headEnd/>
-            <a:tailEnd/>
-          </a:ln>
-        </p:spPr>
-        <p:txBody>
-          <a:bodyPr>
-            <a:spAutoFit/>
-          </a:bodyPr>
-          <a:lstStyle/>
-          <a:p>
-            <a:pPr algn="ctr"/>
-            <a:r>
-              <a:rPr lang="en-US"/>
-              <a:t>Vacuum</a:t>
-            </a:r>
-          </a:p>
-        </p:txBody>
-      </p:sp>
-      <p:sp>
-        <p:nvSpPr>
-          <p:cNvPr id="183305" name="Text Box 8"/>
-          <p:cNvSpPr txBox="1">
-            <a:spLocks noChangeArrowheads="1"/>
-          </p:cNvSpPr>
-          <p:nvPr/>
-        </p:nvSpPr>
-        <p:spPr bwMode="auto">
-          <a:xfrm>
-            <a:off x="7278689" y="3092451"/>
-            <a:ext cx="1920875" cy="366713"/>
-          </a:xfrm>
-          <a:prstGeom prst="rect">
-            <a:avLst/>
-          </a:prstGeom>
-          <a:noFill/>
-          <a:ln w="9525" algn="ctr">
-            <a:noFill/>
-            <a:miter lim="800000"/>
-            <a:headEnd/>
-            <a:tailEnd/>
-          </a:ln>
-        </p:spPr>
-        <p:txBody>
-          <a:bodyPr>
-            <a:spAutoFit/>
-          </a:bodyPr>
-          <a:lstStyle/>
-          <a:p>
-            <a:pPr algn="ctr"/>
-            <a:r>
-              <a:rPr lang="en-US"/>
-              <a:t>Membrane</a:t>
-            </a:r>
-          </a:p>
-        </p:txBody>
-      </p:sp>
-      <p:sp>
-        <p:nvSpPr>
-          <p:cNvPr id="183306" name="Line 9"/>
-          <p:cNvSpPr>
-            <a:spLocks noChangeShapeType="1"/>
-          </p:cNvSpPr>
-          <p:nvPr/>
-        </p:nvSpPr>
-        <p:spPr bwMode="auto">
-          <a:xfrm flipH="1">
-            <a:off x="8026400" y="3381376"/>
-            <a:ext cx="115888" cy="276225"/>
-          </a:xfrm>
-          <a:prstGeom prst="line">
-            <a:avLst/>
-          </a:prstGeom>
-          <a:noFill/>
-          <a:ln w="9525">
-            <a:solidFill>
-              <a:schemeClr val="tx1"/>
-            </a:solidFill>
-            <a:round/>
-            <a:headEnd/>
-            <a:tailEnd type="triangle" w="med" len="med"/>
-          </a:ln>
-        </p:spPr>
-        <p:txBody>
-          <a:bodyPr wrap="none" anchor="ctr"/>
-          <a:lstStyle/>
-          <a:p>
-            <a:endParaRPr lang="en-US"/>
-          </a:p>
-        </p:txBody>
-      </p:sp>
+            <a:r>
+              <a:rPr lang="en-US" dirty="0"/>
+              <a:t>Question</a:t>
+            </a:r>
+          </a:p>
+        </p:txBody>
+      </p:sp>
+      <mc:AlternateContent xmlns:mc="http://schemas.openxmlformats.org/markup-compatibility/2006">
+        <mc:Choice xmlns:a14="http://schemas.microsoft.com/office/drawing/2010/main" Requires="a14">
+          <p:sp>
+            <p:nvSpPr>
+              <p:cNvPr id="3" name="Content Placeholder 2">
+                <a:extLst>
+                  <a:ext uri="{FF2B5EF4-FFF2-40B4-BE49-F238E27FC236}">
+                    <a16:creationId xmlns:a16="http://schemas.microsoft.com/office/drawing/2014/main" id="{6F64307E-3582-259B-6FFF-E34800D93684}"/>
+                  </a:ext>
+                </a:extLst>
+              </p:cNvPr>
+              <p:cNvSpPr>
+                <a:spLocks noGrp="1"/>
+              </p:cNvSpPr>
+              <p:nvPr>
+                <p:ph idx="1"/>
+              </p:nvPr>
+            </p:nvSpPr>
+            <p:spPr/>
+            <p:txBody>
+              <a:bodyPr/>
+              <a:lstStyle/>
+              <a:p>
+                <a:pPr marL="0" indent="0">
+                  <a:buNone/>
+                </a:pPr>
+                <a:r>
+                  <a:rPr lang="en-US" dirty="0"/>
+                  <a:t>Which of the following is true?</a:t>
+                </a:r>
+              </a:p>
+              <a:p>
+                <a:pPr marL="514350" indent="-514350">
+                  <a:buFont typeface="+mj-lt"/>
+                  <a:buAutoNum type="alphaLcParenR"/>
+                </a:pPr>
+                <a:r>
+                  <a:rPr lang="en-US" dirty="0"/>
+                  <a:t> </a:t>
+                </a:r>
+                <a14:m>
+                  <m:oMath xmlns:m="http://schemas.openxmlformats.org/officeDocument/2006/math">
+                    <m:r>
+                      <a:rPr lang="en-US" b="0" i="1" smtClean="0">
+                        <a:latin typeface="Cambria Math" panose="02040503050406030204" pitchFamily="18" charset="0"/>
+                      </a:rPr>
+                      <m:t>𝑎</m:t>
+                    </m:r>
+                    <m:func>
+                      <m:funcPr>
+                        <m:ctrlPr>
+                          <a:rPr lang="en-US" b="0" i="1" smtClean="0">
+                            <a:latin typeface="Cambria Math" panose="02040503050406030204" pitchFamily="18" charset="0"/>
+                          </a:rPr>
+                        </m:ctrlPr>
+                      </m:funcPr>
+                      <m:fName>
+                        <m:r>
+                          <m:rPr>
+                            <m:sty m:val="p"/>
+                          </m:rPr>
+                          <a:rPr lang="en-US" b="0" i="0" smtClean="0">
+                            <a:latin typeface="Cambria Math" panose="02040503050406030204" pitchFamily="18" charset="0"/>
+                          </a:rPr>
+                          <m:t>ln</m:t>
+                        </m:r>
+                      </m:fName>
+                      <m:e>
+                        <m:r>
+                          <a:rPr lang="en-US" b="0" i="1" smtClean="0">
+                            <a:latin typeface="Cambria Math" panose="02040503050406030204" pitchFamily="18" charset="0"/>
+                          </a:rPr>
+                          <m:t>𝑏</m:t>
+                        </m:r>
+                        <m:r>
+                          <a:rPr lang="en-US" b="0" i="1" smtClean="0">
+                            <a:latin typeface="Cambria Math" panose="02040503050406030204" pitchFamily="18" charset="0"/>
+                          </a:rPr>
+                          <m:t>=</m:t>
+                        </m:r>
+                        <m:func>
+                          <m:funcPr>
+                            <m:ctrlPr>
+                              <a:rPr lang="en-US" b="0" i="1" smtClean="0">
+                                <a:latin typeface="Cambria Math" panose="02040503050406030204" pitchFamily="18" charset="0"/>
+                              </a:rPr>
+                            </m:ctrlPr>
+                          </m:funcPr>
+                          <m:fName>
+                            <m:r>
+                              <m:rPr>
+                                <m:sty m:val="p"/>
+                              </m:rPr>
+                              <a:rPr lang="en-US" b="0" i="0" smtClean="0">
+                                <a:latin typeface="Cambria Math" panose="02040503050406030204" pitchFamily="18" charset="0"/>
+                              </a:rPr>
+                              <m:t>ln</m:t>
+                            </m:r>
+                          </m:fName>
+                          <m:e>
+                            <m:sSup>
+                              <m:sSupPr>
+                                <m:ctrlPr>
+                                  <a:rPr lang="en-US" b="0" i="1" smtClean="0">
+                                    <a:latin typeface="Cambria Math" panose="02040503050406030204" pitchFamily="18" charset="0"/>
+                                  </a:rPr>
+                                </m:ctrlPr>
+                              </m:sSupPr>
+                              <m:e>
+                                <m:r>
+                                  <a:rPr lang="en-US" b="0" i="1" smtClean="0">
+                                    <a:latin typeface="Cambria Math" panose="02040503050406030204" pitchFamily="18" charset="0"/>
+                                  </a:rPr>
+                                  <m:t>𝑏</m:t>
+                                </m:r>
+                              </m:e>
+                              <m:sup>
+                                <m:r>
+                                  <a:rPr lang="en-US" b="0" i="1" smtClean="0">
+                                    <a:latin typeface="Cambria Math" panose="02040503050406030204" pitchFamily="18" charset="0"/>
+                                  </a:rPr>
+                                  <m:t>𝑎</m:t>
+                                </m:r>
+                              </m:sup>
+                            </m:sSup>
+                          </m:e>
+                        </m:func>
+                      </m:e>
+                    </m:func>
+                  </m:oMath>
+                </a14:m>
+                <a:endParaRPr lang="en-US" dirty="0"/>
+              </a:p>
+              <a:p>
+                <a:pPr marL="514350" indent="-514350">
+                  <a:buFont typeface="+mj-lt"/>
+                  <a:buAutoNum type="alphaLcParenR"/>
+                </a:pPr>
+                <a:r>
+                  <a:rPr lang="en-US" dirty="0"/>
+                  <a:t> </a:t>
+                </a:r>
+                <a14:m>
+                  <m:oMath xmlns:m="http://schemas.openxmlformats.org/officeDocument/2006/math">
+                    <m:func>
+                      <m:funcPr>
+                        <m:ctrlPr>
+                          <a:rPr lang="en-US" i="1" smtClean="0">
+                            <a:latin typeface="Cambria Math" panose="02040503050406030204" pitchFamily="18" charset="0"/>
+                          </a:rPr>
+                        </m:ctrlPr>
+                      </m:funcPr>
+                      <m:fName>
+                        <m:r>
+                          <m:rPr>
+                            <m:sty m:val="p"/>
+                          </m:rPr>
+                          <a:rPr lang="en-US" i="0" smtClean="0">
+                            <a:latin typeface="Cambria Math" panose="02040503050406030204" pitchFamily="18" charset="0"/>
+                          </a:rPr>
+                          <m:t>ln</m:t>
+                        </m:r>
+                      </m:fName>
+                      <m:e>
+                        <m:r>
+                          <a:rPr lang="en-US" b="0" i="1" smtClean="0">
+                            <a:latin typeface="Cambria Math" panose="02040503050406030204" pitchFamily="18" charset="0"/>
+                          </a:rPr>
+                          <m:t>𝑎</m:t>
+                        </m:r>
+                        <m:r>
+                          <a:rPr lang="en-US" b="0" i="1" smtClean="0">
+                            <a:latin typeface="Cambria Math" panose="02040503050406030204" pitchFamily="18" charset="0"/>
+                          </a:rPr>
+                          <m:t>+</m:t>
+                        </m:r>
+                        <m:func>
+                          <m:funcPr>
+                            <m:ctrlPr>
+                              <a:rPr lang="en-US" b="0" i="1" smtClean="0">
+                                <a:latin typeface="Cambria Math" panose="02040503050406030204" pitchFamily="18" charset="0"/>
+                              </a:rPr>
+                            </m:ctrlPr>
+                          </m:funcPr>
+                          <m:fName>
+                            <m:r>
+                              <m:rPr>
+                                <m:sty m:val="p"/>
+                              </m:rPr>
+                              <a:rPr lang="en-US" b="0" i="0" smtClean="0">
+                                <a:latin typeface="Cambria Math" panose="02040503050406030204" pitchFamily="18" charset="0"/>
+                              </a:rPr>
+                              <m:t>ln</m:t>
+                            </m:r>
+                          </m:fName>
+                          <m:e>
+                            <m:r>
+                              <a:rPr lang="en-US" b="0" i="1" smtClean="0">
+                                <a:latin typeface="Cambria Math" panose="02040503050406030204" pitchFamily="18" charset="0"/>
+                              </a:rPr>
+                              <m:t>𝑏</m:t>
+                            </m:r>
+                          </m:e>
+                        </m:func>
+                        <m:r>
+                          <a:rPr lang="en-US" b="0" i="1" smtClean="0">
+                            <a:latin typeface="Cambria Math" panose="02040503050406030204" pitchFamily="18" charset="0"/>
+                          </a:rPr>
+                          <m:t>=</m:t>
+                        </m:r>
+                        <m:func>
+                          <m:funcPr>
+                            <m:ctrlPr>
+                              <a:rPr lang="en-US" b="0" i="1" smtClean="0">
+                                <a:latin typeface="Cambria Math" panose="02040503050406030204" pitchFamily="18" charset="0"/>
+                              </a:rPr>
+                            </m:ctrlPr>
+                          </m:funcPr>
+                          <m:fName>
+                            <m:r>
+                              <m:rPr>
+                                <m:sty m:val="p"/>
+                              </m:rPr>
+                              <a:rPr lang="en-US" b="0" i="0" smtClean="0">
+                                <a:latin typeface="Cambria Math" panose="02040503050406030204" pitchFamily="18" charset="0"/>
+                              </a:rPr>
+                              <m:t>ln</m:t>
+                            </m:r>
+                          </m:fName>
+                          <m:e>
+                            <m:r>
+                              <a:rPr lang="en-US" b="0" i="1" smtClean="0">
+                                <a:latin typeface="Cambria Math" panose="02040503050406030204" pitchFamily="18" charset="0"/>
+                              </a:rPr>
+                              <m:t>𝑎𝑏</m:t>
+                            </m:r>
+                          </m:e>
+                        </m:func>
+                      </m:e>
+                    </m:func>
+                  </m:oMath>
+                </a14:m>
+                <a:endParaRPr lang="en-US" dirty="0"/>
+              </a:p>
+              <a:p>
+                <a:pPr marL="514350" indent="-514350">
+                  <a:buFont typeface="+mj-lt"/>
+                  <a:buAutoNum type="alphaLcParenR"/>
+                </a:pPr>
+                <a:r>
+                  <a:rPr lang="en-US" dirty="0"/>
+                  <a:t> </a:t>
+                </a:r>
+                <a14:m>
+                  <m:oMath xmlns:m="http://schemas.openxmlformats.org/officeDocument/2006/math">
+                    <m:func>
+                      <m:funcPr>
+                        <m:ctrlPr>
+                          <a:rPr lang="en-US" i="1" smtClean="0">
+                            <a:latin typeface="Cambria Math" panose="02040503050406030204" pitchFamily="18" charset="0"/>
+                          </a:rPr>
+                        </m:ctrlPr>
+                      </m:funcPr>
+                      <m:fName>
+                        <m:r>
+                          <m:rPr>
+                            <m:sty m:val="p"/>
+                          </m:rPr>
+                          <a:rPr lang="en-US" i="0" smtClean="0">
+                            <a:latin typeface="Cambria Math" panose="02040503050406030204" pitchFamily="18" charset="0"/>
+                          </a:rPr>
+                          <m:t>ln</m:t>
+                        </m:r>
+                      </m:fName>
+                      <m:e>
+                        <m:r>
+                          <a:rPr lang="en-US" b="0" i="1" smtClean="0">
+                            <a:latin typeface="Cambria Math" panose="02040503050406030204" pitchFamily="18" charset="0"/>
+                          </a:rPr>
+                          <m:t>h𝑜𝑢𝑠𝑒</m:t>
+                        </m:r>
+                        <m:r>
+                          <a:rPr lang="en-US" b="0" i="1" smtClean="0">
+                            <a:latin typeface="Cambria Math" panose="02040503050406030204" pitchFamily="18" charset="0"/>
+                          </a:rPr>
+                          <m:t>=</m:t>
+                        </m:r>
+                        <m:r>
+                          <a:rPr lang="en-US" b="0" i="1" smtClean="0">
+                            <a:latin typeface="Cambria Math" panose="02040503050406030204" pitchFamily="18" charset="0"/>
+                          </a:rPr>
+                          <m:t>𝑐𝑎𝑏𝑖𝑛</m:t>
+                        </m:r>
+                      </m:e>
+                    </m:func>
+                  </m:oMath>
+                </a14:m>
+                <a:endParaRPr lang="en-US" dirty="0"/>
+              </a:p>
+              <a:p>
+                <a:pPr marL="514350" indent="-514350">
+                  <a:buFont typeface="+mj-lt"/>
+                  <a:buAutoNum type="alphaLcParenR"/>
+                </a:pPr>
+                <a:r>
+                  <a:rPr lang="en-US" dirty="0"/>
+                  <a:t>I don’t remember anything about log functions</a:t>
+                </a:r>
+              </a:p>
+            </p:txBody>
+          </p:sp>
+        </mc:Choice>
+        <mc:Fallback>
+          <p:sp>
+            <p:nvSpPr>
+              <p:cNvPr id="3" name="Content Placeholder 2">
+                <a:extLst>
+                  <a:ext uri="{FF2B5EF4-FFF2-40B4-BE49-F238E27FC236}">
+                    <a16:creationId xmlns:a16="http://schemas.microsoft.com/office/drawing/2014/main" id="{6F64307E-3582-259B-6FFF-E34800D93684}"/>
+                  </a:ext>
+                </a:extLst>
+              </p:cNvPr>
+              <p:cNvSpPr>
+                <a:spLocks noGrp="1" noRot="1" noChangeAspect="1" noMove="1" noResize="1" noEditPoints="1" noAdjustHandles="1" noChangeArrowheads="1" noChangeShapeType="1" noTextEdit="1"/>
+              </p:cNvSpPr>
+              <p:nvPr>
+                <p:ph idx="1"/>
+              </p:nvPr>
+            </p:nvSpPr>
+            <p:spPr>
+              <a:blipFill>
+                <a:blip r:embed="rId2"/>
+                <a:stretch>
+                  <a:fillRect l="-1217" t="-2381"/>
+                </a:stretch>
+              </a:blipFill>
+            </p:spPr>
+            <p:txBody>
+              <a:bodyPr/>
+              <a:lstStyle/>
+              <a:p>
+                <a:r>
+                  <a:rPr lang="en-US">
+                    <a:noFill/>
+                  </a:rPr>
+                  <a:t> </a:t>
+                </a:r>
+              </a:p>
+            </p:txBody>
+          </p:sp>
+        </mc:Fallback>
+      </mc:AlternateContent>
     </p:spTree>
     <p:extLst>
       <p:ext uri="{BB962C8B-B14F-4D97-AF65-F5344CB8AC3E}">
-        <p14:creationId xmlns:p14="http://schemas.microsoft.com/office/powerpoint/2010/main" val="3786188879"/>
+        <p14:creationId xmlns:p14="http://schemas.microsoft.com/office/powerpoint/2010/main" val="2389341818"/>
       </p:ext>
     </p:extLst>
   </p:cSld>
@@ -4970,18 +6300,18 @@
       </p:grpSpPr>
       <p:sp>
         <p:nvSpPr>
-          <p:cNvPr id="4" name="Title 3">
-            <a:extLst>
-              <a:ext uri="{FF2B5EF4-FFF2-40B4-BE49-F238E27FC236}">
-                <a16:creationId xmlns:a16="http://schemas.microsoft.com/office/drawing/2014/main" id="{278E2971-ABB3-3665-9E07-6648A45C5EA1}"/>
-              </a:ext>
-            </a:extLst>
-          </p:cNvPr>
-          <p:cNvSpPr>
-            <a:spLocks noGrp="1"/>
-          </p:cNvSpPr>
-          <p:nvPr>
-            <p:ph type="ctrTitle"/>
+          <p:cNvPr id="2" name="Title 1">
+            <a:extLst>
+              <a:ext uri="{FF2B5EF4-FFF2-40B4-BE49-F238E27FC236}">
+                <a16:creationId xmlns:a16="http://schemas.microsoft.com/office/drawing/2014/main" id="{7D432002-FF55-F810-0DAE-FAE499C324E4}"/>
+              </a:ext>
+            </a:extLst>
+          </p:cNvPr>
+          <p:cNvSpPr>
+            <a:spLocks noGrp="1"/>
+          </p:cNvSpPr>
+          <p:nvPr>
+            <p:ph type="title"/>
           </p:nvPr>
         </p:nvSpPr>
         <p:spPr/>
@@ -4991,25 +6321,25 @@
           <a:p>
             <a:r>
               <a:rPr lang="en-US" dirty="0"/>
-              <a:t>END</a:t>
-            </a:r>
-          </a:p>
-        </p:txBody>
-      </p:sp>
-      <p:sp>
-        <p:nvSpPr>
-          <p:cNvPr id="5" name="Subtitle 4">
-            <a:extLst>
-              <a:ext uri="{FF2B5EF4-FFF2-40B4-BE49-F238E27FC236}">
-                <a16:creationId xmlns:a16="http://schemas.microsoft.com/office/drawing/2014/main" id="{0D541E2D-86A8-F412-3392-CC7332FB94CE}"/>
-              </a:ext>
-            </a:extLst>
-          </p:cNvPr>
-          <p:cNvSpPr>
-            <a:spLocks noGrp="1"/>
-          </p:cNvSpPr>
-          <p:nvPr>
-            <p:ph type="subTitle" idx="1"/>
+              <a:t>Question</a:t>
+            </a:r>
+          </a:p>
+        </p:txBody>
+      </p:sp>
+      <p:sp>
+        <p:nvSpPr>
+          <p:cNvPr id="3" name="Content Placeholder 2">
+            <a:extLst>
+              <a:ext uri="{FF2B5EF4-FFF2-40B4-BE49-F238E27FC236}">
+                <a16:creationId xmlns:a16="http://schemas.microsoft.com/office/drawing/2014/main" id="{029605CA-880A-29C8-6C74-7E7688FE48C5}"/>
+              </a:ext>
+            </a:extLst>
+          </p:cNvPr>
+          <p:cNvSpPr>
+            <a:spLocks noGrp="1"/>
+          </p:cNvSpPr>
+          <p:nvPr>
+            <p:ph idx="1"/>
           </p:nvPr>
         </p:nvSpPr>
         <p:spPr/>
@@ -5017,14 +6347,169 @@
           <a:bodyPr/>
           <a:lstStyle/>
           <a:p>
-            <a:endParaRPr lang="en-US"/>
+            <a:pPr marL="0" indent="0">
+              <a:buNone/>
+            </a:pPr>
+            <a:r>
+              <a:rPr lang="en-US" dirty="0"/>
+              <a:t>If I add two constants, is the result still constant?</a:t>
+            </a:r>
+          </a:p>
+          <a:p>
+            <a:pPr marL="514350" indent="-514350">
+              <a:buFont typeface="+mj-lt"/>
+              <a:buAutoNum type="alphaLcParenR"/>
+            </a:pPr>
+            <a:r>
+              <a:rPr lang="en-US" dirty="0"/>
+              <a:t>Yes</a:t>
+            </a:r>
+          </a:p>
+          <a:p>
+            <a:pPr marL="514350" indent="-514350">
+              <a:buFont typeface="+mj-lt"/>
+              <a:buAutoNum type="alphaLcParenR"/>
+            </a:pPr>
+            <a:r>
+              <a:rPr lang="en-US" dirty="0"/>
+              <a:t>No</a:t>
+            </a:r>
+          </a:p>
+          <a:p>
+            <a:pPr marL="514350" indent="-514350">
+              <a:buFont typeface="+mj-lt"/>
+              <a:buAutoNum type="alphaLcParenR"/>
+            </a:pPr>
+            <a:r>
+              <a:rPr lang="en-US" dirty="0"/>
+              <a:t>Maybe</a:t>
+            </a:r>
           </a:p>
         </p:txBody>
       </p:sp>
     </p:spTree>
     <p:extLst>
       <p:ext uri="{BB962C8B-B14F-4D97-AF65-F5344CB8AC3E}">
-        <p14:creationId xmlns:p14="http://schemas.microsoft.com/office/powerpoint/2010/main" val="1532625996"/>
+        <p14:creationId xmlns:p14="http://schemas.microsoft.com/office/powerpoint/2010/main" val="2851887090"/>
+      </p:ext>
+    </p:extLst>
+  </p:cSld>
+  <p:clrMapOvr>
+    <a:masterClrMapping/>
+  </p:clrMapOvr>
+</p:sld>
+</file>
+
+<file path=ppt/slides/slide9.xml><?xml version="1.0" encoding="utf-8"?>
+<p:sld xmlns:a="http://schemas.openxmlformats.org/drawingml/2006/main" xmlns:r="http://schemas.openxmlformats.org/officeDocument/2006/relationships" xmlns:p="http://schemas.openxmlformats.org/presentationml/2006/main">
+  <p:cSld>
+    <p:spTree>
+      <p:nvGrpSpPr>
+        <p:cNvPr id="1" name=""/>
+        <p:cNvGrpSpPr/>
+        <p:nvPr/>
+      </p:nvGrpSpPr>
+      <p:grpSpPr>
+        <a:xfrm>
+          <a:off x="0" y="0"/>
+          <a:ext cx="0" cy="0"/>
+          <a:chOff x="0" y="0"/>
+          <a:chExt cx="0" cy="0"/>
+        </a:xfrm>
+      </p:grpSpPr>
+      <p:sp>
+        <p:nvSpPr>
+          <p:cNvPr id="2" name="Title 1">
+            <a:extLst>
+              <a:ext uri="{FF2B5EF4-FFF2-40B4-BE49-F238E27FC236}">
+                <a16:creationId xmlns:a16="http://schemas.microsoft.com/office/drawing/2014/main" id="{36C05A08-BBAD-733F-9214-FFCA080F07AC}"/>
+              </a:ext>
+            </a:extLst>
+          </p:cNvPr>
+          <p:cNvSpPr>
+            <a:spLocks noGrp="1"/>
+          </p:cNvSpPr>
+          <p:nvPr>
+            <p:ph type="title"/>
+          </p:nvPr>
+        </p:nvSpPr>
+        <p:spPr/>
+        <p:txBody>
+          <a:bodyPr/>
+          <a:lstStyle/>
+          <a:p>
+            <a:r>
+              <a:rPr lang="en-US" dirty="0"/>
+              <a:t>Question</a:t>
+            </a:r>
+          </a:p>
+        </p:txBody>
+      </p:sp>
+      <p:sp>
+        <p:nvSpPr>
+          <p:cNvPr id="3" name="Content Placeholder 2">
+            <a:extLst>
+              <a:ext uri="{FF2B5EF4-FFF2-40B4-BE49-F238E27FC236}">
+                <a16:creationId xmlns:a16="http://schemas.microsoft.com/office/drawing/2014/main" id="{857BFD40-4C1B-BCE6-1015-757E5ACBD398}"/>
+              </a:ext>
+            </a:extLst>
+          </p:cNvPr>
+          <p:cNvSpPr>
+            <a:spLocks noGrp="1"/>
+          </p:cNvSpPr>
+          <p:nvPr>
+            <p:ph idx="1"/>
+          </p:nvPr>
+        </p:nvSpPr>
+        <p:spPr/>
+        <p:txBody>
+          <a:bodyPr/>
+          <a:lstStyle/>
+          <a:p>
+            <a:pPr marL="0" indent="0">
+              <a:buNone/>
+            </a:pPr>
+            <a:r>
+              <a:rPr lang="en-US" dirty="0"/>
+              <a:t>Why do we like conservation laws in physics?</a:t>
+            </a:r>
+          </a:p>
+          <a:p>
+            <a:pPr marL="514350" indent="-514350">
+              <a:buFont typeface="+mj-lt"/>
+              <a:buAutoNum type="alphaLcParenR"/>
+            </a:pPr>
+            <a:r>
+              <a:rPr lang="en-US" dirty="0"/>
+              <a:t>They tell us how the universe works</a:t>
+            </a:r>
+          </a:p>
+          <a:p>
+            <a:pPr marL="514350" indent="-514350">
+              <a:buFont typeface="+mj-lt"/>
+              <a:buAutoNum type="alphaLcParenR"/>
+            </a:pPr>
+            <a:r>
+              <a:rPr lang="en-US" dirty="0"/>
+              <a:t>They make everything easy to understand</a:t>
+            </a:r>
+          </a:p>
+          <a:p>
+            <a:pPr marL="514350" indent="-514350">
+              <a:buFont typeface="+mj-lt"/>
+              <a:buAutoNum type="alphaLcParenR"/>
+            </a:pPr>
+            <a:r>
+              <a:rPr lang="en-US" dirty="0"/>
+              <a:t>They make solving problems easier</a:t>
+            </a:r>
+          </a:p>
+        </p:txBody>
+      </p:sp>
+    </p:spTree>
+    <p:extLst>
+      <p:ext uri="{BB962C8B-B14F-4D97-AF65-F5344CB8AC3E}">
+        <p14:creationId xmlns:p14="http://schemas.microsoft.com/office/powerpoint/2010/main" val="3378814276"/>
       </p:ext>
     </p:extLst>
   </p:cSld>

--- a/Lecture_Slides/PH 123 Lecture 36.pptx
+++ b/Lecture_Slides/PH 123 Lecture 36.pptx
@@ -128,7 +128,7 @@
 <file path=ppt/revisionInfo.xml><?xml version="1.0" encoding="utf-8"?>
 <p1510:revInfo xmlns:a="http://schemas.openxmlformats.org/drawingml/2006/main" xmlns:r="http://schemas.openxmlformats.org/officeDocument/2006/relationships" xmlns:p1510="http://schemas.microsoft.com/office/powerpoint/2015/10/main">
   <p1510:revLst>
-    <p1510:client id="{19433E2F-A7AC-4341-9FA4-5680B2C19CE3}" v="100" dt="2025-07-11T15:59:09.548"/>
+    <p1510:client id="{19433E2F-A7AC-4341-9FA4-5680B2C19CE3}" v="102" dt="2025-07-18T17:55:15.880"/>
   </p1510:revLst>
 </p1510:revInfo>
 </file>
@@ -138,7 +138,7 @@
   <pc:docChgLst>
     <pc:chgData name="Lines, Todd" userId="afaf7c3a-e8aa-4568-882a-02ad8f9e19b0" providerId="ADAL" clId="{19433E2F-A7AC-4341-9FA4-5680B2C19CE3}"/>
     <pc:docChg chg="custSel addSld delSld modSld">
-      <pc:chgData name="Lines, Todd" userId="afaf7c3a-e8aa-4568-882a-02ad8f9e19b0" providerId="ADAL" clId="{19433E2F-A7AC-4341-9FA4-5680B2C19CE3}" dt="2025-07-11T16:01:48.824" v="624" actId="20577"/>
+      <pc:chgData name="Lines, Todd" userId="afaf7c3a-e8aa-4568-882a-02ad8f9e19b0" providerId="ADAL" clId="{19433E2F-A7AC-4341-9FA4-5680B2C19CE3}" dt="2025-07-18T17:55:21.505" v="639" actId="21"/>
       <pc:docMkLst>
         <pc:docMk/>
       </pc:docMkLst>
@@ -194,12 +194,28 @@
           </ac:spMkLst>
         </pc:spChg>
       </pc:sldChg>
-      <pc:sldChg chg="add">
-        <pc:chgData name="Lines, Todd" userId="afaf7c3a-e8aa-4568-882a-02ad8f9e19b0" providerId="ADAL" clId="{19433E2F-A7AC-4341-9FA4-5680B2C19CE3}" dt="2025-07-11T15:52:07.899" v="85"/>
+      <pc:sldChg chg="addSp delSp modSp add mod">
+        <pc:chgData name="Lines, Todd" userId="afaf7c3a-e8aa-4568-882a-02ad8f9e19b0" providerId="ADAL" clId="{19433E2F-A7AC-4341-9FA4-5680B2C19CE3}" dt="2025-07-18T17:55:21.505" v="639" actId="21"/>
         <pc:sldMkLst>
           <pc:docMk/>
           <pc:sldMk cId="3465067879" sldId="486"/>
         </pc:sldMkLst>
+        <pc:picChg chg="del mod">
+          <ac:chgData name="Lines, Todd" userId="afaf7c3a-e8aa-4568-882a-02ad8f9e19b0" providerId="ADAL" clId="{19433E2F-A7AC-4341-9FA4-5680B2C19CE3}" dt="2025-07-18T17:55:21.505" v="639" actId="21"/>
+          <ac:picMkLst>
+            <pc:docMk/>
+            <pc:sldMk cId="3465067879" sldId="486"/>
+            <ac:picMk id="8" creationId="{80070FD3-532A-DBD5-B87B-3D7F14D37321}"/>
+          </ac:picMkLst>
+        </pc:picChg>
+        <pc:cxnChg chg="add mod">
+          <ac:chgData name="Lines, Todd" userId="afaf7c3a-e8aa-4568-882a-02ad8f9e19b0" providerId="ADAL" clId="{19433E2F-A7AC-4341-9FA4-5680B2C19CE3}" dt="2025-07-18T17:55:05.699" v="637" actId="14100"/>
+          <ac:cxnSpMkLst>
+            <pc:docMk/>
+            <pc:sldMk cId="3465067879" sldId="486"/>
+            <ac:cxnSpMk id="3" creationId="{AFC79ABE-F59B-9F93-9EFF-8D33E3DC38ED}"/>
+          </ac:cxnSpMkLst>
+        </pc:cxnChg>
       </pc:sldChg>
       <pc:sldChg chg="modSp new mod">
         <pc:chgData name="Lines, Todd" userId="afaf7c3a-e8aa-4568-882a-02ad8f9e19b0" providerId="ADAL" clId="{19433E2F-A7AC-4341-9FA4-5680B2C19CE3}" dt="2025-07-11T15:55:05.868" v="219" actId="20577"/>
@@ -451,7 +467,7 @@
           <a:p>
             <a:fld id="{5D14FE54-3E4B-43AC-AC6A-78E009FC7A62}" type="datetimeFigureOut">
               <a:rPr lang="en-US" smtClean="0"/>
-              <a:t>7/11/2025</a:t>
+              <a:t>7/18/2025</a:t>
             </a:fld>
             <a:endParaRPr lang="en-US"/>
           </a:p>
@@ -649,7 +665,7 @@
           <a:p>
             <a:fld id="{5D14FE54-3E4B-43AC-AC6A-78E009FC7A62}" type="datetimeFigureOut">
               <a:rPr lang="en-US" smtClean="0"/>
-              <a:t>7/11/2025</a:t>
+              <a:t>7/18/2025</a:t>
             </a:fld>
             <a:endParaRPr lang="en-US"/>
           </a:p>
@@ -857,7 +873,7 @@
           <a:p>
             <a:fld id="{5D14FE54-3E4B-43AC-AC6A-78E009FC7A62}" type="datetimeFigureOut">
               <a:rPr lang="en-US" smtClean="0"/>
-              <a:t>7/11/2025</a:t>
+              <a:t>7/18/2025</a:t>
             </a:fld>
             <a:endParaRPr lang="en-US"/>
           </a:p>
@@ -1055,7 +1071,7 @@
           <a:p>
             <a:fld id="{5D14FE54-3E4B-43AC-AC6A-78E009FC7A62}" type="datetimeFigureOut">
               <a:rPr lang="en-US" smtClean="0"/>
-              <a:t>7/11/2025</a:t>
+              <a:t>7/18/2025</a:t>
             </a:fld>
             <a:endParaRPr lang="en-US"/>
           </a:p>
@@ -1330,7 +1346,7 @@
           <a:p>
             <a:fld id="{5D14FE54-3E4B-43AC-AC6A-78E009FC7A62}" type="datetimeFigureOut">
               <a:rPr lang="en-US" smtClean="0"/>
-              <a:t>7/11/2025</a:t>
+              <a:t>7/18/2025</a:t>
             </a:fld>
             <a:endParaRPr lang="en-US"/>
           </a:p>
@@ -1595,7 +1611,7 @@
           <a:p>
             <a:fld id="{5D14FE54-3E4B-43AC-AC6A-78E009FC7A62}" type="datetimeFigureOut">
               <a:rPr lang="en-US" smtClean="0"/>
-              <a:t>7/11/2025</a:t>
+              <a:t>7/18/2025</a:t>
             </a:fld>
             <a:endParaRPr lang="en-US"/>
           </a:p>
@@ -2007,7 +2023,7 @@
           <a:p>
             <a:fld id="{5D14FE54-3E4B-43AC-AC6A-78E009FC7A62}" type="datetimeFigureOut">
               <a:rPr lang="en-US" smtClean="0"/>
-              <a:t>7/11/2025</a:t>
+              <a:t>7/18/2025</a:t>
             </a:fld>
             <a:endParaRPr lang="en-US"/>
           </a:p>
@@ -2148,7 +2164,7 @@
           <a:p>
             <a:fld id="{5D14FE54-3E4B-43AC-AC6A-78E009FC7A62}" type="datetimeFigureOut">
               <a:rPr lang="en-US" smtClean="0"/>
-              <a:t>7/11/2025</a:t>
+              <a:t>7/18/2025</a:t>
             </a:fld>
             <a:endParaRPr lang="en-US"/>
           </a:p>
@@ -2261,7 +2277,7 @@
           <a:p>
             <a:fld id="{5D14FE54-3E4B-43AC-AC6A-78E009FC7A62}" type="datetimeFigureOut">
               <a:rPr lang="en-US" smtClean="0"/>
-              <a:t>7/11/2025</a:t>
+              <a:t>7/18/2025</a:t>
             </a:fld>
             <a:endParaRPr lang="en-US"/>
           </a:p>
@@ -2572,7 +2588,7 @@
           <a:p>
             <a:fld id="{5D14FE54-3E4B-43AC-AC6A-78E009FC7A62}" type="datetimeFigureOut">
               <a:rPr lang="en-US" smtClean="0"/>
-              <a:t>7/11/2025</a:t>
+              <a:t>7/18/2025</a:t>
             </a:fld>
             <a:endParaRPr lang="en-US"/>
           </a:p>
@@ -2860,7 +2876,7 @@
           <a:p>
             <a:fld id="{5D14FE54-3E4B-43AC-AC6A-78E009FC7A62}" type="datetimeFigureOut">
               <a:rPr lang="en-US" smtClean="0"/>
-              <a:t>7/11/2025</a:t>
+              <a:t>7/18/2025</a:t>
             </a:fld>
             <a:endParaRPr lang="en-US"/>
           </a:p>
@@ -3101,7 +3117,7 @@
           <a:p>
             <a:fld id="{5D14FE54-3E4B-43AC-AC6A-78E009FC7A62}" type="datetimeFigureOut">
               <a:rPr lang="en-US" smtClean="0"/>
-              <a:t>7/11/2025</a:t>
+              <a:t>7/18/2025</a:t>
             </a:fld>
             <a:endParaRPr lang="en-US"/>
           </a:p>
@@ -5526,8 +5542,8 @@
           </a:p>
         </p:txBody>
       </p:sp>
-      <mc:AlternateContent xmlns:mc="http://schemas.openxmlformats.org/markup-compatibility/2006">
-        <mc:Choice xmlns:a14="http://schemas.microsoft.com/office/drawing/2010/main" Requires="a14">
+      <mc:AlternateContent xmlns:mc="http://schemas.openxmlformats.org/markup-compatibility/2006" xmlns:a14="http://schemas.microsoft.com/office/drawing/2010/main">
+        <mc:Choice Requires="a14">
           <p:sp>
             <p:nvSpPr>
               <p:cNvPr id="3" name="Content Placeholder 2">
@@ -5746,7 +5762,7 @@
             </p:txBody>
           </p:sp>
         </mc:Choice>
-        <mc:Fallback>
+        <mc:Fallback xmlns="">
           <p:sp>
             <p:nvSpPr>
               <p:cNvPr id="3" name="Content Placeholder 2">
@@ -5852,6 +5868,51 @@
           </a:prstGeom>
         </p:spPr>
       </p:pic>
+      <p:cxnSp>
+        <p:nvCxnSpPr>
+          <p:cNvPr id="3" name="Straight Arrow Connector 2">
+            <a:extLst>
+              <a:ext uri="{FF2B5EF4-FFF2-40B4-BE49-F238E27FC236}">
+                <a16:creationId xmlns:a16="http://schemas.microsoft.com/office/drawing/2014/main" id="{AFC79ABE-F59B-9F93-9EFF-8D33E3DC38ED}"/>
+              </a:ext>
+            </a:extLst>
+          </p:cNvPr>
+          <p:cNvCxnSpPr>
+            <a:cxnSpLocks/>
+          </p:cNvCxnSpPr>
+          <p:nvPr/>
+        </p:nvCxnSpPr>
+        <p:spPr>
+          <a:xfrm>
+            <a:off x="5892800" y="3429000"/>
+            <a:ext cx="203200" cy="210127"/>
+          </a:xfrm>
+          <a:prstGeom prst="straightConnector1">
+            <a:avLst/>
+          </a:prstGeom>
+          <a:ln w="38100">
+            <a:solidFill>
+              <a:srgbClr val="FF0000"/>
+            </a:solidFill>
+            <a:headEnd type="none" w="med" len="med"/>
+            <a:tailEnd type="arrow" w="lg" len="lg"/>
+          </a:ln>
+        </p:spPr>
+        <p:style>
+          <a:lnRef idx="2">
+            <a:schemeClr val="accent1"/>
+          </a:lnRef>
+          <a:fillRef idx="0">
+            <a:schemeClr val="accent1"/>
+          </a:fillRef>
+          <a:effectRef idx="1">
+            <a:schemeClr val="accent1"/>
+          </a:effectRef>
+          <a:fontRef idx="minor">
+            <a:schemeClr val="tx1"/>
+          </a:fontRef>
+        </p:style>
+      </p:cxnSp>
     </p:spTree>
     <p:extLst>
       <p:ext uri="{BB962C8B-B14F-4D97-AF65-F5344CB8AC3E}">
@@ -5916,8 +5977,8 @@
           </a:p>
         </p:txBody>
       </p:sp>
-      <mc:AlternateContent xmlns:mc="http://schemas.openxmlformats.org/markup-compatibility/2006">
-        <mc:Choice xmlns:a14="http://schemas.microsoft.com/office/drawing/2010/main" Requires="a14">
+      <mc:AlternateContent xmlns:mc="http://schemas.openxmlformats.org/markup-compatibility/2006" xmlns:a14="http://schemas.microsoft.com/office/drawing/2010/main">
+        <mc:Choice Requires="a14">
           <p:sp>
             <p:nvSpPr>
               <p:cNvPr id="3" name="Content Placeholder 2">
@@ -6228,7 +6289,7 @@
             </p:txBody>
           </p:sp>
         </mc:Choice>
-        <mc:Fallback>
+        <mc:Fallback xmlns="">
           <p:sp>
             <p:nvSpPr>
               <p:cNvPr id="3" name="Content Placeholder 2">

--- a/Lecture_Slides/PH 123 Lecture 36.pptx
+++ b/Lecture_Slides/PH 123 Lecture 36.pptx
@@ -18,7 +18,10 @@
     <p:sldId id="285" r:id="rId12"/>
     <p:sldId id="340" r:id="rId13"/>
     <p:sldId id="283" r:id="rId14"/>
-    <p:sldId id="257" r:id="rId15"/>
+    <p:sldId id="306" r:id="rId15"/>
+    <p:sldId id="307" r:id="rId16"/>
+    <p:sldId id="308" r:id="rId17"/>
+    <p:sldId id="257" r:id="rId18"/>
   </p:sldIdLst>
   <p:sldSz cx="12192000" cy="6858000"/>
   <p:notesSz cx="6858000" cy="9144000"/>
@@ -128,7 +131,7 @@
 <file path=ppt/revisionInfo.xml><?xml version="1.0" encoding="utf-8"?>
 <p1510:revInfo xmlns:a="http://schemas.openxmlformats.org/drawingml/2006/main" xmlns:r="http://schemas.openxmlformats.org/officeDocument/2006/relationships" xmlns:p1510="http://schemas.microsoft.com/office/powerpoint/2015/10/main">
   <p1510:revLst>
-    <p1510:client id="{19433E2F-A7AC-4341-9FA4-5680B2C19CE3}" v="102" dt="2025-07-18T17:55:15.880"/>
+    <p1510:client id="{C3A8F3B3-0951-41A8-9538-BC546DF3340D}" v="1" dt="2026-01-22T22:05:22.813"/>
   </p1510:revLst>
 </p1510:revInfo>
 </file>
@@ -136,184 +139,32 @@
 <file path=ppt/changesInfos/changesInfo1.xml><?xml version="1.0" encoding="utf-8"?>
 <pc:chgInfo xmlns:a="http://schemas.openxmlformats.org/drawingml/2006/main" xmlns:r="http://schemas.openxmlformats.org/officeDocument/2006/relationships" xmlns:ac="http://schemas.microsoft.com/office/drawing/2013/main/command" xmlns:pc="http://schemas.microsoft.com/office/powerpoint/2013/main/command">
   <pc:docChgLst>
-    <pc:chgData name="Lines, Todd" userId="afaf7c3a-e8aa-4568-882a-02ad8f9e19b0" providerId="ADAL" clId="{19433E2F-A7AC-4341-9FA4-5680B2C19CE3}"/>
-    <pc:docChg chg="custSel addSld delSld modSld">
-      <pc:chgData name="Lines, Todd" userId="afaf7c3a-e8aa-4568-882a-02ad8f9e19b0" providerId="ADAL" clId="{19433E2F-A7AC-4341-9FA4-5680B2C19CE3}" dt="2025-07-18T17:55:21.505" v="639" actId="21"/>
+    <pc:chgData name="Lines, Todd" userId="afaf7c3a-e8aa-4568-882a-02ad8f9e19b0" providerId="ADAL" clId="{5FF5AC1B-ABA9-43D7-A1E3-2D92732CD6E2}"/>
+    <pc:docChg chg="addSld modSld">
+      <pc:chgData name="Lines, Todd" userId="afaf7c3a-e8aa-4568-882a-02ad8f9e19b0" providerId="ADAL" clId="{5FF5AC1B-ABA9-43D7-A1E3-2D92732CD6E2}" dt="2026-01-22T22:05:22.797" v="0"/>
       <pc:docMkLst>
         <pc:docMk/>
       </pc:docMkLst>
       <pc:sldChg chg="add">
-        <pc:chgData name="Lines, Todd" userId="afaf7c3a-e8aa-4568-882a-02ad8f9e19b0" providerId="ADAL" clId="{19433E2F-A7AC-4341-9FA4-5680B2C19CE3}" dt="2025-07-03T22:45:43.067" v="5"/>
+        <pc:chgData name="Lines, Todd" userId="afaf7c3a-e8aa-4568-882a-02ad8f9e19b0" providerId="ADAL" clId="{5FF5AC1B-ABA9-43D7-A1E3-2D92732CD6E2}" dt="2026-01-22T22:05:22.797" v="0"/>
         <pc:sldMkLst>
           <pc:docMk/>
-          <pc:sldMk cId="0" sldId="265"/>
+          <pc:sldMk cId="1247448808" sldId="306"/>
         </pc:sldMkLst>
       </pc:sldChg>
-      <pc:sldChg chg="addSp delSp modSp new mod">
-        <pc:chgData name="Lines, Todd" userId="afaf7c3a-e8aa-4568-882a-02ad8f9e19b0" providerId="ADAL" clId="{19433E2F-A7AC-4341-9FA4-5680B2C19CE3}" dt="2025-07-03T22:44:15.552" v="4" actId="14100"/>
+      <pc:sldChg chg="add">
+        <pc:chgData name="Lines, Todd" userId="afaf7c3a-e8aa-4568-882a-02ad8f9e19b0" providerId="ADAL" clId="{5FF5AC1B-ABA9-43D7-A1E3-2D92732CD6E2}" dt="2026-01-22T22:05:22.797" v="0"/>
         <pc:sldMkLst>
           <pc:docMk/>
-          <pc:sldMk cId="3556862412" sldId="341"/>
+          <pc:sldMk cId="4168904192" sldId="307"/>
         </pc:sldMkLst>
-        <pc:picChg chg="add mod">
-          <ac:chgData name="Lines, Todd" userId="afaf7c3a-e8aa-4568-882a-02ad8f9e19b0" providerId="ADAL" clId="{19433E2F-A7AC-4341-9FA4-5680B2C19CE3}" dt="2025-07-03T22:44:15.552" v="4" actId="14100"/>
-          <ac:picMkLst>
-            <pc:docMk/>
-            <pc:sldMk cId="3556862412" sldId="341"/>
-            <ac:picMk id="5" creationId="{FE9C3FC7-9DC0-D72B-55CE-8DD1D7DED647}"/>
-          </ac:picMkLst>
-        </pc:picChg>
       </pc:sldChg>
-      <pc:sldChg chg="modSp add mod">
-        <pc:chgData name="Lines, Todd" userId="afaf7c3a-e8aa-4568-882a-02ad8f9e19b0" providerId="ADAL" clId="{19433E2F-A7AC-4341-9FA4-5680B2C19CE3}" dt="2025-07-08T19:01:50.896" v="8" actId="20577"/>
+      <pc:sldChg chg="add">
+        <pc:chgData name="Lines, Todd" userId="afaf7c3a-e8aa-4568-882a-02ad8f9e19b0" providerId="ADAL" clId="{5FF5AC1B-ABA9-43D7-A1E3-2D92732CD6E2}" dt="2026-01-22T22:05:22.797" v="0"/>
         <pc:sldMkLst>
           <pc:docMk/>
-          <pc:sldMk cId="0" sldId="484"/>
+          <pc:sldMk cId="1325716157" sldId="308"/>
         </pc:sldMkLst>
-        <pc:spChg chg="mod">
-          <ac:chgData name="Lines, Todd" userId="afaf7c3a-e8aa-4568-882a-02ad8f9e19b0" providerId="ADAL" clId="{19433E2F-A7AC-4341-9FA4-5680B2C19CE3}" dt="2025-07-08T19:01:50.896" v="8" actId="20577"/>
-          <ac:spMkLst>
-            <pc:docMk/>
-            <pc:sldMk cId="0" sldId="484"/>
-            <ac:spMk id="35843" creationId="{25E6F564-0ACC-BFA0-5D1C-098F0645008F}"/>
-          </ac:spMkLst>
-        </pc:spChg>
-      </pc:sldChg>
-      <pc:sldChg chg="modSp add mod">
-        <pc:chgData name="Lines, Todd" userId="afaf7c3a-e8aa-4568-882a-02ad8f9e19b0" providerId="ADAL" clId="{19433E2F-A7AC-4341-9FA4-5680B2C19CE3}" dt="2025-07-10T19:08:35.353" v="84"/>
-        <pc:sldMkLst>
-          <pc:docMk/>
-          <pc:sldMk cId="3842804923" sldId="485"/>
-        </pc:sldMkLst>
-        <pc:spChg chg="mod">
-          <ac:chgData name="Lines, Todd" userId="afaf7c3a-e8aa-4568-882a-02ad8f9e19b0" providerId="ADAL" clId="{19433E2F-A7AC-4341-9FA4-5680B2C19CE3}" dt="2025-07-10T19:08:35.353" v="84"/>
-          <ac:spMkLst>
-            <pc:docMk/>
-            <pc:sldMk cId="3842804923" sldId="485"/>
-            <ac:spMk id="35843" creationId="{0880A836-F3E8-694F-BE88-C7B0C83B8377}"/>
-          </ac:spMkLst>
-        </pc:spChg>
-      </pc:sldChg>
-      <pc:sldChg chg="addSp delSp modSp add mod">
-        <pc:chgData name="Lines, Todd" userId="afaf7c3a-e8aa-4568-882a-02ad8f9e19b0" providerId="ADAL" clId="{19433E2F-A7AC-4341-9FA4-5680B2C19CE3}" dt="2025-07-18T17:55:21.505" v="639" actId="21"/>
-        <pc:sldMkLst>
-          <pc:docMk/>
-          <pc:sldMk cId="3465067879" sldId="486"/>
-        </pc:sldMkLst>
-        <pc:picChg chg="del mod">
-          <ac:chgData name="Lines, Todd" userId="afaf7c3a-e8aa-4568-882a-02ad8f9e19b0" providerId="ADAL" clId="{19433E2F-A7AC-4341-9FA4-5680B2C19CE3}" dt="2025-07-18T17:55:21.505" v="639" actId="21"/>
-          <ac:picMkLst>
-            <pc:docMk/>
-            <pc:sldMk cId="3465067879" sldId="486"/>
-            <ac:picMk id="8" creationId="{80070FD3-532A-DBD5-B87B-3D7F14D37321}"/>
-          </ac:picMkLst>
-        </pc:picChg>
-        <pc:cxnChg chg="add mod">
-          <ac:chgData name="Lines, Todd" userId="afaf7c3a-e8aa-4568-882a-02ad8f9e19b0" providerId="ADAL" clId="{19433E2F-A7AC-4341-9FA4-5680B2C19CE3}" dt="2025-07-18T17:55:05.699" v="637" actId="14100"/>
-          <ac:cxnSpMkLst>
-            <pc:docMk/>
-            <pc:sldMk cId="3465067879" sldId="486"/>
-            <ac:cxnSpMk id="3" creationId="{AFC79ABE-F59B-9F93-9EFF-8D33E3DC38ED}"/>
-          </ac:cxnSpMkLst>
-        </pc:cxnChg>
-      </pc:sldChg>
-      <pc:sldChg chg="modSp new mod">
-        <pc:chgData name="Lines, Todd" userId="afaf7c3a-e8aa-4568-882a-02ad8f9e19b0" providerId="ADAL" clId="{19433E2F-A7AC-4341-9FA4-5680B2C19CE3}" dt="2025-07-11T15:55:05.868" v="219" actId="20577"/>
-        <pc:sldMkLst>
-          <pc:docMk/>
-          <pc:sldMk cId="1446333334" sldId="487"/>
-        </pc:sldMkLst>
-        <pc:spChg chg="mod">
-          <ac:chgData name="Lines, Todd" userId="afaf7c3a-e8aa-4568-882a-02ad8f9e19b0" providerId="ADAL" clId="{19433E2F-A7AC-4341-9FA4-5680B2C19CE3}" dt="2025-07-11T15:52:13.279" v="94" actId="20577"/>
-          <ac:spMkLst>
-            <pc:docMk/>
-            <pc:sldMk cId="1446333334" sldId="487"/>
-            <ac:spMk id="2" creationId="{54610E40-E486-E84C-682C-6002987BB624}"/>
-          </ac:spMkLst>
-        </pc:spChg>
-        <pc:spChg chg="mod">
-          <ac:chgData name="Lines, Todd" userId="afaf7c3a-e8aa-4568-882a-02ad8f9e19b0" providerId="ADAL" clId="{19433E2F-A7AC-4341-9FA4-5680B2C19CE3}" dt="2025-07-11T15:55:05.868" v="219" actId="20577"/>
-          <ac:spMkLst>
-            <pc:docMk/>
-            <pc:sldMk cId="1446333334" sldId="487"/>
-            <ac:spMk id="3" creationId="{08537D8D-6AC6-1433-021B-54F0CF486FA0}"/>
-          </ac:spMkLst>
-        </pc:spChg>
-      </pc:sldChg>
-      <pc:sldChg chg="modSp add mod">
-        <pc:chgData name="Lines, Todd" userId="afaf7c3a-e8aa-4568-882a-02ad8f9e19b0" providerId="ADAL" clId="{19433E2F-A7AC-4341-9FA4-5680B2C19CE3}" dt="2025-07-11T15:59:20.973" v="355" actId="20577"/>
-        <pc:sldMkLst>
-          <pc:docMk/>
-          <pc:sldMk cId="2389341818" sldId="488"/>
-        </pc:sldMkLst>
-        <pc:spChg chg="mod">
-          <ac:chgData name="Lines, Todd" userId="afaf7c3a-e8aa-4568-882a-02ad8f9e19b0" providerId="ADAL" clId="{19433E2F-A7AC-4341-9FA4-5680B2C19CE3}" dt="2025-07-11T15:59:20.973" v="355" actId="20577"/>
-          <ac:spMkLst>
-            <pc:docMk/>
-            <pc:sldMk cId="2389341818" sldId="488"/>
-            <ac:spMk id="3" creationId="{6F64307E-3582-259B-6FFF-E34800D93684}"/>
-          </ac:spMkLst>
-        </pc:spChg>
-      </pc:sldChg>
-      <pc:sldChg chg="add del">
-        <pc:chgData name="Lines, Todd" userId="afaf7c3a-e8aa-4568-882a-02ad8f9e19b0" providerId="ADAL" clId="{19433E2F-A7AC-4341-9FA4-5680B2C19CE3}" dt="2025-07-11T15:55:56.334" v="221" actId="47"/>
-        <pc:sldMkLst>
-          <pc:docMk/>
-          <pc:sldMk cId="3237716521" sldId="488"/>
-        </pc:sldMkLst>
-      </pc:sldChg>
-      <pc:sldChg chg="add del">
-        <pc:chgData name="Lines, Todd" userId="afaf7c3a-e8aa-4568-882a-02ad8f9e19b0" providerId="ADAL" clId="{19433E2F-A7AC-4341-9FA4-5680B2C19CE3}" dt="2025-07-11T15:57:59.888" v="269"/>
-        <pc:sldMkLst>
-          <pc:docMk/>
-          <pc:sldMk cId="1831025676" sldId="489"/>
-        </pc:sldMkLst>
-      </pc:sldChg>
-      <pc:sldChg chg="modSp new mod">
-        <pc:chgData name="Lines, Todd" userId="afaf7c3a-e8aa-4568-882a-02ad8f9e19b0" providerId="ADAL" clId="{19433E2F-A7AC-4341-9FA4-5680B2C19CE3}" dt="2025-07-11T16:00:13.225" v="435" actId="20577"/>
-        <pc:sldMkLst>
-          <pc:docMk/>
-          <pc:sldMk cId="2851887090" sldId="489"/>
-        </pc:sldMkLst>
-        <pc:spChg chg="mod">
-          <ac:chgData name="Lines, Todd" userId="afaf7c3a-e8aa-4568-882a-02ad8f9e19b0" providerId="ADAL" clId="{19433E2F-A7AC-4341-9FA4-5680B2C19CE3}" dt="2025-07-11T15:59:42.281" v="364" actId="20577"/>
-          <ac:spMkLst>
-            <pc:docMk/>
-            <pc:sldMk cId="2851887090" sldId="489"/>
-            <ac:spMk id="2" creationId="{7D432002-FF55-F810-0DAE-FAE499C324E4}"/>
-          </ac:spMkLst>
-        </pc:spChg>
-        <pc:spChg chg="mod">
-          <ac:chgData name="Lines, Todd" userId="afaf7c3a-e8aa-4568-882a-02ad8f9e19b0" providerId="ADAL" clId="{19433E2F-A7AC-4341-9FA4-5680B2C19CE3}" dt="2025-07-11T16:00:13.225" v="435" actId="20577"/>
-          <ac:spMkLst>
-            <pc:docMk/>
-            <pc:sldMk cId="2851887090" sldId="489"/>
-            <ac:spMk id="3" creationId="{029605CA-880A-29C8-6C74-7E7688FE48C5}"/>
-          </ac:spMkLst>
-        </pc:spChg>
-      </pc:sldChg>
-      <pc:sldChg chg="modSp new mod">
-        <pc:chgData name="Lines, Todd" userId="afaf7c3a-e8aa-4568-882a-02ad8f9e19b0" providerId="ADAL" clId="{19433E2F-A7AC-4341-9FA4-5680B2C19CE3}" dt="2025-07-11T16:01:48.824" v="624" actId="20577"/>
-        <pc:sldMkLst>
-          <pc:docMk/>
-          <pc:sldMk cId="3378814276" sldId="490"/>
-        </pc:sldMkLst>
-        <pc:spChg chg="mod">
-          <ac:chgData name="Lines, Todd" userId="afaf7c3a-e8aa-4568-882a-02ad8f9e19b0" providerId="ADAL" clId="{19433E2F-A7AC-4341-9FA4-5680B2C19CE3}" dt="2025-07-11T16:00:45.529" v="444" actId="20577"/>
-          <ac:spMkLst>
-            <pc:docMk/>
-            <pc:sldMk cId="3378814276" sldId="490"/>
-            <ac:spMk id="2" creationId="{36C05A08-BBAD-733F-9214-FFCA080F07AC}"/>
-          </ac:spMkLst>
-        </pc:spChg>
-        <pc:spChg chg="mod">
-          <ac:chgData name="Lines, Todd" userId="afaf7c3a-e8aa-4568-882a-02ad8f9e19b0" providerId="ADAL" clId="{19433E2F-A7AC-4341-9FA4-5680B2C19CE3}" dt="2025-07-11T16:01:48.824" v="624" actId="20577"/>
-          <ac:spMkLst>
-            <pc:docMk/>
-            <pc:sldMk cId="3378814276" sldId="490"/>
-            <ac:spMk id="3" creationId="{857BFD40-4C1B-BCE6-1015-757E5ACBD398}"/>
-          </ac:spMkLst>
-        </pc:spChg>
       </pc:sldChg>
     </pc:docChg>
   </pc:docChgLst>
@@ -467,7 +318,7 @@
           <a:p>
             <a:fld id="{5D14FE54-3E4B-43AC-AC6A-78E009FC7A62}" type="datetimeFigureOut">
               <a:rPr lang="en-US" smtClean="0"/>
-              <a:t>7/18/2025</a:t>
+              <a:t>1/22/2026</a:t>
             </a:fld>
             <a:endParaRPr lang="en-US"/>
           </a:p>
@@ -665,7 +516,7 @@
           <a:p>
             <a:fld id="{5D14FE54-3E4B-43AC-AC6A-78E009FC7A62}" type="datetimeFigureOut">
               <a:rPr lang="en-US" smtClean="0"/>
-              <a:t>7/18/2025</a:t>
+              <a:t>1/22/2026</a:t>
             </a:fld>
             <a:endParaRPr lang="en-US"/>
           </a:p>
@@ -873,7 +724,7 @@
           <a:p>
             <a:fld id="{5D14FE54-3E4B-43AC-AC6A-78E009FC7A62}" type="datetimeFigureOut">
               <a:rPr lang="en-US" smtClean="0"/>
-              <a:t>7/18/2025</a:t>
+              <a:t>1/22/2026</a:t>
             </a:fld>
             <a:endParaRPr lang="en-US"/>
           </a:p>
@@ -1071,7 +922,7 @@
           <a:p>
             <a:fld id="{5D14FE54-3E4B-43AC-AC6A-78E009FC7A62}" type="datetimeFigureOut">
               <a:rPr lang="en-US" smtClean="0"/>
-              <a:t>7/18/2025</a:t>
+              <a:t>1/22/2026</a:t>
             </a:fld>
             <a:endParaRPr lang="en-US"/>
           </a:p>
@@ -1346,7 +1197,7 @@
           <a:p>
             <a:fld id="{5D14FE54-3E4B-43AC-AC6A-78E009FC7A62}" type="datetimeFigureOut">
               <a:rPr lang="en-US" smtClean="0"/>
-              <a:t>7/18/2025</a:t>
+              <a:t>1/22/2026</a:t>
             </a:fld>
             <a:endParaRPr lang="en-US"/>
           </a:p>
@@ -1611,7 +1462,7 @@
           <a:p>
             <a:fld id="{5D14FE54-3E4B-43AC-AC6A-78E009FC7A62}" type="datetimeFigureOut">
               <a:rPr lang="en-US" smtClean="0"/>
-              <a:t>7/18/2025</a:t>
+              <a:t>1/22/2026</a:t>
             </a:fld>
             <a:endParaRPr lang="en-US"/>
           </a:p>
@@ -2023,7 +1874,7 @@
           <a:p>
             <a:fld id="{5D14FE54-3E4B-43AC-AC6A-78E009FC7A62}" type="datetimeFigureOut">
               <a:rPr lang="en-US" smtClean="0"/>
-              <a:t>7/18/2025</a:t>
+              <a:t>1/22/2026</a:t>
             </a:fld>
             <a:endParaRPr lang="en-US"/>
           </a:p>
@@ -2164,7 +2015,7 @@
           <a:p>
             <a:fld id="{5D14FE54-3E4B-43AC-AC6A-78E009FC7A62}" type="datetimeFigureOut">
               <a:rPr lang="en-US" smtClean="0"/>
-              <a:t>7/18/2025</a:t>
+              <a:t>1/22/2026</a:t>
             </a:fld>
             <a:endParaRPr lang="en-US"/>
           </a:p>
@@ -2277,7 +2128,7 @@
           <a:p>
             <a:fld id="{5D14FE54-3E4B-43AC-AC6A-78E009FC7A62}" type="datetimeFigureOut">
               <a:rPr lang="en-US" smtClean="0"/>
-              <a:t>7/18/2025</a:t>
+              <a:t>1/22/2026</a:t>
             </a:fld>
             <a:endParaRPr lang="en-US"/>
           </a:p>
@@ -2588,7 +2439,7 @@
           <a:p>
             <a:fld id="{5D14FE54-3E4B-43AC-AC6A-78E009FC7A62}" type="datetimeFigureOut">
               <a:rPr lang="en-US" smtClean="0"/>
-              <a:t>7/18/2025</a:t>
+              <a:t>1/22/2026</a:t>
             </a:fld>
             <a:endParaRPr lang="en-US"/>
           </a:p>
@@ -2876,7 +2727,7 @@
           <a:p>
             <a:fld id="{5D14FE54-3E4B-43AC-AC6A-78E009FC7A62}" type="datetimeFigureOut">
               <a:rPr lang="en-US" smtClean="0"/>
-              <a:t>7/18/2025</a:t>
+              <a:t>1/22/2026</a:t>
             </a:fld>
             <a:endParaRPr lang="en-US"/>
           </a:p>
@@ -3117,7 +2968,7 @@
           <a:p>
             <a:fld id="{5D14FE54-3E4B-43AC-AC6A-78E009FC7A62}" type="datetimeFigureOut">
               <a:rPr lang="en-US" smtClean="0"/>
-              <a:t>7/18/2025</a:t>
+              <a:t>1/22/2026</a:t>
             </a:fld>
             <a:endParaRPr lang="en-US"/>
           </a:p>
@@ -4726,6 +4577,2446 @@
 </file>
 
 <file path=ppt/slides/slide14.xml><?xml version="1.0" encoding="utf-8"?>
+<p:sld xmlns:a="http://schemas.openxmlformats.org/drawingml/2006/main" xmlns:r="http://schemas.openxmlformats.org/officeDocument/2006/relationships" xmlns:p="http://schemas.openxmlformats.org/presentationml/2006/main">
+  <p:cSld>
+    <p:spTree>
+      <p:nvGrpSpPr>
+        <p:cNvPr id="1" name=""/>
+        <p:cNvGrpSpPr/>
+        <p:nvPr/>
+      </p:nvGrpSpPr>
+      <p:grpSpPr>
+        <a:xfrm>
+          <a:off x="0" y="0"/>
+          <a:ext cx="0" cy="0"/>
+          <a:chOff x="0" y="0"/>
+          <a:chExt cx="0" cy="0"/>
+        </a:xfrm>
+      </p:grpSpPr>
+      <p:sp>
+        <p:nvSpPr>
+          <p:cNvPr id="4" name="Cylinder 3">
+            <a:extLst>
+              <a:ext uri="{FF2B5EF4-FFF2-40B4-BE49-F238E27FC236}">
+                <a16:creationId xmlns:a16="http://schemas.microsoft.com/office/drawing/2014/main" id="{C7CEA9B5-10E1-0690-20A5-E941D70EF6CE}"/>
+              </a:ext>
+            </a:extLst>
+          </p:cNvPr>
+          <p:cNvSpPr/>
+          <p:nvPr/>
+        </p:nvSpPr>
+        <p:spPr>
+          <a:xfrm rot="16200000">
+            <a:off x="5327904" y="329184"/>
+            <a:ext cx="932688" cy="4681728"/>
+          </a:xfrm>
+          <a:prstGeom prst="can">
+            <a:avLst>
+              <a:gd name="adj" fmla="val 52451"/>
+            </a:avLst>
+          </a:prstGeom>
+          <a:solidFill>
+            <a:schemeClr val="tx2">
+              <a:lumMod val="20000"/>
+              <a:lumOff val="80000"/>
+            </a:schemeClr>
+          </a:solidFill>
+        </p:spPr>
+        <p:style>
+          <a:lnRef idx="2">
+            <a:schemeClr val="accent1">
+              <a:shade val="15000"/>
+            </a:schemeClr>
+          </a:lnRef>
+          <a:fillRef idx="1">
+            <a:schemeClr val="accent1"/>
+          </a:fillRef>
+          <a:effectRef idx="0">
+            <a:schemeClr val="accent1"/>
+          </a:effectRef>
+          <a:fontRef idx="minor">
+            <a:schemeClr val="lt1"/>
+          </a:fontRef>
+        </p:style>
+        <p:txBody>
+          <a:bodyPr rtlCol="0" anchor="ctr"/>
+          <a:lstStyle/>
+          <a:p>
+            <a:pPr algn="ctr"/>
+            <a:endParaRPr lang="en-US"/>
+          </a:p>
+        </p:txBody>
+      </p:sp>
+      <p:sp>
+        <p:nvSpPr>
+          <p:cNvPr id="5" name="Cylinder 4">
+            <a:extLst>
+              <a:ext uri="{FF2B5EF4-FFF2-40B4-BE49-F238E27FC236}">
+                <a16:creationId xmlns:a16="http://schemas.microsoft.com/office/drawing/2014/main" id="{0117D1E6-05E3-328B-3F36-AFC8B477D456}"/>
+              </a:ext>
+            </a:extLst>
+          </p:cNvPr>
+          <p:cNvSpPr/>
+          <p:nvPr/>
+        </p:nvSpPr>
+        <p:spPr>
+          <a:xfrm rot="16200000">
+            <a:off x="5353812" y="1754125"/>
+            <a:ext cx="932688" cy="1831848"/>
+          </a:xfrm>
+          <a:prstGeom prst="can">
+            <a:avLst>
+              <a:gd name="adj" fmla="val 52451"/>
+            </a:avLst>
+          </a:prstGeom>
+          <a:solidFill>
+            <a:schemeClr val="tx2">
+              <a:lumMod val="60000"/>
+              <a:lumOff val="40000"/>
+            </a:schemeClr>
+          </a:solidFill>
+        </p:spPr>
+        <p:style>
+          <a:lnRef idx="2">
+            <a:schemeClr val="accent1">
+              <a:shade val="15000"/>
+            </a:schemeClr>
+          </a:lnRef>
+          <a:fillRef idx="1">
+            <a:schemeClr val="accent1"/>
+          </a:fillRef>
+          <a:effectRef idx="0">
+            <a:schemeClr val="accent1"/>
+          </a:effectRef>
+          <a:fontRef idx="minor">
+            <a:schemeClr val="lt1"/>
+          </a:fontRef>
+        </p:style>
+        <p:txBody>
+          <a:bodyPr rtlCol="0" anchor="ctr"/>
+          <a:lstStyle/>
+          <a:p>
+            <a:pPr algn="ctr"/>
+            <a:endParaRPr lang="en-US"/>
+          </a:p>
+        </p:txBody>
+      </p:sp>
+      <p:sp>
+        <p:nvSpPr>
+          <p:cNvPr id="6" name="TextBox 5">
+            <a:extLst>
+              <a:ext uri="{FF2B5EF4-FFF2-40B4-BE49-F238E27FC236}">
+                <a16:creationId xmlns:a16="http://schemas.microsoft.com/office/drawing/2014/main" id="{82B82AD0-A576-E02B-3403-FC95165C25E7}"/>
+              </a:ext>
+            </a:extLst>
+          </p:cNvPr>
+          <p:cNvSpPr txBox="1"/>
+          <p:nvPr/>
+        </p:nvSpPr>
+        <p:spPr>
+          <a:xfrm>
+            <a:off x="4992262" y="2485382"/>
+            <a:ext cx="320922" cy="369332"/>
+          </a:xfrm>
+          <a:prstGeom prst="rect">
+            <a:avLst/>
+          </a:prstGeom>
+          <a:noFill/>
+        </p:spPr>
+        <p:txBody>
+          <a:bodyPr wrap="none" rtlCol="0">
+            <a:spAutoFit/>
+          </a:bodyPr>
+          <a:lstStyle/>
+          <a:p>
+            <a:r>
+              <a:rPr lang="en-US" dirty="0"/>
+              <a:t>A</a:t>
+            </a:r>
+          </a:p>
+        </p:txBody>
+      </p:sp>
+      <p:cxnSp>
+        <p:nvCxnSpPr>
+          <p:cNvPr id="8" name="Straight Connector 7">
+            <a:extLst>
+              <a:ext uri="{FF2B5EF4-FFF2-40B4-BE49-F238E27FC236}">
+                <a16:creationId xmlns:a16="http://schemas.microsoft.com/office/drawing/2014/main" id="{0ACF803B-B61B-F4CF-3CBB-0086E5811D65}"/>
+              </a:ext>
+            </a:extLst>
+          </p:cNvPr>
+          <p:cNvCxnSpPr/>
+          <p:nvPr/>
+        </p:nvCxnSpPr>
+        <p:spPr>
+          <a:xfrm flipV="1">
+            <a:off x="5151120" y="1618488"/>
+            <a:ext cx="0" cy="521208"/>
+          </a:xfrm>
+          <a:prstGeom prst="line">
+            <a:avLst/>
+          </a:prstGeom>
+          <a:ln>
+            <a:solidFill>
+              <a:schemeClr val="tx1"/>
+            </a:solidFill>
+            <a:prstDash val="dash"/>
+          </a:ln>
+        </p:spPr>
+        <p:style>
+          <a:lnRef idx="1">
+            <a:schemeClr val="accent1"/>
+          </a:lnRef>
+          <a:fillRef idx="0">
+            <a:schemeClr val="accent1"/>
+          </a:fillRef>
+          <a:effectRef idx="0">
+            <a:schemeClr val="accent1"/>
+          </a:effectRef>
+          <a:fontRef idx="minor">
+            <a:schemeClr val="tx1"/>
+          </a:fontRef>
+        </p:style>
+      </p:cxnSp>
+      <p:cxnSp>
+        <p:nvCxnSpPr>
+          <p:cNvPr id="9" name="Straight Connector 8">
+            <a:extLst>
+              <a:ext uri="{FF2B5EF4-FFF2-40B4-BE49-F238E27FC236}">
+                <a16:creationId xmlns:a16="http://schemas.microsoft.com/office/drawing/2014/main" id="{603595B2-A95D-A8D4-51D7-931603F86545}"/>
+              </a:ext>
+            </a:extLst>
+          </p:cNvPr>
+          <p:cNvCxnSpPr/>
+          <p:nvPr/>
+        </p:nvCxnSpPr>
+        <p:spPr>
+          <a:xfrm flipV="1">
+            <a:off x="6556248" y="1618488"/>
+            <a:ext cx="0" cy="521208"/>
+          </a:xfrm>
+          <a:prstGeom prst="line">
+            <a:avLst/>
+          </a:prstGeom>
+          <a:ln>
+            <a:solidFill>
+              <a:schemeClr val="tx1"/>
+            </a:solidFill>
+            <a:prstDash val="dash"/>
+          </a:ln>
+        </p:spPr>
+        <p:style>
+          <a:lnRef idx="1">
+            <a:schemeClr val="accent1"/>
+          </a:lnRef>
+          <a:fillRef idx="0">
+            <a:schemeClr val="accent1"/>
+          </a:fillRef>
+          <a:effectRef idx="0">
+            <a:schemeClr val="accent1"/>
+          </a:effectRef>
+          <a:fontRef idx="minor">
+            <a:schemeClr val="tx1"/>
+          </a:fontRef>
+        </p:style>
+      </p:cxnSp>
+      <p:cxnSp>
+        <p:nvCxnSpPr>
+          <p:cNvPr id="11" name="Straight Arrow Connector 10">
+            <a:extLst>
+              <a:ext uri="{FF2B5EF4-FFF2-40B4-BE49-F238E27FC236}">
+                <a16:creationId xmlns:a16="http://schemas.microsoft.com/office/drawing/2014/main" id="{D1A9A135-2042-0657-03DA-4F1D50813C6D}"/>
+              </a:ext>
+            </a:extLst>
+          </p:cNvPr>
+          <p:cNvCxnSpPr/>
+          <p:nvPr/>
+        </p:nvCxnSpPr>
+        <p:spPr>
+          <a:xfrm>
+            <a:off x="5151120" y="1879092"/>
+            <a:ext cx="1392936" cy="0"/>
+          </a:xfrm>
+          <a:prstGeom prst="straightConnector1">
+            <a:avLst/>
+          </a:prstGeom>
+          <a:ln>
+            <a:solidFill>
+              <a:schemeClr val="tx1"/>
+            </a:solidFill>
+            <a:prstDash val="dash"/>
+            <a:headEnd type="triangle"/>
+            <a:tailEnd type="triangle"/>
+          </a:ln>
+        </p:spPr>
+        <p:style>
+          <a:lnRef idx="1">
+            <a:schemeClr val="accent1"/>
+          </a:lnRef>
+          <a:fillRef idx="0">
+            <a:schemeClr val="accent1"/>
+          </a:fillRef>
+          <a:effectRef idx="0">
+            <a:schemeClr val="accent1"/>
+          </a:effectRef>
+          <a:fontRef idx="minor">
+            <a:schemeClr val="tx1"/>
+          </a:fontRef>
+        </p:style>
+      </p:cxnSp>
+      <p:sp>
+        <p:nvSpPr>
+          <p:cNvPr id="12" name="TextBox 11">
+            <a:extLst>
+              <a:ext uri="{FF2B5EF4-FFF2-40B4-BE49-F238E27FC236}">
+                <a16:creationId xmlns:a16="http://schemas.microsoft.com/office/drawing/2014/main" id="{13C3B7EB-4075-93A1-F1D5-130146D4AB9C}"/>
+              </a:ext>
+            </a:extLst>
+          </p:cNvPr>
+          <p:cNvSpPr txBox="1"/>
+          <p:nvPr/>
+        </p:nvSpPr>
+        <p:spPr>
+          <a:xfrm>
+            <a:off x="5738796" y="1694426"/>
+            <a:ext cx="425116" cy="369332"/>
+          </a:xfrm>
+          <a:prstGeom prst="rect">
+            <a:avLst/>
+          </a:prstGeom>
+          <a:solidFill>
+            <a:schemeClr val="bg1"/>
+          </a:solidFill>
+        </p:spPr>
+        <p:txBody>
+          <a:bodyPr wrap="none" rtlCol="0">
+            <a:spAutoFit/>
+          </a:bodyPr>
+          <a:lstStyle/>
+          <a:p>
+            <a:r>
+              <a:rPr lang="en-US" dirty="0">
+                <a:sym typeface="Symbol" panose="05050102010706020507" pitchFamily="18" charset="2"/>
+              </a:rPr>
+              <a:t></a:t>
+            </a:r>
+            <a:r>
+              <a:rPr lang="en-US" dirty="0"/>
+              <a:t>x</a:t>
+            </a:r>
+          </a:p>
+        </p:txBody>
+      </p:sp>
+      <p:sp>
+        <p:nvSpPr>
+          <p:cNvPr id="13" name="Oval 12">
+            <a:extLst>
+              <a:ext uri="{FF2B5EF4-FFF2-40B4-BE49-F238E27FC236}">
+                <a16:creationId xmlns:a16="http://schemas.microsoft.com/office/drawing/2014/main" id="{F8877B15-2AAF-441A-8BB6-E91D4626B716}"/>
+              </a:ext>
+            </a:extLst>
+          </p:cNvPr>
+          <p:cNvSpPr/>
+          <p:nvPr/>
+        </p:nvSpPr>
+        <p:spPr>
+          <a:xfrm>
+            <a:off x="6251089" y="2203703"/>
+            <a:ext cx="487680" cy="932689"/>
+          </a:xfrm>
+          <a:prstGeom prst="ellipse">
+            <a:avLst/>
+          </a:prstGeom>
+          <a:solidFill>
+            <a:schemeClr val="tx2">
+              <a:lumMod val="60000"/>
+              <a:lumOff val="40000"/>
+            </a:schemeClr>
+          </a:solidFill>
+          <a:ln w="9525">
+            <a:solidFill>
+              <a:schemeClr val="tx1">
+                <a:lumMod val="95000"/>
+                <a:lumOff val="5000"/>
+              </a:schemeClr>
+            </a:solidFill>
+            <a:prstDash val="dash"/>
+          </a:ln>
+        </p:spPr>
+        <p:style>
+          <a:lnRef idx="2">
+            <a:schemeClr val="accent1">
+              <a:shade val="15000"/>
+            </a:schemeClr>
+          </a:lnRef>
+          <a:fillRef idx="1">
+            <a:schemeClr val="accent1"/>
+          </a:fillRef>
+          <a:effectRef idx="0">
+            <a:schemeClr val="accent1"/>
+          </a:effectRef>
+          <a:fontRef idx="minor">
+            <a:schemeClr val="lt1"/>
+          </a:fontRef>
+        </p:style>
+        <p:txBody>
+          <a:bodyPr rtlCol="0" anchor="ctr"/>
+          <a:lstStyle/>
+          <a:p>
+            <a:pPr algn="ctr"/>
+            <a:endParaRPr lang="en-US"/>
+          </a:p>
+        </p:txBody>
+      </p:sp>
+      <p:sp>
+        <p:nvSpPr>
+          <p:cNvPr id="14" name="Arc 13">
+            <a:extLst>
+              <a:ext uri="{FF2B5EF4-FFF2-40B4-BE49-F238E27FC236}">
+                <a16:creationId xmlns:a16="http://schemas.microsoft.com/office/drawing/2014/main" id="{C8CB2D2C-A259-ACC4-DFDD-B2C86AA527A1}"/>
+              </a:ext>
+            </a:extLst>
+          </p:cNvPr>
+          <p:cNvSpPr/>
+          <p:nvPr/>
+        </p:nvSpPr>
+        <p:spPr>
+          <a:xfrm>
+            <a:off x="6248040" y="2203704"/>
+            <a:ext cx="487680" cy="932689"/>
+          </a:xfrm>
+          <a:prstGeom prst="arc">
+            <a:avLst>
+              <a:gd name="adj1" fmla="val 16200000"/>
+              <a:gd name="adj2" fmla="val 5236651"/>
+            </a:avLst>
+          </a:prstGeom>
+          <a:ln w="28575">
+            <a:solidFill>
+              <a:schemeClr val="tx1"/>
+            </a:solidFill>
+          </a:ln>
+        </p:spPr>
+        <p:style>
+          <a:lnRef idx="1">
+            <a:schemeClr val="accent1"/>
+          </a:lnRef>
+          <a:fillRef idx="0">
+            <a:schemeClr val="accent1"/>
+          </a:fillRef>
+          <a:effectRef idx="0">
+            <a:schemeClr val="accent1"/>
+          </a:effectRef>
+          <a:fontRef idx="minor">
+            <a:schemeClr val="tx1"/>
+          </a:fontRef>
+        </p:style>
+        <p:txBody>
+          <a:bodyPr rtlCol="0" anchor="ctr"/>
+          <a:lstStyle/>
+          <a:p>
+            <a:pPr algn="ctr"/>
+            <a:endParaRPr lang="en-US"/>
+          </a:p>
+        </p:txBody>
+      </p:sp>
+      <p:sp>
+        <p:nvSpPr>
+          <p:cNvPr id="15" name="Oval 14">
+            <a:extLst>
+              <a:ext uri="{FF2B5EF4-FFF2-40B4-BE49-F238E27FC236}">
+                <a16:creationId xmlns:a16="http://schemas.microsoft.com/office/drawing/2014/main" id="{7FA60F47-8906-0C8E-78DA-8CF2FFEB52BC}"/>
+              </a:ext>
+            </a:extLst>
+          </p:cNvPr>
+          <p:cNvSpPr/>
+          <p:nvPr/>
+        </p:nvSpPr>
+        <p:spPr>
+          <a:xfrm>
+            <a:off x="7647432" y="2203703"/>
+            <a:ext cx="487680" cy="932689"/>
+          </a:xfrm>
+          <a:prstGeom prst="ellipse">
+            <a:avLst/>
+          </a:prstGeom>
+          <a:solidFill>
+            <a:schemeClr val="tx2">
+              <a:lumMod val="20000"/>
+              <a:lumOff val="80000"/>
+            </a:schemeClr>
+          </a:solidFill>
+          <a:ln w="9525">
+            <a:solidFill>
+              <a:schemeClr val="tx1">
+                <a:lumMod val="95000"/>
+                <a:lumOff val="5000"/>
+              </a:schemeClr>
+            </a:solidFill>
+            <a:prstDash val="dash"/>
+          </a:ln>
+        </p:spPr>
+        <p:style>
+          <a:lnRef idx="2">
+            <a:schemeClr val="accent1">
+              <a:shade val="15000"/>
+            </a:schemeClr>
+          </a:lnRef>
+          <a:fillRef idx="1">
+            <a:schemeClr val="accent1"/>
+          </a:fillRef>
+          <a:effectRef idx="0">
+            <a:schemeClr val="accent1"/>
+          </a:effectRef>
+          <a:fontRef idx="minor">
+            <a:schemeClr val="lt1"/>
+          </a:fontRef>
+        </p:style>
+        <p:txBody>
+          <a:bodyPr rtlCol="0" anchor="ctr"/>
+          <a:lstStyle/>
+          <a:p>
+            <a:pPr algn="ctr"/>
+            <a:endParaRPr lang="en-US"/>
+          </a:p>
+        </p:txBody>
+      </p:sp>
+      <p:cxnSp>
+        <p:nvCxnSpPr>
+          <p:cNvPr id="17" name="Straight Arrow Connector 16">
+            <a:extLst>
+              <a:ext uri="{FF2B5EF4-FFF2-40B4-BE49-F238E27FC236}">
+                <a16:creationId xmlns:a16="http://schemas.microsoft.com/office/drawing/2014/main" id="{9D2453E8-F171-5CE9-7C13-324E3A854047}"/>
+              </a:ext>
+            </a:extLst>
+          </p:cNvPr>
+          <p:cNvCxnSpPr>
+            <a:cxnSpLocks/>
+          </p:cNvCxnSpPr>
+          <p:nvPr/>
+        </p:nvCxnSpPr>
+        <p:spPr>
+          <a:xfrm>
+            <a:off x="6824472" y="2670046"/>
+            <a:ext cx="551688" cy="0"/>
+          </a:xfrm>
+          <a:prstGeom prst="straightConnector1">
+            <a:avLst/>
+          </a:prstGeom>
+          <a:ln w="38100">
+            <a:solidFill>
+              <a:srgbClr val="FF0000"/>
+            </a:solidFill>
+            <a:tailEnd type="triangle"/>
+          </a:ln>
+        </p:spPr>
+        <p:style>
+          <a:lnRef idx="1">
+            <a:schemeClr val="accent1"/>
+          </a:lnRef>
+          <a:fillRef idx="0">
+            <a:schemeClr val="accent1"/>
+          </a:fillRef>
+          <a:effectRef idx="0">
+            <a:schemeClr val="accent1"/>
+          </a:effectRef>
+          <a:fontRef idx="minor">
+            <a:schemeClr val="tx1"/>
+          </a:fontRef>
+        </p:style>
+      </p:cxnSp>
+      <p:sp>
+        <p:nvSpPr>
+          <p:cNvPr id="19" name="TextBox 18">
+            <a:extLst>
+              <a:ext uri="{FF2B5EF4-FFF2-40B4-BE49-F238E27FC236}">
+                <a16:creationId xmlns:a16="http://schemas.microsoft.com/office/drawing/2014/main" id="{A2FD0FCE-7FAC-FFE3-03DC-DD75ECB7FD13}"/>
+              </a:ext>
+            </a:extLst>
+          </p:cNvPr>
+          <p:cNvSpPr txBox="1"/>
+          <p:nvPr/>
+        </p:nvSpPr>
+        <p:spPr>
+          <a:xfrm>
+            <a:off x="6892398" y="2300713"/>
+            <a:ext cx="288862" cy="369332"/>
+          </a:xfrm>
+          <a:prstGeom prst="rect">
+            <a:avLst/>
+          </a:prstGeom>
+          <a:noFill/>
+        </p:spPr>
+        <p:txBody>
+          <a:bodyPr wrap="none" rtlCol="0">
+            <a:spAutoFit/>
+          </a:bodyPr>
+          <a:lstStyle/>
+          <a:p>
+            <a:r>
+              <a:rPr lang="en-US" dirty="0">
+                <a:solidFill>
+                  <a:srgbClr val="FF0000"/>
+                </a:solidFill>
+              </a:rPr>
+              <a:t>v</a:t>
+            </a:r>
+          </a:p>
+        </p:txBody>
+      </p:sp>
+    </p:spTree>
+    <p:extLst>
+      <p:ext uri="{BB962C8B-B14F-4D97-AF65-F5344CB8AC3E}">
+        <p14:creationId xmlns:p14="http://schemas.microsoft.com/office/powerpoint/2010/main" val="1247448808"/>
+      </p:ext>
+    </p:extLst>
+  </p:cSld>
+  <p:clrMapOvr>
+    <a:masterClrMapping/>
+  </p:clrMapOvr>
+</p:sld>
+</file>
+
+<file path=ppt/slides/slide15.xml><?xml version="1.0" encoding="utf-8"?>
+<p:sld xmlns:a="http://schemas.openxmlformats.org/drawingml/2006/main" xmlns:r="http://schemas.openxmlformats.org/officeDocument/2006/relationships" xmlns:p="http://schemas.openxmlformats.org/presentationml/2006/main">
+  <p:cSld>
+    <p:spTree>
+      <p:nvGrpSpPr>
+        <p:cNvPr id="1" name=""/>
+        <p:cNvGrpSpPr/>
+        <p:nvPr/>
+      </p:nvGrpSpPr>
+      <p:grpSpPr>
+        <a:xfrm>
+          <a:off x="0" y="0"/>
+          <a:ext cx="0" cy="0"/>
+          <a:chOff x="0" y="0"/>
+          <a:chExt cx="0" cy="0"/>
+        </a:xfrm>
+      </p:grpSpPr>
+      <p:sp>
+        <p:nvSpPr>
+          <p:cNvPr id="23" name="Rectangle 22">
+            <a:extLst>
+              <a:ext uri="{FF2B5EF4-FFF2-40B4-BE49-F238E27FC236}">
+                <a16:creationId xmlns:a16="http://schemas.microsoft.com/office/drawing/2014/main" id="{E9B3595E-FFD0-BA39-FCC8-3F4E86448FCA}"/>
+              </a:ext>
+            </a:extLst>
+          </p:cNvPr>
+          <p:cNvSpPr/>
+          <p:nvPr/>
+        </p:nvSpPr>
+        <p:spPr>
+          <a:xfrm>
+            <a:off x="2182368" y="1243584"/>
+            <a:ext cx="7488936" cy="3191256"/>
+          </a:xfrm>
+          <a:prstGeom prst="rect">
+            <a:avLst/>
+          </a:prstGeom>
+          <a:solidFill>
+            <a:schemeClr val="bg1"/>
+          </a:solidFill>
+          <a:ln>
+            <a:noFill/>
+          </a:ln>
+        </p:spPr>
+        <p:style>
+          <a:lnRef idx="2">
+            <a:schemeClr val="accent1">
+              <a:shade val="15000"/>
+            </a:schemeClr>
+          </a:lnRef>
+          <a:fillRef idx="1">
+            <a:schemeClr val="accent1"/>
+          </a:fillRef>
+          <a:effectRef idx="0">
+            <a:schemeClr val="accent1"/>
+          </a:effectRef>
+          <a:fontRef idx="minor">
+            <a:schemeClr val="lt1"/>
+          </a:fontRef>
+        </p:style>
+        <p:txBody>
+          <a:bodyPr rtlCol="0" anchor="ctr"/>
+          <a:lstStyle/>
+          <a:p>
+            <a:pPr algn="ctr"/>
+            <a:endParaRPr lang="en-US"/>
+          </a:p>
+        </p:txBody>
+      </p:sp>
+      <p:sp>
+        <p:nvSpPr>
+          <p:cNvPr id="4" name="Cube 3">
+            <a:extLst>
+              <a:ext uri="{FF2B5EF4-FFF2-40B4-BE49-F238E27FC236}">
+                <a16:creationId xmlns:a16="http://schemas.microsoft.com/office/drawing/2014/main" id="{6FF530C8-B8D8-CF2D-9FC9-D3F61AFF3C1E}"/>
+              </a:ext>
+            </a:extLst>
+          </p:cNvPr>
+          <p:cNvSpPr/>
+          <p:nvPr/>
+        </p:nvSpPr>
+        <p:spPr>
+          <a:xfrm>
+            <a:off x="4568952" y="1911096"/>
+            <a:ext cx="2212848" cy="1517904"/>
+          </a:xfrm>
+          <a:prstGeom prst="cube">
+            <a:avLst/>
+          </a:prstGeom>
+          <a:solidFill>
+            <a:schemeClr val="accent1">
+              <a:lumMod val="20000"/>
+              <a:lumOff val="80000"/>
+            </a:schemeClr>
+          </a:solidFill>
+        </p:spPr>
+        <p:style>
+          <a:lnRef idx="2">
+            <a:schemeClr val="accent1">
+              <a:shade val="15000"/>
+            </a:schemeClr>
+          </a:lnRef>
+          <a:fillRef idx="1">
+            <a:schemeClr val="accent1"/>
+          </a:fillRef>
+          <a:effectRef idx="0">
+            <a:schemeClr val="accent1"/>
+          </a:effectRef>
+          <a:fontRef idx="minor">
+            <a:schemeClr val="lt1"/>
+          </a:fontRef>
+        </p:style>
+        <p:txBody>
+          <a:bodyPr rtlCol="0" anchor="ctr"/>
+          <a:lstStyle/>
+          <a:p>
+            <a:pPr algn="ctr"/>
+            <a:endParaRPr lang="en-US"/>
+          </a:p>
+        </p:txBody>
+      </p:sp>
+      <p:sp>
+        <p:nvSpPr>
+          <p:cNvPr id="5" name="TextBox 4">
+            <a:extLst>
+              <a:ext uri="{FF2B5EF4-FFF2-40B4-BE49-F238E27FC236}">
+                <a16:creationId xmlns:a16="http://schemas.microsoft.com/office/drawing/2014/main" id="{9DB800A5-898B-76A1-23F2-09ED707F8D43}"/>
+              </a:ext>
+            </a:extLst>
+          </p:cNvPr>
+          <p:cNvSpPr txBox="1"/>
+          <p:nvPr/>
+        </p:nvSpPr>
+        <p:spPr>
+          <a:xfrm>
+            <a:off x="2612136" y="2105275"/>
+            <a:ext cx="1647374" cy="369332"/>
+          </a:xfrm>
+          <a:prstGeom prst="rect">
+            <a:avLst/>
+          </a:prstGeom>
+          <a:noFill/>
+        </p:spPr>
+        <p:txBody>
+          <a:bodyPr wrap="none" rtlCol="0">
+            <a:spAutoFit/>
+          </a:bodyPr>
+          <a:lstStyle/>
+          <a:p>
+            <a:r>
+              <a:rPr lang="en-US" dirty="0"/>
+              <a:t>Sound Wave In</a:t>
+            </a:r>
+          </a:p>
+        </p:txBody>
+      </p:sp>
+      <p:cxnSp>
+        <p:nvCxnSpPr>
+          <p:cNvPr id="7" name="Straight Arrow Connector 6">
+            <a:extLst>
+              <a:ext uri="{FF2B5EF4-FFF2-40B4-BE49-F238E27FC236}">
+                <a16:creationId xmlns:a16="http://schemas.microsoft.com/office/drawing/2014/main" id="{53B41E67-32F0-8666-BCC8-E8CBDD178FD5}"/>
+              </a:ext>
+            </a:extLst>
+          </p:cNvPr>
+          <p:cNvCxnSpPr>
+            <a:cxnSpLocks/>
+          </p:cNvCxnSpPr>
+          <p:nvPr/>
+        </p:nvCxnSpPr>
+        <p:spPr>
+          <a:xfrm>
+            <a:off x="2815800" y="2794599"/>
+            <a:ext cx="1380744" cy="0"/>
+          </a:xfrm>
+          <a:prstGeom prst="straightConnector1">
+            <a:avLst/>
+          </a:prstGeom>
+          <a:ln w="57150">
+            <a:solidFill>
+              <a:srgbClr val="FF0000"/>
+            </a:solidFill>
+            <a:tailEnd type="triangle"/>
+          </a:ln>
+        </p:spPr>
+        <p:style>
+          <a:lnRef idx="1">
+            <a:schemeClr val="accent1"/>
+          </a:lnRef>
+          <a:fillRef idx="0">
+            <a:schemeClr val="accent1"/>
+          </a:fillRef>
+          <a:effectRef idx="0">
+            <a:schemeClr val="accent1"/>
+          </a:effectRef>
+          <a:fontRef idx="minor">
+            <a:schemeClr val="tx1"/>
+          </a:fontRef>
+        </p:style>
+      </p:cxnSp>
+      <p:cxnSp>
+        <p:nvCxnSpPr>
+          <p:cNvPr id="8" name="Straight Arrow Connector 7">
+            <a:extLst>
+              <a:ext uri="{FF2B5EF4-FFF2-40B4-BE49-F238E27FC236}">
+                <a16:creationId xmlns:a16="http://schemas.microsoft.com/office/drawing/2014/main" id="{F9F6F487-2D99-7F36-5867-097A34B08853}"/>
+              </a:ext>
+            </a:extLst>
+          </p:cNvPr>
+          <p:cNvCxnSpPr>
+            <a:cxnSpLocks/>
+          </p:cNvCxnSpPr>
+          <p:nvPr/>
+        </p:nvCxnSpPr>
+        <p:spPr>
+          <a:xfrm>
+            <a:off x="7000098" y="2794599"/>
+            <a:ext cx="1380744" cy="0"/>
+          </a:xfrm>
+          <a:prstGeom prst="straightConnector1">
+            <a:avLst/>
+          </a:prstGeom>
+          <a:ln w="57150">
+            <a:solidFill>
+              <a:srgbClr val="FF0000"/>
+            </a:solidFill>
+            <a:tailEnd type="triangle"/>
+          </a:ln>
+        </p:spPr>
+        <p:style>
+          <a:lnRef idx="1">
+            <a:schemeClr val="accent1"/>
+          </a:lnRef>
+          <a:fillRef idx="0">
+            <a:schemeClr val="accent1"/>
+          </a:fillRef>
+          <a:effectRef idx="0">
+            <a:schemeClr val="accent1"/>
+          </a:effectRef>
+          <a:fontRef idx="minor">
+            <a:schemeClr val="tx1"/>
+          </a:fontRef>
+        </p:style>
+      </p:cxnSp>
+      <mc:AlternateContent xmlns:mc="http://schemas.openxmlformats.org/markup-compatibility/2006">
+        <mc:Choice xmlns:a14="http://schemas.microsoft.com/office/drawing/2010/main" Requires="a14">
+          <p:sp>
+            <p:nvSpPr>
+              <p:cNvPr id="9" name="TextBox 8">
+                <a:extLst>
+                  <a:ext uri="{FF2B5EF4-FFF2-40B4-BE49-F238E27FC236}">
+                    <a16:creationId xmlns:a16="http://schemas.microsoft.com/office/drawing/2014/main" id="{A2652880-E3BA-1526-C57B-FAF4325E25A5}"/>
+                  </a:ext>
+                </a:extLst>
+              </p:cNvPr>
+              <p:cNvSpPr txBox="1"/>
+              <p:nvPr/>
+            </p:nvSpPr>
+            <p:spPr>
+              <a:xfrm>
+                <a:off x="2612136" y="2996028"/>
+                <a:ext cx="1316130" cy="369332"/>
+              </a:xfrm>
+              <a:prstGeom prst="rect">
+                <a:avLst/>
+              </a:prstGeom>
+              <a:noFill/>
+            </p:spPr>
+            <p:txBody>
+              <a:bodyPr wrap="none" rtlCol="0">
+                <a:spAutoFit/>
+              </a:bodyPr>
+              <a:lstStyle/>
+              <a:p>
+                <a:r>
+                  <a:rPr lang="en-US" dirty="0">
+                    <a:sym typeface="Symbol" panose="05050102010706020507" pitchFamily="18" charset="2"/>
+                  </a:rPr>
+                  <a:t></a:t>
+                </a:r>
+                <a14:m>
+                  <m:oMath xmlns:m="http://schemas.openxmlformats.org/officeDocument/2006/math">
+                    <m:sSub>
+                      <m:sSubPr>
+                        <m:ctrlPr>
+                          <a:rPr lang="en-US" i="1">
+                            <a:latin typeface="Cambria Math" panose="02040503050406030204" pitchFamily="18" charset="0"/>
+                            <a:ea typeface="Cambria Math" panose="02040503050406030204" pitchFamily="18" charset="0"/>
+                            <a:sym typeface="Symbol" panose="05050102010706020507" pitchFamily="18" charset="2"/>
+                          </a:rPr>
+                        </m:ctrlPr>
+                      </m:sSubPr>
+                      <m:e>
+                        <m:r>
+                          <a:rPr lang="en-US" i="1">
+                            <a:latin typeface="Cambria Math" panose="02040503050406030204" pitchFamily="18" charset="0"/>
+                            <a:ea typeface="Cambria Math" panose="02040503050406030204" pitchFamily="18" charset="0"/>
+                            <a:sym typeface="Symbol" panose="05050102010706020507" pitchFamily="18" charset="2"/>
+                          </a:rPr>
+                          <m:t>𝜌</m:t>
+                        </m:r>
+                      </m:e>
+                      <m:sub>
+                        <m:r>
+                          <a:rPr lang="en-US" i="1">
+                            <a:latin typeface="Cambria Math" panose="02040503050406030204" pitchFamily="18" charset="0"/>
+                            <a:ea typeface="Cambria Math" panose="02040503050406030204" pitchFamily="18" charset="0"/>
+                            <a:sym typeface="Symbol" panose="05050102010706020507" pitchFamily="18" charset="2"/>
+                          </a:rPr>
+                          <m:t>𝑖𝑛</m:t>
+                        </m:r>
+                      </m:sub>
+                    </m:sSub>
+                    <m:r>
+                      <a:rPr lang="en-US" i="1">
+                        <a:latin typeface="Cambria Math" panose="02040503050406030204" pitchFamily="18" charset="0"/>
+                        <a:ea typeface="Cambria Math" panose="02040503050406030204" pitchFamily="18" charset="0"/>
+                        <a:sym typeface="Symbol" panose="05050102010706020507" pitchFamily="18" charset="2"/>
+                      </a:rPr>
+                      <m:t>,</m:t>
+                    </m:r>
+                    <m:sSub>
+                      <m:sSubPr>
+                        <m:ctrlPr>
+                          <a:rPr lang="en-US" i="1">
+                            <a:latin typeface="Cambria Math" panose="02040503050406030204" pitchFamily="18" charset="0"/>
+                            <a:ea typeface="Cambria Math" panose="02040503050406030204" pitchFamily="18" charset="0"/>
+                            <a:sym typeface="Symbol" panose="05050102010706020507" pitchFamily="18" charset="2"/>
+                          </a:rPr>
+                        </m:ctrlPr>
+                      </m:sSubPr>
+                      <m:e>
+                        <m:r>
+                          <a:rPr lang="en-US" i="1">
+                            <a:latin typeface="Cambria Math" panose="02040503050406030204" pitchFamily="18" charset="0"/>
+                            <a:ea typeface="Cambria Math" panose="02040503050406030204" pitchFamily="18" charset="0"/>
+                            <a:sym typeface="Symbol" panose="05050102010706020507" pitchFamily="18" charset="2"/>
+                          </a:rPr>
+                          <m:t>𝑣</m:t>
+                        </m:r>
+                      </m:e>
+                      <m:sub>
+                        <m:r>
+                          <a:rPr lang="en-US" i="1">
+                            <a:latin typeface="Cambria Math" panose="02040503050406030204" pitchFamily="18" charset="0"/>
+                            <a:ea typeface="Cambria Math" panose="02040503050406030204" pitchFamily="18" charset="0"/>
+                            <a:sym typeface="Symbol" panose="05050102010706020507" pitchFamily="18" charset="2"/>
+                          </a:rPr>
+                          <m:t>𝑖𝑛</m:t>
+                        </m:r>
+                      </m:sub>
+                    </m:sSub>
+                    <m:r>
+                      <a:rPr lang="en-US" i="1">
+                        <a:latin typeface="Cambria Math" panose="02040503050406030204" pitchFamily="18" charset="0"/>
+                        <a:ea typeface="Cambria Math" panose="02040503050406030204" pitchFamily="18" charset="0"/>
+                        <a:sym typeface="Symbol" panose="05050102010706020507" pitchFamily="18" charset="2"/>
+                      </a:rPr>
+                      <m:t>,</m:t>
+                    </m:r>
+                    <m:sSub>
+                      <m:sSubPr>
+                        <m:ctrlPr>
+                          <a:rPr lang="en-US" i="1">
+                            <a:latin typeface="Cambria Math" panose="02040503050406030204" pitchFamily="18" charset="0"/>
+                            <a:ea typeface="Cambria Math" panose="02040503050406030204" pitchFamily="18" charset="0"/>
+                            <a:sym typeface="Symbol" panose="05050102010706020507" pitchFamily="18" charset="2"/>
+                          </a:rPr>
+                        </m:ctrlPr>
+                      </m:sSubPr>
+                      <m:e>
+                        <m:r>
+                          <a:rPr lang="en-US" i="1">
+                            <a:latin typeface="Cambria Math" panose="02040503050406030204" pitchFamily="18" charset="0"/>
+                            <a:ea typeface="Cambria Math" panose="02040503050406030204" pitchFamily="18" charset="0"/>
+                            <a:sym typeface="Symbol" panose="05050102010706020507" pitchFamily="18" charset="2"/>
+                          </a:rPr>
+                          <m:t>𝑇</m:t>
+                        </m:r>
+                      </m:e>
+                      <m:sub>
+                        <m:r>
+                          <a:rPr lang="en-US" i="1">
+                            <a:latin typeface="Cambria Math" panose="02040503050406030204" pitchFamily="18" charset="0"/>
+                            <a:ea typeface="Cambria Math" panose="02040503050406030204" pitchFamily="18" charset="0"/>
+                            <a:sym typeface="Symbol" panose="05050102010706020507" pitchFamily="18" charset="2"/>
+                          </a:rPr>
+                          <m:t>𝑖𝑛</m:t>
+                        </m:r>
+                      </m:sub>
+                    </m:sSub>
+                  </m:oMath>
+                </a14:m>
+                <a:endParaRPr lang="en-US" dirty="0"/>
+              </a:p>
+            </p:txBody>
+          </p:sp>
+        </mc:Choice>
+        <mc:Fallback>
+          <p:sp>
+            <p:nvSpPr>
+              <p:cNvPr id="9" name="TextBox 8">
+                <a:extLst>
+                  <a:ext uri="{FF2B5EF4-FFF2-40B4-BE49-F238E27FC236}">
+                    <a16:creationId xmlns:a16="http://schemas.microsoft.com/office/drawing/2014/main" id="{A2652880-E3BA-1526-C57B-FAF4325E25A5}"/>
+                  </a:ext>
+                </a:extLst>
+              </p:cNvPr>
+              <p:cNvSpPr txBox="1">
+                <a:spLocks noRot="1" noChangeAspect="1" noMove="1" noResize="1" noEditPoints="1" noAdjustHandles="1" noChangeArrowheads="1" noChangeShapeType="1" noTextEdit="1"/>
+              </p:cNvSpPr>
+              <p:nvPr/>
+            </p:nvSpPr>
+            <p:spPr>
+              <a:xfrm>
+                <a:off x="2612136" y="2996028"/>
+                <a:ext cx="1316130" cy="369332"/>
+              </a:xfrm>
+              <a:prstGeom prst="rect">
+                <a:avLst/>
+              </a:prstGeom>
+              <a:blipFill>
+                <a:blip r:embed="rId2"/>
+                <a:stretch>
+                  <a:fillRect l="-4186" t="-11475" b="-21311"/>
+                </a:stretch>
+              </a:blipFill>
+            </p:spPr>
+            <p:txBody>
+              <a:bodyPr/>
+              <a:lstStyle/>
+              <a:p>
+                <a:r>
+                  <a:rPr lang="en-US">
+                    <a:noFill/>
+                  </a:rPr>
+                  <a:t> </a:t>
+                </a:r>
+              </a:p>
+            </p:txBody>
+          </p:sp>
+        </mc:Fallback>
+      </mc:AlternateContent>
+      <mc:AlternateContent xmlns:mc="http://schemas.openxmlformats.org/markup-compatibility/2006">
+        <mc:Choice xmlns:a14="http://schemas.microsoft.com/office/drawing/2010/main" Requires="a14">
+          <p:sp>
+            <p:nvSpPr>
+              <p:cNvPr id="10" name="TextBox 9">
+                <a:extLst>
+                  <a:ext uri="{FF2B5EF4-FFF2-40B4-BE49-F238E27FC236}">
+                    <a16:creationId xmlns:a16="http://schemas.microsoft.com/office/drawing/2014/main" id="{329EBA03-A8F7-8263-C359-5DE180645ECE}"/>
+                  </a:ext>
+                </a:extLst>
+              </p:cNvPr>
+              <p:cNvSpPr txBox="1"/>
+              <p:nvPr/>
+            </p:nvSpPr>
+            <p:spPr>
+              <a:xfrm>
+                <a:off x="7000098" y="2996028"/>
+                <a:ext cx="1662378" cy="369332"/>
+              </a:xfrm>
+              <a:prstGeom prst="rect">
+                <a:avLst/>
+              </a:prstGeom>
+              <a:noFill/>
+            </p:spPr>
+            <p:txBody>
+              <a:bodyPr wrap="none" rtlCol="0">
+                <a:spAutoFit/>
+              </a:bodyPr>
+              <a:lstStyle/>
+              <a:p>
+                <a:r>
+                  <a:rPr lang="en-US" dirty="0">
+                    <a:sym typeface="Symbol" panose="05050102010706020507" pitchFamily="18" charset="2"/>
+                  </a:rPr>
+                  <a:t></a:t>
+                </a:r>
+                <a14:m>
+                  <m:oMath xmlns:m="http://schemas.openxmlformats.org/officeDocument/2006/math">
+                    <m:sSub>
+                      <m:sSubPr>
+                        <m:ctrlPr>
+                          <a:rPr lang="en-US" i="1">
+                            <a:latin typeface="Cambria Math" panose="02040503050406030204" pitchFamily="18" charset="0"/>
+                            <a:ea typeface="Cambria Math" panose="02040503050406030204" pitchFamily="18" charset="0"/>
+                            <a:sym typeface="Symbol" panose="05050102010706020507" pitchFamily="18" charset="2"/>
+                          </a:rPr>
+                        </m:ctrlPr>
+                      </m:sSubPr>
+                      <m:e>
+                        <m:r>
+                          <a:rPr lang="en-US" i="1">
+                            <a:latin typeface="Cambria Math" panose="02040503050406030204" pitchFamily="18" charset="0"/>
+                            <a:ea typeface="Cambria Math" panose="02040503050406030204" pitchFamily="18" charset="0"/>
+                            <a:sym typeface="Symbol" panose="05050102010706020507" pitchFamily="18" charset="2"/>
+                          </a:rPr>
+                          <m:t>𝜌</m:t>
+                        </m:r>
+                      </m:e>
+                      <m:sub>
+                        <m:r>
+                          <a:rPr lang="en-US" i="1">
+                            <a:latin typeface="Cambria Math" panose="02040503050406030204" pitchFamily="18" charset="0"/>
+                            <a:ea typeface="Cambria Math" panose="02040503050406030204" pitchFamily="18" charset="0"/>
+                            <a:sym typeface="Symbol" panose="05050102010706020507" pitchFamily="18" charset="2"/>
+                          </a:rPr>
+                          <m:t>𝑜𝑢𝑡</m:t>
+                        </m:r>
+                      </m:sub>
+                    </m:sSub>
+                    <m:r>
+                      <a:rPr lang="en-US" i="1">
+                        <a:latin typeface="Cambria Math" panose="02040503050406030204" pitchFamily="18" charset="0"/>
+                        <a:ea typeface="Cambria Math" panose="02040503050406030204" pitchFamily="18" charset="0"/>
+                        <a:sym typeface="Symbol" panose="05050102010706020507" pitchFamily="18" charset="2"/>
+                      </a:rPr>
+                      <m:t>,</m:t>
+                    </m:r>
+                    <m:sSub>
+                      <m:sSubPr>
+                        <m:ctrlPr>
+                          <a:rPr lang="en-US" i="1">
+                            <a:latin typeface="Cambria Math" panose="02040503050406030204" pitchFamily="18" charset="0"/>
+                            <a:ea typeface="Cambria Math" panose="02040503050406030204" pitchFamily="18" charset="0"/>
+                            <a:sym typeface="Symbol" panose="05050102010706020507" pitchFamily="18" charset="2"/>
+                          </a:rPr>
+                        </m:ctrlPr>
+                      </m:sSubPr>
+                      <m:e>
+                        <m:r>
+                          <a:rPr lang="en-US" i="1">
+                            <a:latin typeface="Cambria Math" panose="02040503050406030204" pitchFamily="18" charset="0"/>
+                            <a:ea typeface="Cambria Math" panose="02040503050406030204" pitchFamily="18" charset="0"/>
+                            <a:sym typeface="Symbol" panose="05050102010706020507" pitchFamily="18" charset="2"/>
+                          </a:rPr>
+                          <m:t>𝑣</m:t>
+                        </m:r>
+                      </m:e>
+                      <m:sub>
+                        <m:r>
+                          <a:rPr lang="en-US" i="1">
+                            <a:latin typeface="Cambria Math" panose="02040503050406030204" pitchFamily="18" charset="0"/>
+                            <a:ea typeface="Cambria Math" panose="02040503050406030204" pitchFamily="18" charset="0"/>
+                            <a:sym typeface="Symbol" panose="05050102010706020507" pitchFamily="18" charset="2"/>
+                          </a:rPr>
+                          <m:t>𝑜𝑢𝑡</m:t>
+                        </m:r>
+                      </m:sub>
+                    </m:sSub>
+                    <m:r>
+                      <a:rPr lang="en-US" i="1">
+                        <a:latin typeface="Cambria Math" panose="02040503050406030204" pitchFamily="18" charset="0"/>
+                        <a:ea typeface="Cambria Math" panose="02040503050406030204" pitchFamily="18" charset="0"/>
+                        <a:sym typeface="Symbol" panose="05050102010706020507" pitchFamily="18" charset="2"/>
+                      </a:rPr>
+                      <m:t>,</m:t>
+                    </m:r>
+                    <m:sSub>
+                      <m:sSubPr>
+                        <m:ctrlPr>
+                          <a:rPr lang="en-US" i="1">
+                            <a:latin typeface="Cambria Math" panose="02040503050406030204" pitchFamily="18" charset="0"/>
+                            <a:ea typeface="Cambria Math" panose="02040503050406030204" pitchFamily="18" charset="0"/>
+                            <a:sym typeface="Symbol" panose="05050102010706020507" pitchFamily="18" charset="2"/>
+                          </a:rPr>
+                        </m:ctrlPr>
+                      </m:sSubPr>
+                      <m:e>
+                        <m:r>
+                          <a:rPr lang="en-US" i="1">
+                            <a:latin typeface="Cambria Math" panose="02040503050406030204" pitchFamily="18" charset="0"/>
+                            <a:ea typeface="Cambria Math" panose="02040503050406030204" pitchFamily="18" charset="0"/>
+                            <a:sym typeface="Symbol" panose="05050102010706020507" pitchFamily="18" charset="2"/>
+                          </a:rPr>
+                          <m:t>𝑇</m:t>
+                        </m:r>
+                      </m:e>
+                      <m:sub>
+                        <m:r>
+                          <a:rPr lang="en-US" i="1">
+                            <a:latin typeface="Cambria Math" panose="02040503050406030204" pitchFamily="18" charset="0"/>
+                            <a:ea typeface="Cambria Math" panose="02040503050406030204" pitchFamily="18" charset="0"/>
+                            <a:sym typeface="Symbol" panose="05050102010706020507" pitchFamily="18" charset="2"/>
+                          </a:rPr>
+                          <m:t>𝑜𝑢𝑡</m:t>
+                        </m:r>
+                      </m:sub>
+                    </m:sSub>
+                  </m:oMath>
+                </a14:m>
+                <a:endParaRPr lang="en-US" dirty="0"/>
+              </a:p>
+            </p:txBody>
+          </p:sp>
+        </mc:Choice>
+        <mc:Fallback>
+          <p:sp>
+            <p:nvSpPr>
+              <p:cNvPr id="10" name="TextBox 9">
+                <a:extLst>
+                  <a:ext uri="{FF2B5EF4-FFF2-40B4-BE49-F238E27FC236}">
+                    <a16:creationId xmlns:a16="http://schemas.microsoft.com/office/drawing/2014/main" id="{329EBA03-A8F7-8263-C359-5DE180645ECE}"/>
+                  </a:ext>
+                </a:extLst>
+              </p:cNvPr>
+              <p:cNvSpPr txBox="1">
+                <a:spLocks noRot="1" noChangeAspect="1" noMove="1" noResize="1" noEditPoints="1" noAdjustHandles="1" noChangeArrowheads="1" noChangeShapeType="1" noTextEdit="1"/>
+              </p:cNvSpPr>
+              <p:nvPr/>
+            </p:nvSpPr>
+            <p:spPr>
+              <a:xfrm>
+                <a:off x="7000098" y="2996028"/>
+                <a:ext cx="1662378" cy="369332"/>
+              </a:xfrm>
+              <a:prstGeom prst="rect">
+                <a:avLst/>
+              </a:prstGeom>
+              <a:blipFill>
+                <a:blip r:embed="rId3"/>
+                <a:stretch>
+                  <a:fillRect l="-2930" t="-11475" b="-21311"/>
+                </a:stretch>
+              </a:blipFill>
+            </p:spPr>
+            <p:txBody>
+              <a:bodyPr/>
+              <a:lstStyle/>
+              <a:p>
+                <a:r>
+                  <a:rPr lang="en-US">
+                    <a:noFill/>
+                  </a:rPr>
+                  <a:t> </a:t>
+                </a:r>
+              </a:p>
+            </p:txBody>
+          </p:sp>
+        </mc:Fallback>
+      </mc:AlternateContent>
+      <p:cxnSp>
+        <p:nvCxnSpPr>
+          <p:cNvPr id="12" name="Straight Connector 11">
+            <a:extLst>
+              <a:ext uri="{FF2B5EF4-FFF2-40B4-BE49-F238E27FC236}">
+                <a16:creationId xmlns:a16="http://schemas.microsoft.com/office/drawing/2014/main" id="{AAC7E8B9-6AB3-FFE6-52BA-931BFBB171E9}"/>
+              </a:ext>
+            </a:extLst>
+          </p:cNvPr>
+          <p:cNvCxnSpPr>
+            <a:cxnSpLocks/>
+          </p:cNvCxnSpPr>
+          <p:nvPr/>
+        </p:nvCxnSpPr>
+        <p:spPr>
+          <a:xfrm>
+            <a:off x="4943856" y="1911096"/>
+            <a:ext cx="0" cy="1145524"/>
+          </a:xfrm>
+          <a:prstGeom prst="line">
+            <a:avLst/>
+          </a:prstGeom>
+          <a:ln>
+            <a:prstDash val="dash"/>
+          </a:ln>
+        </p:spPr>
+        <p:style>
+          <a:lnRef idx="1">
+            <a:schemeClr val="accent1"/>
+          </a:lnRef>
+          <a:fillRef idx="0">
+            <a:schemeClr val="accent1"/>
+          </a:fillRef>
+          <a:effectRef idx="0">
+            <a:schemeClr val="accent1"/>
+          </a:effectRef>
+          <a:fontRef idx="minor">
+            <a:schemeClr val="tx1"/>
+          </a:fontRef>
+        </p:style>
+      </p:cxnSp>
+      <p:cxnSp>
+        <p:nvCxnSpPr>
+          <p:cNvPr id="13" name="Straight Connector 12">
+            <a:extLst>
+              <a:ext uri="{FF2B5EF4-FFF2-40B4-BE49-F238E27FC236}">
+                <a16:creationId xmlns:a16="http://schemas.microsoft.com/office/drawing/2014/main" id="{88EA8E0F-34FE-7F7D-0D65-F49892AABB9A}"/>
+              </a:ext>
+            </a:extLst>
+          </p:cNvPr>
+          <p:cNvCxnSpPr>
+            <a:cxnSpLocks/>
+          </p:cNvCxnSpPr>
+          <p:nvPr/>
+        </p:nvCxnSpPr>
+        <p:spPr>
+          <a:xfrm flipH="1">
+            <a:off x="4943856" y="3044428"/>
+            <a:ext cx="1837944" cy="0"/>
+          </a:xfrm>
+          <a:prstGeom prst="line">
+            <a:avLst/>
+          </a:prstGeom>
+          <a:ln>
+            <a:prstDash val="dash"/>
+          </a:ln>
+        </p:spPr>
+        <p:style>
+          <a:lnRef idx="1">
+            <a:schemeClr val="accent1"/>
+          </a:lnRef>
+          <a:fillRef idx="0">
+            <a:schemeClr val="accent1"/>
+          </a:fillRef>
+          <a:effectRef idx="0">
+            <a:schemeClr val="accent1"/>
+          </a:effectRef>
+          <a:fontRef idx="minor">
+            <a:schemeClr val="tx1"/>
+          </a:fontRef>
+        </p:style>
+      </p:cxnSp>
+      <p:cxnSp>
+        <p:nvCxnSpPr>
+          <p:cNvPr id="17" name="Straight Connector 16">
+            <a:extLst>
+              <a:ext uri="{FF2B5EF4-FFF2-40B4-BE49-F238E27FC236}">
+                <a16:creationId xmlns:a16="http://schemas.microsoft.com/office/drawing/2014/main" id="{5539441F-EAA9-837A-93F1-CCFB58048557}"/>
+              </a:ext>
+            </a:extLst>
+          </p:cNvPr>
+          <p:cNvCxnSpPr>
+            <a:cxnSpLocks/>
+          </p:cNvCxnSpPr>
+          <p:nvPr/>
+        </p:nvCxnSpPr>
+        <p:spPr>
+          <a:xfrm flipH="1">
+            <a:off x="4568952" y="3056620"/>
+            <a:ext cx="374904" cy="369332"/>
+          </a:xfrm>
+          <a:prstGeom prst="line">
+            <a:avLst/>
+          </a:prstGeom>
+          <a:ln>
+            <a:prstDash val="dash"/>
+          </a:ln>
+        </p:spPr>
+        <p:style>
+          <a:lnRef idx="1">
+            <a:schemeClr val="accent1"/>
+          </a:lnRef>
+          <a:fillRef idx="0">
+            <a:schemeClr val="accent1"/>
+          </a:fillRef>
+          <a:effectRef idx="0">
+            <a:schemeClr val="accent1"/>
+          </a:effectRef>
+          <a:fontRef idx="minor">
+            <a:schemeClr val="tx1"/>
+          </a:fontRef>
+        </p:style>
+      </p:cxnSp>
+      <p:sp>
+        <p:nvSpPr>
+          <p:cNvPr id="19" name="TextBox 18">
+            <a:extLst>
+              <a:ext uri="{FF2B5EF4-FFF2-40B4-BE49-F238E27FC236}">
+                <a16:creationId xmlns:a16="http://schemas.microsoft.com/office/drawing/2014/main" id="{30529782-63D2-9A27-B18E-5660AC840788}"/>
+              </a:ext>
+            </a:extLst>
+          </p:cNvPr>
+          <p:cNvSpPr txBox="1"/>
+          <p:nvPr/>
+        </p:nvSpPr>
+        <p:spPr>
+          <a:xfrm>
+            <a:off x="6464084" y="2560748"/>
+            <a:ext cx="320922" cy="369332"/>
+          </a:xfrm>
+          <a:prstGeom prst="rect">
+            <a:avLst/>
+          </a:prstGeom>
+          <a:noFill/>
+        </p:spPr>
+        <p:txBody>
+          <a:bodyPr wrap="none" rtlCol="0">
+            <a:spAutoFit/>
+          </a:bodyPr>
+          <a:lstStyle/>
+          <a:p>
+            <a:r>
+              <a:rPr lang="en-US" dirty="0"/>
+              <a:t>A</a:t>
+            </a:r>
+          </a:p>
+        </p:txBody>
+      </p:sp>
+      <p:sp>
+        <p:nvSpPr>
+          <p:cNvPr id="20" name="TextBox 19">
+            <a:extLst>
+              <a:ext uri="{FF2B5EF4-FFF2-40B4-BE49-F238E27FC236}">
+                <a16:creationId xmlns:a16="http://schemas.microsoft.com/office/drawing/2014/main" id="{76403000-451C-72F1-9B6E-1F8C53CF126C}"/>
+              </a:ext>
+            </a:extLst>
+          </p:cNvPr>
+          <p:cNvSpPr txBox="1"/>
+          <p:nvPr/>
+        </p:nvSpPr>
+        <p:spPr>
+          <a:xfrm>
+            <a:off x="7000098" y="2105275"/>
+            <a:ext cx="1833322" cy="369332"/>
+          </a:xfrm>
+          <a:prstGeom prst="rect">
+            <a:avLst/>
+          </a:prstGeom>
+          <a:noFill/>
+        </p:spPr>
+        <p:txBody>
+          <a:bodyPr wrap="none" rtlCol="0">
+            <a:spAutoFit/>
+          </a:bodyPr>
+          <a:lstStyle/>
+          <a:p>
+            <a:r>
+              <a:rPr lang="en-US" dirty="0"/>
+              <a:t>Sound Wave Out</a:t>
+            </a:r>
+          </a:p>
+        </p:txBody>
+      </p:sp>
+      <p:sp>
+        <p:nvSpPr>
+          <p:cNvPr id="21" name="TextBox 20">
+            <a:extLst>
+              <a:ext uri="{FF2B5EF4-FFF2-40B4-BE49-F238E27FC236}">
+                <a16:creationId xmlns:a16="http://schemas.microsoft.com/office/drawing/2014/main" id="{815EF259-62C8-1D0A-772E-A1AD883B08CB}"/>
+              </a:ext>
+            </a:extLst>
+          </p:cNvPr>
+          <p:cNvSpPr txBox="1"/>
+          <p:nvPr/>
+        </p:nvSpPr>
+        <p:spPr>
+          <a:xfrm>
+            <a:off x="4962144" y="3543348"/>
+            <a:ext cx="1366400" cy="369332"/>
+          </a:xfrm>
+          <a:prstGeom prst="rect">
+            <a:avLst/>
+          </a:prstGeom>
+          <a:noFill/>
+        </p:spPr>
+        <p:txBody>
+          <a:bodyPr wrap="none" rtlCol="0">
+            <a:spAutoFit/>
+          </a:bodyPr>
+          <a:lstStyle/>
+          <a:p>
+            <a:r>
+              <a:rPr lang="en-US" dirty="0"/>
+              <a:t>Parcel of Air</a:t>
+            </a:r>
+          </a:p>
+        </p:txBody>
+      </p:sp>
+    </p:spTree>
+    <p:extLst>
+      <p:ext uri="{BB962C8B-B14F-4D97-AF65-F5344CB8AC3E}">
+        <p14:creationId xmlns:p14="http://schemas.microsoft.com/office/powerpoint/2010/main" val="4168904192"/>
+      </p:ext>
+    </p:extLst>
+  </p:cSld>
+  <p:clrMapOvr>
+    <a:masterClrMapping/>
+  </p:clrMapOvr>
+</p:sld>
+</file>
+
+<file path=ppt/slides/slide16.xml><?xml version="1.0" encoding="utf-8"?>
+<p:sld xmlns:a="http://schemas.openxmlformats.org/drawingml/2006/main" xmlns:r="http://schemas.openxmlformats.org/officeDocument/2006/relationships" xmlns:p="http://schemas.openxmlformats.org/presentationml/2006/main">
+  <p:cSld>
+    <p:spTree>
+      <p:nvGrpSpPr>
+        <p:cNvPr id="1" name="">
+          <a:extLst>
+            <a:ext uri="{FF2B5EF4-FFF2-40B4-BE49-F238E27FC236}">
+              <a16:creationId xmlns:a16="http://schemas.microsoft.com/office/drawing/2014/main" id="{D9E86AD2-BCB5-92CD-EE00-289A1BFC3583}"/>
+            </a:ext>
+          </a:extLst>
+        </p:cNvPr>
+        <p:cNvGrpSpPr/>
+        <p:nvPr/>
+      </p:nvGrpSpPr>
+      <p:grpSpPr>
+        <a:xfrm>
+          <a:off x="0" y="0"/>
+          <a:ext cx="0" cy="0"/>
+          <a:chOff x="0" y="0"/>
+          <a:chExt cx="0" cy="0"/>
+        </a:xfrm>
+      </p:grpSpPr>
+      <p:sp>
+        <p:nvSpPr>
+          <p:cNvPr id="23" name="Rectangle 22">
+            <a:extLst>
+              <a:ext uri="{FF2B5EF4-FFF2-40B4-BE49-F238E27FC236}">
+                <a16:creationId xmlns:a16="http://schemas.microsoft.com/office/drawing/2014/main" id="{D3BE6317-D1B2-E0D8-8603-E3F69B778159}"/>
+              </a:ext>
+            </a:extLst>
+          </p:cNvPr>
+          <p:cNvSpPr/>
+          <p:nvPr/>
+        </p:nvSpPr>
+        <p:spPr>
+          <a:xfrm>
+            <a:off x="2250948" y="1198971"/>
+            <a:ext cx="7488936" cy="3191256"/>
+          </a:xfrm>
+          <a:prstGeom prst="rect">
+            <a:avLst/>
+          </a:prstGeom>
+          <a:solidFill>
+            <a:schemeClr val="bg1"/>
+          </a:solidFill>
+          <a:ln>
+            <a:noFill/>
+          </a:ln>
+        </p:spPr>
+        <p:style>
+          <a:lnRef idx="2">
+            <a:schemeClr val="accent1">
+              <a:shade val="15000"/>
+            </a:schemeClr>
+          </a:lnRef>
+          <a:fillRef idx="1">
+            <a:schemeClr val="accent1"/>
+          </a:fillRef>
+          <a:effectRef idx="0">
+            <a:schemeClr val="accent1"/>
+          </a:effectRef>
+          <a:fontRef idx="minor">
+            <a:schemeClr val="lt1"/>
+          </a:fontRef>
+        </p:style>
+        <p:txBody>
+          <a:bodyPr rtlCol="0" anchor="ctr"/>
+          <a:lstStyle/>
+          <a:p>
+            <a:pPr algn="ctr"/>
+            <a:r>
+              <a:rPr lang="en-US" dirty="0"/>
+              <a:t>P</a:t>
+            </a:r>
+          </a:p>
+        </p:txBody>
+      </p:sp>
+      <p:sp>
+        <p:nvSpPr>
+          <p:cNvPr id="4" name="Cube 3">
+            <a:extLst>
+              <a:ext uri="{FF2B5EF4-FFF2-40B4-BE49-F238E27FC236}">
+                <a16:creationId xmlns:a16="http://schemas.microsoft.com/office/drawing/2014/main" id="{59DFCA99-EC97-278E-AAE4-8423188FEC52}"/>
+              </a:ext>
+            </a:extLst>
+          </p:cNvPr>
+          <p:cNvSpPr/>
+          <p:nvPr/>
+        </p:nvSpPr>
+        <p:spPr>
+          <a:xfrm>
+            <a:off x="4568952" y="1911096"/>
+            <a:ext cx="2212848" cy="1517904"/>
+          </a:xfrm>
+          <a:prstGeom prst="cube">
+            <a:avLst/>
+          </a:prstGeom>
+          <a:solidFill>
+            <a:schemeClr val="accent1">
+              <a:lumMod val="20000"/>
+              <a:lumOff val="80000"/>
+            </a:schemeClr>
+          </a:solidFill>
+        </p:spPr>
+        <p:style>
+          <a:lnRef idx="2">
+            <a:schemeClr val="accent1">
+              <a:shade val="15000"/>
+            </a:schemeClr>
+          </a:lnRef>
+          <a:fillRef idx="1">
+            <a:schemeClr val="accent1"/>
+          </a:fillRef>
+          <a:effectRef idx="0">
+            <a:schemeClr val="accent1"/>
+          </a:effectRef>
+          <a:fontRef idx="minor">
+            <a:schemeClr val="lt1"/>
+          </a:fontRef>
+        </p:style>
+        <p:txBody>
+          <a:bodyPr rtlCol="0" anchor="ctr"/>
+          <a:lstStyle/>
+          <a:p>
+            <a:pPr algn="ctr"/>
+            <a:endParaRPr lang="en-US"/>
+          </a:p>
+        </p:txBody>
+      </p:sp>
+      <p:cxnSp>
+        <p:nvCxnSpPr>
+          <p:cNvPr id="7" name="Straight Arrow Connector 6">
+            <a:extLst>
+              <a:ext uri="{FF2B5EF4-FFF2-40B4-BE49-F238E27FC236}">
+                <a16:creationId xmlns:a16="http://schemas.microsoft.com/office/drawing/2014/main" id="{227D5FB6-7D29-746E-1F5E-AED189F8769D}"/>
+              </a:ext>
+            </a:extLst>
+          </p:cNvPr>
+          <p:cNvCxnSpPr>
+            <a:cxnSpLocks/>
+          </p:cNvCxnSpPr>
+          <p:nvPr/>
+        </p:nvCxnSpPr>
+        <p:spPr>
+          <a:xfrm>
+            <a:off x="3828288" y="2794599"/>
+            <a:ext cx="740664" cy="0"/>
+          </a:xfrm>
+          <a:prstGeom prst="straightConnector1">
+            <a:avLst/>
+          </a:prstGeom>
+          <a:ln w="57150">
+            <a:solidFill>
+              <a:srgbClr val="00B050"/>
+            </a:solidFill>
+            <a:tailEnd type="triangle"/>
+          </a:ln>
+        </p:spPr>
+        <p:style>
+          <a:lnRef idx="1">
+            <a:schemeClr val="accent1"/>
+          </a:lnRef>
+          <a:fillRef idx="0">
+            <a:schemeClr val="accent1"/>
+          </a:fillRef>
+          <a:effectRef idx="0">
+            <a:schemeClr val="accent1"/>
+          </a:effectRef>
+          <a:fontRef idx="minor">
+            <a:schemeClr val="tx1"/>
+          </a:fontRef>
+        </p:style>
+      </p:cxnSp>
+      <p:cxnSp>
+        <p:nvCxnSpPr>
+          <p:cNvPr id="8" name="Straight Arrow Connector 7">
+            <a:extLst>
+              <a:ext uri="{FF2B5EF4-FFF2-40B4-BE49-F238E27FC236}">
+                <a16:creationId xmlns:a16="http://schemas.microsoft.com/office/drawing/2014/main" id="{D0D5F3AA-D694-FAB8-ECD5-256D6B66F29F}"/>
+              </a:ext>
+            </a:extLst>
+          </p:cNvPr>
+          <p:cNvCxnSpPr>
+            <a:cxnSpLocks/>
+          </p:cNvCxnSpPr>
+          <p:nvPr/>
+        </p:nvCxnSpPr>
+        <p:spPr>
+          <a:xfrm flipH="1">
+            <a:off x="6515466" y="2767595"/>
+            <a:ext cx="933846" cy="0"/>
+          </a:xfrm>
+          <a:prstGeom prst="straightConnector1">
+            <a:avLst/>
+          </a:prstGeom>
+          <a:ln w="57150">
+            <a:solidFill>
+              <a:srgbClr val="00B050"/>
+            </a:solidFill>
+            <a:tailEnd type="triangle"/>
+          </a:ln>
+        </p:spPr>
+        <p:style>
+          <a:lnRef idx="1">
+            <a:schemeClr val="accent1"/>
+          </a:lnRef>
+          <a:fillRef idx="0">
+            <a:schemeClr val="accent1"/>
+          </a:fillRef>
+          <a:effectRef idx="0">
+            <a:schemeClr val="accent1"/>
+          </a:effectRef>
+          <a:fontRef idx="minor">
+            <a:schemeClr val="tx1"/>
+          </a:fontRef>
+        </p:style>
+      </p:cxnSp>
+      <p:cxnSp>
+        <p:nvCxnSpPr>
+          <p:cNvPr id="12" name="Straight Connector 11">
+            <a:extLst>
+              <a:ext uri="{FF2B5EF4-FFF2-40B4-BE49-F238E27FC236}">
+                <a16:creationId xmlns:a16="http://schemas.microsoft.com/office/drawing/2014/main" id="{3D8C1748-0B21-B782-ECD1-80EC5F45D008}"/>
+              </a:ext>
+            </a:extLst>
+          </p:cNvPr>
+          <p:cNvCxnSpPr>
+            <a:cxnSpLocks/>
+          </p:cNvCxnSpPr>
+          <p:nvPr/>
+        </p:nvCxnSpPr>
+        <p:spPr>
+          <a:xfrm>
+            <a:off x="4943856" y="1911096"/>
+            <a:ext cx="0" cy="1145524"/>
+          </a:xfrm>
+          <a:prstGeom prst="line">
+            <a:avLst/>
+          </a:prstGeom>
+          <a:ln>
+            <a:prstDash val="dash"/>
+          </a:ln>
+        </p:spPr>
+        <p:style>
+          <a:lnRef idx="1">
+            <a:schemeClr val="accent1"/>
+          </a:lnRef>
+          <a:fillRef idx="0">
+            <a:schemeClr val="accent1"/>
+          </a:fillRef>
+          <a:effectRef idx="0">
+            <a:schemeClr val="accent1"/>
+          </a:effectRef>
+          <a:fontRef idx="minor">
+            <a:schemeClr val="tx1"/>
+          </a:fontRef>
+        </p:style>
+      </p:cxnSp>
+      <p:cxnSp>
+        <p:nvCxnSpPr>
+          <p:cNvPr id="13" name="Straight Connector 12">
+            <a:extLst>
+              <a:ext uri="{FF2B5EF4-FFF2-40B4-BE49-F238E27FC236}">
+                <a16:creationId xmlns:a16="http://schemas.microsoft.com/office/drawing/2014/main" id="{F92FC43E-3A3D-E256-5BC7-DD648457C115}"/>
+              </a:ext>
+            </a:extLst>
+          </p:cNvPr>
+          <p:cNvCxnSpPr>
+            <a:cxnSpLocks/>
+          </p:cNvCxnSpPr>
+          <p:nvPr/>
+        </p:nvCxnSpPr>
+        <p:spPr>
+          <a:xfrm flipH="1">
+            <a:off x="4943856" y="3044428"/>
+            <a:ext cx="1837944" cy="0"/>
+          </a:xfrm>
+          <a:prstGeom prst="line">
+            <a:avLst/>
+          </a:prstGeom>
+          <a:ln>
+            <a:prstDash val="dash"/>
+          </a:ln>
+        </p:spPr>
+        <p:style>
+          <a:lnRef idx="1">
+            <a:schemeClr val="accent1"/>
+          </a:lnRef>
+          <a:fillRef idx="0">
+            <a:schemeClr val="accent1"/>
+          </a:fillRef>
+          <a:effectRef idx="0">
+            <a:schemeClr val="accent1"/>
+          </a:effectRef>
+          <a:fontRef idx="minor">
+            <a:schemeClr val="tx1"/>
+          </a:fontRef>
+        </p:style>
+      </p:cxnSp>
+      <p:cxnSp>
+        <p:nvCxnSpPr>
+          <p:cNvPr id="17" name="Straight Connector 16">
+            <a:extLst>
+              <a:ext uri="{FF2B5EF4-FFF2-40B4-BE49-F238E27FC236}">
+                <a16:creationId xmlns:a16="http://schemas.microsoft.com/office/drawing/2014/main" id="{14ED8DB1-4EFA-B861-6ABD-DA0779AE5525}"/>
+              </a:ext>
+            </a:extLst>
+          </p:cNvPr>
+          <p:cNvCxnSpPr>
+            <a:cxnSpLocks/>
+          </p:cNvCxnSpPr>
+          <p:nvPr/>
+        </p:nvCxnSpPr>
+        <p:spPr>
+          <a:xfrm flipH="1">
+            <a:off x="4568952" y="3056620"/>
+            <a:ext cx="374904" cy="369332"/>
+          </a:xfrm>
+          <a:prstGeom prst="line">
+            <a:avLst/>
+          </a:prstGeom>
+          <a:ln>
+            <a:prstDash val="dash"/>
+          </a:ln>
+        </p:spPr>
+        <p:style>
+          <a:lnRef idx="1">
+            <a:schemeClr val="accent1"/>
+          </a:lnRef>
+          <a:fillRef idx="0">
+            <a:schemeClr val="accent1"/>
+          </a:fillRef>
+          <a:effectRef idx="0">
+            <a:schemeClr val="accent1"/>
+          </a:effectRef>
+          <a:fontRef idx="minor">
+            <a:schemeClr val="tx1"/>
+          </a:fontRef>
+        </p:style>
+      </p:cxnSp>
+      <p:cxnSp>
+        <p:nvCxnSpPr>
+          <p:cNvPr id="2" name="Straight Connector 1">
+            <a:extLst>
+              <a:ext uri="{FF2B5EF4-FFF2-40B4-BE49-F238E27FC236}">
+                <a16:creationId xmlns:a16="http://schemas.microsoft.com/office/drawing/2014/main" id="{B312B2C5-1958-7B69-85F4-8FF656F6F56E}"/>
+              </a:ext>
+            </a:extLst>
+          </p:cNvPr>
+          <p:cNvCxnSpPr/>
+          <p:nvPr/>
+        </p:nvCxnSpPr>
+        <p:spPr>
+          <a:xfrm flipV="1">
+            <a:off x="4943856" y="1325880"/>
+            <a:ext cx="0" cy="521208"/>
+          </a:xfrm>
+          <a:prstGeom prst="line">
+            <a:avLst/>
+          </a:prstGeom>
+          <a:ln>
+            <a:solidFill>
+              <a:schemeClr val="tx1"/>
+            </a:solidFill>
+            <a:prstDash val="dash"/>
+          </a:ln>
+        </p:spPr>
+        <p:style>
+          <a:lnRef idx="1">
+            <a:schemeClr val="accent1"/>
+          </a:lnRef>
+          <a:fillRef idx="0">
+            <a:schemeClr val="accent1"/>
+          </a:fillRef>
+          <a:effectRef idx="0">
+            <a:schemeClr val="accent1"/>
+          </a:effectRef>
+          <a:fontRef idx="minor">
+            <a:schemeClr val="tx1"/>
+          </a:fontRef>
+        </p:style>
+      </p:cxnSp>
+      <p:cxnSp>
+        <p:nvCxnSpPr>
+          <p:cNvPr id="3" name="Straight Connector 2">
+            <a:extLst>
+              <a:ext uri="{FF2B5EF4-FFF2-40B4-BE49-F238E27FC236}">
+                <a16:creationId xmlns:a16="http://schemas.microsoft.com/office/drawing/2014/main" id="{67B02CF7-E812-19A8-4B11-D7076EC55086}"/>
+              </a:ext>
+            </a:extLst>
+          </p:cNvPr>
+          <p:cNvCxnSpPr/>
+          <p:nvPr/>
+        </p:nvCxnSpPr>
+        <p:spPr>
+          <a:xfrm flipV="1">
+            <a:off x="4568952" y="1725168"/>
+            <a:ext cx="0" cy="521208"/>
+          </a:xfrm>
+          <a:prstGeom prst="line">
+            <a:avLst/>
+          </a:prstGeom>
+          <a:ln>
+            <a:solidFill>
+              <a:schemeClr val="tx1"/>
+            </a:solidFill>
+            <a:prstDash val="dash"/>
+          </a:ln>
+        </p:spPr>
+        <p:style>
+          <a:lnRef idx="1">
+            <a:schemeClr val="accent1"/>
+          </a:lnRef>
+          <a:fillRef idx="0">
+            <a:schemeClr val="accent1"/>
+          </a:fillRef>
+          <a:effectRef idx="0">
+            <a:schemeClr val="accent1"/>
+          </a:effectRef>
+          <a:fontRef idx="minor">
+            <a:schemeClr val="tx1"/>
+          </a:fontRef>
+        </p:style>
+      </p:cxnSp>
+      <p:cxnSp>
+        <p:nvCxnSpPr>
+          <p:cNvPr id="6" name="Straight Arrow Connector 5">
+            <a:extLst>
+              <a:ext uri="{FF2B5EF4-FFF2-40B4-BE49-F238E27FC236}">
+                <a16:creationId xmlns:a16="http://schemas.microsoft.com/office/drawing/2014/main" id="{9D26FF9B-056F-AE83-B094-016B369BD14B}"/>
+              </a:ext>
+            </a:extLst>
+          </p:cNvPr>
+          <p:cNvCxnSpPr>
+            <a:cxnSpLocks/>
+          </p:cNvCxnSpPr>
+          <p:nvPr/>
+        </p:nvCxnSpPr>
+        <p:spPr>
+          <a:xfrm flipV="1">
+            <a:off x="4568952" y="1581330"/>
+            <a:ext cx="374904" cy="380107"/>
+          </a:xfrm>
+          <a:prstGeom prst="straightConnector1">
+            <a:avLst/>
+          </a:prstGeom>
+          <a:ln>
+            <a:solidFill>
+              <a:schemeClr val="tx1"/>
+            </a:solidFill>
+            <a:prstDash val="dash"/>
+            <a:headEnd type="triangle"/>
+            <a:tailEnd type="triangle"/>
+          </a:ln>
+        </p:spPr>
+        <p:style>
+          <a:lnRef idx="1">
+            <a:schemeClr val="accent1"/>
+          </a:lnRef>
+          <a:fillRef idx="0">
+            <a:schemeClr val="accent1"/>
+          </a:fillRef>
+          <a:effectRef idx="0">
+            <a:schemeClr val="accent1"/>
+          </a:effectRef>
+          <a:fontRef idx="minor">
+            <a:schemeClr val="tx1"/>
+          </a:fontRef>
+        </p:style>
+      </p:cxnSp>
+      <p:sp>
+        <p:nvSpPr>
+          <p:cNvPr id="14" name="TextBox 13">
+            <a:extLst>
+              <a:ext uri="{FF2B5EF4-FFF2-40B4-BE49-F238E27FC236}">
+                <a16:creationId xmlns:a16="http://schemas.microsoft.com/office/drawing/2014/main" id="{CD173A3B-5D3E-FBEA-F0A4-1FC55D0B6085}"/>
+              </a:ext>
+            </a:extLst>
+          </p:cNvPr>
+          <p:cNvSpPr txBox="1"/>
+          <p:nvPr/>
+        </p:nvSpPr>
+        <p:spPr>
+          <a:xfrm>
+            <a:off x="4495879" y="1296389"/>
+            <a:ext cx="415498" cy="369332"/>
+          </a:xfrm>
+          <a:prstGeom prst="rect">
+            <a:avLst/>
+          </a:prstGeom>
+          <a:noFill/>
+        </p:spPr>
+        <p:txBody>
+          <a:bodyPr wrap="none" rtlCol="0">
+            <a:spAutoFit/>
+          </a:bodyPr>
+          <a:lstStyle/>
+          <a:p>
+            <a:r>
+              <a:rPr lang="en-US" dirty="0" err="1">
+                <a:sym typeface="Symbol" panose="05050102010706020507" pitchFamily="18" charset="2"/>
+              </a:rPr>
+              <a:t>d</a:t>
+            </a:r>
+            <a:r>
+              <a:rPr lang="en-US" dirty="0" err="1"/>
+              <a:t>z</a:t>
+            </a:r>
+            <a:endParaRPr lang="en-US" dirty="0"/>
+          </a:p>
+        </p:txBody>
+      </p:sp>
+      <p:cxnSp>
+        <p:nvCxnSpPr>
+          <p:cNvPr id="15" name="Straight Connector 14">
+            <a:extLst>
+              <a:ext uri="{FF2B5EF4-FFF2-40B4-BE49-F238E27FC236}">
+                <a16:creationId xmlns:a16="http://schemas.microsoft.com/office/drawing/2014/main" id="{8CE21D82-5BB2-7B20-4B76-32D44A3F31D6}"/>
+              </a:ext>
+            </a:extLst>
+          </p:cNvPr>
+          <p:cNvCxnSpPr/>
+          <p:nvPr/>
+        </p:nvCxnSpPr>
+        <p:spPr>
+          <a:xfrm flipV="1">
+            <a:off x="4568952" y="3520702"/>
+            <a:ext cx="0" cy="521208"/>
+          </a:xfrm>
+          <a:prstGeom prst="line">
+            <a:avLst/>
+          </a:prstGeom>
+          <a:ln>
+            <a:solidFill>
+              <a:schemeClr val="tx1"/>
+            </a:solidFill>
+            <a:prstDash val="dash"/>
+          </a:ln>
+        </p:spPr>
+        <p:style>
+          <a:lnRef idx="1">
+            <a:schemeClr val="accent1"/>
+          </a:lnRef>
+          <a:fillRef idx="0">
+            <a:schemeClr val="accent1"/>
+          </a:fillRef>
+          <a:effectRef idx="0">
+            <a:schemeClr val="accent1"/>
+          </a:effectRef>
+          <a:fontRef idx="minor">
+            <a:schemeClr val="tx1"/>
+          </a:fontRef>
+        </p:style>
+      </p:cxnSp>
+      <p:cxnSp>
+        <p:nvCxnSpPr>
+          <p:cNvPr id="16" name="Straight Connector 15">
+            <a:extLst>
+              <a:ext uri="{FF2B5EF4-FFF2-40B4-BE49-F238E27FC236}">
+                <a16:creationId xmlns:a16="http://schemas.microsoft.com/office/drawing/2014/main" id="{3D11ADD0-C44A-A4CF-B328-B85E48DB8A42}"/>
+              </a:ext>
+            </a:extLst>
+          </p:cNvPr>
+          <p:cNvCxnSpPr/>
+          <p:nvPr/>
+        </p:nvCxnSpPr>
+        <p:spPr>
+          <a:xfrm flipV="1">
+            <a:off x="6385560" y="3444764"/>
+            <a:ext cx="0" cy="521208"/>
+          </a:xfrm>
+          <a:prstGeom prst="line">
+            <a:avLst/>
+          </a:prstGeom>
+          <a:ln>
+            <a:solidFill>
+              <a:schemeClr val="tx1"/>
+            </a:solidFill>
+            <a:prstDash val="dash"/>
+          </a:ln>
+        </p:spPr>
+        <p:style>
+          <a:lnRef idx="1">
+            <a:schemeClr val="accent1"/>
+          </a:lnRef>
+          <a:fillRef idx="0">
+            <a:schemeClr val="accent1"/>
+          </a:fillRef>
+          <a:effectRef idx="0">
+            <a:schemeClr val="accent1"/>
+          </a:effectRef>
+          <a:fontRef idx="minor">
+            <a:schemeClr val="tx1"/>
+          </a:fontRef>
+        </p:style>
+      </p:cxnSp>
+      <p:cxnSp>
+        <p:nvCxnSpPr>
+          <p:cNvPr id="18" name="Straight Arrow Connector 17">
+            <a:extLst>
+              <a:ext uri="{FF2B5EF4-FFF2-40B4-BE49-F238E27FC236}">
+                <a16:creationId xmlns:a16="http://schemas.microsoft.com/office/drawing/2014/main" id="{576D556B-E548-114E-10DA-CE5E435BBBB1}"/>
+              </a:ext>
+            </a:extLst>
+          </p:cNvPr>
+          <p:cNvCxnSpPr>
+            <a:cxnSpLocks/>
+          </p:cNvCxnSpPr>
+          <p:nvPr/>
+        </p:nvCxnSpPr>
+        <p:spPr>
+          <a:xfrm>
+            <a:off x="4568952" y="3781306"/>
+            <a:ext cx="1787652" cy="0"/>
+          </a:xfrm>
+          <a:prstGeom prst="straightConnector1">
+            <a:avLst/>
+          </a:prstGeom>
+          <a:ln>
+            <a:solidFill>
+              <a:schemeClr val="tx1"/>
+            </a:solidFill>
+            <a:prstDash val="dash"/>
+            <a:headEnd type="triangle"/>
+            <a:tailEnd type="triangle"/>
+          </a:ln>
+        </p:spPr>
+        <p:style>
+          <a:lnRef idx="1">
+            <a:schemeClr val="accent1"/>
+          </a:lnRef>
+          <a:fillRef idx="0">
+            <a:schemeClr val="accent1"/>
+          </a:fillRef>
+          <a:effectRef idx="0">
+            <a:schemeClr val="accent1"/>
+          </a:effectRef>
+          <a:fontRef idx="minor">
+            <a:schemeClr val="tx1"/>
+          </a:fontRef>
+        </p:style>
+      </p:cxnSp>
+      <p:sp>
+        <p:nvSpPr>
+          <p:cNvPr id="22" name="TextBox 21">
+            <a:extLst>
+              <a:ext uri="{FF2B5EF4-FFF2-40B4-BE49-F238E27FC236}">
+                <a16:creationId xmlns:a16="http://schemas.microsoft.com/office/drawing/2014/main" id="{56BD8E51-928B-6538-9DE3-75C3BE796E18}"/>
+              </a:ext>
+            </a:extLst>
+          </p:cNvPr>
+          <p:cNvSpPr txBox="1"/>
+          <p:nvPr/>
+        </p:nvSpPr>
+        <p:spPr>
+          <a:xfrm>
+            <a:off x="5264698" y="3596640"/>
+            <a:ext cx="417102" cy="369332"/>
+          </a:xfrm>
+          <a:prstGeom prst="rect">
+            <a:avLst/>
+          </a:prstGeom>
+          <a:solidFill>
+            <a:schemeClr val="bg1"/>
+          </a:solidFill>
+        </p:spPr>
+        <p:txBody>
+          <a:bodyPr wrap="none" rtlCol="0">
+            <a:spAutoFit/>
+          </a:bodyPr>
+          <a:lstStyle/>
+          <a:p>
+            <a:r>
+              <a:rPr lang="en-US" dirty="0">
+                <a:sym typeface="Symbol" panose="05050102010706020507" pitchFamily="18" charset="2"/>
+              </a:rPr>
+              <a:t>d</a:t>
+            </a:r>
+            <a:r>
+              <a:rPr lang="en-US" dirty="0"/>
+              <a:t>x</a:t>
+            </a:r>
+          </a:p>
+        </p:txBody>
+      </p:sp>
+      <p:cxnSp>
+        <p:nvCxnSpPr>
+          <p:cNvPr id="25" name="Straight Connector 24">
+            <a:extLst>
+              <a:ext uri="{FF2B5EF4-FFF2-40B4-BE49-F238E27FC236}">
+                <a16:creationId xmlns:a16="http://schemas.microsoft.com/office/drawing/2014/main" id="{86912471-0A70-708E-897C-E86A10876C71}"/>
+              </a:ext>
+            </a:extLst>
+          </p:cNvPr>
+          <p:cNvCxnSpPr>
+            <a:cxnSpLocks/>
+          </p:cNvCxnSpPr>
+          <p:nvPr/>
+        </p:nvCxnSpPr>
+        <p:spPr>
+          <a:xfrm flipH="1">
+            <a:off x="4105735" y="2316480"/>
+            <a:ext cx="408432" cy="0"/>
+          </a:xfrm>
+          <a:prstGeom prst="line">
+            <a:avLst/>
+          </a:prstGeom>
+          <a:ln>
+            <a:solidFill>
+              <a:schemeClr val="tx1"/>
+            </a:solidFill>
+            <a:prstDash val="dash"/>
+          </a:ln>
+        </p:spPr>
+        <p:style>
+          <a:lnRef idx="1">
+            <a:schemeClr val="accent1"/>
+          </a:lnRef>
+          <a:fillRef idx="0">
+            <a:schemeClr val="accent1"/>
+          </a:fillRef>
+          <a:effectRef idx="0">
+            <a:schemeClr val="accent1"/>
+          </a:effectRef>
+          <a:fontRef idx="minor">
+            <a:schemeClr val="tx1"/>
+          </a:fontRef>
+        </p:style>
+      </p:cxnSp>
+      <p:cxnSp>
+        <p:nvCxnSpPr>
+          <p:cNvPr id="27" name="Straight Connector 26">
+            <a:extLst>
+              <a:ext uri="{FF2B5EF4-FFF2-40B4-BE49-F238E27FC236}">
+                <a16:creationId xmlns:a16="http://schemas.microsoft.com/office/drawing/2014/main" id="{F16C13D7-78AB-6F8F-5255-33E8C51B6E3D}"/>
+              </a:ext>
+            </a:extLst>
+          </p:cNvPr>
+          <p:cNvCxnSpPr>
+            <a:cxnSpLocks/>
+          </p:cNvCxnSpPr>
+          <p:nvPr/>
+        </p:nvCxnSpPr>
+        <p:spPr>
+          <a:xfrm flipH="1">
+            <a:off x="4111831" y="3429000"/>
+            <a:ext cx="408432" cy="0"/>
+          </a:xfrm>
+          <a:prstGeom prst="line">
+            <a:avLst/>
+          </a:prstGeom>
+          <a:ln>
+            <a:solidFill>
+              <a:schemeClr val="tx1"/>
+            </a:solidFill>
+            <a:prstDash val="dash"/>
+          </a:ln>
+        </p:spPr>
+        <p:style>
+          <a:lnRef idx="1">
+            <a:schemeClr val="accent1"/>
+          </a:lnRef>
+          <a:fillRef idx="0">
+            <a:schemeClr val="accent1"/>
+          </a:fillRef>
+          <a:effectRef idx="0">
+            <a:schemeClr val="accent1"/>
+          </a:effectRef>
+          <a:fontRef idx="minor">
+            <a:schemeClr val="tx1"/>
+          </a:fontRef>
+        </p:style>
+      </p:cxnSp>
+      <p:cxnSp>
+        <p:nvCxnSpPr>
+          <p:cNvPr id="28" name="Straight Arrow Connector 27">
+            <a:extLst>
+              <a:ext uri="{FF2B5EF4-FFF2-40B4-BE49-F238E27FC236}">
+                <a16:creationId xmlns:a16="http://schemas.microsoft.com/office/drawing/2014/main" id="{464582FE-08BD-FCC6-657F-10BBC29128F9}"/>
+              </a:ext>
+            </a:extLst>
+          </p:cNvPr>
+          <p:cNvCxnSpPr>
+            <a:cxnSpLocks/>
+          </p:cNvCxnSpPr>
+          <p:nvPr/>
+        </p:nvCxnSpPr>
+        <p:spPr>
+          <a:xfrm flipV="1">
+            <a:off x="4308348" y="2316480"/>
+            <a:ext cx="0" cy="1102114"/>
+          </a:xfrm>
+          <a:prstGeom prst="straightConnector1">
+            <a:avLst/>
+          </a:prstGeom>
+          <a:ln>
+            <a:solidFill>
+              <a:schemeClr val="tx1"/>
+            </a:solidFill>
+            <a:prstDash val="dash"/>
+            <a:headEnd type="triangle"/>
+            <a:tailEnd type="triangle"/>
+          </a:ln>
+        </p:spPr>
+        <p:style>
+          <a:lnRef idx="1">
+            <a:schemeClr val="accent1"/>
+          </a:lnRef>
+          <a:fillRef idx="0">
+            <a:schemeClr val="accent1"/>
+          </a:fillRef>
+          <a:effectRef idx="0">
+            <a:schemeClr val="accent1"/>
+          </a:effectRef>
+          <a:fontRef idx="minor">
+            <a:schemeClr val="tx1"/>
+          </a:fontRef>
+        </p:style>
+      </p:cxnSp>
+      <p:sp>
+        <p:nvSpPr>
+          <p:cNvPr id="30" name="TextBox 29">
+            <a:extLst>
+              <a:ext uri="{FF2B5EF4-FFF2-40B4-BE49-F238E27FC236}">
+                <a16:creationId xmlns:a16="http://schemas.microsoft.com/office/drawing/2014/main" id="{97BE651B-D294-EA86-5F53-24780C613604}"/>
+              </a:ext>
+            </a:extLst>
+          </p:cNvPr>
+          <p:cNvSpPr txBox="1"/>
+          <p:nvPr/>
+        </p:nvSpPr>
+        <p:spPr>
+          <a:xfrm>
+            <a:off x="4111515" y="2923460"/>
+            <a:ext cx="418704" cy="369332"/>
+          </a:xfrm>
+          <a:prstGeom prst="rect">
+            <a:avLst/>
+          </a:prstGeom>
+          <a:solidFill>
+            <a:schemeClr val="bg1"/>
+          </a:solidFill>
+        </p:spPr>
+        <p:txBody>
+          <a:bodyPr wrap="none" rtlCol="0">
+            <a:spAutoFit/>
+          </a:bodyPr>
+          <a:lstStyle/>
+          <a:p>
+            <a:r>
+              <a:rPr lang="en-US" dirty="0" err="1">
+                <a:sym typeface="Symbol" panose="05050102010706020507" pitchFamily="18" charset="2"/>
+              </a:rPr>
+              <a:t>dy</a:t>
+            </a:r>
+            <a:endParaRPr lang="en-US" dirty="0"/>
+          </a:p>
+        </p:txBody>
+      </p:sp>
+      <p:sp>
+        <p:nvSpPr>
+          <p:cNvPr id="33" name="TextBox 32">
+            <a:extLst>
+              <a:ext uri="{FF2B5EF4-FFF2-40B4-BE49-F238E27FC236}">
+                <a16:creationId xmlns:a16="http://schemas.microsoft.com/office/drawing/2014/main" id="{939DC9B8-FE62-186B-4C4B-54EDA73AA9B5}"/>
+              </a:ext>
+            </a:extLst>
+          </p:cNvPr>
+          <p:cNvSpPr txBox="1"/>
+          <p:nvPr/>
+        </p:nvSpPr>
+        <p:spPr>
+          <a:xfrm>
+            <a:off x="3383618" y="2549236"/>
+            <a:ext cx="362600" cy="461665"/>
+          </a:xfrm>
+          <a:prstGeom prst="rect">
+            <a:avLst/>
+          </a:prstGeom>
+          <a:noFill/>
+        </p:spPr>
+        <p:txBody>
+          <a:bodyPr wrap="none" rtlCol="0">
+            <a:spAutoFit/>
+          </a:bodyPr>
+          <a:lstStyle/>
+          <a:p>
+            <a:r>
+              <a:rPr lang="en-US" sz="2400" dirty="0">
+                <a:solidFill>
+                  <a:srgbClr val="00B050"/>
+                </a:solidFill>
+              </a:rPr>
+              <a:t>P</a:t>
+            </a:r>
+          </a:p>
+        </p:txBody>
+      </p:sp>
+      <p:sp>
+        <p:nvSpPr>
+          <p:cNvPr id="34" name="TextBox 33">
+            <a:extLst>
+              <a:ext uri="{FF2B5EF4-FFF2-40B4-BE49-F238E27FC236}">
+                <a16:creationId xmlns:a16="http://schemas.microsoft.com/office/drawing/2014/main" id="{02A560B1-56B2-9197-9B9F-10AA18A1D6A5}"/>
+              </a:ext>
+            </a:extLst>
+          </p:cNvPr>
+          <p:cNvSpPr txBox="1"/>
+          <p:nvPr/>
+        </p:nvSpPr>
+        <p:spPr>
+          <a:xfrm>
+            <a:off x="7529090" y="2536210"/>
+            <a:ext cx="878767" cy="461665"/>
+          </a:xfrm>
+          <a:prstGeom prst="rect">
+            <a:avLst/>
+          </a:prstGeom>
+          <a:noFill/>
+        </p:spPr>
+        <p:txBody>
+          <a:bodyPr wrap="none" rtlCol="0">
+            <a:spAutoFit/>
+          </a:bodyPr>
+          <a:lstStyle/>
+          <a:p>
+            <a:r>
+              <a:rPr lang="en-US" sz="2400" dirty="0" err="1">
+                <a:solidFill>
+                  <a:srgbClr val="00B050"/>
+                </a:solidFill>
+              </a:rPr>
+              <a:t>P+dP</a:t>
+            </a:r>
+            <a:endParaRPr lang="en-US" sz="2400" dirty="0">
+              <a:solidFill>
+                <a:srgbClr val="00B050"/>
+              </a:solidFill>
+            </a:endParaRPr>
+          </a:p>
+        </p:txBody>
+      </p:sp>
+    </p:spTree>
+    <p:extLst>
+      <p:ext uri="{BB962C8B-B14F-4D97-AF65-F5344CB8AC3E}">
+        <p14:creationId xmlns:p14="http://schemas.microsoft.com/office/powerpoint/2010/main" val="1325716157"/>
+      </p:ext>
+    </p:extLst>
+  </p:cSld>
+  <p:clrMapOvr>
+    <a:masterClrMapping/>
+  </p:clrMapOvr>
+</p:sld>
+</file>
+
+<file path=ppt/slides/slide17.xml><?xml version="1.0" encoding="utf-8"?>
 <p:sld xmlns:a="http://schemas.openxmlformats.org/drawingml/2006/main" xmlns:r="http://schemas.openxmlformats.org/officeDocument/2006/relationships" xmlns:p="http://schemas.openxmlformats.org/presentationml/2006/main">
   <p:cSld>
     <p:spTree>

--- a/Lecture_Slides/PH 123 Lecture 36.pptx
+++ b/Lecture_Slides/PH 123 Lecture 36.pptx
@@ -7,21 +7,22 @@
   <p:sldIdLst>
     <p:sldId id="256" r:id="rId2"/>
     <p:sldId id="484" r:id="rId3"/>
-    <p:sldId id="485" r:id="rId4"/>
-    <p:sldId id="341" r:id="rId5"/>
-    <p:sldId id="487" r:id="rId6"/>
-    <p:sldId id="486" r:id="rId7"/>
-    <p:sldId id="488" r:id="rId8"/>
-    <p:sldId id="489" r:id="rId9"/>
-    <p:sldId id="490" r:id="rId10"/>
-    <p:sldId id="265" r:id="rId11"/>
-    <p:sldId id="285" r:id="rId12"/>
-    <p:sldId id="340" r:id="rId13"/>
-    <p:sldId id="283" r:id="rId14"/>
-    <p:sldId id="306" r:id="rId15"/>
-    <p:sldId id="307" r:id="rId16"/>
-    <p:sldId id="308" r:id="rId17"/>
-    <p:sldId id="257" r:id="rId18"/>
+    <p:sldId id="491" r:id="rId4"/>
+    <p:sldId id="485" r:id="rId5"/>
+    <p:sldId id="341" r:id="rId6"/>
+    <p:sldId id="487" r:id="rId7"/>
+    <p:sldId id="486" r:id="rId8"/>
+    <p:sldId id="488" r:id="rId9"/>
+    <p:sldId id="489" r:id="rId10"/>
+    <p:sldId id="490" r:id="rId11"/>
+    <p:sldId id="265" r:id="rId12"/>
+    <p:sldId id="285" r:id="rId13"/>
+    <p:sldId id="340" r:id="rId14"/>
+    <p:sldId id="283" r:id="rId15"/>
+    <p:sldId id="306" r:id="rId16"/>
+    <p:sldId id="307" r:id="rId17"/>
+    <p:sldId id="308" r:id="rId18"/>
+    <p:sldId id="257" r:id="rId19"/>
   </p:sldIdLst>
   <p:sldSz cx="12192000" cy="6858000"/>
   <p:notesSz cx="6858000" cy="9144000"/>
@@ -131,7 +132,7 @@
 <file path=ppt/revisionInfo.xml><?xml version="1.0" encoding="utf-8"?>
 <p1510:revInfo xmlns:a="http://schemas.openxmlformats.org/drawingml/2006/main" xmlns:r="http://schemas.openxmlformats.org/officeDocument/2006/relationships" xmlns:p1510="http://schemas.microsoft.com/office/powerpoint/2015/10/main">
   <p1510:revLst>
-    <p1510:client id="{C3A8F3B3-0951-41A8-9538-BC546DF3340D}" v="1" dt="2026-01-22T22:05:22.813"/>
+    <p1510:client id="{A188FBDB-A577-4F86-A794-33773316D8C5}" v="46" dt="2026-03-31T19:47:52.001"/>
   </p1510:revLst>
 </p1510:revInfo>
 </file>
@@ -140,31 +141,369 @@
 <pc:chgInfo xmlns:a="http://schemas.openxmlformats.org/drawingml/2006/main" xmlns:r="http://schemas.openxmlformats.org/officeDocument/2006/relationships" xmlns:ac="http://schemas.microsoft.com/office/drawing/2013/main/command" xmlns:pc="http://schemas.microsoft.com/office/powerpoint/2013/main/command">
   <pc:docChgLst>
     <pc:chgData name="Lines, Todd" userId="afaf7c3a-e8aa-4568-882a-02ad8f9e19b0" providerId="ADAL" clId="{5FF5AC1B-ABA9-43D7-A1E3-2D92732CD6E2}"/>
-    <pc:docChg chg="addSld modSld">
-      <pc:chgData name="Lines, Todd" userId="afaf7c3a-e8aa-4568-882a-02ad8f9e19b0" providerId="ADAL" clId="{5FF5AC1B-ABA9-43D7-A1E3-2D92732CD6E2}" dt="2026-01-22T22:05:22.797" v="0"/>
+    <pc:docChg chg="undo custSel addSld modSld">
+      <pc:chgData name="Lines, Todd" userId="afaf7c3a-e8aa-4568-882a-02ad8f9e19b0" providerId="ADAL" clId="{5FF5AC1B-ABA9-43D7-A1E3-2D92732CD6E2}" dt="2026-03-31T19:47:56.233" v="552" actId="21"/>
       <pc:docMkLst>
         <pc:docMk/>
       </pc:docMkLst>
-      <pc:sldChg chg="add">
-        <pc:chgData name="Lines, Todd" userId="afaf7c3a-e8aa-4568-882a-02ad8f9e19b0" providerId="ADAL" clId="{5FF5AC1B-ABA9-43D7-A1E3-2D92732CD6E2}" dt="2026-01-22T22:05:22.797" v="0"/>
+      <pc:sldChg chg="addSp delSp modSp new mod">
+        <pc:chgData name="Lines, Todd" userId="afaf7c3a-e8aa-4568-882a-02ad8f9e19b0" providerId="ADAL" clId="{5FF5AC1B-ABA9-43D7-A1E3-2D92732CD6E2}" dt="2026-03-31T19:47:56.233" v="552" actId="21"/>
         <pc:sldMkLst>
           <pc:docMk/>
-          <pc:sldMk cId="1247448808" sldId="306"/>
+          <pc:sldMk cId="403151843" sldId="491"/>
         </pc:sldMkLst>
-      </pc:sldChg>
-      <pc:sldChg chg="add">
-        <pc:chgData name="Lines, Todd" userId="afaf7c3a-e8aa-4568-882a-02ad8f9e19b0" providerId="ADAL" clId="{5FF5AC1B-ABA9-43D7-A1E3-2D92732CD6E2}" dt="2026-01-22T22:05:22.797" v="0"/>
-        <pc:sldMkLst>
-          <pc:docMk/>
-          <pc:sldMk cId="4168904192" sldId="307"/>
-        </pc:sldMkLst>
-      </pc:sldChg>
-      <pc:sldChg chg="add">
-        <pc:chgData name="Lines, Todd" userId="afaf7c3a-e8aa-4568-882a-02ad8f9e19b0" providerId="ADAL" clId="{5FF5AC1B-ABA9-43D7-A1E3-2D92732CD6E2}" dt="2026-01-22T22:05:22.797" v="0"/>
-        <pc:sldMkLst>
-          <pc:docMk/>
-          <pc:sldMk cId="1325716157" sldId="308"/>
-        </pc:sldMkLst>
+        <pc:spChg chg="del">
+          <ac:chgData name="Lines, Todd" userId="afaf7c3a-e8aa-4568-882a-02ad8f9e19b0" providerId="ADAL" clId="{5FF5AC1B-ABA9-43D7-A1E3-2D92732CD6E2}" dt="2026-03-31T16:56:02.597" v="14" actId="478"/>
+          <ac:spMkLst>
+            <pc:docMk/>
+            <pc:sldMk cId="403151843" sldId="491"/>
+            <ac:spMk id="2" creationId="{31475D24-A24B-7258-4C3D-C874B65EB90A}"/>
+          </ac:spMkLst>
+        </pc:spChg>
+        <pc:spChg chg="add mod">
+          <ac:chgData name="Lines, Todd" userId="afaf7c3a-e8aa-4568-882a-02ad8f9e19b0" providerId="ADAL" clId="{5FF5AC1B-ABA9-43D7-A1E3-2D92732CD6E2}" dt="2026-03-31T18:19:54.929" v="496" actId="1076"/>
+          <ac:spMkLst>
+            <pc:docMk/>
+            <pc:sldMk cId="403151843" sldId="491"/>
+            <ac:spMk id="2" creationId="{E164F363-7B4B-E628-C5E8-4952D796471C}"/>
+          </ac:spMkLst>
+        </pc:spChg>
+        <pc:spChg chg="del">
+          <ac:chgData name="Lines, Todd" userId="afaf7c3a-e8aa-4568-882a-02ad8f9e19b0" providerId="ADAL" clId="{5FF5AC1B-ABA9-43D7-A1E3-2D92732CD6E2}" dt="2026-03-31T16:56:02.597" v="14" actId="478"/>
+          <ac:spMkLst>
+            <pc:docMk/>
+            <pc:sldMk cId="403151843" sldId="491"/>
+            <ac:spMk id="3" creationId="{7A295380-E057-7774-A081-5B452462224B}"/>
+          </ac:spMkLst>
+        </pc:spChg>
+        <pc:spChg chg="add mod">
+          <ac:chgData name="Lines, Todd" userId="afaf7c3a-e8aa-4568-882a-02ad8f9e19b0" providerId="ADAL" clId="{5FF5AC1B-ABA9-43D7-A1E3-2D92732CD6E2}" dt="2026-03-31T18:21:25.045" v="518" actId="1076"/>
+          <ac:spMkLst>
+            <pc:docMk/>
+            <pc:sldMk cId="403151843" sldId="491"/>
+            <ac:spMk id="3" creationId="{875B9F74-81CF-3B10-4FB6-FBEB22837005}"/>
+          </ac:spMkLst>
+        </pc:spChg>
+        <pc:spChg chg="add mod">
+          <ac:chgData name="Lines, Todd" userId="afaf7c3a-e8aa-4568-882a-02ad8f9e19b0" providerId="ADAL" clId="{5FF5AC1B-ABA9-43D7-A1E3-2D92732CD6E2}" dt="2026-03-31T18:21:11.919" v="516" actId="1076"/>
+          <ac:spMkLst>
+            <pc:docMk/>
+            <pc:sldMk cId="403151843" sldId="491"/>
+            <ac:spMk id="5" creationId="{8F210133-1F63-43BD-EE09-C65FB0945E1D}"/>
+          </ac:spMkLst>
+        </pc:spChg>
+        <pc:spChg chg="add mod">
+          <ac:chgData name="Lines, Todd" userId="afaf7c3a-e8aa-4568-882a-02ad8f9e19b0" providerId="ADAL" clId="{5FF5AC1B-ABA9-43D7-A1E3-2D92732CD6E2}" dt="2026-03-31T19:47:35.335" v="550" actId="1076"/>
+          <ac:spMkLst>
+            <pc:docMk/>
+            <pc:sldMk cId="403151843" sldId="491"/>
+            <ac:spMk id="6" creationId="{50C5AD2D-A3D3-4A77-009D-2214784A808B}"/>
+          </ac:spMkLst>
+        </pc:spChg>
+        <pc:spChg chg="add mod">
+          <ac:chgData name="Lines, Todd" userId="afaf7c3a-e8aa-4568-882a-02ad8f9e19b0" providerId="ADAL" clId="{5FF5AC1B-ABA9-43D7-A1E3-2D92732CD6E2}" dt="2026-03-31T18:20:30.145" v="503" actId="1076"/>
+          <ac:spMkLst>
+            <pc:docMk/>
+            <pc:sldMk cId="403151843" sldId="491"/>
+            <ac:spMk id="7" creationId="{431DE04B-62F0-9B3E-A268-7617D4F0D5F3}"/>
+          </ac:spMkLst>
+        </pc:spChg>
+        <pc:spChg chg="add del mod">
+          <ac:chgData name="Lines, Todd" userId="afaf7c3a-e8aa-4568-882a-02ad8f9e19b0" providerId="ADAL" clId="{5FF5AC1B-ABA9-43D7-A1E3-2D92732CD6E2}" dt="2026-03-31T16:55:37.733" v="6" actId="478"/>
+          <ac:spMkLst>
+            <pc:docMk/>
+            <pc:sldMk cId="403151843" sldId="491"/>
+            <ac:spMk id="7" creationId="{FABA0109-99FA-8D8F-0C01-BCF4E8AD060F}"/>
+          </ac:spMkLst>
+        </pc:spChg>
+        <pc:spChg chg="add mod">
+          <ac:chgData name="Lines, Todd" userId="afaf7c3a-e8aa-4568-882a-02ad8f9e19b0" providerId="ADAL" clId="{5FF5AC1B-ABA9-43D7-A1E3-2D92732CD6E2}" dt="2026-03-31T18:21:22.692" v="517" actId="14100"/>
+          <ac:spMkLst>
+            <pc:docMk/>
+            <pc:sldMk cId="403151843" sldId="491"/>
+            <ac:spMk id="8" creationId="{527EE164-82C6-B656-CC56-D5CD91159A8F}"/>
+          </ac:spMkLst>
+        </pc:spChg>
+        <pc:spChg chg="add del mod">
+          <ac:chgData name="Lines, Todd" userId="afaf7c3a-e8aa-4568-882a-02ad8f9e19b0" providerId="ADAL" clId="{5FF5AC1B-ABA9-43D7-A1E3-2D92732CD6E2}" dt="2026-03-31T16:55:39.533" v="7" actId="478"/>
+          <ac:spMkLst>
+            <pc:docMk/>
+            <pc:sldMk cId="403151843" sldId="491"/>
+            <ac:spMk id="8" creationId="{747DC620-DE97-78F6-EC97-310FF13BC855}"/>
+          </ac:spMkLst>
+        </pc:spChg>
+        <pc:spChg chg="add del mod">
+          <ac:chgData name="Lines, Todd" userId="afaf7c3a-e8aa-4568-882a-02ad8f9e19b0" providerId="ADAL" clId="{5FF5AC1B-ABA9-43D7-A1E3-2D92732CD6E2}" dt="2026-03-31T18:20:50.900" v="511" actId="478"/>
+          <ac:spMkLst>
+            <pc:docMk/>
+            <pc:sldMk cId="403151843" sldId="491"/>
+            <ac:spMk id="9" creationId="{2B794453-447B-C3E8-EA96-CAE8F4B46AC5}"/>
+          </ac:spMkLst>
+        </pc:spChg>
+        <pc:spChg chg="add del mod">
+          <ac:chgData name="Lines, Todd" userId="afaf7c3a-e8aa-4568-882a-02ad8f9e19b0" providerId="ADAL" clId="{5FF5AC1B-ABA9-43D7-A1E3-2D92732CD6E2}" dt="2026-03-31T16:55:42.251" v="9" actId="478"/>
+          <ac:spMkLst>
+            <pc:docMk/>
+            <pc:sldMk cId="403151843" sldId="491"/>
+            <ac:spMk id="9" creationId="{B5FA6051-6F27-5CFF-AC42-9E5DE922B129}"/>
+          </ac:spMkLst>
+        </pc:spChg>
+        <pc:spChg chg="add mod">
+          <ac:chgData name="Lines, Todd" userId="afaf7c3a-e8aa-4568-882a-02ad8f9e19b0" providerId="ADAL" clId="{5FF5AC1B-ABA9-43D7-A1E3-2D92732CD6E2}" dt="2026-03-31T18:21:08.861" v="515" actId="14100"/>
+          <ac:spMkLst>
+            <pc:docMk/>
+            <pc:sldMk cId="403151843" sldId="491"/>
+            <ac:spMk id="10" creationId="{6ADF0F47-A5B0-3CED-CEF5-1618CAE12199}"/>
+          </ac:spMkLst>
+        </pc:spChg>
+        <pc:spChg chg="add del mod">
+          <ac:chgData name="Lines, Todd" userId="afaf7c3a-e8aa-4568-882a-02ad8f9e19b0" providerId="ADAL" clId="{5FF5AC1B-ABA9-43D7-A1E3-2D92732CD6E2}" dt="2026-03-31T16:55:41.530" v="8" actId="478"/>
+          <ac:spMkLst>
+            <pc:docMk/>
+            <pc:sldMk cId="403151843" sldId="491"/>
+            <ac:spMk id="10" creationId="{752B3BD7-F960-685D-0531-F44D94C56BA9}"/>
+          </ac:spMkLst>
+        </pc:spChg>
+        <pc:spChg chg="add mod ord">
+          <ac:chgData name="Lines, Todd" userId="afaf7c3a-e8aa-4568-882a-02ad8f9e19b0" providerId="ADAL" clId="{5FF5AC1B-ABA9-43D7-A1E3-2D92732CD6E2}" dt="2026-03-31T17:19:16.878" v="441" actId="1038"/>
+          <ac:spMkLst>
+            <pc:docMk/>
+            <pc:sldMk cId="403151843" sldId="491"/>
+            <ac:spMk id="11" creationId="{E92237C2-F4CC-BD5E-520B-FD8603FB6A5B}"/>
+          </ac:spMkLst>
+        </pc:spChg>
+        <pc:spChg chg="add del mod ord">
+          <ac:chgData name="Lines, Todd" userId="afaf7c3a-e8aa-4568-882a-02ad8f9e19b0" providerId="ADAL" clId="{5FF5AC1B-ABA9-43D7-A1E3-2D92732CD6E2}" dt="2026-03-31T17:20:03.506" v="447" actId="1076"/>
+          <ac:spMkLst>
+            <pc:docMk/>
+            <pc:sldMk cId="403151843" sldId="491"/>
+            <ac:spMk id="12" creationId="{9C20913B-8E23-DFA4-8795-0B8686517F01}"/>
+          </ac:spMkLst>
+        </pc:spChg>
+        <pc:spChg chg="add mod">
+          <ac:chgData name="Lines, Todd" userId="afaf7c3a-e8aa-4568-882a-02ad8f9e19b0" providerId="ADAL" clId="{5FF5AC1B-ABA9-43D7-A1E3-2D92732CD6E2}" dt="2026-03-31T17:05:26.832" v="200" actId="14100"/>
+          <ac:spMkLst>
+            <pc:docMk/>
+            <pc:sldMk cId="403151843" sldId="491"/>
+            <ac:spMk id="13" creationId="{8298ACB4-1ECF-EA3C-D73B-588F988C32A1}"/>
+          </ac:spMkLst>
+        </pc:spChg>
+        <pc:spChg chg="add del mod">
+          <ac:chgData name="Lines, Todd" userId="afaf7c3a-e8aa-4568-882a-02ad8f9e19b0" providerId="ADAL" clId="{5FF5AC1B-ABA9-43D7-A1E3-2D92732CD6E2}" dt="2026-03-31T17:05:21.719" v="199" actId="478"/>
+          <ac:spMkLst>
+            <pc:docMk/>
+            <pc:sldMk cId="403151843" sldId="491"/>
+            <ac:spMk id="14" creationId="{237925E0-C731-E9FD-ACF3-7D7E69FDBA79}"/>
+          </ac:spMkLst>
+        </pc:spChg>
+        <pc:spChg chg="add del mod">
+          <ac:chgData name="Lines, Todd" userId="afaf7c3a-e8aa-4568-882a-02ad8f9e19b0" providerId="ADAL" clId="{5FF5AC1B-ABA9-43D7-A1E3-2D92732CD6E2}" dt="2026-03-31T18:21:30.162" v="520" actId="478"/>
+          <ac:spMkLst>
+            <pc:docMk/>
+            <pc:sldMk cId="403151843" sldId="491"/>
+            <ac:spMk id="14" creationId="{88A454B6-607D-657D-9BB9-23541A6751E0}"/>
+          </ac:spMkLst>
+        </pc:spChg>
+        <pc:spChg chg="add mod ord">
+          <ac:chgData name="Lines, Todd" userId="afaf7c3a-e8aa-4568-882a-02ad8f9e19b0" providerId="ADAL" clId="{5FF5AC1B-ABA9-43D7-A1E3-2D92732CD6E2}" dt="2026-03-31T17:20:03.506" v="447" actId="1076"/>
+          <ac:spMkLst>
+            <pc:docMk/>
+            <pc:sldMk cId="403151843" sldId="491"/>
+            <ac:spMk id="15" creationId="{ADC6E333-C323-609E-2C24-7D94919D03AA}"/>
+          </ac:spMkLst>
+        </pc:spChg>
+        <pc:spChg chg="add mod">
+          <ac:chgData name="Lines, Todd" userId="afaf7c3a-e8aa-4568-882a-02ad8f9e19b0" providerId="ADAL" clId="{5FF5AC1B-ABA9-43D7-A1E3-2D92732CD6E2}" dt="2026-03-31T18:21:39.069" v="523" actId="14100"/>
+          <ac:spMkLst>
+            <pc:docMk/>
+            <pc:sldMk cId="403151843" sldId="491"/>
+            <ac:spMk id="16" creationId="{70563D98-10D8-ED0C-0DBA-A6DED290534E}"/>
+          </ac:spMkLst>
+        </pc:spChg>
+        <pc:spChg chg="add del mod">
+          <ac:chgData name="Lines, Todd" userId="afaf7c3a-e8aa-4568-882a-02ad8f9e19b0" providerId="ADAL" clId="{5FF5AC1B-ABA9-43D7-A1E3-2D92732CD6E2}" dt="2026-03-31T16:58:02.100" v="37" actId="478"/>
+          <ac:spMkLst>
+            <pc:docMk/>
+            <pc:sldMk cId="403151843" sldId="491"/>
+            <ac:spMk id="16" creationId="{E6D5AB84-7B1F-B684-FDE9-E077F2FE04E0}"/>
+          </ac:spMkLst>
+        </pc:spChg>
+        <pc:spChg chg="add mod ord">
+          <ac:chgData name="Lines, Todd" userId="afaf7c3a-e8aa-4568-882a-02ad8f9e19b0" providerId="ADAL" clId="{5FF5AC1B-ABA9-43D7-A1E3-2D92732CD6E2}" dt="2026-03-31T17:17:09.996" v="388" actId="14100"/>
+          <ac:spMkLst>
+            <pc:docMk/>
+            <pc:sldMk cId="403151843" sldId="491"/>
+            <ac:spMk id="17" creationId="{9F7C406B-1F76-26C7-8B1D-253140385A24}"/>
+          </ac:spMkLst>
+        </pc:spChg>
+        <pc:spChg chg="add del mod ord">
+          <ac:chgData name="Lines, Todd" userId="afaf7c3a-e8aa-4568-882a-02ad8f9e19b0" providerId="ADAL" clId="{5FF5AC1B-ABA9-43D7-A1E3-2D92732CD6E2}" dt="2026-03-31T17:19:53.867" v="445" actId="478"/>
+          <ac:spMkLst>
+            <pc:docMk/>
+            <pc:sldMk cId="403151843" sldId="491"/>
+            <ac:spMk id="18" creationId="{4EFB59E6-C196-479A-6263-94C690909702}"/>
+          </ac:spMkLst>
+        </pc:spChg>
+        <pc:spChg chg="add del mod ord">
+          <ac:chgData name="Lines, Todd" userId="afaf7c3a-e8aa-4568-882a-02ad8f9e19b0" providerId="ADAL" clId="{5FF5AC1B-ABA9-43D7-A1E3-2D92732CD6E2}" dt="2026-03-31T17:20:03.506" v="447" actId="1076"/>
+          <ac:spMkLst>
+            <pc:docMk/>
+            <pc:sldMk cId="403151843" sldId="491"/>
+            <ac:spMk id="19" creationId="{4C43CEA2-F7E4-B221-5BCF-9E13F2F11BCF}"/>
+          </ac:spMkLst>
+        </pc:spChg>
+        <pc:spChg chg="add mod ord">
+          <ac:chgData name="Lines, Todd" userId="afaf7c3a-e8aa-4568-882a-02ad8f9e19b0" providerId="ADAL" clId="{5FF5AC1B-ABA9-43D7-A1E3-2D92732CD6E2}" dt="2026-03-31T17:20:03.506" v="447" actId="1076"/>
+          <ac:spMkLst>
+            <pc:docMk/>
+            <pc:sldMk cId="403151843" sldId="491"/>
+            <ac:spMk id="20" creationId="{9C20913B-8E23-DFA4-8795-0B8686517F01}"/>
+          </ac:spMkLst>
+        </pc:spChg>
+        <pc:spChg chg="add mod">
+          <ac:chgData name="Lines, Todd" userId="afaf7c3a-e8aa-4568-882a-02ad8f9e19b0" providerId="ADAL" clId="{5FF5AC1B-ABA9-43D7-A1E3-2D92732CD6E2}" dt="2026-03-31T17:18:52.356" v="435" actId="1035"/>
+          <ac:spMkLst>
+            <pc:docMk/>
+            <pc:sldMk cId="403151843" sldId="491"/>
+            <ac:spMk id="21" creationId="{C8E6AC44-F52A-570B-C93E-E3600DC4B4FA}"/>
+          </ac:spMkLst>
+        </pc:spChg>
+        <pc:spChg chg="add mod ord">
+          <ac:chgData name="Lines, Todd" userId="afaf7c3a-e8aa-4568-882a-02ad8f9e19b0" providerId="ADAL" clId="{5FF5AC1B-ABA9-43D7-A1E3-2D92732CD6E2}" dt="2026-03-31T17:18:48.899" v="433" actId="1035"/>
+          <ac:spMkLst>
+            <pc:docMk/>
+            <pc:sldMk cId="403151843" sldId="491"/>
+            <ac:spMk id="22" creationId="{E9A70D16-38EC-FA1F-2067-91F7317D8F7B}"/>
+          </ac:spMkLst>
+        </pc:spChg>
+        <pc:spChg chg="add mod ord">
+          <ac:chgData name="Lines, Todd" userId="afaf7c3a-e8aa-4568-882a-02ad8f9e19b0" providerId="ADAL" clId="{5FF5AC1B-ABA9-43D7-A1E3-2D92732CD6E2}" dt="2026-03-31T17:20:03.506" v="447" actId="1076"/>
+          <ac:spMkLst>
+            <pc:docMk/>
+            <pc:sldMk cId="403151843" sldId="491"/>
+            <ac:spMk id="23" creationId="{89B8B6E3-A1C6-A3B7-DB90-5A8F6EE766E7}"/>
+          </ac:spMkLst>
+        </pc:spChg>
+        <pc:spChg chg="add mod ord">
+          <ac:chgData name="Lines, Todd" userId="afaf7c3a-e8aa-4568-882a-02ad8f9e19b0" providerId="ADAL" clId="{5FF5AC1B-ABA9-43D7-A1E3-2D92732CD6E2}" dt="2026-03-31T17:20:03.506" v="447" actId="1076"/>
+          <ac:spMkLst>
+            <pc:docMk/>
+            <pc:sldMk cId="403151843" sldId="491"/>
+            <ac:spMk id="24" creationId="{0C0C1B29-7B7D-1262-2242-2F09343BBAA1}"/>
+          </ac:spMkLst>
+        </pc:spChg>
+        <pc:spChg chg="add mod">
+          <ac:chgData name="Lines, Todd" userId="afaf7c3a-e8aa-4568-882a-02ad8f9e19b0" providerId="ADAL" clId="{5FF5AC1B-ABA9-43D7-A1E3-2D92732CD6E2}" dt="2026-03-31T17:08:11.997" v="232" actId="1076"/>
+          <ac:spMkLst>
+            <pc:docMk/>
+            <pc:sldMk cId="403151843" sldId="491"/>
+            <ac:spMk id="25" creationId="{D0B3F9A9-49AE-1BEB-DEC3-39A0955558B7}"/>
+          </ac:spMkLst>
+        </pc:spChg>
+        <pc:spChg chg="add mod">
+          <ac:chgData name="Lines, Todd" userId="afaf7c3a-e8aa-4568-882a-02ad8f9e19b0" providerId="ADAL" clId="{5FF5AC1B-ABA9-43D7-A1E3-2D92732CD6E2}" dt="2026-03-31T17:20:03.506" v="447" actId="1076"/>
+          <ac:spMkLst>
+            <pc:docMk/>
+            <pc:sldMk cId="403151843" sldId="491"/>
+            <ac:spMk id="26" creationId="{0855BDB8-A1CF-2ACF-A14A-259EB6C50C5C}"/>
+          </ac:spMkLst>
+        </pc:spChg>
+        <pc:spChg chg="add mod ord">
+          <ac:chgData name="Lines, Todd" userId="afaf7c3a-e8aa-4568-882a-02ad8f9e19b0" providerId="ADAL" clId="{5FF5AC1B-ABA9-43D7-A1E3-2D92732CD6E2}" dt="2026-03-31T17:13:52.572" v="353" actId="166"/>
+          <ac:spMkLst>
+            <pc:docMk/>
+            <pc:sldMk cId="403151843" sldId="491"/>
+            <ac:spMk id="27" creationId="{97C9F5F0-DA83-014B-B52C-A9989287E00D}"/>
+          </ac:spMkLst>
+        </pc:spChg>
+        <pc:spChg chg="add mod">
+          <ac:chgData name="Lines, Todd" userId="afaf7c3a-e8aa-4568-882a-02ad8f9e19b0" providerId="ADAL" clId="{5FF5AC1B-ABA9-43D7-A1E3-2D92732CD6E2}" dt="2026-03-31T17:20:03.506" v="447" actId="1076"/>
+          <ac:spMkLst>
+            <pc:docMk/>
+            <pc:sldMk cId="403151843" sldId="491"/>
+            <ac:spMk id="32" creationId="{9DE87A87-C22C-7AFE-78B3-4AFDE8C44449}"/>
+          </ac:spMkLst>
+        </pc:spChg>
+        <pc:spChg chg="add mod">
+          <ac:chgData name="Lines, Todd" userId="afaf7c3a-e8aa-4568-882a-02ad8f9e19b0" providerId="ADAL" clId="{5FF5AC1B-ABA9-43D7-A1E3-2D92732CD6E2}" dt="2026-03-31T17:20:03.506" v="447" actId="1076"/>
+          <ac:spMkLst>
+            <pc:docMk/>
+            <pc:sldMk cId="403151843" sldId="491"/>
+            <ac:spMk id="33" creationId="{E7BEBAC5-78D1-8695-574B-7DC4F4259B85}"/>
+          </ac:spMkLst>
+        </pc:spChg>
+        <pc:spChg chg="add mod">
+          <ac:chgData name="Lines, Todd" userId="afaf7c3a-e8aa-4568-882a-02ad8f9e19b0" providerId="ADAL" clId="{5FF5AC1B-ABA9-43D7-A1E3-2D92732CD6E2}" dt="2026-03-31T17:20:03.506" v="447" actId="1076"/>
+          <ac:spMkLst>
+            <pc:docMk/>
+            <pc:sldMk cId="403151843" sldId="491"/>
+            <ac:spMk id="34" creationId="{442A1DB1-BDD0-96C5-CCD0-47094D72A1F3}"/>
+          </ac:spMkLst>
+        </pc:spChg>
+        <pc:picChg chg="add mod">
+          <ac:chgData name="Lines, Todd" userId="afaf7c3a-e8aa-4568-882a-02ad8f9e19b0" providerId="ADAL" clId="{5FF5AC1B-ABA9-43D7-A1E3-2D92732CD6E2}" dt="2026-03-31T18:21:59.592" v="528" actId="1076"/>
+          <ac:picMkLst>
+            <pc:docMk/>
+            <pc:sldMk cId="403151843" sldId="491"/>
+            <ac:picMk id="4" creationId="{08AE5275-D8AC-A14B-69B4-DE5098F75237}"/>
+          </ac:picMkLst>
+        </pc:picChg>
+        <pc:picChg chg="add del mod">
+          <ac:chgData name="Lines, Todd" userId="afaf7c3a-e8aa-4568-882a-02ad8f9e19b0" providerId="ADAL" clId="{5FF5AC1B-ABA9-43D7-A1E3-2D92732CD6E2}" dt="2026-03-31T17:19:45.067" v="443" actId="478"/>
+          <ac:picMkLst>
+            <pc:docMk/>
+            <pc:sldMk cId="403151843" sldId="491"/>
+            <ac:picMk id="5" creationId="{66B6BE6B-BA56-6632-FD7C-A9C11A3EA36D}"/>
+          </ac:picMkLst>
+        </pc:picChg>
+        <pc:picChg chg="add del mod">
+          <ac:chgData name="Lines, Todd" userId="afaf7c3a-e8aa-4568-882a-02ad8f9e19b0" providerId="ADAL" clId="{5FF5AC1B-ABA9-43D7-A1E3-2D92732CD6E2}" dt="2026-03-31T16:55:44.093" v="10" actId="478"/>
+          <ac:picMkLst>
+            <pc:docMk/>
+            <pc:sldMk cId="403151843" sldId="491"/>
+            <ac:picMk id="6" creationId="{843D8325-5718-BCD1-9BE3-31EACC93AA4F}"/>
+          </ac:picMkLst>
+        </pc:picChg>
+        <pc:picChg chg="del mod">
+          <ac:chgData name="Lines, Todd" userId="afaf7c3a-e8aa-4568-882a-02ad8f9e19b0" providerId="ADAL" clId="{5FF5AC1B-ABA9-43D7-A1E3-2D92732CD6E2}" dt="2026-03-31T18:22:14.976" v="530" actId="21"/>
+          <ac:picMkLst>
+            <pc:docMk/>
+            <pc:sldMk cId="403151843" sldId="491"/>
+            <ac:picMk id="18" creationId="{BFDE7A56-A41F-437E-0A2D-B30CEDBCABF4}"/>
+          </ac:picMkLst>
+        </pc:picChg>
+        <pc:picChg chg="del mod">
+          <ac:chgData name="Lines, Todd" userId="afaf7c3a-e8aa-4568-882a-02ad8f9e19b0" providerId="ADAL" clId="{5FF5AC1B-ABA9-43D7-A1E3-2D92732CD6E2}" dt="2026-03-31T19:47:56.233" v="552" actId="21"/>
+          <ac:picMkLst>
+            <pc:docMk/>
+            <pc:sldMk cId="403151843" sldId="491"/>
+            <ac:picMk id="28" creationId="{E26171E3-A344-F12D-1C5D-BA6F92646C09}"/>
+          </ac:picMkLst>
+        </pc:picChg>
+        <pc:cxnChg chg="add del mod">
+          <ac:chgData name="Lines, Todd" userId="afaf7c3a-e8aa-4568-882a-02ad8f9e19b0" providerId="ADAL" clId="{5FF5AC1B-ABA9-43D7-A1E3-2D92732CD6E2}" dt="2026-03-31T17:11:51.655" v="273" actId="478"/>
+          <ac:cxnSpMkLst>
+            <pc:docMk/>
+            <pc:sldMk cId="403151843" sldId="491"/>
+            <ac:cxnSpMk id="29" creationId="{EF50CEA1-0CFE-E702-0FD2-A743EDBFCA7E}"/>
+          </ac:cxnSpMkLst>
+        </pc:cxnChg>
+        <pc:cxnChg chg="add del mod">
+          <ac:chgData name="Lines, Todd" userId="afaf7c3a-e8aa-4568-882a-02ad8f9e19b0" providerId="ADAL" clId="{5FF5AC1B-ABA9-43D7-A1E3-2D92732CD6E2}" dt="2026-03-31T17:11:53.807" v="274" actId="478"/>
+          <ac:cxnSpMkLst>
+            <pc:docMk/>
+            <pc:sldMk cId="403151843" sldId="491"/>
+            <ac:cxnSpMk id="30" creationId="{66BA3B13-CC1B-E51F-54B3-6B87D5BF476A}"/>
+          </ac:cxnSpMkLst>
+        </pc:cxnChg>
+        <pc:cxnChg chg="add del mod">
+          <ac:chgData name="Lines, Todd" userId="afaf7c3a-e8aa-4568-882a-02ad8f9e19b0" providerId="ADAL" clId="{5FF5AC1B-ABA9-43D7-A1E3-2D92732CD6E2}" dt="2026-03-31T17:11:20.669" v="269" actId="478"/>
+          <ac:cxnSpMkLst>
+            <pc:docMk/>
+            <pc:sldMk cId="403151843" sldId="491"/>
+            <ac:cxnSpMk id="31" creationId="{2EA31224-9EF4-EA4F-45E1-6BE7051BBD23}"/>
+          </ac:cxnSpMkLst>
+        </pc:cxnChg>
       </pc:sldChg>
     </pc:docChg>
   </pc:docChgLst>
@@ -318,7 +657,7 @@
           <a:p>
             <a:fld id="{5D14FE54-3E4B-43AC-AC6A-78E009FC7A62}" type="datetimeFigureOut">
               <a:rPr lang="en-US" smtClean="0"/>
-              <a:t>1/22/2026</a:t>
+              <a:t>3/31/2026</a:t>
             </a:fld>
             <a:endParaRPr lang="en-US"/>
           </a:p>
@@ -516,7 +855,7 @@
           <a:p>
             <a:fld id="{5D14FE54-3E4B-43AC-AC6A-78E009FC7A62}" type="datetimeFigureOut">
               <a:rPr lang="en-US" smtClean="0"/>
-              <a:t>1/22/2026</a:t>
+              <a:t>3/31/2026</a:t>
             </a:fld>
             <a:endParaRPr lang="en-US"/>
           </a:p>
@@ -724,7 +1063,7 @@
           <a:p>
             <a:fld id="{5D14FE54-3E4B-43AC-AC6A-78E009FC7A62}" type="datetimeFigureOut">
               <a:rPr lang="en-US" smtClean="0"/>
-              <a:t>1/22/2026</a:t>
+              <a:t>3/31/2026</a:t>
             </a:fld>
             <a:endParaRPr lang="en-US"/>
           </a:p>
@@ -922,7 +1261,7 @@
           <a:p>
             <a:fld id="{5D14FE54-3E4B-43AC-AC6A-78E009FC7A62}" type="datetimeFigureOut">
               <a:rPr lang="en-US" smtClean="0"/>
-              <a:t>1/22/2026</a:t>
+              <a:t>3/31/2026</a:t>
             </a:fld>
             <a:endParaRPr lang="en-US"/>
           </a:p>
@@ -1197,7 +1536,7 @@
           <a:p>
             <a:fld id="{5D14FE54-3E4B-43AC-AC6A-78E009FC7A62}" type="datetimeFigureOut">
               <a:rPr lang="en-US" smtClean="0"/>
-              <a:t>1/22/2026</a:t>
+              <a:t>3/31/2026</a:t>
             </a:fld>
             <a:endParaRPr lang="en-US"/>
           </a:p>
@@ -1462,7 +1801,7 @@
           <a:p>
             <a:fld id="{5D14FE54-3E4B-43AC-AC6A-78E009FC7A62}" type="datetimeFigureOut">
               <a:rPr lang="en-US" smtClean="0"/>
-              <a:t>1/22/2026</a:t>
+              <a:t>3/31/2026</a:t>
             </a:fld>
             <a:endParaRPr lang="en-US"/>
           </a:p>
@@ -1874,7 +2213,7 @@
           <a:p>
             <a:fld id="{5D14FE54-3E4B-43AC-AC6A-78E009FC7A62}" type="datetimeFigureOut">
               <a:rPr lang="en-US" smtClean="0"/>
-              <a:t>1/22/2026</a:t>
+              <a:t>3/31/2026</a:t>
             </a:fld>
             <a:endParaRPr lang="en-US"/>
           </a:p>
@@ -2015,7 +2354,7 @@
           <a:p>
             <a:fld id="{5D14FE54-3E4B-43AC-AC6A-78E009FC7A62}" type="datetimeFigureOut">
               <a:rPr lang="en-US" smtClean="0"/>
-              <a:t>1/22/2026</a:t>
+              <a:t>3/31/2026</a:t>
             </a:fld>
             <a:endParaRPr lang="en-US"/>
           </a:p>
@@ -2128,7 +2467,7 @@
           <a:p>
             <a:fld id="{5D14FE54-3E4B-43AC-AC6A-78E009FC7A62}" type="datetimeFigureOut">
               <a:rPr lang="en-US" smtClean="0"/>
-              <a:t>1/22/2026</a:t>
+              <a:t>3/31/2026</a:t>
             </a:fld>
             <a:endParaRPr lang="en-US"/>
           </a:p>
@@ -2439,7 +2778,7 @@
           <a:p>
             <a:fld id="{5D14FE54-3E4B-43AC-AC6A-78E009FC7A62}" type="datetimeFigureOut">
               <a:rPr lang="en-US" smtClean="0"/>
-              <a:t>1/22/2026</a:t>
+              <a:t>3/31/2026</a:t>
             </a:fld>
             <a:endParaRPr lang="en-US"/>
           </a:p>
@@ -2727,7 +3066,7 @@
           <a:p>
             <a:fld id="{5D14FE54-3E4B-43AC-AC6A-78E009FC7A62}" type="datetimeFigureOut">
               <a:rPr lang="en-US" smtClean="0"/>
-              <a:t>1/22/2026</a:t>
+              <a:t>3/31/2026</a:t>
             </a:fld>
             <a:endParaRPr lang="en-US"/>
           </a:p>
@@ -2968,7 +3307,7 @@
           <a:p>
             <a:fld id="{5D14FE54-3E4B-43AC-AC6A-78E009FC7A62}" type="datetimeFigureOut">
               <a:rPr lang="en-US" smtClean="0"/>
-              <a:t>1/22/2026</a:t>
+              <a:t>3/31/2026</a:t>
             </a:fld>
             <a:endParaRPr lang="en-US"/>
           </a:p>
@@ -3470,6 +3809,125 @@
       </p:grpSpPr>
       <p:sp>
         <p:nvSpPr>
+          <p:cNvPr id="2" name="Title 1">
+            <a:extLst>
+              <a:ext uri="{FF2B5EF4-FFF2-40B4-BE49-F238E27FC236}">
+                <a16:creationId xmlns:a16="http://schemas.microsoft.com/office/drawing/2014/main" id="{36C05A08-BBAD-733F-9214-FFCA080F07AC}"/>
+              </a:ext>
+            </a:extLst>
+          </p:cNvPr>
+          <p:cNvSpPr>
+            <a:spLocks noGrp="1"/>
+          </p:cNvSpPr>
+          <p:nvPr>
+            <p:ph type="title"/>
+          </p:nvPr>
+        </p:nvSpPr>
+        <p:spPr/>
+        <p:txBody>
+          <a:bodyPr/>
+          <a:lstStyle/>
+          <a:p>
+            <a:r>
+              <a:rPr lang="en-US" dirty="0"/>
+              <a:t>Question</a:t>
+            </a:r>
+          </a:p>
+        </p:txBody>
+      </p:sp>
+      <p:sp>
+        <p:nvSpPr>
+          <p:cNvPr id="3" name="Content Placeholder 2">
+            <a:extLst>
+              <a:ext uri="{FF2B5EF4-FFF2-40B4-BE49-F238E27FC236}">
+                <a16:creationId xmlns:a16="http://schemas.microsoft.com/office/drawing/2014/main" id="{857BFD40-4C1B-BCE6-1015-757E5ACBD398}"/>
+              </a:ext>
+            </a:extLst>
+          </p:cNvPr>
+          <p:cNvSpPr>
+            <a:spLocks noGrp="1"/>
+          </p:cNvSpPr>
+          <p:nvPr>
+            <p:ph idx="1"/>
+          </p:nvPr>
+        </p:nvSpPr>
+        <p:spPr/>
+        <p:txBody>
+          <a:bodyPr/>
+          <a:lstStyle/>
+          <a:p>
+            <a:pPr marL="0" indent="0">
+              <a:buNone/>
+            </a:pPr>
+            <a:r>
+              <a:rPr lang="en-US" dirty="0"/>
+              <a:t>Why do we like conservation laws in physics?</a:t>
+            </a:r>
+          </a:p>
+          <a:p>
+            <a:pPr marL="514350" indent="-514350">
+              <a:buFont typeface="+mj-lt"/>
+              <a:buAutoNum type="alphaLcParenR"/>
+            </a:pPr>
+            <a:r>
+              <a:rPr lang="en-US" dirty="0"/>
+              <a:t>They tell us how the universe works</a:t>
+            </a:r>
+          </a:p>
+          <a:p>
+            <a:pPr marL="514350" indent="-514350">
+              <a:buFont typeface="+mj-lt"/>
+              <a:buAutoNum type="alphaLcParenR"/>
+            </a:pPr>
+            <a:r>
+              <a:rPr lang="en-US" dirty="0"/>
+              <a:t>They make everything easy to understand</a:t>
+            </a:r>
+          </a:p>
+          <a:p>
+            <a:pPr marL="514350" indent="-514350">
+              <a:buFont typeface="+mj-lt"/>
+              <a:buAutoNum type="alphaLcParenR"/>
+            </a:pPr>
+            <a:r>
+              <a:rPr lang="en-US" dirty="0"/>
+              <a:t>They make solving problems easier</a:t>
+            </a:r>
+          </a:p>
+        </p:txBody>
+      </p:sp>
+    </p:spTree>
+    <p:extLst>
+      <p:ext uri="{BB962C8B-B14F-4D97-AF65-F5344CB8AC3E}">
+        <p14:creationId xmlns:p14="http://schemas.microsoft.com/office/powerpoint/2010/main" val="3378814276"/>
+      </p:ext>
+    </p:extLst>
+  </p:cSld>
+  <p:clrMapOvr>
+    <a:masterClrMapping/>
+  </p:clrMapOvr>
+</p:sld>
+</file>
+
+<file path=ppt/slides/slide11.xml><?xml version="1.0" encoding="utf-8"?>
+<p:sld xmlns:a="http://schemas.openxmlformats.org/drawingml/2006/main" xmlns:r="http://schemas.openxmlformats.org/officeDocument/2006/relationships" xmlns:p="http://schemas.openxmlformats.org/presentationml/2006/main">
+  <p:cSld>
+    <p:spTree>
+      <p:nvGrpSpPr>
+        <p:cNvPr id="1" name=""/>
+        <p:cNvGrpSpPr/>
+        <p:nvPr/>
+      </p:nvGrpSpPr>
+      <p:grpSpPr>
+        <a:xfrm>
+          <a:off x="0" y="0"/>
+          <a:ext cx="0" cy="0"/>
+          <a:chOff x="0" y="0"/>
+          <a:chExt cx="0" cy="0"/>
+        </a:xfrm>
+      </p:grpSpPr>
+      <p:sp>
+        <p:nvSpPr>
           <p:cNvPr id="2" name="Title 1"/>
           <p:cNvSpPr>
             <a:spLocks noGrp="1"/>
@@ -3547,7 +4005,7 @@
 </p:sld>
 </file>
 
-<file path=ppt/slides/slide11.xml><?xml version="1.0" encoding="utf-8"?>
+<file path=ppt/slides/slide12.xml><?xml version="1.0" encoding="utf-8"?>
 <p:sld xmlns:a="http://schemas.openxmlformats.org/drawingml/2006/main" xmlns:r="http://schemas.openxmlformats.org/officeDocument/2006/relationships" xmlns:p="http://schemas.openxmlformats.org/presentationml/2006/main">
   <p:cSld>
     <p:spTree>
@@ -4096,7 +4554,7 @@
 </p:sld>
 </file>
 
-<file path=ppt/slides/slide12.xml><?xml version="1.0" encoding="utf-8"?>
+<file path=ppt/slides/slide13.xml><?xml version="1.0" encoding="utf-8"?>
 <p:sld xmlns:a="http://schemas.openxmlformats.org/drawingml/2006/main" xmlns:r="http://schemas.openxmlformats.org/officeDocument/2006/relationships" xmlns:p="http://schemas.openxmlformats.org/presentationml/2006/main">
   <p:cSld>
     <p:spTree>
@@ -4192,7 +4650,7 @@
 </p:sld>
 </file>
 
-<file path=ppt/slides/slide13.xml><?xml version="1.0" encoding="utf-8"?>
+<file path=ppt/slides/slide14.xml><?xml version="1.0" encoding="utf-8"?>
 <p:sld xmlns:a="http://schemas.openxmlformats.org/drawingml/2006/main" xmlns:r="http://schemas.openxmlformats.org/officeDocument/2006/relationships" xmlns:p="http://schemas.openxmlformats.org/presentationml/2006/main">
   <p:cSld>
     <p:spTree>
@@ -4229,7 +4687,7 @@
             <a:fld id="{C2812B8D-E844-4807-B20D-B92C141DEBC2}" type="slidenum">
               <a:rPr lang="en-US" smtClean="0"/>
               <a:pPr/>
-              <a:t>13</a:t>
+              <a:t>14</a:t>
             </a:fld>
             <a:endParaRPr lang="en-US"/>
           </a:p>
@@ -4567,607 +5025,6 @@
     <p:extLst>
       <p:ext uri="{BB962C8B-B14F-4D97-AF65-F5344CB8AC3E}">
         <p14:creationId xmlns:p14="http://schemas.microsoft.com/office/powerpoint/2010/main" val="3786188879"/>
-      </p:ext>
-    </p:extLst>
-  </p:cSld>
-  <p:clrMapOvr>
-    <a:masterClrMapping/>
-  </p:clrMapOvr>
-</p:sld>
-</file>
-
-<file path=ppt/slides/slide14.xml><?xml version="1.0" encoding="utf-8"?>
-<p:sld xmlns:a="http://schemas.openxmlformats.org/drawingml/2006/main" xmlns:r="http://schemas.openxmlformats.org/officeDocument/2006/relationships" xmlns:p="http://schemas.openxmlformats.org/presentationml/2006/main">
-  <p:cSld>
-    <p:spTree>
-      <p:nvGrpSpPr>
-        <p:cNvPr id="1" name=""/>
-        <p:cNvGrpSpPr/>
-        <p:nvPr/>
-      </p:nvGrpSpPr>
-      <p:grpSpPr>
-        <a:xfrm>
-          <a:off x="0" y="0"/>
-          <a:ext cx="0" cy="0"/>
-          <a:chOff x="0" y="0"/>
-          <a:chExt cx="0" cy="0"/>
-        </a:xfrm>
-      </p:grpSpPr>
-      <p:sp>
-        <p:nvSpPr>
-          <p:cNvPr id="4" name="Cylinder 3">
-            <a:extLst>
-              <a:ext uri="{FF2B5EF4-FFF2-40B4-BE49-F238E27FC236}">
-                <a16:creationId xmlns:a16="http://schemas.microsoft.com/office/drawing/2014/main" id="{C7CEA9B5-10E1-0690-20A5-E941D70EF6CE}"/>
-              </a:ext>
-            </a:extLst>
-          </p:cNvPr>
-          <p:cNvSpPr/>
-          <p:nvPr/>
-        </p:nvSpPr>
-        <p:spPr>
-          <a:xfrm rot="16200000">
-            <a:off x="5327904" y="329184"/>
-            <a:ext cx="932688" cy="4681728"/>
-          </a:xfrm>
-          <a:prstGeom prst="can">
-            <a:avLst>
-              <a:gd name="adj" fmla="val 52451"/>
-            </a:avLst>
-          </a:prstGeom>
-          <a:solidFill>
-            <a:schemeClr val="tx2">
-              <a:lumMod val="20000"/>
-              <a:lumOff val="80000"/>
-            </a:schemeClr>
-          </a:solidFill>
-        </p:spPr>
-        <p:style>
-          <a:lnRef idx="2">
-            <a:schemeClr val="accent1">
-              <a:shade val="15000"/>
-            </a:schemeClr>
-          </a:lnRef>
-          <a:fillRef idx="1">
-            <a:schemeClr val="accent1"/>
-          </a:fillRef>
-          <a:effectRef idx="0">
-            <a:schemeClr val="accent1"/>
-          </a:effectRef>
-          <a:fontRef idx="minor">
-            <a:schemeClr val="lt1"/>
-          </a:fontRef>
-        </p:style>
-        <p:txBody>
-          <a:bodyPr rtlCol="0" anchor="ctr"/>
-          <a:lstStyle/>
-          <a:p>
-            <a:pPr algn="ctr"/>
-            <a:endParaRPr lang="en-US"/>
-          </a:p>
-        </p:txBody>
-      </p:sp>
-      <p:sp>
-        <p:nvSpPr>
-          <p:cNvPr id="5" name="Cylinder 4">
-            <a:extLst>
-              <a:ext uri="{FF2B5EF4-FFF2-40B4-BE49-F238E27FC236}">
-                <a16:creationId xmlns:a16="http://schemas.microsoft.com/office/drawing/2014/main" id="{0117D1E6-05E3-328B-3F36-AFC8B477D456}"/>
-              </a:ext>
-            </a:extLst>
-          </p:cNvPr>
-          <p:cNvSpPr/>
-          <p:nvPr/>
-        </p:nvSpPr>
-        <p:spPr>
-          <a:xfrm rot="16200000">
-            <a:off x="5353812" y="1754125"/>
-            <a:ext cx="932688" cy="1831848"/>
-          </a:xfrm>
-          <a:prstGeom prst="can">
-            <a:avLst>
-              <a:gd name="adj" fmla="val 52451"/>
-            </a:avLst>
-          </a:prstGeom>
-          <a:solidFill>
-            <a:schemeClr val="tx2">
-              <a:lumMod val="60000"/>
-              <a:lumOff val="40000"/>
-            </a:schemeClr>
-          </a:solidFill>
-        </p:spPr>
-        <p:style>
-          <a:lnRef idx="2">
-            <a:schemeClr val="accent1">
-              <a:shade val="15000"/>
-            </a:schemeClr>
-          </a:lnRef>
-          <a:fillRef idx="1">
-            <a:schemeClr val="accent1"/>
-          </a:fillRef>
-          <a:effectRef idx="0">
-            <a:schemeClr val="accent1"/>
-          </a:effectRef>
-          <a:fontRef idx="minor">
-            <a:schemeClr val="lt1"/>
-          </a:fontRef>
-        </p:style>
-        <p:txBody>
-          <a:bodyPr rtlCol="0" anchor="ctr"/>
-          <a:lstStyle/>
-          <a:p>
-            <a:pPr algn="ctr"/>
-            <a:endParaRPr lang="en-US"/>
-          </a:p>
-        </p:txBody>
-      </p:sp>
-      <p:sp>
-        <p:nvSpPr>
-          <p:cNvPr id="6" name="TextBox 5">
-            <a:extLst>
-              <a:ext uri="{FF2B5EF4-FFF2-40B4-BE49-F238E27FC236}">
-                <a16:creationId xmlns:a16="http://schemas.microsoft.com/office/drawing/2014/main" id="{82B82AD0-A576-E02B-3403-FC95165C25E7}"/>
-              </a:ext>
-            </a:extLst>
-          </p:cNvPr>
-          <p:cNvSpPr txBox="1"/>
-          <p:nvPr/>
-        </p:nvSpPr>
-        <p:spPr>
-          <a:xfrm>
-            <a:off x="4992262" y="2485382"/>
-            <a:ext cx="320922" cy="369332"/>
-          </a:xfrm>
-          <a:prstGeom prst="rect">
-            <a:avLst/>
-          </a:prstGeom>
-          <a:noFill/>
-        </p:spPr>
-        <p:txBody>
-          <a:bodyPr wrap="none" rtlCol="0">
-            <a:spAutoFit/>
-          </a:bodyPr>
-          <a:lstStyle/>
-          <a:p>
-            <a:r>
-              <a:rPr lang="en-US" dirty="0"/>
-              <a:t>A</a:t>
-            </a:r>
-          </a:p>
-        </p:txBody>
-      </p:sp>
-      <p:cxnSp>
-        <p:nvCxnSpPr>
-          <p:cNvPr id="8" name="Straight Connector 7">
-            <a:extLst>
-              <a:ext uri="{FF2B5EF4-FFF2-40B4-BE49-F238E27FC236}">
-                <a16:creationId xmlns:a16="http://schemas.microsoft.com/office/drawing/2014/main" id="{0ACF803B-B61B-F4CF-3CBB-0086E5811D65}"/>
-              </a:ext>
-            </a:extLst>
-          </p:cNvPr>
-          <p:cNvCxnSpPr/>
-          <p:nvPr/>
-        </p:nvCxnSpPr>
-        <p:spPr>
-          <a:xfrm flipV="1">
-            <a:off x="5151120" y="1618488"/>
-            <a:ext cx="0" cy="521208"/>
-          </a:xfrm>
-          <a:prstGeom prst="line">
-            <a:avLst/>
-          </a:prstGeom>
-          <a:ln>
-            <a:solidFill>
-              <a:schemeClr val="tx1"/>
-            </a:solidFill>
-            <a:prstDash val="dash"/>
-          </a:ln>
-        </p:spPr>
-        <p:style>
-          <a:lnRef idx="1">
-            <a:schemeClr val="accent1"/>
-          </a:lnRef>
-          <a:fillRef idx="0">
-            <a:schemeClr val="accent1"/>
-          </a:fillRef>
-          <a:effectRef idx="0">
-            <a:schemeClr val="accent1"/>
-          </a:effectRef>
-          <a:fontRef idx="minor">
-            <a:schemeClr val="tx1"/>
-          </a:fontRef>
-        </p:style>
-      </p:cxnSp>
-      <p:cxnSp>
-        <p:nvCxnSpPr>
-          <p:cNvPr id="9" name="Straight Connector 8">
-            <a:extLst>
-              <a:ext uri="{FF2B5EF4-FFF2-40B4-BE49-F238E27FC236}">
-                <a16:creationId xmlns:a16="http://schemas.microsoft.com/office/drawing/2014/main" id="{603595B2-A95D-A8D4-51D7-931603F86545}"/>
-              </a:ext>
-            </a:extLst>
-          </p:cNvPr>
-          <p:cNvCxnSpPr/>
-          <p:nvPr/>
-        </p:nvCxnSpPr>
-        <p:spPr>
-          <a:xfrm flipV="1">
-            <a:off x="6556248" y="1618488"/>
-            <a:ext cx="0" cy="521208"/>
-          </a:xfrm>
-          <a:prstGeom prst="line">
-            <a:avLst/>
-          </a:prstGeom>
-          <a:ln>
-            <a:solidFill>
-              <a:schemeClr val="tx1"/>
-            </a:solidFill>
-            <a:prstDash val="dash"/>
-          </a:ln>
-        </p:spPr>
-        <p:style>
-          <a:lnRef idx="1">
-            <a:schemeClr val="accent1"/>
-          </a:lnRef>
-          <a:fillRef idx="0">
-            <a:schemeClr val="accent1"/>
-          </a:fillRef>
-          <a:effectRef idx="0">
-            <a:schemeClr val="accent1"/>
-          </a:effectRef>
-          <a:fontRef idx="minor">
-            <a:schemeClr val="tx1"/>
-          </a:fontRef>
-        </p:style>
-      </p:cxnSp>
-      <p:cxnSp>
-        <p:nvCxnSpPr>
-          <p:cNvPr id="11" name="Straight Arrow Connector 10">
-            <a:extLst>
-              <a:ext uri="{FF2B5EF4-FFF2-40B4-BE49-F238E27FC236}">
-                <a16:creationId xmlns:a16="http://schemas.microsoft.com/office/drawing/2014/main" id="{D1A9A135-2042-0657-03DA-4F1D50813C6D}"/>
-              </a:ext>
-            </a:extLst>
-          </p:cNvPr>
-          <p:cNvCxnSpPr/>
-          <p:nvPr/>
-        </p:nvCxnSpPr>
-        <p:spPr>
-          <a:xfrm>
-            <a:off x="5151120" y="1879092"/>
-            <a:ext cx="1392936" cy="0"/>
-          </a:xfrm>
-          <a:prstGeom prst="straightConnector1">
-            <a:avLst/>
-          </a:prstGeom>
-          <a:ln>
-            <a:solidFill>
-              <a:schemeClr val="tx1"/>
-            </a:solidFill>
-            <a:prstDash val="dash"/>
-            <a:headEnd type="triangle"/>
-            <a:tailEnd type="triangle"/>
-          </a:ln>
-        </p:spPr>
-        <p:style>
-          <a:lnRef idx="1">
-            <a:schemeClr val="accent1"/>
-          </a:lnRef>
-          <a:fillRef idx="0">
-            <a:schemeClr val="accent1"/>
-          </a:fillRef>
-          <a:effectRef idx="0">
-            <a:schemeClr val="accent1"/>
-          </a:effectRef>
-          <a:fontRef idx="minor">
-            <a:schemeClr val="tx1"/>
-          </a:fontRef>
-        </p:style>
-      </p:cxnSp>
-      <p:sp>
-        <p:nvSpPr>
-          <p:cNvPr id="12" name="TextBox 11">
-            <a:extLst>
-              <a:ext uri="{FF2B5EF4-FFF2-40B4-BE49-F238E27FC236}">
-                <a16:creationId xmlns:a16="http://schemas.microsoft.com/office/drawing/2014/main" id="{13C3B7EB-4075-93A1-F1D5-130146D4AB9C}"/>
-              </a:ext>
-            </a:extLst>
-          </p:cNvPr>
-          <p:cNvSpPr txBox="1"/>
-          <p:nvPr/>
-        </p:nvSpPr>
-        <p:spPr>
-          <a:xfrm>
-            <a:off x="5738796" y="1694426"/>
-            <a:ext cx="425116" cy="369332"/>
-          </a:xfrm>
-          <a:prstGeom prst="rect">
-            <a:avLst/>
-          </a:prstGeom>
-          <a:solidFill>
-            <a:schemeClr val="bg1"/>
-          </a:solidFill>
-        </p:spPr>
-        <p:txBody>
-          <a:bodyPr wrap="none" rtlCol="0">
-            <a:spAutoFit/>
-          </a:bodyPr>
-          <a:lstStyle/>
-          <a:p>
-            <a:r>
-              <a:rPr lang="en-US" dirty="0">
-                <a:sym typeface="Symbol" panose="05050102010706020507" pitchFamily="18" charset="2"/>
-              </a:rPr>
-              <a:t></a:t>
-            </a:r>
-            <a:r>
-              <a:rPr lang="en-US" dirty="0"/>
-              <a:t>x</a:t>
-            </a:r>
-          </a:p>
-        </p:txBody>
-      </p:sp>
-      <p:sp>
-        <p:nvSpPr>
-          <p:cNvPr id="13" name="Oval 12">
-            <a:extLst>
-              <a:ext uri="{FF2B5EF4-FFF2-40B4-BE49-F238E27FC236}">
-                <a16:creationId xmlns:a16="http://schemas.microsoft.com/office/drawing/2014/main" id="{F8877B15-2AAF-441A-8BB6-E91D4626B716}"/>
-              </a:ext>
-            </a:extLst>
-          </p:cNvPr>
-          <p:cNvSpPr/>
-          <p:nvPr/>
-        </p:nvSpPr>
-        <p:spPr>
-          <a:xfrm>
-            <a:off x="6251089" y="2203703"/>
-            <a:ext cx="487680" cy="932689"/>
-          </a:xfrm>
-          <a:prstGeom prst="ellipse">
-            <a:avLst/>
-          </a:prstGeom>
-          <a:solidFill>
-            <a:schemeClr val="tx2">
-              <a:lumMod val="60000"/>
-              <a:lumOff val="40000"/>
-            </a:schemeClr>
-          </a:solidFill>
-          <a:ln w="9525">
-            <a:solidFill>
-              <a:schemeClr val="tx1">
-                <a:lumMod val="95000"/>
-                <a:lumOff val="5000"/>
-              </a:schemeClr>
-            </a:solidFill>
-            <a:prstDash val="dash"/>
-          </a:ln>
-        </p:spPr>
-        <p:style>
-          <a:lnRef idx="2">
-            <a:schemeClr val="accent1">
-              <a:shade val="15000"/>
-            </a:schemeClr>
-          </a:lnRef>
-          <a:fillRef idx="1">
-            <a:schemeClr val="accent1"/>
-          </a:fillRef>
-          <a:effectRef idx="0">
-            <a:schemeClr val="accent1"/>
-          </a:effectRef>
-          <a:fontRef idx="minor">
-            <a:schemeClr val="lt1"/>
-          </a:fontRef>
-        </p:style>
-        <p:txBody>
-          <a:bodyPr rtlCol="0" anchor="ctr"/>
-          <a:lstStyle/>
-          <a:p>
-            <a:pPr algn="ctr"/>
-            <a:endParaRPr lang="en-US"/>
-          </a:p>
-        </p:txBody>
-      </p:sp>
-      <p:sp>
-        <p:nvSpPr>
-          <p:cNvPr id="14" name="Arc 13">
-            <a:extLst>
-              <a:ext uri="{FF2B5EF4-FFF2-40B4-BE49-F238E27FC236}">
-                <a16:creationId xmlns:a16="http://schemas.microsoft.com/office/drawing/2014/main" id="{C8CB2D2C-A259-ACC4-DFDD-B2C86AA527A1}"/>
-              </a:ext>
-            </a:extLst>
-          </p:cNvPr>
-          <p:cNvSpPr/>
-          <p:nvPr/>
-        </p:nvSpPr>
-        <p:spPr>
-          <a:xfrm>
-            <a:off x="6248040" y="2203704"/>
-            <a:ext cx="487680" cy="932689"/>
-          </a:xfrm>
-          <a:prstGeom prst="arc">
-            <a:avLst>
-              <a:gd name="adj1" fmla="val 16200000"/>
-              <a:gd name="adj2" fmla="val 5236651"/>
-            </a:avLst>
-          </a:prstGeom>
-          <a:ln w="28575">
-            <a:solidFill>
-              <a:schemeClr val="tx1"/>
-            </a:solidFill>
-          </a:ln>
-        </p:spPr>
-        <p:style>
-          <a:lnRef idx="1">
-            <a:schemeClr val="accent1"/>
-          </a:lnRef>
-          <a:fillRef idx="0">
-            <a:schemeClr val="accent1"/>
-          </a:fillRef>
-          <a:effectRef idx="0">
-            <a:schemeClr val="accent1"/>
-          </a:effectRef>
-          <a:fontRef idx="minor">
-            <a:schemeClr val="tx1"/>
-          </a:fontRef>
-        </p:style>
-        <p:txBody>
-          <a:bodyPr rtlCol="0" anchor="ctr"/>
-          <a:lstStyle/>
-          <a:p>
-            <a:pPr algn="ctr"/>
-            <a:endParaRPr lang="en-US"/>
-          </a:p>
-        </p:txBody>
-      </p:sp>
-      <p:sp>
-        <p:nvSpPr>
-          <p:cNvPr id="15" name="Oval 14">
-            <a:extLst>
-              <a:ext uri="{FF2B5EF4-FFF2-40B4-BE49-F238E27FC236}">
-                <a16:creationId xmlns:a16="http://schemas.microsoft.com/office/drawing/2014/main" id="{7FA60F47-8906-0C8E-78DA-8CF2FFEB52BC}"/>
-              </a:ext>
-            </a:extLst>
-          </p:cNvPr>
-          <p:cNvSpPr/>
-          <p:nvPr/>
-        </p:nvSpPr>
-        <p:spPr>
-          <a:xfrm>
-            <a:off x="7647432" y="2203703"/>
-            <a:ext cx="487680" cy="932689"/>
-          </a:xfrm>
-          <a:prstGeom prst="ellipse">
-            <a:avLst/>
-          </a:prstGeom>
-          <a:solidFill>
-            <a:schemeClr val="tx2">
-              <a:lumMod val="20000"/>
-              <a:lumOff val="80000"/>
-            </a:schemeClr>
-          </a:solidFill>
-          <a:ln w="9525">
-            <a:solidFill>
-              <a:schemeClr val="tx1">
-                <a:lumMod val="95000"/>
-                <a:lumOff val="5000"/>
-              </a:schemeClr>
-            </a:solidFill>
-            <a:prstDash val="dash"/>
-          </a:ln>
-        </p:spPr>
-        <p:style>
-          <a:lnRef idx="2">
-            <a:schemeClr val="accent1">
-              <a:shade val="15000"/>
-            </a:schemeClr>
-          </a:lnRef>
-          <a:fillRef idx="1">
-            <a:schemeClr val="accent1"/>
-          </a:fillRef>
-          <a:effectRef idx="0">
-            <a:schemeClr val="accent1"/>
-          </a:effectRef>
-          <a:fontRef idx="minor">
-            <a:schemeClr val="lt1"/>
-          </a:fontRef>
-        </p:style>
-        <p:txBody>
-          <a:bodyPr rtlCol="0" anchor="ctr"/>
-          <a:lstStyle/>
-          <a:p>
-            <a:pPr algn="ctr"/>
-            <a:endParaRPr lang="en-US"/>
-          </a:p>
-        </p:txBody>
-      </p:sp>
-      <p:cxnSp>
-        <p:nvCxnSpPr>
-          <p:cNvPr id="17" name="Straight Arrow Connector 16">
-            <a:extLst>
-              <a:ext uri="{FF2B5EF4-FFF2-40B4-BE49-F238E27FC236}">
-                <a16:creationId xmlns:a16="http://schemas.microsoft.com/office/drawing/2014/main" id="{9D2453E8-F171-5CE9-7C13-324E3A854047}"/>
-              </a:ext>
-            </a:extLst>
-          </p:cNvPr>
-          <p:cNvCxnSpPr>
-            <a:cxnSpLocks/>
-          </p:cNvCxnSpPr>
-          <p:nvPr/>
-        </p:nvCxnSpPr>
-        <p:spPr>
-          <a:xfrm>
-            <a:off x="6824472" y="2670046"/>
-            <a:ext cx="551688" cy="0"/>
-          </a:xfrm>
-          <a:prstGeom prst="straightConnector1">
-            <a:avLst/>
-          </a:prstGeom>
-          <a:ln w="38100">
-            <a:solidFill>
-              <a:srgbClr val="FF0000"/>
-            </a:solidFill>
-            <a:tailEnd type="triangle"/>
-          </a:ln>
-        </p:spPr>
-        <p:style>
-          <a:lnRef idx="1">
-            <a:schemeClr val="accent1"/>
-          </a:lnRef>
-          <a:fillRef idx="0">
-            <a:schemeClr val="accent1"/>
-          </a:fillRef>
-          <a:effectRef idx="0">
-            <a:schemeClr val="accent1"/>
-          </a:effectRef>
-          <a:fontRef idx="minor">
-            <a:schemeClr val="tx1"/>
-          </a:fontRef>
-        </p:style>
-      </p:cxnSp>
-      <p:sp>
-        <p:nvSpPr>
-          <p:cNvPr id="19" name="TextBox 18">
-            <a:extLst>
-              <a:ext uri="{FF2B5EF4-FFF2-40B4-BE49-F238E27FC236}">
-                <a16:creationId xmlns:a16="http://schemas.microsoft.com/office/drawing/2014/main" id="{A2FD0FCE-7FAC-FFE3-03DC-DD75ECB7FD13}"/>
-              </a:ext>
-            </a:extLst>
-          </p:cNvPr>
-          <p:cNvSpPr txBox="1"/>
-          <p:nvPr/>
-        </p:nvSpPr>
-        <p:spPr>
-          <a:xfrm>
-            <a:off x="6892398" y="2300713"/>
-            <a:ext cx="288862" cy="369332"/>
-          </a:xfrm>
-          <a:prstGeom prst="rect">
-            <a:avLst/>
-          </a:prstGeom>
-          <a:noFill/>
-        </p:spPr>
-        <p:txBody>
-          <a:bodyPr wrap="none" rtlCol="0">
-            <a:spAutoFit/>
-          </a:bodyPr>
-          <a:lstStyle/>
-          <a:p>
-            <a:r>
-              <a:rPr lang="en-US" dirty="0">
-                <a:solidFill>
-                  <a:srgbClr val="FF0000"/>
-                </a:solidFill>
-              </a:rPr>
-              <a:t>v</a:t>
-            </a:r>
-          </a:p>
-        </p:txBody>
-      </p:sp>
-    </p:spTree>
-    <p:extLst>
-      <p:ext uri="{BB962C8B-B14F-4D97-AF65-F5344CB8AC3E}">
-        <p14:creationId xmlns:p14="http://schemas.microsoft.com/office/powerpoint/2010/main" val="1247448808"/>
       </p:ext>
     </p:extLst>
   </p:cSld>
@@ -5196,6 +5053,607 @@
       </p:grpSpPr>
       <p:sp>
         <p:nvSpPr>
+          <p:cNvPr id="4" name="Cylinder 3">
+            <a:extLst>
+              <a:ext uri="{FF2B5EF4-FFF2-40B4-BE49-F238E27FC236}">
+                <a16:creationId xmlns:a16="http://schemas.microsoft.com/office/drawing/2014/main" id="{C7CEA9B5-10E1-0690-20A5-E941D70EF6CE}"/>
+              </a:ext>
+            </a:extLst>
+          </p:cNvPr>
+          <p:cNvSpPr/>
+          <p:nvPr/>
+        </p:nvSpPr>
+        <p:spPr>
+          <a:xfrm rot="16200000">
+            <a:off x="5327904" y="329184"/>
+            <a:ext cx="932688" cy="4681728"/>
+          </a:xfrm>
+          <a:prstGeom prst="can">
+            <a:avLst>
+              <a:gd name="adj" fmla="val 52451"/>
+            </a:avLst>
+          </a:prstGeom>
+          <a:solidFill>
+            <a:schemeClr val="tx2">
+              <a:lumMod val="20000"/>
+              <a:lumOff val="80000"/>
+            </a:schemeClr>
+          </a:solidFill>
+        </p:spPr>
+        <p:style>
+          <a:lnRef idx="2">
+            <a:schemeClr val="accent1">
+              <a:shade val="15000"/>
+            </a:schemeClr>
+          </a:lnRef>
+          <a:fillRef idx="1">
+            <a:schemeClr val="accent1"/>
+          </a:fillRef>
+          <a:effectRef idx="0">
+            <a:schemeClr val="accent1"/>
+          </a:effectRef>
+          <a:fontRef idx="minor">
+            <a:schemeClr val="lt1"/>
+          </a:fontRef>
+        </p:style>
+        <p:txBody>
+          <a:bodyPr rtlCol="0" anchor="ctr"/>
+          <a:lstStyle/>
+          <a:p>
+            <a:pPr algn="ctr"/>
+            <a:endParaRPr lang="en-US"/>
+          </a:p>
+        </p:txBody>
+      </p:sp>
+      <p:sp>
+        <p:nvSpPr>
+          <p:cNvPr id="5" name="Cylinder 4">
+            <a:extLst>
+              <a:ext uri="{FF2B5EF4-FFF2-40B4-BE49-F238E27FC236}">
+                <a16:creationId xmlns:a16="http://schemas.microsoft.com/office/drawing/2014/main" id="{0117D1E6-05E3-328B-3F36-AFC8B477D456}"/>
+              </a:ext>
+            </a:extLst>
+          </p:cNvPr>
+          <p:cNvSpPr/>
+          <p:nvPr/>
+        </p:nvSpPr>
+        <p:spPr>
+          <a:xfrm rot="16200000">
+            <a:off x="5353812" y="1754125"/>
+            <a:ext cx="932688" cy="1831848"/>
+          </a:xfrm>
+          <a:prstGeom prst="can">
+            <a:avLst>
+              <a:gd name="adj" fmla="val 52451"/>
+            </a:avLst>
+          </a:prstGeom>
+          <a:solidFill>
+            <a:schemeClr val="tx2">
+              <a:lumMod val="60000"/>
+              <a:lumOff val="40000"/>
+            </a:schemeClr>
+          </a:solidFill>
+        </p:spPr>
+        <p:style>
+          <a:lnRef idx="2">
+            <a:schemeClr val="accent1">
+              <a:shade val="15000"/>
+            </a:schemeClr>
+          </a:lnRef>
+          <a:fillRef idx="1">
+            <a:schemeClr val="accent1"/>
+          </a:fillRef>
+          <a:effectRef idx="0">
+            <a:schemeClr val="accent1"/>
+          </a:effectRef>
+          <a:fontRef idx="minor">
+            <a:schemeClr val="lt1"/>
+          </a:fontRef>
+        </p:style>
+        <p:txBody>
+          <a:bodyPr rtlCol="0" anchor="ctr"/>
+          <a:lstStyle/>
+          <a:p>
+            <a:pPr algn="ctr"/>
+            <a:endParaRPr lang="en-US"/>
+          </a:p>
+        </p:txBody>
+      </p:sp>
+      <p:sp>
+        <p:nvSpPr>
+          <p:cNvPr id="6" name="TextBox 5">
+            <a:extLst>
+              <a:ext uri="{FF2B5EF4-FFF2-40B4-BE49-F238E27FC236}">
+                <a16:creationId xmlns:a16="http://schemas.microsoft.com/office/drawing/2014/main" id="{82B82AD0-A576-E02B-3403-FC95165C25E7}"/>
+              </a:ext>
+            </a:extLst>
+          </p:cNvPr>
+          <p:cNvSpPr txBox="1"/>
+          <p:nvPr/>
+        </p:nvSpPr>
+        <p:spPr>
+          <a:xfrm>
+            <a:off x="4992262" y="2485382"/>
+            <a:ext cx="320922" cy="369332"/>
+          </a:xfrm>
+          <a:prstGeom prst="rect">
+            <a:avLst/>
+          </a:prstGeom>
+          <a:noFill/>
+        </p:spPr>
+        <p:txBody>
+          <a:bodyPr wrap="none" rtlCol="0">
+            <a:spAutoFit/>
+          </a:bodyPr>
+          <a:lstStyle/>
+          <a:p>
+            <a:r>
+              <a:rPr lang="en-US" dirty="0"/>
+              <a:t>A</a:t>
+            </a:r>
+          </a:p>
+        </p:txBody>
+      </p:sp>
+      <p:cxnSp>
+        <p:nvCxnSpPr>
+          <p:cNvPr id="8" name="Straight Connector 7">
+            <a:extLst>
+              <a:ext uri="{FF2B5EF4-FFF2-40B4-BE49-F238E27FC236}">
+                <a16:creationId xmlns:a16="http://schemas.microsoft.com/office/drawing/2014/main" id="{0ACF803B-B61B-F4CF-3CBB-0086E5811D65}"/>
+              </a:ext>
+            </a:extLst>
+          </p:cNvPr>
+          <p:cNvCxnSpPr/>
+          <p:nvPr/>
+        </p:nvCxnSpPr>
+        <p:spPr>
+          <a:xfrm flipV="1">
+            <a:off x="5151120" y="1618488"/>
+            <a:ext cx="0" cy="521208"/>
+          </a:xfrm>
+          <a:prstGeom prst="line">
+            <a:avLst/>
+          </a:prstGeom>
+          <a:ln>
+            <a:solidFill>
+              <a:schemeClr val="tx1"/>
+            </a:solidFill>
+            <a:prstDash val="dash"/>
+          </a:ln>
+        </p:spPr>
+        <p:style>
+          <a:lnRef idx="1">
+            <a:schemeClr val="accent1"/>
+          </a:lnRef>
+          <a:fillRef idx="0">
+            <a:schemeClr val="accent1"/>
+          </a:fillRef>
+          <a:effectRef idx="0">
+            <a:schemeClr val="accent1"/>
+          </a:effectRef>
+          <a:fontRef idx="minor">
+            <a:schemeClr val="tx1"/>
+          </a:fontRef>
+        </p:style>
+      </p:cxnSp>
+      <p:cxnSp>
+        <p:nvCxnSpPr>
+          <p:cNvPr id="9" name="Straight Connector 8">
+            <a:extLst>
+              <a:ext uri="{FF2B5EF4-FFF2-40B4-BE49-F238E27FC236}">
+                <a16:creationId xmlns:a16="http://schemas.microsoft.com/office/drawing/2014/main" id="{603595B2-A95D-A8D4-51D7-931603F86545}"/>
+              </a:ext>
+            </a:extLst>
+          </p:cNvPr>
+          <p:cNvCxnSpPr/>
+          <p:nvPr/>
+        </p:nvCxnSpPr>
+        <p:spPr>
+          <a:xfrm flipV="1">
+            <a:off x="6556248" y="1618488"/>
+            <a:ext cx="0" cy="521208"/>
+          </a:xfrm>
+          <a:prstGeom prst="line">
+            <a:avLst/>
+          </a:prstGeom>
+          <a:ln>
+            <a:solidFill>
+              <a:schemeClr val="tx1"/>
+            </a:solidFill>
+            <a:prstDash val="dash"/>
+          </a:ln>
+        </p:spPr>
+        <p:style>
+          <a:lnRef idx="1">
+            <a:schemeClr val="accent1"/>
+          </a:lnRef>
+          <a:fillRef idx="0">
+            <a:schemeClr val="accent1"/>
+          </a:fillRef>
+          <a:effectRef idx="0">
+            <a:schemeClr val="accent1"/>
+          </a:effectRef>
+          <a:fontRef idx="minor">
+            <a:schemeClr val="tx1"/>
+          </a:fontRef>
+        </p:style>
+      </p:cxnSp>
+      <p:cxnSp>
+        <p:nvCxnSpPr>
+          <p:cNvPr id="11" name="Straight Arrow Connector 10">
+            <a:extLst>
+              <a:ext uri="{FF2B5EF4-FFF2-40B4-BE49-F238E27FC236}">
+                <a16:creationId xmlns:a16="http://schemas.microsoft.com/office/drawing/2014/main" id="{D1A9A135-2042-0657-03DA-4F1D50813C6D}"/>
+              </a:ext>
+            </a:extLst>
+          </p:cNvPr>
+          <p:cNvCxnSpPr/>
+          <p:nvPr/>
+        </p:nvCxnSpPr>
+        <p:spPr>
+          <a:xfrm>
+            <a:off x="5151120" y="1879092"/>
+            <a:ext cx="1392936" cy="0"/>
+          </a:xfrm>
+          <a:prstGeom prst="straightConnector1">
+            <a:avLst/>
+          </a:prstGeom>
+          <a:ln>
+            <a:solidFill>
+              <a:schemeClr val="tx1"/>
+            </a:solidFill>
+            <a:prstDash val="dash"/>
+            <a:headEnd type="triangle"/>
+            <a:tailEnd type="triangle"/>
+          </a:ln>
+        </p:spPr>
+        <p:style>
+          <a:lnRef idx="1">
+            <a:schemeClr val="accent1"/>
+          </a:lnRef>
+          <a:fillRef idx="0">
+            <a:schemeClr val="accent1"/>
+          </a:fillRef>
+          <a:effectRef idx="0">
+            <a:schemeClr val="accent1"/>
+          </a:effectRef>
+          <a:fontRef idx="minor">
+            <a:schemeClr val="tx1"/>
+          </a:fontRef>
+        </p:style>
+      </p:cxnSp>
+      <p:sp>
+        <p:nvSpPr>
+          <p:cNvPr id="12" name="TextBox 11">
+            <a:extLst>
+              <a:ext uri="{FF2B5EF4-FFF2-40B4-BE49-F238E27FC236}">
+                <a16:creationId xmlns:a16="http://schemas.microsoft.com/office/drawing/2014/main" id="{13C3B7EB-4075-93A1-F1D5-130146D4AB9C}"/>
+              </a:ext>
+            </a:extLst>
+          </p:cNvPr>
+          <p:cNvSpPr txBox="1"/>
+          <p:nvPr/>
+        </p:nvSpPr>
+        <p:spPr>
+          <a:xfrm>
+            <a:off x="5738796" y="1694426"/>
+            <a:ext cx="425116" cy="369332"/>
+          </a:xfrm>
+          <a:prstGeom prst="rect">
+            <a:avLst/>
+          </a:prstGeom>
+          <a:solidFill>
+            <a:schemeClr val="bg1"/>
+          </a:solidFill>
+        </p:spPr>
+        <p:txBody>
+          <a:bodyPr wrap="none" rtlCol="0">
+            <a:spAutoFit/>
+          </a:bodyPr>
+          <a:lstStyle/>
+          <a:p>
+            <a:r>
+              <a:rPr lang="en-US" dirty="0">
+                <a:sym typeface="Symbol" panose="05050102010706020507" pitchFamily="18" charset="2"/>
+              </a:rPr>
+              <a:t></a:t>
+            </a:r>
+            <a:r>
+              <a:rPr lang="en-US" dirty="0"/>
+              <a:t>x</a:t>
+            </a:r>
+          </a:p>
+        </p:txBody>
+      </p:sp>
+      <p:sp>
+        <p:nvSpPr>
+          <p:cNvPr id="13" name="Oval 12">
+            <a:extLst>
+              <a:ext uri="{FF2B5EF4-FFF2-40B4-BE49-F238E27FC236}">
+                <a16:creationId xmlns:a16="http://schemas.microsoft.com/office/drawing/2014/main" id="{F8877B15-2AAF-441A-8BB6-E91D4626B716}"/>
+              </a:ext>
+            </a:extLst>
+          </p:cNvPr>
+          <p:cNvSpPr/>
+          <p:nvPr/>
+        </p:nvSpPr>
+        <p:spPr>
+          <a:xfrm>
+            <a:off x="6251089" y="2203703"/>
+            <a:ext cx="487680" cy="932689"/>
+          </a:xfrm>
+          <a:prstGeom prst="ellipse">
+            <a:avLst/>
+          </a:prstGeom>
+          <a:solidFill>
+            <a:schemeClr val="tx2">
+              <a:lumMod val="60000"/>
+              <a:lumOff val="40000"/>
+            </a:schemeClr>
+          </a:solidFill>
+          <a:ln w="9525">
+            <a:solidFill>
+              <a:schemeClr val="tx1">
+                <a:lumMod val="95000"/>
+                <a:lumOff val="5000"/>
+              </a:schemeClr>
+            </a:solidFill>
+            <a:prstDash val="dash"/>
+          </a:ln>
+        </p:spPr>
+        <p:style>
+          <a:lnRef idx="2">
+            <a:schemeClr val="accent1">
+              <a:shade val="15000"/>
+            </a:schemeClr>
+          </a:lnRef>
+          <a:fillRef idx="1">
+            <a:schemeClr val="accent1"/>
+          </a:fillRef>
+          <a:effectRef idx="0">
+            <a:schemeClr val="accent1"/>
+          </a:effectRef>
+          <a:fontRef idx="minor">
+            <a:schemeClr val="lt1"/>
+          </a:fontRef>
+        </p:style>
+        <p:txBody>
+          <a:bodyPr rtlCol="0" anchor="ctr"/>
+          <a:lstStyle/>
+          <a:p>
+            <a:pPr algn="ctr"/>
+            <a:endParaRPr lang="en-US"/>
+          </a:p>
+        </p:txBody>
+      </p:sp>
+      <p:sp>
+        <p:nvSpPr>
+          <p:cNvPr id="14" name="Arc 13">
+            <a:extLst>
+              <a:ext uri="{FF2B5EF4-FFF2-40B4-BE49-F238E27FC236}">
+                <a16:creationId xmlns:a16="http://schemas.microsoft.com/office/drawing/2014/main" id="{C8CB2D2C-A259-ACC4-DFDD-B2C86AA527A1}"/>
+              </a:ext>
+            </a:extLst>
+          </p:cNvPr>
+          <p:cNvSpPr/>
+          <p:nvPr/>
+        </p:nvSpPr>
+        <p:spPr>
+          <a:xfrm>
+            <a:off x="6248040" y="2203704"/>
+            <a:ext cx="487680" cy="932689"/>
+          </a:xfrm>
+          <a:prstGeom prst="arc">
+            <a:avLst>
+              <a:gd name="adj1" fmla="val 16200000"/>
+              <a:gd name="adj2" fmla="val 5236651"/>
+            </a:avLst>
+          </a:prstGeom>
+          <a:ln w="28575">
+            <a:solidFill>
+              <a:schemeClr val="tx1"/>
+            </a:solidFill>
+          </a:ln>
+        </p:spPr>
+        <p:style>
+          <a:lnRef idx="1">
+            <a:schemeClr val="accent1"/>
+          </a:lnRef>
+          <a:fillRef idx="0">
+            <a:schemeClr val="accent1"/>
+          </a:fillRef>
+          <a:effectRef idx="0">
+            <a:schemeClr val="accent1"/>
+          </a:effectRef>
+          <a:fontRef idx="minor">
+            <a:schemeClr val="tx1"/>
+          </a:fontRef>
+        </p:style>
+        <p:txBody>
+          <a:bodyPr rtlCol="0" anchor="ctr"/>
+          <a:lstStyle/>
+          <a:p>
+            <a:pPr algn="ctr"/>
+            <a:endParaRPr lang="en-US"/>
+          </a:p>
+        </p:txBody>
+      </p:sp>
+      <p:sp>
+        <p:nvSpPr>
+          <p:cNvPr id="15" name="Oval 14">
+            <a:extLst>
+              <a:ext uri="{FF2B5EF4-FFF2-40B4-BE49-F238E27FC236}">
+                <a16:creationId xmlns:a16="http://schemas.microsoft.com/office/drawing/2014/main" id="{7FA60F47-8906-0C8E-78DA-8CF2FFEB52BC}"/>
+              </a:ext>
+            </a:extLst>
+          </p:cNvPr>
+          <p:cNvSpPr/>
+          <p:nvPr/>
+        </p:nvSpPr>
+        <p:spPr>
+          <a:xfrm>
+            <a:off x="7647432" y="2203703"/>
+            <a:ext cx="487680" cy="932689"/>
+          </a:xfrm>
+          <a:prstGeom prst="ellipse">
+            <a:avLst/>
+          </a:prstGeom>
+          <a:solidFill>
+            <a:schemeClr val="tx2">
+              <a:lumMod val="20000"/>
+              <a:lumOff val="80000"/>
+            </a:schemeClr>
+          </a:solidFill>
+          <a:ln w="9525">
+            <a:solidFill>
+              <a:schemeClr val="tx1">
+                <a:lumMod val="95000"/>
+                <a:lumOff val="5000"/>
+              </a:schemeClr>
+            </a:solidFill>
+            <a:prstDash val="dash"/>
+          </a:ln>
+        </p:spPr>
+        <p:style>
+          <a:lnRef idx="2">
+            <a:schemeClr val="accent1">
+              <a:shade val="15000"/>
+            </a:schemeClr>
+          </a:lnRef>
+          <a:fillRef idx="1">
+            <a:schemeClr val="accent1"/>
+          </a:fillRef>
+          <a:effectRef idx="0">
+            <a:schemeClr val="accent1"/>
+          </a:effectRef>
+          <a:fontRef idx="minor">
+            <a:schemeClr val="lt1"/>
+          </a:fontRef>
+        </p:style>
+        <p:txBody>
+          <a:bodyPr rtlCol="0" anchor="ctr"/>
+          <a:lstStyle/>
+          <a:p>
+            <a:pPr algn="ctr"/>
+            <a:endParaRPr lang="en-US"/>
+          </a:p>
+        </p:txBody>
+      </p:sp>
+      <p:cxnSp>
+        <p:nvCxnSpPr>
+          <p:cNvPr id="17" name="Straight Arrow Connector 16">
+            <a:extLst>
+              <a:ext uri="{FF2B5EF4-FFF2-40B4-BE49-F238E27FC236}">
+                <a16:creationId xmlns:a16="http://schemas.microsoft.com/office/drawing/2014/main" id="{9D2453E8-F171-5CE9-7C13-324E3A854047}"/>
+              </a:ext>
+            </a:extLst>
+          </p:cNvPr>
+          <p:cNvCxnSpPr>
+            <a:cxnSpLocks/>
+          </p:cNvCxnSpPr>
+          <p:nvPr/>
+        </p:nvCxnSpPr>
+        <p:spPr>
+          <a:xfrm>
+            <a:off x="6824472" y="2670046"/>
+            <a:ext cx="551688" cy="0"/>
+          </a:xfrm>
+          <a:prstGeom prst="straightConnector1">
+            <a:avLst/>
+          </a:prstGeom>
+          <a:ln w="38100">
+            <a:solidFill>
+              <a:srgbClr val="FF0000"/>
+            </a:solidFill>
+            <a:tailEnd type="triangle"/>
+          </a:ln>
+        </p:spPr>
+        <p:style>
+          <a:lnRef idx="1">
+            <a:schemeClr val="accent1"/>
+          </a:lnRef>
+          <a:fillRef idx="0">
+            <a:schemeClr val="accent1"/>
+          </a:fillRef>
+          <a:effectRef idx="0">
+            <a:schemeClr val="accent1"/>
+          </a:effectRef>
+          <a:fontRef idx="minor">
+            <a:schemeClr val="tx1"/>
+          </a:fontRef>
+        </p:style>
+      </p:cxnSp>
+      <p:sp>
+        <p:nvSpPr>
+          <p:cNvPr id="19" name="TextBox 18">
+            <a:extLst>
+              <a:ext uri="{FF2B5EF4-FFF2-40B4-BE49-F238E27FC236}">
+                <a16:creationId xmlns:a16="http://schemas.microsoft.com/office/drawing/2014/main" id="{A2FD0FCE-7FAC-FFE3-03DC-DD75ECB7FD13}"/>
+              </a:ext>
+            </a:extLst>
+          </p:cNvPr>
+          <p:cNvSpPr txBox="1"/>
+          <p:nvPr/>
+        </p:nvSpPr>
+        <p:spPr>
+          <a:xfrm>
+            <a:off x="6892398" y="2300713"/>
+            <a:ext cx="288862" cy="369332"/>
+          </a:xfrm>
+          <a:prstGeom prst="rect">
+            <a:avLst/>
+          </a:prstGeom>
+          <a:noFill/>
+        </p:spPr>
+        <p:txBody>
+          <a:bodyPr wrap="none" rtlCol="0">
+            <a:spAutoFit/>
+          </a:bodyPr>
+          <a:lstStyle/>
+          <a:p>
+            <a:r>
+              <a:rPr lang="en-US" dirty="0">
+                <a:solidFill>
+                  <a:srgbClr val="FF0000"/>
+                </a:solidFill>
+              </a:rPr>
+              <a:t>v</a:t>
+            </a:r>
+          </a:p>
+        </p:txBody>
+      </p:sp>
+    </p:spTree>
+    <p:extLst>
+      <p:ext uri="{BB962C8B-B14F-4D97-AF65-F5344CB8AC3E}">
+        <p14:creationId xmlns:p14="http://schemas.microsoft.com/office/powerpoint/2010/main" val="1247448808"/>
+      </p:ext>
+    </p:extLst>
+  </p:cSld>
+  <p:clrMapOvr>
+    <a:masterClrMapping/>
+  </p:clrMapOvr>
+</p:sld>
+</file>
+
+<file path=ppt/slides/slide16.xml><?xml version="1.0" encoding="utf-8"?>
+<p:sld xmlns:a="http://schemas.openxmlformats.org/drawingml/2006/main" xmlns:r="http://schemas.openxmlformats.org/officeDocument/2006/relationships" xmlns:p="http://schemas.openxmlformats.org/presentationml/2006/main">
+  <p:cSld>
+    <p:spTree>
+      <p:nvGrpSpPr>
+        <p:cNvPr id="1" name=""/>
+        <p:cNvGrpSpPr/>
+        <p:nvPr/>
+      </p:nvGrpSpPr>
+      <p:grpSpPr>
+        <a:xfrm>
+          <a:off x="0" y="0"/>
+          <a:ext cx="0" cy="0"/>
+          <a:chOff x="0" y="0"/>
+          <a:chExt cx="0" cy="0"/>
+        </a:xfrm>
+      </p:grpSpPr>
+      <p:sp>
+        <p:nvSpPr>
           <p:cNvPr id="23" name="Rectangle 22">
             <a:extLst>
               <a:ext uri="{FF2B5EF4-FFF2-40B4-BE49-F238E27FC236}">
@@ -5421,8 +5879,8 @@
           </a:fontRef>
         </p:style>
       </p:cxnSp>
-      <mc:AlternateContent xmlns:mc="http://schemas.openxmlformats.org/markup-compatibility/2006">
-        <mc:Choice xmlns:a14="http://schemas.microsoft.com/office/drawing/2010/main" Requires="a14">
+      <mc:AlternateContent xmlns:mc="http://schemas.openxmlformats.org/markup-compatibility/2006" xmlns:a14="http://schemas.microsoft.com/office/drawing/2010/main">
+        <mc:Choice Requires="a14">
           <p:sp>
             <p:nvSpPr>
               <p:cNvPr id="9" name="TextBox 8">
@@ -5575,7 +6033,7 @@
             </p:txBody>
           </p:sp>
         </mc:Choice>
-        <mc:Fallback>
+        <mc:Fallback xmlns="">
           <p:sp>
             <p:nvSpPr>
               <p:cNvPr id="9" name="TextBox 8">
@@ -5620,8 +6078,8 @@
           </p:sp>
         </mc:Fallback>
       </mc:AlternateContent>
-      <mc:AlternateContent xmlns:mc="http://schemas.openxmlformats.org/markup-compatibility/2006">
-        <mc:Choice xmlns:a14="http://schemas.microsoft.com/office/drawing/2010/main" Requires="a14">
+      <mc:AlternateContent xmlns:mc="http://schemas.openxmlformats.org/markup-compatibility/2006" xmlns:a14="http://schemas.microsoft.com/office/drawing/2010/main">
+        <mc:Choice Requires="a14">
           <p:sp>
             <p:nvSpPr>
               <p:cNvPr id="10" name="TextBox 9">
@@ -5774,7 +6232,7 @@
             </p:txBody>
           </p:sp>
         </mc:Choice>
-        <mc:Fallback>
+        <mc:Fallback xmlns="">
           <p:sp>
             <p:nvSpPr>
               <p:cNvPr id="10" name="TextBox 9">
@@ -6060,7 +6518,7 @@
 </p:sld>
 </file>
 
-<file path=ppt/slides/slide16.xml><?xml version="1.0" encoding="utf-8"?>
+<file path=ppt/slides/slide17.xml><?xml version="1.0" encoding="utf-8"?>
 <p:sld xmlns:a="http://schemas.openxmlformats.org/drawingml/2006/main" xmlns:r="http://schemas.openxmlformats.org/officeDocument/2006/relationships" xmlns:p="http://schemas.openxmlformats.org/presentationml/2006/main">
   <p:cSld>
     <p:spTree>
@@ -7016,7 +7474,7 @@
 </p:sld>
 </file>
 
-<file path=ppt/slides/slide17.xml><?xml version="1.0" encoding="utf-8"?>
+<file path=ppt/slides/slide18.xml><?xml version="1.0" encoding="utf-8"?>
 <p:sld xmlns:a="http://schemas.openxmlformats.org/drawingml/2006/main" xmlns:r="http://schemas.openxmlformats.org/officeDocument/2006/relationships" xmlns:p="http://schemas.openxmlformats.org/presentationml/2006/main">
   <p:cSld>
     <p:spTree>
@@ -7412,6 +7870,1598 @@
   <p:cSld>
     <p:spTree>
       <p:nvGrpSpPr>
+        <p:cNvPr id="1" name=""/>
+        <p:cNvGrpSpPr/>
+        <p:nvPr/>
+      </p:nvGrpSpPr>
+      <p:grpSpPr>
+        <a:xfrm>
+          <a:off x="0" y="0"/>
+          <a:ext cx="0" cy="0"/>
+          <a:chOff x="0" y="0"/>
+          <a:chExt cx="0" cy="0"/>
+        </a:xfrm>
+      </p:grpSpPr>
+      <p:sp>
+        <p:nvSpPr>
+          <p:cNvPr id="23" name="Oval 22">
+            <a:extLst>
+              <a:ext uri="{FF2B5EF4-FFF2-40B4-BE49-F238E27FC236}">
+                <a16:creationId xmlns:a16="http://schemas.microsoft.com/office/drawing/2014/main" id="{89B8B6E3-A1C6-A3B7-DB90-5A8F6EE766E7}"/>
+              </a:ext>
+            </a:extLst>
+          </p:cNvPr>
+          <p:cNvSpPr/>
+          <p:nvPr/>
+        </p:nvSpPr>
+        <p:spPr>
+          <a:xfrm>
+            <a:off x="6650617" y="1975365"/>
+            <a:ext cx="2343150" cy="666750"/>
+          </a:xfrm>
+          <a:prstGeom prst="ellipse">
+            <a:avLst/>
+          </a:prstGeom>
+          <a:solidFill>
+            <a:schemeClr val="bg1">
+              <a:lumMod val="50000"/>
+            </a:schemeClr>
+          </a:solidFill>
+          <a:ln w="6350">
+            <a:solidFill>
+              <a:schemeClr val="tx1"/>
+            </a:solidFill>
+          </a:ln>
+        </p:spPr>
+        <p:style>
+          <a:lnRef idx="2">
+            <a:schemeClr val="accent1">
+              <a:shade val="15000"/>
+            </a:schemeClr>
+          </a:lnRef>
+          <a:fillRef idx="1">
+            <a:schemeClr val="accent1"/>
+          </a:fillRef>
+          <a:effectRef idx="0">
+            <a:schemeClr val="accent1"/>
+          </a:effectRef>
+          <a:fontRef idx="minor">
+            <a:schemeClr val="lt1"/>
+          </a:fontRef>
+        </p:style>
+        <p:txBody>
+          <a:bodyPr rtlCol="0" anchor="ctr"/>
+          <a:lstStyle/>
+          <a:p>
+            <a:pPr algn="ctr"/>
+            <a:endParaRPr lang="en-US"/>
+          </a:p>
+        </p:txBody>
+      </p:sp>
+      <p:sp>
+        <p:nvSpPr>
+          <p:cNvPr id="24" name="Oval 23">
+            <a:extLst>
+              <a:ext uri="{FF2B5EF4-FFF2-40B4-BE49-F238E27FC236}">
+                <a16:creationId xmlns:a16="http://schemas.microsoft.com/office/drawing/2014/main" id="{0C0C1B29-7B7D-1262-2242-2F09343BBAA1}"/>
+              </a:ext>
+            </a:extLst>
+          </p:cNvPr>
+          <p:cNvSpPr/>
+          <p:nvPr/>
+        </p:nvSpPr>
+        <p:spPr>
+          <a:xfrm>
+            <a:off x="6756667" y="2065956"/>
+            <a:ext cx="2133506" cy="456731"/>
+          </a:xfrm>
+          <a:prstGeom prst="ellipse">
+            <a:avLst/>
+          </a:prstGeom>
+          <a:solidFill>
+            <a:schemeClr val="bg1">
+              <a:lumMod val="85000"/>
+            </a:schemeClr>
+          </a:solidFill>
+          <a:ln>
+            <a:noFill/>
+          </a:ln>
+        </p:spPr>
+        <p:style>
+          <a:lnRef idx="2">
+            <a:schemeClr val="accent1">
+              <a:shade val="15000"/>
+            </a:schemeClr>
+          </a:lnRef>
+          <a:fillRef idx="1">
+            <a:schemeClr val="accent1"/>
+          </a:fillRef>
+          <a:effectRef idx="0">
+            <a:schemeClr val="accent1"/>
+          </a:effectRef>
+          <a:fontRef idx="minor">
+            <a:schemeClr val="lt1"/>
+          </a:fontRef>
+        </p:style>
+        <p:txBody>
+          <a:bodyPr rtlCol="0" anchor="ctr"/>
+          <a:lstStyle/>
+          <a:p>
+            <a:pPr algn="ctr"/>
+            <a:endParaRPr lang="en-US"/>
+          </a:p>
+        </p:txBody>
+      </p:sp>
+      <p:sp>
+        <p:nvSpPr>
+          <p:cNvPr id="11" name="Oval 10">
+            <a:extLst>
+              <a:ext uri="{FF2B5EF4-FFF2-40B4-BE49-F238E27FC236}">
+                <a16:creationId xmlns:a16="http://schemas.microsoft.com/office/drawing/2014/main" id="{E92237C2-F4CC-BD5E-520B-FD8603FB6A5B}"/>
+              </a:ext>
+            </a:extLst>
+          </p:cNvPr>
+          <p:cNvSpPr/>
+          <p:nvPr/>
+        </p:nvSpPr>
+        <p:spPr>
+          <a:xfrm>
+            <a:off x="6655381" y="4499551"/>
+            <a:ext cx="2343150" cy="666750"/>
+          </a:xfrm>
+          <a:prstGeom prst="ellipse">
+            <a:avLst/>
+          </a:prstGeom>
+          <a:solidFill>
+            <a:schemeClr val="bg1">
+              <a:lumMod val="50000"/>
+            </a:schemeClr>
+          </a:solidFill>
+          <a:ln>
+            <a:noFill/>
+          </a:ln>
+        </p:spPr>
+        <p:style>
+          <a:lnRef idx="2">
+            <a:schemeClr val="accent1">
+              <a:shade val="15000"/>
+            </a:schemeClr>
+          </a:lnRef>
+          <a:fillRef idx="1">
+            <a:schemeClr val="accent1"/>
+          </a:fillRef>
+          <a:effectRef idx="0">
+            <a:schemeClr val="accent1"/>
+          </a:effectRef>
+          <a:fontRef idx="minor">
+            <a:schemeClr val="lt1"/>
+          </a:fontRef>
+        </p:style>
+        <p:txBody>
+          <a:bodyPr rtlCol="0" anchor="ctr"/>
+          <a:lstStyle/>
+          <a:p>
+            <a:pPr algn="ctr"/>
+            <a:endParaRPr lang="en-US"/>
+          </a:p>
+        </p:txBody>
+      </p:sp>
+      <p:sp>
+        <p:nvSpPr>
+          <p:cNvPr id="22" name="Oval 21">
+            <a:extLst>
+              <a:ext uri="{FF2B5EF4-FFF2-40B4-BE49-F238E27FC236}">
+                <a16:creationId xmlns:a16="http://schemas.microsoft.com/office/drawing/2014/main" id="{E9A70D16-38EC-FA1F-2067-91F7317D8F7B}"/>
+              </a:ext>
+            </a:extLst>
+          </p:cNvPr>
+          <p:cNvSpPr/>
+          <p:nvPr/>
+        </p:nvSpPr>
+        <p:spPr>
+          <a:xfrm>
+            <a:off x="6765739" y="4599712"/>
+            <a:ext cx="2133506" cy="467151"/>
+          </a:xfrm>
+          <a:prstGeom prst="ellipse">
+            <a:avLst/>
+          </a:prstGeom>
+          <a:solidFill>
+            <a:schemeClr val="bg1">
+              <a:lumMod val="85000"/>
+            </a:schemeClr>
+          </a:solidFill>
+          <a:ln>
+            <a:noFill/>
+          </a:ln>
+        </p:spPr>
+        <p:style>
+          <a:lnRef idx="2">
+            <a:schemeClr val="accent1">
+              <a:shade val="15000"/>
+            </a:schemeClr>
+          </a:lnRef>
+          <a:fillRef idx="1">
+            <a:schemeClr val="accent1"/>
+          </a:fillRef>
+          <a:effectRef idx="0">
+            <a:schemeClr val="accent1"/>
+          </a:effectRef>
+          <a:fontRef idx="minor">
+            <a:schemeClr val="lt1"/>
+          </a:fontRef>
+        </p:style>
+        <p:txBody>
+          <a:bodyPr rtlCol="0" anchor="ctr"/>
+          <a:lstStyle/>
+          <a:p>
+            <a:pPr algn="ctr"/>
+            <a:endParaRPr lang="en-US"/>
+          </a:p>
+        </p:txBody>
+      </p:sp>
+      <p:pic>
+        <p:nvPicPr>
+          <p:cNvPr id="4" name="Picture 4">
+            <a:extLst>
+              <a:ext uri="{FF2B5EF4-FFF2-40B4-BE49-F238E27FC236}">
+                <a16:creationId xmlns:a16="http://schemas.microsoft.com/office/drawing/2014/main" id="{08AE5275-D8AC-A14B-69B4-DE5098F75237}"/>
+              </a:ext>
+            </a:extLst>
+          </p:cNvPr>
+          <p:cNvPicPr>
+            <a:picLocks noChangeAspect="1" noChangeArrowheads="1"/>
+          </p:cNvPicPr>
+          <p:nvPr/>
+        </p:nvPicPr>
+        <p:blipFill rotWithShape="1">
+          <a:blip r:embed="rId2" cstate="print">
+            <a:extLst>
+              <a:ext uri="{28A0092B-C50C-407E-A947-70E740481C1C}">
+                <a14:useLocalDpi xmlns:a14="http://schemas.microsoft.com/office/drawing/2010/main" val="0"/>
+              </a:ext>
+            </a:extLst>
+          </a:blip>
+          <a:srcRect l="40400"/>
+          <a:stretch>
+            <a:fillRect/>
+          </a:stretch>
+        </p:blipFill>
+        <p:spPr bwMode="auto">
+          <a:xfrm>
+            <a:off x="1963505" y="1587306"/>
+            <a:ext cx="3826741" cy="3479557"/>
+          </a:xfrm>
+          <a:prstGeom prst="rect">
+            <a:avLst/>
+          </a:prstGeom>
+          <a:noFill/>
+          <a:ln>
+            <a:noFill/>
+          </a:ln>
+          <a:effectLst/>
+          <a:extLst>
+            <a:ext uri="{909E8E84-426E-40DD-AFC4-6F175D3DCCD1}">
+              <a14:hiddenFill xmlns:a14="http://schemas.microsoft.com/office/drawing/2010/main">
+                <a:solidFill>
+                  <a:schemeClr val="accent1"/>
+                </a:solidFill>
+              </a14:hiddenFill>
+            </a:ext>
+            <a:ext uri="{91240B29-F687-4F45-9708-019B960494DF}">
+              <a14:hiddenLine xmlns:a14="http://schemas.microsoft.com/office/drawing/2010/main" w="9525">
+                <a:solidFill>
+                  <a:schemeClr val="tx1"/>
+                </a:solidFill>
+                <a:miter lim="800000"/>
+                <a:headEnd/>
+                <a:tailEnd/>
+              </a14:hiddenLine>
+            </a:ext>
+            <a:ext uri="{AF507438-7753-43E0-B8FC-AC1667EBCBE1}">
+              <a14:hiddenEffects xmlns:a14="http://schemas.microsoft.com/office/drawing/2010/main">
+                <a:effectLst>
+                  <a:outerShdw dist="35921" dir="2700000" algn="ctr" rotWithShape="0">
+                    <a:schemeClr val="bg2"/>
+                  </a:outerShdw>
+                </a:effectLst>
+              </a14:hiddenEffects>
+            </a:ext>
+          </a:extLst>
+        </p:spPr>
+      </p:pic>
+      <p:sp>
+        <p:nvSpPr>
+          <p:cNvPr id="13" name="Rectangle 12">
+            <a:extLst>
+              <a:ext uri="{FF2B5EF4-FFF2-40B4-BE49-F238E27FC236}">
+                <a16:creationId xmlns:a16="http://schemas.microsoft.com/office/drawing/2014/main" id="{8298ACB4-1ECF-EA3C-D73B-588F988C32A1}"/>
+              </a:ext>
+            </a:extLst>
+          </p:cNvPr>
+          <p:cNvSpPr/>
+          <p:nvPr/>
+        </p:nvSpPr>
+        <p:spPr>
+          <a:xfrm>
+            <a:off x="6650617" y="2298268"/>
+            <a:ext cx="2343150" cy="2525712"/>
+          </a:xfrm>
+          <a:prstGeom prst="rect">
+            <a:avLst/>
+          </a:prstGeom>
+          <a:solidFill>
+            <a:schemeClr val="bg1">
+              <a:lumMod val="50000"/>
+            </a:schemeClr>
+          </a:solidFill>
+          <a:ln>
+            <a:noFill/>
+          </a:ln>
+        </p:spPr>
+        <p:style>
+          <a:lnRef idx="2">
+            <a:schemeClr val="accent1">
+              <a:shade val="15000"/>
+            </a:schemeClr>
+          </a:lnRef>
+          <a:fillRef idx="1">
+            <a:schemeClr val="accent1"/>
+          </a:fillRef>
+          <a:effectRef idx="0">
+            <a:schemeClr val="accent1"/>
+          </a:effectRef>
+          <a:fontRef idx="minor">
+            <a:schemeClr val="lt1"/>
+          </a:fontRef>
+        </p:style>
+        <p:txBody>
+          <a:bodyPr rtlCol="0" anchor="ctr"/>
+          <a:lstStyle/>
+          <a:p>
+            <a:pPr algn="ctr"/>
+            <a:endParaRPr lang="en-US"/>
+          </a:p>
+        </p:txBody>
+      </p:sp>
+      <p:sp>
+        <p:nvSpPr>
+          <p:cNvPr id="21" name="Oval 20">
+            <a:extLst>
+              <a:ext uri="{FF2B5EF4-FFF2-40B4-BE49-F238E27FC236}">
+                <a16:creationId xmlns:a16="http://schemas.microsoft.com/office/drawing/2014/main" id="{C8E6AC44-F52A-570B-C93E-E3600DC4B4FA}"/>
+              </a:ext>
+            </a:extLst>
+          </p:cNvPr>
+          <p:cNvSpPr/>
+          <p:nvPr/>
+        </p:nvSpPr>
+        <p:spPr>
+          <a:xfrm>
+            <a:off x="6963859" y="4654672"/>
+            <a:ext cx="1737264" cy="354736"/>
+          </a:xfrm>
+          <a:prstGeom prst="ellipse">
+            <a:avLst/>
+          </a:prstGeom>
+          <a:solidFill>
+            <a:schemeClr val="bg1">
+              <a:lumMod val="50000"/>
+            </a:schemeClr>
+          </a:solidFill>
+          <a:ln>
+            <a:noFill/>
+          </a:ln>
+        </p:spPr>
+        <p:style>
+          <a:lnRef idx="2">
+            <a:schemeClr val="accent1">
+              <a:shade val="15000"/>
+            </a:schemeClr>
+          </a:lnRef>
+          <a:fillRef idx="1">
+            <a:schemeClr val="accent1"/>
+          </a:fillRef>
+          <a:effectRef idx="0">
+            <a:schemeClr val="accent1"/>
+          </a:effectRef>
+          <a:fontRef idx="minor">
+            <a:schemeClr val="lt1"/>
+          </a:fontRef>
+        </p:style>
+        <p:txBody>
+          <a:bodyPr rtlCol="0" anchor="ctr"/>
+          <a:lstStyle/>
+          <a:p>
+            <a:pPr algn="ctr"/>
+            <a:endParaRPr lang="en-US"/>
+          </a:p>
+        </p:txBody>
+      </p:sp>
+      <p:sp>
+        <p:nvSpPr>
+          <p:cNvPr id="20" name="Oval 19">
+            <a:extLst>
+              <a:ext uri="{FF2B5EF4-FFF2-40B4-BE49-F238E27FC236}">
+                <a16:creationId xmlns:a16="http://schemas.microsoft.com/office/drawing/2014/main" id="{9C20913B-8E23-DFA4-8795-0B8686517F01}"/>
+              </a:ext>
+            </a:extLst>
+          </p:cNvPr>
+          <p:cNvSpPr/>
+          <p:nvPr/>
+        </p:nvSpPr>
+        <p:spPr>
+          <a:xfrm>
+            <a:off x="7097496" y="4665164"/>
+            <a:ext cx="1504569" cy="307370"/>
+          </a:xfrm>
+          <a:prstGeom prst="ellipse">
+            <a:avLst/>
+          </a:prstGeom>
+          <a:gradFill flip="none" rotWithShape="1">
+            <a:gsLst>
+              <a:gs pos="0">
+                <a:schemeClr val="accent2">
+                  <a:shade val="30000"/>
+                  <a:satMod val="115000"/>
+                </a:schemeClr>
+              </a:gs>
+              <a:gs pos="50000">
+                <a:schemeClr val="accent2">
+                  <a:shade val="67500"/>
+                  <a:satMod val="115000"/>
+                </a:schemeClr>
+              </a:gs>
+              <a:gs pos="100000">
+                <a:schemeClr val="accent2">
+                  <a:shade val="100000"/>
+                  <a:satMod val="115000"/>
+                </a:schemeClr>
+              </a:gs>
+            </a:gsLst>
+            <a:lin ang="0" scaled="1"/>
+            <a:tileRect/>
+          </a:gradFill>
+          <a:ln>
+            <a:noFill/>
+          </a:ln>
+        </p:spPr>
+        <p:style>
+          <a:lnRef idx="2">
+            <a:schemeClr val="accent1">
+              <a:shade val="15000"/>
+            </a:schemeClr>
+          </a:lnRef>
+          <a:fillRef idx="1">
+            <a:schemeClr val="accent1"/>
+          </a:fillRef>
+          <a:effectRef idx="0">
+            <a:schemeClr val="accent1"/>
+          </a:effectRef>
+          <a:fontRef idx="minor">
+            <a:schemeClr val="lt1"/>
+          </a:fontRef>
+        </p:style>
+        <p:txBody>
+          <a:bodyPr rtlCol="0" anchor="ctr"/>
+          <a:lstStyle/>
+          <a:p>
+            <a:pPr algn="ctr"/>
+            <a:endParaRPr lang="en-US"/>
+          </a:p>
+        </p:txBody>
+      </p:sp>
+      <p:sp>
+        <p:nvSpPr>
+          <p:cNvPr id="19" name="Rectangle 18">
+            <a:extLst>
+              <a:ext uri="{FF2B5EF4-FFF2-40B4-BE49-F238E27FC236}">
+                <a16:creationId xmlns:a16="http://schemas.microsoft.com/office/drawing/2014/main" id="{4C43CEA2-F7E4-B221-5BCF-9E13F2F11BCF}"/>
+              </a:ext>
+            </a:extLst>
+          </p:cNvPr>
+          <p:cNvSpPr/>
+          <p:nvPr/>
+        </p:nvSpPr>
+        <p:spPr>
+          <a:xfrm>
+            <a:off x="7093530" y="2302886"/>
+            <a:ext cx="1504569" cy="2525712"/>
+          </a:xfrm>
+          <a:prstGeom prst="rect">
+            <a:avLst/>
+          </a:prstGeom>
+          <a:gradFill flip="none" rotWithShape="1">
+            <a:gsLst>
+              <a:gs pos="0">
+                <a:schemeClr val="accent2">
+                  <a:shade val="30000"/>
+                  <a:satMod val="115000"/>
+                </a:schemeClr>
+              </a:gs>
+              <a:gs pos="50000">
+                <a:schemeClr val="accent2">
+                  <a:shade val="67500"/>
+                  <a:satMod val="115000"/>
+                </a:schemeClr>
+              </a:gs>
+              <a:gs pos="100000">
+                <a:schemeClr val="accent2">
+                  <a:shade val="100000"/>
+                  <a:satMod val="115000"/>
+                </a:schemeClr>
+              </a:gs>
+            </a:gsLst>
+            <a:lin ang="0" scaled="1"/>
+            <a:tileRect/>
+          </a:gradFill>
+          <a:ln>
+            <a:noFill/>
+          </a:ln>
+        </p:spPr>
+        <p:style>
+          <a:lnRef idx="2">
+            <a:schemeClr val="accent1">
+              <a:shade val="15000"/>
+            </a:schemeClr>
+          </a:lnRef>
+          <a:fillRef idx="1">
+            <a:schemeClr val="accent1"/>
+          </a:fillRef>
+          <a:effectRef idx="0">
+            <a:schemeClr val="accent1"/>
+          </a:effectRef>
+          <a:fontRef idx="minor">
+            <a:schemeClr val="lt1"/>
+          </a:fontRef>
+        </p:style>
+        <p:txBody>
+          <a:bodyPr rtlCol="0" anchor="ctr"/>
+          <a:lstStyle/>
+          <a:p>
+            <a:pPr algn="ctr"/>
+            <a:endParaRPr lang="en-US"/>
+          </a:p>
+        </p:txBody>
+      </p:sp>
+      <p:sp>
+        <p:nvSpPr>
+          <p:cNvPr id="12" name="Oval 11">
+            <a:extLst>
+              <a:ext uri="{FF2B5EF4-FFF2-40B4-BE49-F238E27FC236}">
+                <a16:creationId xmlns:a16="http://schemas.microsoft.com/office/drawing/2014/main" id="{9C20913B-8E23-DFA4-8795-0B8686517F01}"/>
+              </a:ext>
+            </a:extLst>
+          </p:cNvPr>
+          <p:cNvSpPr/>
+          <p:nvPr/>
+        </p:nvSpPr>
+        <p:spPr>
+          <a:xfrm>
+            <a:off x="7090505" y="4668912"/>
+            <a:ext cx="1504569" cy="303622"/>
+          </a:xfrm>
+          <a:prstGeom prst="ellipse">
+            <a:avLst/>
+          </a:prstGeom>
+          <a:noFill/>
+          <a:ln w="9525"/>
+        </p:spPr>
+        <p:style>
+          <a:lnRef idx="2">
+            <a:schemeClr val="accent1">
+              <a:shade val="15000"/>
+            </a:schemeClr>
+          </a:lnRef>
+          <a:fillRef idx="1">
+            <a:schemeClr val="accent1"/>
+          </a:fillRef>
+          <a:effectRef idx="0">
+            <a:schemeClr val="accent1"/>
+          </a:effectRef>
+          <a:fontRef idx="minor">
+            <a:schemeClr val="lt1"/>
+          </a:fontRef>
+        </p:style>
+        <p:txBody>
+          <a:bodyPr rtlCol="0" anchor="ctr"/>
+          <a:lstStyle/>
+          <a:p>
+            <a:pPr algn="ctr"/>
+            <a:endParaRPr lang="en-US"/>
+          </a:p>
+        </p:txBody>
+      </p:sp>
+      <p:sp>
+        <p:nvSpPr>
+          <p:cNvPr id="25" name="Oval 24">
+            <a:extLst>
+              <a:ext uri="{FF2B5EF4-FFF2-40B4-BE49-F238E27FC236}">
+                <a16:creationId xmlns:a16="http://schemas.microsoft.com/office/drawing/2014/main" id="{D0B3F9A9-49AE-1BEB-DEC3-39A0955558B7}"/>
+              </a:ext>
+            </a:extLst>
+          </p:cNvPr>
+          <p:cNvSpPr/>
+          <p:nvPr/>
+        </p:nvSpPr>
+        <p:spPr>
+          <a:xfrm>
+            <a:off x="6953560" y="2159238"/>
+            <a:ext cx="1737264" cy="352221"/>
+          </a:xfrm>
+          <a:prstGeom prst="ellipse">
+            <a:avLst/>
+          </a:prstGeom>
+          <a:solidFill>
+            <a:schemeClr val="bg1">
+              <a:lumMod val="50000"/>
+            </a:schemeClr>
+          </a:solidFill>
+          <a:ln>
+            <a:noFill/>
+          </a:ln>
+        </p:spPr>
+        <p:style>
+          <a:lnRef idx="2">
+            <a:schemeClr val="accent1">
+              <a:shade val="15000"/>
+            </a:schemeClr>
+          </a:lnRef>
+          <a:fillRef idx="1">
+            <a:schemeClr val="accent1"/>
+          </a:fillRef>
+          <a:effectRef idx="0">
+            <a:schemeClr val="accent1"/>
+          </a:effectRef>
+          <a:fontRef idx="minor">
+            <a:schemeClr val="lt1"/>
+          </a:fontRef>
+        </p:style>
+        <p:txBody>
+          <a:bodyPr rtlCol="0" anchor="ctr"/>
+          <a:lstStyle/>
+          <a:p>
+            <a:pPr algn="ctr"/>
+            <a:endParaRPr lang="en-US"/>
+          </a:p>
+        </p:txBody>
+      </p:sp>
+      <p:sp>
+        <p:nvSpPr>
+          <p:cNvPr id="26" name="Cylinder 25">
+            <a:extLst>
+              <a:ext uri="{FF2B5EF4-FFF2-40B4-BE49-F238E27FC236}">
+                <a16:creationId xmlns:a16="http://schemas.microsoft.com/office/drawing/2014/main" id="{0855BDB8-A1CF-2ACF-A14A-259EB6C50C5C}"/>
+              </a:ext>
+            </a:extLst>
+          </p:cNvPr>
+          <p:cNvSpPr/>
+          <p:nvPr/>
+        </p:nvSpPr>
+        <p:spPr>
+          <a:xfrm>
+            <a:off x="7078125" y="2291786"/>
+            <a:ext cx="1523939" cy="535173"/>
+          </a:xfrm>
+          <a:prstGeom prst="can">
+            <a:avLst>
+              <a:gd name="adj" fmla="val 50000"/>
+            </a:avLst>
+          </a:prstGeom>
+          <a:gradFill flip="none" rotWithShape="1">
+            <a:gsLst>
+              <a:gs pos="0">
+                <a:schemeClr val="bg1">
+                  <a:lumMod val="50000"/>
+                  <a:shade val="30000"/>
+                  <a:satMod val="115000"/>
+                </a:schemeClr>
+              </a:gs>
+              <a:gs pos="50000">
+                <a:schemeClr val="bg1">
+                  <a:lumMod val="50000"/>
+                  <a:shade val="67500"/>
+                  <a:satMod val="115000"/>
+                </a:schemeClr>
+              </a:gs>
+              <a:gs pos="100000">
+                <a:schemeClr val="bg1">
+                  <a:lumMod val="50000"/>
+                  <a:shade val="100000"/>
+                  <a:satMod val="115000"/>
+                </a:schemeClr>
+              </a:gs>
+            </a:gsLst>
+            <a:lin ang="0" scaled="1"/>
+            <a:tileRect/>
+          </a:gradFill>
+          <a:ln>
+            <a:noFill/>
+          </a:ln>
+        </p:spPr>
+        <p:style>
+          <a:lnRef idx="2">
+            <a:schemeClr val="accent1">
+              <a:shade val="15000"/>
+            </a:schemeClr>
+          </a:lnRef>
+          <a:fillRef idx="1">
+            <a:schemeClr val="accent1"/>
+          </a:fillRef>
+          <a:effectRef idx="0">
+            <a:schemeClr val="accent1"/>
+          </a:effectRef>
+          <a:fontRef idx="minor">
+            <a:schemeClr val="lt1"/>
+          </a:fontRef>
+        </p:style>
+        <p:txBody>
+          <a:bodyPr rtlCol="0" anchor="ctr"/>
+          <a:lstStyle/>
+          <a:p>
+            <a:pPr algn="ctr"/>
+            <a:endParaRPr lang="en-US"/>
+          </a:p>
+        </p:txBody>
+      </p:sp>
+      <p:sp>
+        <p:nvSpPr>
+          <p:cNvPr id="32" name="Rectangle 31">
+            <a:extLst>
+              <a:ext uri="{FF2B5EF4-FFF2-40B4-BE49-F238E27FC236}">
+                <a16:creationId xmlns:a16="http://schemas.microsoft.com/office/drawing/2014/main" id="{9DE87A87-C22C-7AFE-78B3-4AFDE8C44449}"/>
+              </a:ext>
+            </a:extLst>
+          </p:cNvPr>
+          <p:cNvSpPr/>
+          <p:nvPr/>
+        </p:nvSpPr>
+        <p:spPr>
+          <a:xfrm>
+            <a:off x="6647696" y="2298268"/>
+            <a:ext cx="439887" cy="2521712"/>
+          </a:xfrm>
+          <a:prstGeom prst="rect">
+            <a:avLst/>
+          </a:prstGeom>
+          <a:solidFill>
+            <a:schemeClr val="bg1">
+              <a:lumMod val="50000"/>
+            </a:schemeClr>
+          </a:solidFill>
+          <a:ln w="6350"/>
+        </p:spPr>
+        <p:style>
+          <a:lnRef idx="2">
+            <a:schemeClr val="accent1">
+              <a:shade val="15000"/>
+            </a:schemeClr>
+          </a:lnRef>
+          <a:fillRef idx="1">
+            <a:schemeClr val="accent1"/>
+          </a:fillRef>
+          <a:effectRef idx="0">
+            <a:schemeClr val="accent1"/>
+          </a:effectRef>
+          <a:fontRef idx="minor">
+            <a:schemeClr val="lt1"/>
+          </a:fontRef>
+        </p:style>
+        <p:txBody>
+          <a:bodyPr rtlCol="0" anchor="ctr"/>
+          <a:lstStyle/>
+          <a:p>
+            <a:pPr algn="ctr"/>
+            <a:endParaRPr lang="en-US"/>
+          </a:p>
+        </p:txBody>
+      </p:sp>
+      <p:sp>
+        <p:nvSpPr>
+          <p:cNvPr id="15" name="Rectangle 14">
+            <a:extLst>
+              <a:ext uri="{FF2B5EF4-FFF2-40B4-BE49-F238E27FC236}">
+                <a16:creationId xmlns:a16="http://schemas.microsoft.com/office/drawing/2014/main" id="{ADC6E333-C323-609E-2C24-7D94919D03AA}"/>
+              </a:ext>
+            </a:extLst>
+          </p:cNvPr>
+          <p:cNvSpPr/>
+          <p:nvPr/>
+        </p:nvSpPr>
+        <p:spPr>
+          <a:xfrm>
+            <a:off x="6770276" y="2311504"/>
+            <a:ext cx="198120" cy="2508476"/>
+          </a:xfrm>
+          <a:prstGeom prst="rect">
+            <a:avLst/>
+          </a:prstGeom>
+          <a:solidFill>
+            <a:schemeClr val="bg1">
+              <a:lumMod val="85000"/>
+            </a:schemeClr>
+          </a:solidFill>
+          <a:ln>
+            <a:noFill/>
+          </a:ln>
+        </p:spPr>
+        <p:style>
+          <a:lnRef idx="2">
+            <a:schemeClr val="accent1">
+              <a:shade val="15000"/>
+            </a:schemeClr>
+          </a:lnRef>
+          <a:fillRef idx="1">
+            <a:schemeClr val="accent1"/>
+          </a:fillRef>
+          <a:effectRef idx="0">
+            <a:schemeClr val="accent1"/>
+          </a:effectRef>
+          <a:fontRef idx="minor">
+            <a:schemeClr val="lt1"/>
+          </a:fontRef>
+        </p:style>
+        <p:txBody>
+          <a:bodyPr rtlCol="0" anchor="ctr"/>
+          <a:lstStyle/>
+          <a:p>
+            <a:pPr algn="ctr"/>
+            <a:endParaRPr lang="en-US"/>
+          </a:p>
+        </p:txBody>
+      </p:sp>
+      <p:sp>
+        <p:nvSpPr>
+          <p:cNvPr id="33" name="Rectangle 32">
+            <a:extLst>
+              <a:ext uri="{FF2B5EF4-FFF2-40B4-BE49-F238E27FC236}">
+                <a16:creationId xmlns:a16="http://schemas.microsoft.com/office/drawing/2014/main" id="{E7BEBAC5-78D1-8695-574B-7DC4F4259B85}"/>
+              </a:ext>
+            </a:extLst>
+          </p:cNvPr>
+          <p:cNvSpPr/>
+          <p:nvPr/>
+        </p:nvSpPr>
+        <p:spPr>
+          <a:xfrm>
+            <a:off x="8598144" y="2301070"/>
+            <a:ext cx="395578" cy="2518910"/>
+          </a:xfrm>
+          <a:prstGeom prst="rect">
+            <a:avLst/>
+          </a:prstGeom>
+          <a:solidFill>
+            <a:schemeClr val="bg1">
+              <a:lumMod val="50000"/>
+            </a:schemeClr>
+          </a:solidFill>
+          <a:ln w="6350"/>
+        </p:spPr>
+        <p:style>
+          <a:lnRef idx="2">
+            <a:schemeClr val="accent1">
+              <a:shade val="15000"/>
+            </a:schemeClr>
+          </a:lnRef>
+          <a:fillRef idx="1">
+            <a:schemeClr val="accent1"/>
+          </a:fillRef>
+          <a:effectRef idx="0">
+            <a:schemeClr val="accent1"/>
+          </a:effectRef>
+          <a:fontRef idx="minor">
+            <a:schemeClr val="lt1"/>
+          </a:fontRef>
+        </p:style>
+        <p:txBody>
+          <a:bodyPr rtlCol="0" anchor="ctr"/>
+          <a:lstStyle/>
+          <a:p>
+            <a:pPr algn="ctr"/>
+            <a:endParaRPr lang="en-US"/>
+          </a:p>
+        </p:txBody>
+      </p:sp>
+      <p:sp>
+        <p:nvSpPr>
+          <p:cNvPr id="17" name="Rectangle 16">
+            <a:extLst>
+              <a:ext uri="{FF2B5EF4-FFF2-40B4-BE49-F238E27FC236}">
+                <a16:creationId xmlns:a16="http://schemas.microsoft.com/office/drawing/2014/main" id="{9F7C406B-1F76-26C7-8B1D-253140385A24}"/>
+              </a:ext>
+            </a:extLst>
+          </p:cNvPr>
+          <p:cNvSpPr/>
+          <p:nvPr/>
+        </p:nvSpPr>
+        <p:spPr>
+          <a:xfrm>
+            <a:off x="8696587" y="2312740"/>
+            <a:ext cx="202655" cy="2507240"/>
+          </a:xfrm>
+          <a:prstGeom prst="rect">
+            <a:avLst/>
+          </a:prstGeom>
+          <a:solidFill>
+            <a:schemeClr val="bg1">
+              <a:lumMod val="85000"/>
+            </a:schemeClr>
+          </a:solidFill>
+          <a:ln>
+            <a:noFill/>
+          </a:ln>
+        </p:spPr>
+        <p:style>
+          <a:lnRef idx="2">
+            <a:schemeClr val="accent1">
+              <a:shade val="15000"/>
+            </a:schemeClr>
+          </a:lnRef>
+          <a:fillRef idx="1">
+            <a:schemeClr val="accent1"/>
+          </a:fillRef>
+          <a:effectRef idx="0">
+            <a:schemeClr val="accent1"/>
+          </a:effectRef>
+          <a:fontRef idx="minor">
+            <a:schemeClr val="lt1"/>
+          </a:fontRef>
+        </p:style>
+        <p:txBody>
+          <a:bodyPr rtlCol="0" anchor="ctr"/>
+          <a:lstStyle/>
+          <a:p>
+            <a:pPr algn="ctr"/>
+            <a:endParaRPr lang="en-US"/>
+          </a:p>
+        </p:txBody>
+      </p:sp>
+      <p:sp>
+        <p:nvSpPr>
+          <p:cNvPr id="34" name="Arc 33">
+            <a:extLst>
+              <a:ext uri="{FF2B5EF4-FFF2-40B4-BE49-F238E27FC236}">
+                <a16:creationId xmlns:a16="http://schemas.microsoft.com/office/drawing/2014/main" id="{442A1DB1-BDD0-96C5-CCD0-47094D72A1F3}"/>
+              </a:ext>
+            </a:extLst>
+          </p:cNvPr>
+          <p:cNvSpPr/>
+          <p:nvPr/>
+        </p:nvSpPr>
+        <p:spPr>
+          <a:xfrm>
+            <a:off x="7079189" y="2195959"/>
+            <a:ext cx="1504569" cy="248714"/>
+          </a:xfrm>
+          <a:prstGeom prst="arc">
+            <a:avLst>
+              <a:gd name="adj1" fmla="val 10834829"/>
+              <a:gd name="adj2" fmla="val 0"/>
+            </a:avLst>
+          </a:prstGeom>
+          <a:ln w="9525"/>
+        </p:spPr>
+        <p:style>
+          <a:lnRef idx="2">
+            <a:schemeClr val="dk1"/>
+          </a:lnRef>
+          <a:fillRef idx="0">
+            <a:schemeClr val="dk1"/>
+          </a:fillRef>
+          <a:effectRef idx="1">
+            <a:schemeClr val="dk1"/>
+          </a:effectRef>
+          <a:fontRef idx="minor">
+            <a:schemeClr val="tx1"/>
+          </a:fontRef>
+        </p:style>
+        <p:txBody>
+          <a:bodyPr rtlCol="0" anchor="ctr"/>
+          <a:lstStyle/>
+          <a:p>
+            <a:pPr algn="ctr"/>
+            <a:endParaRPr lang="en-US"/>
+          </a:p>
+        </p:txBody>
+      </p:sp>
+      <p:sp>
+        <p:nvSpPr>
+          <p:cNvPr id="27" name="Cylinder 26">
+            <a:extLst>
+              <a:ext uri="{FF2B5EF4-FFF2-40B4-BE49-F238E27FC236}">
+                <a16:creationId xmlns:a16="http://schemas.microsoft.com/office/drawing/2014/main" id="{97C9F5F0-DA83-014B-B52C-A9989287E00D}"/>
+              </a:ext>
+            </a:extLst>
+          </p:cNvPr>
+          <p:cNvSpPr/>
+          <p:nvPr/>
+        </p:nvSpPr>
+        <p:spPr>
+          <a:xfrm>
+            <a:off x="7502310" y="1514110"/>
+            <a:ext cx="596612" cy="905656"/>
+          </a:xfrm>
+          <a:prstGeom prst="can">
+            <a:avLst>
+              <a:gd name="adj" fmla="val 15479"/>
+            </a:avLst>
+          </a:prstGeom>
+          <a:gradFill flip="none" rotWithShape="1">
+            <a:gsLst>
+              <a:gs pos="0">
+                <a:schemeClr val="bg1">
+                  <a:lumMod val="50000"/>
+                  <a:shade val="30000"/>
+                  <a:satMod val="115000"/>
+                </a:schemeClr>
+              </a:gs>
+              <a:gs pos="50000">
+                <a:schemeClr val="bg1">
+                  <a:lumMod val="50000"/>
+                  <a:shade val="67500"/>
+                  <a:satMod val="115000"/>
+                </a:schemeClr>
+              </a:gs>
+              <a:gs pos="100000">
+                <a:schemeClr val="bg1">
+                  <a:lumMod val="50000"/>
+                  <a:shade val="100000"/>
+                  <a:satMod val="115000"/>
+                </a:schemeClr>
+              </a:gs>
+            </a:gsLst>
+            <a:lin ang="0" scaled="1"/>
+            <a:tileRect/>
+          </a:gradFill>
+          <a:ln>
+            <a:noFill/>
+          </a:ln>
+        </p:spPr>
+        <p:style>
+          <a:lnRef idx="2">
+            <a:schemeClr val="accent1">
+              <a:shade val="15000"/>
+            </a:schemeClr>
+          </a:lnRef>
+          <a:fillRef idx="1">
+            <a:schemeClr val="accent1"/>
+          </a:fillRef>
+          <a:effectRef idx="0">
+            <a:schemeClr val="accent1"/>
+          </a:effectRef>
+          <a:fontRef idx="minor">
+            <a:schemeClr val="lt1"/>
+          </a:fontRef>
+        </p:style>
+        <p:txBody>
+          <a:bodyPr rtlCol="0" anchor="ctr"/>
+          <a:lstStyle/>
+          <a:p>
+            <a:pPr algn="ctr"/>
+            <a:endParaRPr lang="en-US"/>
+          </a:p>
+        </p:txBody>
+      </p:sp>
+      <p:sp>
+        <p:nvSpPr>
+          <p:cNvPr id="2" name="TextBox 1">
+            <a:extLst>
+              <a:ext uri="{FF2B5EF4-FFF2-40B4-BE49-F238E27FC236}">
+                <a16:creationId xmlns:a16="http://schemas.microsoft.com/office/drawing/2014/main" id="{E164F363-7B4B-E628-C5E8-4952D796471C}"/>
+              </a:ext>
+            </a:extLst>
+          </p:cNvPr>
+          <p:cNvSpPr txBox="1"/>
+          <p:nvPr/>
+        </p:nvSpPr>
+        <p:spPr>
+          <a:xfrm>
+            <a:off x="9603816" y="2819217"/>
+            <a:ext cx="1238352" cy="369332"/>
+          </a:xfrm>
+          <a:prstGeom prst="rect">
+            <a:avLst/>
+          </a:prstGeom>
+          <a:noFill/>
+        </p:spPr>
+        <p:txBody>
+          <a:bodyPr wrap="none" rtlCol="0">
+            <a:spAutoFit/>
+          </a:bodyPr>
+          <a:lstStyle/>
+          <a:p>
+            <a:r>
+              <a:rPr lang="en-US" dirty="0"/>
+              <a:t>Outer Wall</a:t>
+            </a:r>
+          </a:p>
+        </p:txBody>
+      </p:sp>
+      <p:sp>
+        <p:nvSpPr>
+          <p:cNvPr id="3" name="TextBox 2">
+            <a:extLst>
+              <a:ext uri="{FF2B5EF4-FFF2-40B4-BE49-F238E27FC236}">
+                <a16:creationId xmlns:a16="http://schemas.microsoft.com/office/drawing/2014/main" id="{875B9F74-81CF-3B10-4FB6-FBEB22837005}"/>
+              </a:ext>
+            </a:extLst>
+          </p:cNvPr>
+          <p:cNvSpPr txBox="1"/>
+          <p:nvPr/>
+        </p:nvSpPr>
+        <p:spPr>
+          <a:xfrm>
+            <a:off x="9806723" y="3397161"/>
+            <a:ext cx="1006366" cy="369332"/>
+          </a:xfrm>
+          <a:prstGeom prst="rect">
+            <a:avLst/>
+          </a:prstGeom>
+          <a:noFill/>
+        </p:spPr>
+        <p:txBody>
+          <a:bodyPr wrap="none" rtlCol="0">
+            <a:spAutoFit/>
+          </a:bodyPr>
+          <a:lstStyle/>
+          <a:p>
+            <a:r>
+              <a:rPr lang="en-US" dirty="0"/>
+              <a:t>Vacuum</a:t>
+            </a:r>
+          </a:p>
+        </p:txBody>
+      </p:sp>
+      <p:sp>
+        <p:nvSpPr>
+          <p:cNvPr id="5" name="TextBox 4">
+            <a:extLst>
+              <a:ext uri="{FF2B5EF4-FFF2-40B4-BE49-F238E27FC236}">
+                <a16:creationId xmlns:a16="http://schemas.microsoft.com/office/drawing/2014/main" id="{8F210133-1F63-43BD-EE09-C65FB0945E1D}"/>
+              </a:ext>
+            </a:extLst>
+          </p:cNvPr>
+          <p:cNvSpPr txBox="1"/>
+          <p:nvPr/>
+        </p:nvSpPr>
+        <p:spPr>
+          <a:xfrm>
+            <a:off x="9632894" y="4290565"/>
+            <a:ext cx="1180195" cy="369332"/>
+          </a:xfrm>
+          <a:prstGeom prst="rect">
+            <a:avLst/>
+          </a:prstGeom>
+          <a:noFill/>
+        </p:spPr>
+        <p:txBody>
+          <a:bodyPr wrap="none" rtlCol="0">
+            <a:spAutoFit/>
+          </a:bodyPr>
+          <a:lstStyle/>
+          <a:p>
+            <a:r>
+              <a:rPr lang="en-US" dirty="0"/>
+              <a:t>Inner Wall</a:t>
+            </a:r>
+          </a:p>
+        </p:txBody>
+      </p:sp>
+      <p:sp>
+        <p:nvSpPr>
+          <p:cNvPr id="6" name="TextBox 5">
+            <a:extLst>
+              <a:ext uri="{FF2B5EF4-FFF2-40B4-BE49-F238E27FC236}">
+                <a16:creationId xmlns:a16="http://schemas.microsoft.com/office/drawing/2014/main" id="{50C5AD2D-A3D3-4A77-009D-2214784A808B}"/>
+              </a:ext>
+            </a:extLst>
+          </p:cNvPr>
+          <p:cNvSpPr txBox="1"/>
+          <p:nvPr/>
+        </p:nvSpPr>
+        <p:spPr>
+          <a:xfrm>
+            <a:off x="9517617" y="2064381"/>
+            <a:ext cx="1741054" cy="646331"/>
+          </a:xfrm>
+          <a:prstGeom prst="rect">
+            <a:avLst/>
+          </a:prstGeom>
+          <a:noFill/>
+        </p:spPr>
+        <p:txBody>
+          <a:bodyPr wrap="none" rtlCol="0">
+            <a:spAutoFit/>
+          </a:bodyPr>
+          <a:lstStyle/>
+          <a:p>
+            <a:r>
+              <a:rPr lang="en-US" dirty="0"/>
+              <a:t>Silvered Interior</a:t>
+            </a:r>
+          </a:p>
+          <a:p>
+            <a:r>
+              <a:rPr lang="en-US" dirty="0"/>
+              <a:t>filled with gas</a:t>
+            </a:r>
+          </a:p>
+        </p:txBody>
+      </p:sp>
+      <p:sp>
+        <p:nvSpPr>
+          <p:cNvPr id="7" name="Freeform: Shape 6">
+            <a:extLst>
+              <a:ext uri="{FF2B5EF4-FFF2-40B4-BE49-F238E27FC236}">
+                <a16:creationId xmlns:a16="http://schemas.microsoft.com/office/drawing/2014/main" id="{431DE04B-62F0-9B3E-A268-7617D4F0D5F3}"/>
+              </a:ext>
+            </a:extLst>
+          </p:cNvPr>
+          <p:cNvSpPr/>
+          <p:nvPr/>
+        </p:nvSpPr>
+        <p:spPr>
+          <a:xfrm>
+            <a:off x="9007376" y="3075603"/>
+            <a:ext cx="661179" cy="283464"/>
+          </a:xfrm>
+          <a:custGeom>
+            <a:avLst/>
+            <a:gdLst>
+              <a:gd name="csX0" fmla="*/ 1042416 w 1042416"/>
+              <a:gd name="csY0" fmla="*/ 0 h 283464"/>
+              <a:gd name="csX1" fmla="*/ 502920 w 1042416"/>
+              <a:gd name="csY1" fmla="*/ 173736 h 283464"/>
+              <a:gd name="csX2" fmla="*/ 0 w 1042416"/>
+              <a:gd name="csY2" fmla="*/ 283464 h 283464"/>
+            </a:gdLst>
+            <a:ahLst/>
+            <a:cxnLst>
+              <a:cxn ang="0">
+                <a:pos x="csX0" y="csY0"/>
+              </a:cxn>
+              <a:cxn ang="0">
+                <a:pos x="csX1" y="csY1"/>
+              </a:cxn>
+              <a:cxn ang="0">
+                <a:pos x="csX2" y="csY2"/>
+              </a:cxn>
+            </a:cxnLst>
+            <a:rect l="l" t="t" r="r" b="b"/>
+            <a:pathLst>
+              <a:path w="1042416" h="283464">
+                <a:moveTo>
+                  <a:pt x="1042416" y="0"/>
+                </a:moveTo>
+                <a:cubicBezTo>
+                  <a:pt x="859536" y="63246"/>
+                  <a:pt x="676656" y="126492"/>
+                  <a:pt x="502920" y="173736"/>
+                </a:cubicBezTo>
+                <a:cubicBezTo>
+                  <a:pt x="329184" y="220980"/>
+                  <a:pt x="164592" y="252222"/>
+                  <a:pt x="0" y="283464"/>
+                </a:cubicBezTo>
+              </a:path>
+            </a:pathLst>
+          </a:custGeom>
+          <a:noFill/>
+          <a:ln w="12700">
+            <a:headEnd type="none" w="med" len="med"/>
+            <a:tailEnd type="arrow" w="med" len="med"/>
+          </a:ln>
+        </p:spPr>
+        <p:style>
+          <a:lnRef idx="2">
+            <a:schemeClr val="accent1">
+              <a:shade val="15000"/>
+            </a:schemeClr>
+          </a:lnRef>
+          <a:fillRef idx="1">
+            <a:schemeClr val="accent1"/>
+          </a:fillRef>
+          <a:effectRef idx="0">
+            <a:schemeClr val="accent1"/>
+          </a:effectRef>
+          <a:fontRef idx="minor">
+            <a:schemeClr val="lt1"/>
+          </a:fontRef>
+        </p:style>
+        <p:txBody>
+          <a:bodyPr rtlCol="0" anchor="ctr"/>
+          <a:lstStyle/>
+          <a:p>
+            <a:pPr algn="ctr"/>
+            <a:endParaRPr lang="en-US"/>
+          </a:p>
+        </p:txBody>
+      </p:sp>
+      <p:sp>
+        <p:nvSpPr>
+          <p:cNvPr id="8" name="Freeform: Shape 7">
+            <a:extLst>
+              <a:ext uri="{FF2B5EF4-FFF2-40B4-BE49-F238E27FC236}">
+                <a16:creationId xmlns:a16="http://schemas.microsoft.com/office/drawing/2014/main" id="{527EE164-82C6-B656-CC56-D5CD91159A8F}"/>
+              </a:ext>
+            </a:extLst>
+          </p:cNvPr>
+          <p:cNvSpPr/>
+          <p:nvPr/>
+        </p:nvSpPr>
+        <p:spPr>
+          <a:xfrm>
+            <a:off x="8794064" y="3587751"/>
+            <a:ext cx="1006366" cy="287247"/>
+          </a:xfrm>
+          <a:custGeom>
+            <a:avLst/>
+            <a:gdLst>
+              <a:gd name="csX0" fmla="*/ 1042416 w 1042416"/>
+              <a:gd name="csY0" fmla="*/ 0 h 283464"/>
+              <a:gd name="csX1" fmla="*/ 502920 w 1042416"/>
+              <a:gd name="csY1" fmla="*/ 173736 h 283464"/>
+              <a:gd name="csX2" fmla="*/ 0 w 1042416"/>
+              <a:gd name="csY2" fmla="*/ 283464 h 283464"/>
+            </a:gdLst>
+            <a:ahLst/>
+            <a:cxnLst>
+              <a:cxn ang="0">
+                <a:pos x="csX0" y="csY0"/>
+              </a:cxn>
+              <a:cxn ang="0">
+                <a:pos x="csX1" y="csY1"/>
+              </a:cxn>
+              <a:cxn ang="0">
+                <a:pos x="csX2" y="csY2"/>
+              </a:cxn>
+            </a:cxnLst>
+            <a:rect l="l" t="t" r="r" b="b"/>
+            <a:pathLst>
+              <a:path w="1042416" h="283464">
+                <a:moveTo>
+                  <a:pt x="1042416" y="0"/>
+                </a:moveTo>
+                <a:cubicBezTo>
+                  <a:pt x="859536" y="63246"/>
+                  <a:pt x="676656" y="126492"/>
+                  <a:pt x="502920" y="173736"/>
+                </a:cubicBezTo>
+                <a:cubicBezTo>
+                  <a:pt x="329184" y="220980"/>
+                  <a:pt x="164592" y="252222"/>
+                  <a:pt x="0" y="283464"/>
+                </a:cubicBezTo>
+              </a:path>
+            </a:pathLst>
+          </a:custGeom>
+          <a:noFill/>
+          <a:ln w="12700">
+            <a:headEnd type="none" w="med" len="med"/>
+            <a:tailEnd type="arrow" w="med" len="med"/>
+          </a:ln>
+        </p:spPr>
+        <p:style>
+          <a:lnRef idx="2">
+            <a:schemeClr val="accent1">
+              <a:shade val="15000"/>
+            </a:schemeClr>
+          </a:lnRef>
+          <a:fillRef idx="1">
+            <a:schemeClr val="accent1"/>
+          </a:fillRef>
+          <a:effectRef idx="0">
+            <a:schemeClr val="accent1"/>
+          </a:effectRef>
+          <a:fontRef idx="minor">
+            <a:schemeClr val="lt1"/>
+          </a:fontRef>
+        </p:style>
+        <p:txBody>
+          <a:bodyPr rtlCol="0" anchor="ctr"/>
+          <a:lstStyle/>
+          <a:p>
+            <a:pPr algn="ctr"/>
+            <a:endParaRPr lang="en-US"/>
+          </a:p>
+        </p:txBody>
+      </p:sp>
+      <p:sp>
+        <p:nvSpPr>
+          <p:cNvPr id="10" name="Freeform: Shape 9">
+            <a:extLst>
+              <a:ext uri="{FF2B5EF4-FFF2-40B4-BE49-F238E27FC236}">
+                <a16:creationId xmlns:a16="http://schemas.microsoft.com/office/drawing/2014/main" id="{6ADF0F47-A5B0-3CED-CEF5-1618CAE12199}"/>
+              </a:ext>
+            </a:extLst>
+          </p:cNvPr>
+          <p:cNvSpPr/>
+          <p:nvPr/>
+        </p:nvSpPr>
+        <p:spPr>
+          <a:xfrm>
+            <a:off x="8662189" y="4451158"/>
+            <a:ext cx="1006366" cy="131170"/>
+          </a:xfrm>
+          <a:custGeom>
+            <a:avLst/>
+            <a:gdLst>
+              <a:gd name="csX0" fmla="*/ 1042416 w 1042416"/>
+              <a:gd name="csY0" fmla="*/ 0 h 283464"/>
+              <a:gd name="csX1" fmla="*/ 502920 w 1042416"/>
+              <a:gd name="csY1" fmla="*/ 173736 h 283464"/>
+              <a:gd name="csX2" fmla="*/ 0 w 1042416"/>
+              <a:gd name="csY2" fmla="*/ 283464 h 283464"/>
+            </a:gdLst>
+            <a:ahLst/>
+            <a:cxnLst>
+              <a:cxn ang="0">
+                <a:pos x="csX0" y="csY0"/>
+              </a:cxn>
+              <a:cxn ang="0">
+                <a:pos x="csX1" y="csY1"/>
+              </a:cxn>
+              <a:cxn ang="0">
+                <a:pos x="csX2" y="csY2"/>
+              </a:cxn>
+            </a:cxnLst>
+            <a:rect l="l" t="t" r="r" b="b"/>
+            <a:pathLst>
+              <a:path w="1042416" h="283464">
+                <a:moveTo>
+                  <a:pt x="1042416" y="0"/>
+                </a:moveTo>
+                <a:cubicBezTo>
+                  <a:pt x="859536" y="63246"/>
+                  <a:pt x="676656" y="126492"/>
+                  <a:pt x="502920" y="173736"/>
+                </a:cubicBezTo>
+                <a:cubicBezTo>
+                  <a:pt x="329184" y="220980"/>
+                  <a:pt x="164592" y="252222"/>
+                  <a:pt x="0" y="283464"/>
+                </a:cubicBezTo>
+              </a:path>
+            </a:pathLst>
+          </a:custGeom>
+          <a:noFill/>
+          <a:ln w="12700">
+            <a:headEnd type="none" w="med" len="med"/>
+            <a:tailEnd type="arrow" w="med" len="med"/>
+          </a:ln>
+        </p:spPr>
+        <p:style>
+          <a:lnRef idx="2">
+            <a:schemeClr val="accent1">
+              <a:shade val="15000"/>
+            </a:schemeClr>
+          </a:lnRef>
+          <a:fillRef idx="1">
+            <a:schemeClr val="accent1"/>
+          </a:fillRef>
+          <a:effectRef idx="0">
+            <a:schemeClr val="accent1"/>
+          </a:effectRef>
+          <a:fontRef idx="minor">
+            <a:schemeClr val="lt1"/>
+          </a:fontRef>
+        </p:style>
+        <p:txBody>
+          <a:bodyPr rtlCol="0" anchor="ctr"/>
+          <a:lstStyle/>
+          <a:p>
+            <a:pPr algn="ctr"/>
+            <a:endParaRPr lang="en-US"/>
+          </a:p>
+        </p:txBody>
+      </p:sp>
+      <p:sp>
+        <p:nvSpPr>
+          <p:cNvPr id="16" name="Freeform: Shape 15">
+            <a:extLst>
+              <a:ext uri="{FF2B5EF4-FFF2-40B4-BE49-F238E27FC236}">
+                <a16:creationId xmlns:a16="http://schemas.microsoft.com/office/drawing/2014/main" id="{70563D98-10D8-ED0C-0DBA-A6DED290534E}"/>
+              </a:ext>
+            </a:extLst>
+          </p:cNvPr>
+          <p:cNvSpPr/>
+          <p:nvPr/>
+        </p:nvSpPr>
+        <p:spPr>
+          <a:xfrm>
+            <a:off x="8244867" y="2442099"/>
+            <a:ext cx="1238352" cy="905656"/>
+          </a:xfrm>
+          <a:custGeom>
+            <a:avLst/>
+            <a:gdLst>
+              <a:gd name="csX0" fmla="*/ 1042416 w 1042416"/>
+              <a:gd name="csY0" fmla="*/ 0 h 283464"/>
+              <a:gd name="csX1" fmla="*/ 502920 w 1042416"/>
+              <a:gd name="csY1" fmla="*/ 173736 h 283464"/>
+              <a:gd name="csX2" fmla="*/ 0 w 1042416"/>
+              <a:gd name="csY2" fmla="*/ 283464 h 283464"/>
+            </a:gdLst>
+            <a:ahLst/>
+            <a:cxnLst>
+              <a:cxn ang="0">
+                <a:pos x="csX0" y="csY0"/>
+              </a:cxn>
+              <a:cxn ang="0">
+                <a:pos x="csX1" y="csY1"/>
+              </a:cxn>
+              <a:cxn ang="0">
+                <a:pos x="csX2" y="csY2"/>
+              </a:cxn>
+            </a:cxnLst>
+            <a:rect l="l" t="t" r="r" b="b"/>
+            <a:pathLst>
+              <a:path w="1042416" h="283464">
+                <a:moveTo>
+                  <a:pt x="1042416" y="0"/>
+                </a:moveTo>
+                <a:cubicBezTo>
+                  <a:pt x="859536" y="63246"/>
+                  <a:pt x="676656" y="126492"/>
+                  <a:pt x="502920" y="173736"/>
+                </a:cubicBezTo>
+                <a:cubicBezTo>
+                  <a:pt x="329184" y="220980"/>
+                  <a:pt x="164592" y="252222"/>
+                  <a:pt x="0" y="283464"/>
+                </a:cubicBezTo>
+              </a:path>
+            </a:pathLst>
+          </a:custGeom>
+          <a:noFill/>
+          <a:ln w="12700">
+            <a:headEnd type="none" w="med" len="med"/>
+            <a:tailEnd type="arrow" w="med" len="med"/>
+          </a:ln>
+        </p:spPr>
+        <p:style>
+          <a:lnRef idx="2">
+            <a:schemeClr val="accent1">
+              <a:shade val="15000"/>
+            </a:schemeClr>
+          </a:lnRef>
+          <a:fillRef idx="1">
+            <a:schemeClr val="accent1"/>
+          </a:fillRef>
+          <a:effectRef idx="0">
+            <a:schemeClr val="accent1"/>
+          </a:effectRef>
+          <a:fontRef idx="minor">
+            <a:schemeClr val="lt1"/>
+          </a:fontRef>
+        </p:style>
+        <p:txBody>
+          <a:bodyPr rtlCol="0" anchor="ctr"/>
+          <a:lstStyle/>
+          <a:p>
+            <a:pPr algn="ctr"/>
+            <a:endParaRPr lang="en-US"/>
+          </a:p>
+        </p:txBody>
+      </p:sp>
+    </p:spTree>
+    <p:extLst>
+      <p:ext uri="{BB962C8B-B14F-4D97-AF65-F5344CB8AC3E}">
+        <p14:creationId xmlns:p14="http://schemas.microsoft.com/office/powerpoint/2010/main" val="403151843"/>
+      </p:ext>
+    </p:extLst>
+  </p:cSld>
+  <p:clrMapOvr>
+    <a:masterClrMapping/>
+  </p:clrMapOvr>
+</p:sld>
+</file>
+
+<file path=ppt/slides/slide4.xml><?xml version="1.0" encoding="utf-8"?>
+<p:sld xmlns:a="http://schemas.openxmlformats.org/drawingml/2006/main" xmlns:r="http://schemas.openxmlformats.org/officeDocument/2006/relationships" xmlns:p="http://schemas.openxmlformats.org/presentationml/2006/main">
+  <p:cSld>
+    <p:spTree>
+      <p:nvGrpSpPr>
         <p:cNvPr id="1" name="">
           <a:extLst>
             <a:ext uri="{FF2B5EF4-FFF2-40B4-BE49-F238E27FC236}">
@@ -7709,7 +9759,7 @@
                 <a:buFontTx/>
                 <a:buNone/>
               </a:pPr>
-              <a:t>3</a:t>
+              <a:t>4</a:t>
             </a:fld>
             <a:endParaRPr lang="en-US" altLang="en-US" sz="1800"/>
           </a:p>
@@ -7728,7 +9778,7 @@
 </p:sld>
 </file>
 
-<file path=ppt/slides/slide4.xml><?xml version="1.0" encoding="utf-8"?>
+<file path=ppt/slides/slide5.xml><?xml version="1.0" encoding="utf-8"?>
 <p:sld xmlns:a="http://schemas.openxmlformats.org/drawingml/2006/main" xmlns:r="http://schemas.openxmlformats.org/officeDocument/2006/relationships" xmlns:p="http://schemas.openxmlformats.org/presentationml/2006/main">
   <p:cSld>
     <p:spTree>
@@ -7788,7 +9838,7 @@
 </p:sld>
 </file>
 
-<file path=ppt/slides/slide5.xml><?xml version="1.0" encoding="utf-8"?>
+<file path=ppt/slides/slide6.xml><?xml version="1.0" encoding="utf-8"?>
 <p:sld xmlns:a="http://schemas.openxmlformats.org/drawingml/2006/main" xmlns:r="http://schemas.openxmlformats.org/officeDocument/2006/relationships" xmlns:p="http://schemas.openxmlformats.org/presentationml/2006/main">
   <p:cSld>
     <p:spTree>
@@ -8106,7 +10156,7 @@
 </p:sld>
 </file>
 
-<file path=ppt/slides/slide6.xml><?xml version="1.0" encoding="utf-8"?>
+<file path=ppt/slides/slide7.xml><?xml version="1.0" encoding="utf-8"?>
 <p:sld xmlns:a="http://schemas.openxmlformats.org/drawingml/2006/main" xmlns:r="http://schemas.openxmlformats.org/officeDocument/2006/relationships" xmlns:p="http://schemas.openxmlformats.org/presentationml/2006/main">
   <p:cSld>
     <p:spTree>
@@ -8217,7 +10267,7 @@
 </p:sld>
 </file>
 
-<file path=ppt/slides/slide7.xml><?xml version="1.0" encoding="utf-8"?>
+<file path=ppt/slides/slide8.xml><?xml version="1.0" encoding="utf-8"?>
 <p:sld xmlns:a="http://schemas.openxmlformats.org/drawingml/2006/main" xmlns:r="http://schemas.openxmlformats.org/officeDocument/2006/relationships" xmlns:p="http://schemas.openxmlformats.org/presentationml/2006/main">
   <p:cSld>
     <p:spTree>
@@ -8633,125 +10683,6 @@
 </p:sld>
 </file>
 
-<file path=ppt/slides/slide8.xml><?xml version="1.0" encoding="utf-8"?>
-<p:sld xmlns:a="http://schemas.openxmlformats.org/drawingml/2006/main" xmlns:r="http://schemas.openxmlformats.org/officeDocument/2006/relationships" xmlns:p="http://schemas.openxmlformats.org/presentationml/2006/main">
-  <p:cSld>
-    <p:spTree>
-      <p:nvGrpSpPr>
-        <p:cNvPr id="1" name=""/>
-        <p:cNvGrpSpPr/>
-        <p:nvPr/>
-      </p:nvGrpSpPr>
-      <p:grpSpPr>
-        <a:xfrm>
-          <a:off x="0" y="0"/>
-          <a:ext cx="0" cy="0"/>
-          <a:chOff x="0" y="0"/>
-          <a:chExt cx="0" cy="0"/>
-        </a:xfrm>
-      </p:grpSpPr>
-      <p:sp>
-        <p:nvSpPr>
-          <p:cNvPr id="2" name="Title 1">
-            <a:extLst>
-              <a:ext uri="{FF2B5EF4-FFF2-40B4-BE49-F238E27FC236}">
-                <a16:creationId xmlns:a16="http://schemas.microsoft.com/office/drawing/2014/main" id="{7D432002-FF55-F810-0DAE-FAE499C324E4}"/>
-              </a:ext>
-            </a:extLst>
-          </p:cNvPr>
-          <p:cNvSpPr>
-            <a:spLocks noGrp="1"/>
-          </p:cNvSpPr>
-          <p:nvPr>
-            <p:ph type="title"/>
-          </p:nvPr>
-        </p:nvSpPr>
-        <p:spPr/>
-        <p:txBody>
-          <a:bodyPr/>
-          <a:lstStyle/>
-          <a:p>
-            <a:r>
-              <a:rPr lang="en-US" dirty="0"/>
-              <a:t>Question</a:t>
-            </a:r>
-          </a:p>
-        </p:txBody>
-      </p:sp>
-      <p:sp>
-        <p:nvSpPr>
-          <p:cNvPr id="3" name="Content Placeholder 2">
-            <a:extLst>
-              <a:ext uri="{FF2B5EF4-FFF2-40B4-BE49-F238E27FC236}">
-                <a16:creationId xmlns:a16="http://schemas.microsoft.com/office/drawing/2014/main" id="{029605CA-880A-29C8-6C74-7E7688FE48C5}"/>
-              </a:ext>
-            </a:extLst>
-          </p:cNvPr>
-          <p:cNvSpPr>
-            <a:spLocks noGrp="1"/>
-          </p:cNvSpPr>
-          <p:nvPr>
-            <p:ph idx="1"/>
-          </p:nvPr>
-        </p:nvSpPr>
-        <p:spPr/>
-        <p:txBody>
-          <a:bodyPr/>
-          <a:lstStyle/>
-          <a:p>
-            <a:pPr marL="0" indent="0">
-              <a:buNone/>
-            </a:pPr>
-            <a:r>
-              <a:rPr lang="en-US" dirty="0"/>
-              <a:t>If I add two constants, is the result still constant?</a:t>
-            </a:r>
-          </a:p>
-          <a:p>
-            <a:pPr marL="514350" indent="-514350">
-              <a:buFont typeface="+mj-lt"/>
-              <a:buAutoNum type="alphaLcParenR"/>
-            </a:pPr>
-            <a:r>
-              <a:rPr lang="en-US" dirty="0"/>
-              <a:t>Yes</a:t>
-            </a:r>
-          </a:p>
-          <a:p>
-            <a:pPr marL="514350" indent="-514350">
-              <a:buFont typeface="+mj-lt"/>
-              <a:buAutoNum type="alphaLcParenR"/>
-            </a:pPr>
-            <a:r>
-              <a:rPr lang="en-US" dirty="0"/>
-              <a:t>No</a:t>
-            </a:r>
-          </a:p>
-          <a:p>
-            <a:pPr marL="514350" indent="-514350">
-              <a:buFont typeface="+mj-lt"/>
-              <a:buAutoNum type="alphaLcParenR"/>
-            </a:pPr>
-            <a:r>
-              <a:rPr lang="en-US" dirty="0"/>
-              <a:t>Maybe</a:t>
-            </a:r>
-          </a:p>
-        </p:txBody>
-      </p:sp>
-    </p:spTree>
-    <p:extLst>
-      <p:ext uri="{BB962C8B-B14F-4D97-AF65-F5344CB8AC3E}">
-        <p14:creationId xmlns:p14="http://schemas.microsoft.com/office/powerpoint/2010/main" val="2851887090"/>
-      </p:ext>
-    </p:extLst>
-  </p:cSld>
-  <p:clrMapOvr>
-    <a:masterClrMapping/>
-  </p:clrMapOvr>
-</p:sld>
-</file>
-
 <file path=ppt/slides/slide9.xml><?xml version="1.0" encoding="utf-8"?>
 <p:sld xmlns:a="http://schemas.openxmlformats.org/drawingml/2006/main" xmlns:r="http://schemas.openxmlformats.org/officeDocument/2006/relationships" xmlns:p="http://schemas.openxmlformats.org/presentationml/2006/main">
   <p:cSld>
@@ -8774,7 +10705,7 @@
           <p:cNvPr id="2" name="Title 1">
             <a:extLst>
               <a:ext uri="{FF2B5EF4-FFF2-40B4-BE49-F238E27FC236}">
-                <a16:creationId xmlns:a16="http://schemas.microsoft.com/office/drawing/2014/main" id="{36C05A08-BBAD-733F-9214-FFCA080F07AC}"/>
+                <a16:creationId xmlns:a16="http://schemas.microsoft.com/office/drawing/2014/main" id="{7D432002-FF55-F810-0DAE-FAE499C324E4}"/>
               </a:ext>
             </a:extLst>
           </p:cNvPr>
@@ -8802,7 +10733,7 @@
           <p:cNvPr id="3" name="Content Placeholder 2">
             <a:extLst>
               <a:ext uri="{FF2B5EF4-FFF2-40B4-BE49-F238E27FC236}">
-                <a16:creationId xmlns:a16="http://schemas.microsoft.com/office/drawing/2014/main" id="{857BFD40-4C1B-BCE6-1015-757E5ACBD398}"/>
+                <a16:creationId xmlns:a16="http://schemas.microsoft.com/office/drawing/2014/main" id="{029605CA-880A-29C8-6C74-7E7688FE48C5}"/>
               </a:ext>
             </a:extLst>
           </p:cNvPr>
@@ -8823,7 +10754,7 @@
             </a:pPr>
             <a:r>
               <a:rPr lang="en-US" dirty="0"/>
-              <a:t>Why do we like conservation laws in physics?</a:t>
+              <a:t>If I add two constants, is the result still constant?</a:t>
             </a:r>
           </a:p>
           <a:p>
@@ -8833,7 +10764,7 @@
             </a:pPr>
             <a:r>
               <a:rPr lang="en-US" dirty="0"/>
-              <a:t>They tell us how the universe works</a:t>
+              <a:t>Yes</a:t>
             </a:r>
           </a:p>
           <a:p>
@@ -8843,7 +10774,7 @@
             </a:pPr>
             <a:r>
               <a:rPr lang="en-US" dirty="0"/>
-              <a:t>They make everything easy to understand</a:t>
+              <a:t>No</a:t>
             </a:r>
           </a:p>
           <a:p>
@@ -8853,7 +10784,7 @@
             </a:pPr>
             <a:r>
               <a:rPr lang="en-US" dirty="0"/>
-              <a:t>They make solving problems easier</a:t>
+              <a:t>Maybe</a:t>
             </a:r>
           </a:p>
         </p:txBody>
@@ -8861,7 +10792,7 @@
     </p:spTree>
     <p:extLst>
       <p:ext uri="{BB962C8B-B14F-4D97-AF65-F5344CB8AC3E}">
-        <p14:creationId xmlns:p14="http://schemas.microsoft.com/office/powerpoint/2010/main" val="3378814276"/>
+        <p14:creationId xmlns:p14="http://schemas.microsoft.com/office/powerpoint/2010/main" val="2851887090"/>
       </p:ext>
     </p:extLst>
   </p:cSld>

--- a/Lecture_Slides/PH 123 Lecture 36.pptx
+++ b/Lecture_Slides/PH 123 Lecture 36.pptx
@@ -132,7 +132,7 @@
 <file path=ppt/revisionInfo.xml><?xml version="1.0" encoding="utf-8"?>
 <p1510:revInfo xmlns:a="http://schemas.openxmlformats.org/drawingml/2006/main" xmlns:r="http://schemas.openxmlformats.org/officeDocument/2006/relationships" xmlns:p1510="http://schemas.microsoft.com/office/powerpoint/2015/10/main">
   <p1510:revLst>
-    <p1510:client id="{A188FBDB-A577-4F86-A794-33773316D8C5}" v="46" dt="2026-03-31T19:47:52.001"/>
+    <p1510:client id="{A188FBDB-A577-4F86-A794-33773316D8C5}" v="47" dt="2026-03-31T21:56:07.660"/>
   </p1510:revLst>
 </p1510:revInfo>
 </file>
@@ -142,12 +142,12 @@
   <pc:docChgLst>
     <pc:chgData name="Lines, Todd" userId="afaf7c3a-e8aa-4568-882a-02ad8f9e19b0" providerId="ADAL" clId="{5FF5AC1B-ABA9-43D7-A1E3-2D92732CD6E2}"/>
     <pc:docChg chg="undo custSel addSld modSld">
-      <pc:chgData name="Lines, Todd" userId="afaf7c3a-e8aa-4568-882a-02ad8f9e19b0" providerId="ADAL" clId="{5FF5AC1B-ABA9-43D7-A1E3-2D92732CD6E2}" dt="2026-03-31T19:47:56.233" v="552" actId="21"/>
+      <pc:chgData name="Lines, Todd" userId="afaf7c3a-e8aa-4568-882a-02ad8f9e19b0" providerId="ADAL" clId="{5FF5AC1B-ABA9-43D7-A1E3-2D92732CD6E2}" dt="2026-03-31T21:56:13.452" v="557" actId="21"/>
       <pc:docMkLst>
         <pc:docMk/>
       </pc:docMkLst>
       <pc:sldChg chg="addSp delSp modSp new mod">
-        <pc:chgData name="Lines, Todd" userId="afaf7c3a-e8aa-4568-882a-02ad8f9e19b0" providerId="ADAL" clId="{5FF5AC1B-ABA9-43D7-A1E3-2D92732CD6E2}" dt="2026-03-31T19:47:56.233" v="552" actId="21"/>
+        <pc:chgData name="Lines, Todd" userId="afaf7c3a-e8aa-4568-882a-02ad8f9e19b0" providerId="ADAL" clId="{5FF5AC1B-ABA9-43D7-A1E3-2D92732CD6E2}" dt="2026-03-31T21:56:13.452" v="557" actId="21"/>
         <pc:sldMkLst>
           <pc:docMk/>
           <pc:sldMk cId="403151843" sldId="491"/>
@@ -345,7 +345,7 @@
           </ac:spMkLst>
         </pc:spChg>
         <pc:spChg chg="add del mod ord">
-          <ac:chgData name="Lines, Todd" userId="afaf7c3a-e8aa-4568-882a-02ad8f9e19b0" providerId="ADAL" clId="{5FF5AC1B-ABA9-43D7-A1E3-2D92732CD6E2}" dt="2026-03-31T17:20:03.506" v="447" actId="1076"/>
+          <ac:chgData name="Lines, Todd" userId="afaf7c3a-e8aa-4568-882a-02ad8f9e19b0" providerId="ADAL" clId="{5FF5AC1B-ABA9-43D7-A1E3-2D92732CD6E2}" dt="2026-03-31T21:55:50.580" v="554" actId="207"/>
           <ac:spMkLst>
             <pc:docMk/>
             <pc:sldMk cId="403151843" sldId="491"/>
@@ -353,7 +353,7 @@
           </ac:spMkLst>
         </pc:spChg>
         <pc:spChg chg="add mod ord">
-          <ac:chgData name="Lines, Todd" userId="afaf7c3a-e8aa-4568-882a-02ad8f9e19b0" providerId="ADAL" clId="{5FF5AC1B-ABA9-43D7-A1E3-2D92732CD6E2}" dt="2026-03-31T17:20:03.506" v="447" actId="1076"/>
+          <ac:chgData name="Lines, Todd" userId="afaf7c3a-e8aa-4568-882a-02ad8f9e19b0" providerId="ADAL" clId="{5FF5AC1B-ABA9-43D7-A1E3-2D92732CD6E2}" dt="2026-03-31T21:55:55.210" v="555" actId="108"/>
           <ac:spMkLst>
             <pc:docMk/>
             <pc:sldMk cId="403151843" sldId="491"/>
@@ -462,6 +462,14 @@
             <pc:docMk/>
             <pc:sldMk cId="403151843" sldId="491"/>
             <ac:picMk id="6" creationId="{843D8325-5718-BCD1-9BE3-31EACC93AA4F}"/>
+          </ac:picMkLst>
+        </pc:picChg>
+        <pc:picChg chg="del mod">
+          <ac:chgData name="Lines, Todd" userId="afaf7c3a-e8aa-4568-882a-02ad8f9e19b0" providerId="ADAL" clId="{5FF5AC1B-ABA9-43D7-A1E3-2D92732CD6E2}" dt="2026-03-31T21:56:13.452" v="557" actId="21"/>
+          <ac:picMkLst>
+            <pc:docMk/>
+            <pc:sldMk cId="403151843" sldId="491"/>
+            <ac:picMk id="9" creationId="{E49870DB-BA70-AFE6-8ED6-DE1760C6DD29}"/>
           </ac:picMkLst>
         </pc:picChg>
         <pc:picChg chg="del mod">
@@ -8302,18 +8310,24 @@
             <a:gsLst>
               <a:gs pos="0">
                 <a:schemeClr val="accent2">
+                  <a:lumMod val="60000"/>
+                  <a:lumOff val="40000"/>
                   <a:shade val="30000"/>
                   <a:satMod val="115000"/>
                 </a:schemeClr>
               </a:gs>
               <a:gs pos="50000">
                 <a:schemeClr val="accent2">
+                  <a:lumMod val="60000"/>
+                  <a:lumOff val="40000"/>
                   <a:shade val="67500"/>
                   <a:satMod val="115000"/>
                 </a:schemeClr>
               </a:gs>
               <a:gs pos="100000">
                 <a:schemeClr val="accent2">
+                  <a:lumMod val="60000"/>
+                  <a:lumOff val="40000"/>
                   <a:shade val="100000"/>
                   <a:satMod val="115000"/>
                 </a:schemeClr>
@@ -8375,18 +8389,24 @@
             <a:gsLst>
               <a:gs pos="0">
                 <a:schemeClr val="accent2">
+                  <a:lumMod val="60000"/>
+                  <a:lumOff val="40000"/>
                   <a:shade val="30000"/>
                   <a:satMod val="115000"/>
                 </a:schemeClr>
               </a:gs>
               <a:gs pos="50000">
                 <a:schemeClr val="accent2">
+                  <a:lumMod val="60000"/>
+                  <a:lumOff val="40000"/>
                   <a:shade val="67500"/>
                   <a:satMod val="115000"/>
                 </a:schemeClr>
               </a:gs>
               <a:gs pos="100000">
                 <a:schemeClr val="accent2">
+                  <a:lumMod val="60000"/>
+                  <a:lumOff val="40000"/>
                   <a:shade val="100000"/>
                   <a:satMod val="115000"/>
                 </a:schemeClr>

--- a/Lecture_Slides/PH 123 Lecture 36.pptx
+++ b/Lecture_Slides/PH 123 Lecture 36.pptx
@@ -4,6 +4,9 @@
   <p:sldMasterIdLst>
     <p:sldMasterId id="2147483648" r:id="rId1"/>
   </p:sldMasterIdLst>
+  <p:notesMasterIdLst>
+    <p:notesMasterId r:id="rId20"/>
+  </p:notesMasterIdLst>
   <p:sldIdLst>
     <p:sldId id="256" r:id="rId2"/>
     <p:sldId id="484" r:id="rId3"/>
@@ -16,13 +19,13 @@
     <p:sldId id="489" r:id="rId10"/>
     <p:sldId id="490" r:id="rId11"/>
     <p:sldId id="265" r:id="rId12"/>
-    <p:sldId id="285" r:id="rId13"/>
-    <p:sldId id="340" r:id="rId14"/>
-    <p:sldId id="283" r:id="rId15"/>
-    <p:sldId id="306" r:id="rId16"/>
-    <p:sldId id="307" r:id="rId17"/>
-    <p:sldId id="308" r:id="rId18"/>
-    <p:sldId id="257" r:id="rId19"/>
+    <p:sldId id="306" r:id="rId13"/>
+    <p:sldId id="307" r:id="rId14"/>
+    <p:sldId id="308" r:id="rId15"/>
+    <p:sldId id="257" r:id="rId16"/>
+    <p:sldId id="285" r:id="rId17"/>
+    <p:sldId id="340" r:id="rId18"/>
+    <p:sldId id="283" r:id="rId19"/>
   </p:sldIdLst>
   <p:sldSz cx="12192000" cy="6858000"/>
   <p:notesSz cx="6858000" cy="9144000"/>
@@ -129,393 +132,503 @@
 </p:presentation>
 </file>
 
-<file path=ppt/revisionInfo.xml><?xml version="1.0" encoding="utf-8"?>
-<p1510:revInfo xmlns:a="http://schemas.openxmlformats.org/drawingml/2006/main" xmlns:r="http://schemas.openxmlformats.org/officeDocument/2006/relationships" xmlns:p1510="http://schemas.microsoft.com/office/powerpoint/2015/10/main">
-  <p1510:revLst>
-    <p1510:client id="{A188FBDB-A577-4F86-A794-33773316D8C5}" v="47" dt="2026-03-31T21:56:07.660"/>
-  </p1510:revLst>
-</p1510:revInfo>
-</file>
-
 <file path=ppt/changesInfos/changesInfo1.xml><?xml version="1.0" encoding="utf-8"?>
 <pc:chgInfo xmlns:a="http://schemas.openxmlformats.org/drawingml/2006/main" xmlns:r="http://schemas.openxmlformats.org/officeDocument/2006/relationships" xmlns:ac="http://schemas.microsoft.com/office/drawing/2013/main/command" xmlns:pc="http://schemas.microsoft.com/office/powerpoint/2013/main/command">
   <pc:docChgLst>
     <pc:chgData name="Lines, Todd" userId="afaf7c3a-e8aa-4568-882a-02ad8f9e19b0" providerId="ADAL" clId="{5FF5AC1B-ABA9-43D7-A1E3-2D92732CD6E2}"/>
-    <pc:docChg chg="undo custSel addSld modSld">
-      <pc:chgData name="Lines, Todd" userId="afaf7c3a-e8aa-4568-882a-02ad8f9e19b0" providerId="ADAL" clId="{5FF5AC1B-ABA9-43D7-A1E3-2D92732CD6E2}" dt="2026-03-31T21:56:13.452" v="557" actId="21"/>
+    <pc:docChg chg="undo custSel addSld modSld sldOrd">
+      <pc:chgData name="Lines, Todd" userId="afaf7c3a-e8aa-4568-882a-02ad8f9e19b0" providerId="ADAL" clId="{5FF5AC1B-ABA9-43D7-A1E3-2D92732CD6E2}" dt="2026-07-13T17:30:58.948" v="703"/>
       <pc:docMkLst>
         <pc:docMk/>
       </pc:docMkLst>
-      <pc:sldChg chg="addSp delSp modSp new mod">
-        <pc:chgData name="Lines, Todd" userId="afaf7c3a-e8aa-4568-882a-02ad8f9e19b0" providerId="ADAL" clId="{5FF5AC1B-ABA9-43D7-A1E3-2D92732CD6E2}" dt="2026-03-31T21:56:13.452" v="557" actId="21"/>
+      <pc:sldChg chg="addSp delSp modSp mod">
+        <pc:chgData name="Lines, Todd" userId="afaf7c3a-e8aa-4568-882a-02ad8f9e19b0" providerId="ADAL" clId="{5FF5AC1B-ABA9-43D7-A1E3-2D92732CD6E2}" dt="2026-07-10T17:17:39.820" v="699" actId="1076"/>
         <pc:sldMkLst>
           <pc:docMk/>
-          <pc:sldMk cId="403151843" sldId="491"/>
+          <pc:sldMk cId="0" sldId="265"/>
         </pc:sldMkLst>
-        <pc:spChg chg="del">
-          <ac:chgData name="Lines, Todd" userId="afaf7c3a-e8aa-4568-882a-02ad8f9e19b0" providerId="ADAL" clId="{5FF5AC1B-ABA9-43D7-A1E3-2D92732CD6E2}" dt="2026-03-31T16:56:02.597" v="14" actId="478"/>
+        <pc:spChg chg="mod">
+          <ac:chgData name="Lines, Todd" userId="afaf7c3a-e8aa-4568-882a-02ad8f9e19b0" providerId="ADAL" clId="{5FF5AC1B-ABA9-43D7-A1E3-2D92732CD6E2}" dt="2026-07-10T17:15:39.782" v="649" actId="20577"/>
           <ac:spMkLst>
             <pc:docMk/>
-            <pc:sldMk cId="403151843" sldId="491"/>
-            <ac:spMk id="2" creationId="{31475D24-A24B-7258-4C3D-C874B65EB90A}"/>
+            <pc:sldMk cId="0" sldId="265"/>
+            <ac:spMk id="3" creationId="{00000000-0000-0000-0000-000000000000}"/>
           </ac:spMkLst>
         </pc:spChg>
         <pc:spChg chg="add mod">
-          <ac:chgData name="Lines, Todd" userId="afaf7c3a-e8aa-4568-882a-02ad8f9e19b0" providerId="ADAL" clId="{5FF5AC1B-ABA9-43D7-A1E3-2D92732CD6E2}" dt="2026-03-31T18:19:54.929" v="496" actId="1076"/>
+          <ac:chgData name="Lines, Todd" userId="afaf7c3a-e8aa-4568-882a-02ad8f9e19b0" providerId="ADAL" clId="{5FF5AC1B-ABA9-43D7-A1E3-2D92732CD6E2}" dt="2026-07-10T17:17:39.820" v="699" actId="1076"/>
           <ac:spMkLst>
             <pc:docMk/>
-            <pc:sldMk cId="403151843" sldId="491"/>
-            <ac:spMk id="2" creationId="{E164F363-7B4B-E628-C5E8-4952D796471C}"/>
+            <pc:sldMk cId="0" sldId="265"/>
+            <ac:spMk id="4" creationId="{6D22323D-E083-638A-1905-A8424C2B0C3E}"/>
           </ac:spMkLst>
         </pc:spChg>
-        <pc:spChg chg="del">
-          <ac:chgData name="Lines, Todd" userId="afaf7c3a-e8aa-4568-882a-02ad8f9e19b0" providerId="ADAL" clId="{5FF5AC1B-ABA9-43D7-A1E3-2D92732CD6E2}" dt="2026-03-31T16:56:02.597" v="14" actId="478"/>
-          <ac:spMkLst>
-            <pc:docMk/>
-            <pc:sldMk cId="403151843" sldId="491"/>
-            <ac:spMk id="3" creationId="{7A295380-E057-7774-A081-5B452462224B}"/>
-          </ac:spMkLst>
-        </pc:spChg>
-        <pc:spChg chg="add mod">
-          <ac:chgData name="Lines, Todd" userId="afaf7c3a-e8aa-4568-882a-02ad8f9e19b0" providerId="ADAL" clId="{5FF5AC1B-ABA9-43D7-A1E3-2D92732CD6E2}" dt="2026-03-31T18:21:25.045" v="518" actId="1076"/>
-          <ac:spMkLst>
-            <pc:docMk/>
-            <pc:sldMk cId="403151843" sldId="491"/>
-            <ac:spMk id="3" creationId="{875B9F74-81CF-3B10-4FB6-FBEB22837005}"/>
-          </ac:spMkLst>
-        </pc:spChg>
-        <pc:spChg chg="add mod">
-          <ac:chgData name="Lines, Todd" userId="afaf7c3a-e8aa-4568-882a-02ad8f9e19b0" providerId="ADAL" clId="{5FF5AC1B-ABA9-43D7-A1E3-2D92732CD6E2}" dt="2026-03-31T18:21:11.919" v="516" actId="1076"/>
-          <ac:spMkLst>
-            <pc:docMk/>
-            <pc:sldMk cId="403151843" sldId="491"/>
-            <ac:spMk id="5" creationId="{8F210133-1F63-43BD-EE09-C65FB0945E1D}"/>
-          </ac:spMkLst>
-        </pc:spChg>
-        <pc:spChg chg="add mod">
-          <ac:chgData name="Lines, Todd" userId="afaf7c3a-e8aa-4568-882a-02ad8f9e19b0" providerId="ADAL" clId="{5FF5AC1B-ABA9-43D7-A1E3-2D92732CD6E2}" dt="2026-03-31T19:47:35.335" v="550" actId="1076"/>
-          <ac:spMkLst>
-            <pc:docMk/>
-            <pc:sldMk cId="403151843" sldId="491"/>
-            <ac:spMk id="6" creationId="{50C5AD2D-A3D3-4A77-009D-2214784A808B}"/>
-          </ac:spMkLst>
-        </pc:spChg>
-        <pc:spChg chg="add mod">
-          <ac:chgData name="Lines, Todd" userId="afaf7c3a-e8aa-4568-882a-02ad8f9e19b0" providerId="ADAL" clId="{5FF5AC1B-ABA9-43D7-A1E3-2D92732CD6E2}" dt="2026-03-31T18:20:30.145" v="503" actId="1076"/>
-          <ac:spMkLst>
-            <pc:docMk/>
-            <pc:sldMk cId="403151843" sldId="491"/>
-            <ac:spMk id="7" creationId="{431DE04B-62F0-9B3E-A268-7617D4F0D5F3}"/>
-          </ac:spMkLst>
-        </pc:spChg>
-        <pc:spChg chg="add del mod">
-          <ac:chgData name="Lines, Todd" userId="afaf7c3a-e8aa-4568-882a-02ad8f9e19b0" providerId="ADAL" clId="{5FF5AC1B-ABA9-43D7-A1E3-2D92732CD6E2}" dt="2026-03-31T16:55:37.733" v="6" actId="478"/>
-          <ac:spMkLst>
-            <pc:docMk/>
-            <pc:sldMk cId="403151843" sldId="491"/>
-            <ac:spMk id="7" creationId="{FABA0109-99FA-8D8F-0C01-BCF4E8AD060F}"/>
-          </ac:spMkLst>
-        </pc:spChg>
-        <pc:spChg chg="add mod">
-          <ac:chgData name="Lines, Todd" userId="afaf7c3a-e8aa-4568-882a-02ad8f9e19b0" providerId="ADAL" clId="{5FF5AC1B-ABA9-43D7-A1E3-2D92732CD6E2}" dt="2026-03-31T18:21:22.692" v="517" actId="14100"/>
-          <ac:spMkLst>
-            <pc:docMk/>
-            <pc:sldMk cId="403151843" sldId="491"/>
-            <ac:spMk id="8" creationId="{527EE164-82C6-B656-CC56-D5CD91159A8F}"/>
-          </ac:spMkLst>
-        </pc:spChg>
-        <pc:spChg chg="add del mod">
-          <ac:chgData name="Lines, Todd" userId="afaf7c3a-e8aa-4568-882a-02ad8f9e19b0" providerId="ADAL" clId="{5FF5AC1B-ABA9-43D7-A1E3-2D92732CD6E2}" dt="2026-03-31T16:55:39.533" v="7" actId="478"/>
-          <ac:spMkLst>
-            <pc:docMk/>
-            <pc:sldMk cId="403151843" sldId="491"/>
-            <ac:spMk id="8" creationId="{747DC620-DE97-78F6-EC97-310FF13BC855}"/>
-          </ac:spMkLst>
-        </pc:spChg>
-        <pc:spChg chg="add del mod">
-          <ac:chgData name="Lines, Todd" userId="afaf7c3a-e8aa-4568-882a-02ad8f9e19b0" providerId="ADAL" clId="{5FF5AC1B-ABA9-43D7-A1E3-2D92732CD6E2}" dt="2026-03-31T18:20:50.900" v="511" actId="478"/>
-          <ac:spMkLst>
-            <pc:docMk/>
-            <pc:sldMk cId="403151843" sldId="491"/>
-            <ac:spMk id="9" creationId="{2B794453-447B-C3E8-EA96-CAE8F4B46AC5}"/>
-          </ac:spMkLst>
-        </pc:spChg>
-        <pc:spChg chg="add del mod">
-          <ac:chgData name="Lines, Todd" userId="afaf7c3a-e8aa-4568-882a-02ad8f9e19b0" providerId="ADAL" clId="{5FF5AC1B-ABA9-43D7-A1E3-2D92732CD6E2}" dt="2026-03-31T16:55:42.251" v="9" actId="478"/>
-          <ac:spMkLst>
-            <pc:docMk/>
-            <pc:sldMk cId="403151843" sldId="491"/>
-            <ac:spMk id="9" creationId="{B5FA6051-6F27-5CFF-AC42-9E5DE922B129}"/>
-          </ac:spMkLst>
-        </pc:spChg>
-        <pc:spChg chg="add mod">
-          <ac:chgData name="Lines, Todd" userId="afaf7c3a-e8aa-4568-882a-02ad8f9e19b0" providerId="ADAL" clId="{5FF5AC1B-ABA9-43D7-A1E3-2D92732CD6E2}" dt="2026-03-31T18:21:08.861" v="515" actId="14100"/>
-          <ac:spMkLst>
-            <pc:docMk/>
-            <pc:sldMk cId="403151843" sldId="491"/>
-            <ac:spMk id="10" creationId="{6ADF0F47-A5B0-3CED-CEF5-1618CAE12199}"/>
-          </ac:spMkLst>
-        </pc:spChg>
-        <pc:spChg chg="add del mod">
-          <ac:chgData name="Lines, Todd" userId="afaf7c3a-e8aa-4568-882a-02ad8f9e19b0" providerId="ADAL" clId="{5FF5AC1B-ABA9-43D7-A1E3-2D92732CD6E2}" dt="2026-03-31T16:55:41.530" v="8" actId="478"/>
-          <ac:spMkLst>
-            <pc:docMk/>
-            <pc:sldMk cId="403151843" sldId="491"/>
-            <ac:spMk id="10" creationId="{752B3BD7-F960-685D-0531-F44D94C56BA9}"/>
-          </ac:spMkLst>
-        </pc:spChg>
-        <pc:spChg chg="add mod ord">
-          <ac:chgData name="Lines, Todd" userId="afaf7c3a-e8aa-4568-882a-02ad8f9e19b0" providerId="ADAL" clId="{5FF5AC1B-ABA9-43D7-A1E3-2D92732CD6E2}" dt="2026-03-31T17:19:16.878" v="441" actId="1038"/>
-          <ac:spMkLst>
-            <pc:docMk/>
-            <pc:sldMk cId="403151843" sldId="491"/>
-            <ac:spMk id="11" creationId="{E92237C2-F4CC-BD5E-520B-FD8603FB6A5B}"/>
-          </ac:spMkLst>
-        </pc:spChg>
-        <pc:spChg chg="add del mod ord">
-          <ac:chgData name="Lines, Todd" userId="afaf7c3a-e8aa-4568-882a-02ad8f9e19b0" providerId="ADAL" clId="{5FF5AC1B-ABA9-43D7-A1E3-2D92732CD6E2}" dt="2026-03-31T17:20:03.506" v="447" actId="1076"/>
-          <ac:spMkLst>
-            <pc:docMk/>
-            <pc:sldMk cId="403151843" sldId="491"/>
-            <ac:spMk id="12" creationId="{9C20913B-8E23-DFA4-8795-0B8686517F01}"/>
-          </ac:spMkLst>
-        </pc:spChg>
-        <pc:spChg chg="add mod">
-          <ac:chgData name="Lines, Todd" userId="afaf7c3a-e8aa-4568-882a-02ad8f9e19b0" providerId="ADAL" clId="{5FF5AC1B-ABA9-43D7-A1E3-2D92732CD6E2}" dt="2026-03-31T17:05:26.832" v="200" actId="14100"/>
-          <ac:spMkLst>
-            <pc:docMk/>
-            <pc:sldMk cId="403151843" sldId="491"/>
-            <ac:spMk id="13" creationId="{8298ACB4-1ECF-EA3C-D73B-588F988C32A1}"/>
-          </ac:spMkLst>
-        </pc:spChg>
-        <pc:spChg chg="add del mod">
-          <ac:chgData name="Lines, Todd" userId="afaf7c3a-e8aa-4568-882a-02ad8f9e19b0" providerId="ADAL" clId="{5FF5AC1B-ABA9-43D7-A1E3-2D92732CD6E2}" dt="2026-03-31T17:05:21.719" v="199" actId="478"/>
-          <ac:spMkLst>
-            <pc:docMk/>
-            <pc:sldMk cId="403151843" sldId="491"/>
-            <ac:spMk id="14" creationId="{237925E0-C731-E9FD-ACF3-7D7E69FDBA79}"/>
-          </ac:spMkLst>
-        </pc:spChg>
-        <pc:spChg chg="add del mod">
-          <ac:chgData name="Lines, Todd" userId="afaf7c3a-e8aa-4568-882a-02ad8f9e19b0" providerId="ADAL" clId="{5FF5AC1B-ABA9-43D7-A1E3-2D92732CD6E2}" dt="2026-03-31T18:21:30.162" v="520" actId="478"/>
-          <ac:spMkLst>
-            <pc:docMk/>
-            <pc:sldMk cId="403151843" sldId="491"/>
-            <ac:spMk id="14" creationId="{88A454B6-607D-657D-9BB9-23541A6751E0}"/>
-          </ac:spMkLst>
-        </pc:spChg>
-        <pc:spChg chg="add mod ord">
-          <ac:chgData name="Lines, Todd" userId="afaf7c3a-e8aa-4568-882a-02ad8f9e19b0" providerId="ADAL" clId="{5FF5AC1B-ABA9-43D7-A1E3-2D92732CD6E2}" dt="2026-03-31T17:20:03.506" v="447" actId="1076"/>
-          <ac:spMkLst>
-            <pc:docMk/>
-            <pc:sldMk cId="403151843" sldId="491"/>
-            <ac:spMk id="15" creationId="{ADC6E333-C323-609E-2C24-7D94919D03AA}"/>
-          </ac:spMkLst>
-        </pc:spChg>
-        <pc:spChg chg="add mod">
-          <ac:chgData name="Lines, Todd" userId="afaf7c3a-e8aa-4568-882a-02ad8f9e19b0" providerId="ADAL" clId="{5FF5AC1B-ABA9-43D7-A1E3-2D92732CD6E2}" dt="2026-03-31T18:21:39.069" v="523" actId="14100"/>
-          <ac:spMkLst>
-            <pc:docMk/>
-            <pc:sldMk cId="403151843" sldId="491"/>
-            <ac:spMk id="16" creationId="{70563D98-10D8-ED0C-0DBA-A6DED290534E}"/>
-          </ac:spMkLst>
-        </pc:spChg>
-        <pc:spChg chg="add del mod">
-          <ac:chgData name="Lines, Todd" userId="afaf7c3a-e8aa-4568-882a-02ad8f9e19b0" providerId="ADAL" clId="{5FF5AC1B-ABA9-43D7-A1E3-2D92732CD6E2}" dt="2026-03-31T16:58:02.100" v="37" actId="478"/>
-          <ac:spMkLst>
-            <pc:docMk/>
-            <pc:sldMk cId="403151843" sldId="491"/>
-            <ac:spMk id="16" creationId="{E6D5AB84-7B1F-B684-FDE9-E077F2FE04E0}"/>
-          </ac:spMkLst>
-        </pc:spChg>
-        <pc:spChg chg="add mod ord">
-          <ac:chgData name="Lines, Todd" userId="afaf7c3a-e8aa-4568-882a-02ad8f9e19b0" providerId="ADAL" clId="{5FF5AC1B-ABA9-43D7-A1E3-2D92732CD6E2}" dt="2026-03-31T17:17:09.996" v="388" actId="14100"/>
-          <ac:spMkLst>
-            <pc:docMk/>
-            <pc:sldMk cId="403151843" sldId="491"/>
-            <ac:spMk id="17" creationId="{9F7C406B-1F76-26C7-8B1D-253140385A24}"/>
-          </ac:spMkLst>
-        </pc:spChg>
-        <pc:spChg chg="add del mod ord">
-          <ac:chgData name="Lines, Todd" userId="afaf7c3a-e8aa-4568-882a-02ad8f9e19b0" providerId="ADAL" clId="{5FF5AC1B-ABA9-43D7-A1E3-2D92732CD6E2}" dt="2026-03-31T17:19:53.867" v="445" actId="478"/>
-          <ac:spMkLst>
-            <pc:docMk/>
-            <pc:sldMk cId="403151843" sldId="491"/>
-            <ac:spMk id="18" creationId="{4EFB59E6-C196-479A-6263-94C690909702}"/>
-          </ac:spMkLst>
-        </pc:spChg>
-        <pc:spChg chg="add del mod ord">
-          <ac:chgData name="Lines, Todd" userId="afaf7c3a-e8aa-4568-882a-02ad8f9e19b0" providerId="ADAL" clId="{5FF5AC1B-ABA9-43D7-A1E3-2D92732CD6E2}" dt="2026-03-31T21:55:50.580" v="554" actId="207"/>
-          <ac:spMkLst>
-            <pc:docMk/>
-            <pc:sldMk cId="403151843" sldId="491"/>
-            <ac:spMk id="19" creationId="{4C43CEA2-F7E4-B221-5BCF-9E13F2F11BCF}"/>
-          </ac:spMkLst>
-        </pc:spChg>
-        <pc:spChg chg="add mod ord">
-          <ac:chgData name="Lines, Todd" userId="afaf7c3a-e8aa-4568-882a-02ad8f9e19b0" providerId="ADAL" clId="{5FF5AC1B-ABA9-43D7-A1E3-2D92732CD6E2}" dt="2026-03-31T21:55:55.210" v="555" actId="108"/>
-          <ac:spMkLst>
-            <pc:docMk/>
-            <pc:sldMk cId="403151843" sldId="491"/>
-            <ac:spMk id="20" creationId="{9C20913B-8E23-DFA4-8795-0B8686517F01}"/>
-          </ac:spMkLst>
-        </pc:spChg>
-        <pc:spChg chg="add mod">
-          <ac:chgData name="Lines, Todd" userId="afaf7c3a-e8aa-4568-882a-02ad8f9e19b0" providerId="ADAL" clId="{5FF5AC1B-ABA9-43D7-A1E3-2D92732CD6E2}" dt="2026-03-31T17:18:52.356" v="435" actId="1035"/>
-          <ac:spMkLst>
-            <pc:docMk/>
-            <pc:sldMk cId="403151843" sldId="491"/>
-            <ac:spMk id="21" creationId="{C8E6AC44-F52A-570B-C93E-E3600DC4B4FA}"/>
-          </ac:spMkLst>
-        </pc:spChg>
-        <pc:spChg chg="add mod ord">
-          <ac:chgData name="Lines, Todd" userId="afaf7c3a-e8aa-4568-882a-02ad8f9e19b0" providerId="ADAL" clId="{5FF5AC1B-ABA9-43D7-A1E3-2D92732CD6E2}" dt="2026-03-31T17:18:48.899" v="433" actId="1035"/>
-          <ac:spMkLst>
-            <pc:docMk/>
-            <pc:sldMk cId="403151843" sldId="491"/>
-            <ac:spMk id="22" creationId="{E9A70D16-38EC-FA1F-2067-91F7317D8F7B}"/>
-          </ac:spMkLst>
-        </pc:spChg>
-        <pc:spChg chg="add mod ord">
-          <ac:chgData name="Lines, Todd" userId="afaf7c3a-e8aa-4568-882a-02ad8f9e19b0" providerId="ADAL" clId="{5FF5AC1B-ABA9-43D7-A1E3-2D92732CD6E2}" dt="2026-03-31T17:20:03.506" v="447" actId="1076"/>
-          <ac:spMkLst>
-            <pc:docMk/>
-            <pc:sldMk cId="403151843" sldId="491"/>
-            <ac:spMk id="23" creationId="{89B8B6E3-A1C6-A3B7-DB90-5A8F6EE766E7}"/>
-          </ac:spMkLst>
-        </pc:spChg>
-        <pc:spChg chg="add mod ord">
-          <ac:chgData name="Lines, Todd" userId="afaf7c3a-e8aa-4568-882a-02ad8f9e19b0" providerId="ADAL" clId="{5FF5AC1B-ABA9-43D7-A1E3-2D92732CD6E2}" dt="2026-03-31T17:20:03.506" v="447" actId="1076"/>
-          <ac:spMkLst>
-            <pc:docMk/>
-            <pc:sldMk cId="403151843" sldId="491"/>
-            <ac:spMk id="24" creationId="{0C0C1B29-7B7D-1262-2242-2F09343BBAA1}"/>
-          </ac:spMkLst>
-        </pc:spChg>
-        <pc:spChg chg="add mod">
-          <ac:chgData name="Lines, Todd" userId="afaf7c3a-e8aa-4568-882a-02ad8f9e19b0" providerId="ADAL" clId="{5FF5AC1B-ABA9-43D7-A1E3-2D92732CD6E2}" dt="2026-03-31T17:08:11.997" v="232" actId="1076"/>
-          <ac:spMkLst>
-            <pc:docMk/>
-            <pc:sldMk cId="403151843" sldId="491"/>
-            <ac:spMk id="25" creationId="{D0B3F9A9-49AE-1BEB-DEC3-39A0955558B7}"/>
-          </ac:spMkLst>
-        </pc:spChg>
-        <pc:spChg chg="add mod">
-          <ac:chgData name="Lines, Todd" userId="afaf7c3a-e8aa-4568-882a-02ad8f9e19b0" providerId="ADAL" clId="{5FF5AC1B-ABA9-43D7-A1E3-2D92732CD6E2}" dt="2026-03-31T17:20:03.506" v="447" actId="1076"/>
-          <ac:spMkLst>
-            <pc:docMk/>
-            <pc:sldMk cId="403151843" sldId="491"/>
-            <ac:spMk id="26" creationId="{0855BDB8-A1CF-2ACF-A14A-259EB6C50C5C}"/>
-          </ac:spMkLst>
-        </pc:spChg>
-        <pc:spChg chg="add mod ord">
-          <ac:chgData name="Lines, Todd" userId="afaf7c3a-e8aa-4568-882a-02ad8f9e19b0" providerId="ADAL" clId="{5FF5AC1B-ABA9-43D7-A1E3-2D92732CD6E2}" dt="2026-03-31T17:13:52.572" v="353" actId="166"/>
-          <ac:spMkLst>
-            <pc:docMk/>
-            <pc:sldMk cId="403151843" sldId="491"/>
-            <ac:spMk id="27" creationId="{97C9F5F0-DA83-014B-B52C-A9989287E00D}"/>
-          </ac:spMkLst>
-        </pc:spChg>
-        <pc:spChg chg="add mod">
-          <ac:chgData name="Lines, Todd" userId="afaf7c3a-e8aa-4568-882a-02ad8f9e19b0" providerId="ADAL" clId="{5FF5AC1B-ABA9-43D7-A1E3-2D92732CD6E2}" dt="2026-03-31T17:20:03.506" v="447" actId="1076"/>
-          <ac:spMkLst>
-            <pc:docMk/>
-            <pc:sldMk cId="403151843" sldId="491"/>
-            <ac:spMk id="32" creationId="{9DE87A87-C22C-7AFE-78B3-4AFDE8C44449}"/>
-          </ac:spMkLst>
-        </pc:spChg>
-        <pc:spChg chg="add mod">
-          <ac:chgData name="Lines, Todd" userId="afaf7c3a-e8aa-4568-882a-02ad8f9e19b0" providerId="ADAL" clId="{5FF5AC1B-ABA9-43D7-A1E3-2D92732CD6E2}" dt="2026-03-31T17:20:03.506" v="447" actId="1076"/>
-          <ac:spMkLst>
-            <pc:docMk/>
-            <pc:sldMk cId="403151843" sldId="491"/>
-            <ac:spMk id="33" creationId="{E7BEBAC5-78D1-8695-574B-7DC4F4259B85}"/>
-          </ac:spMkLst>
-        </pc:spChg>
-        <pc:spChg chg="add mod">
-          <ac:chgData name="Lines, Todd" userId="afaf7c3a-e8aa-4568-882a-02ad8f9e19b0" providerId="ADAL" clId="{5FF5AC1B-ABA9-43D7-A1E3-2D92732CD6E2}" dt="2026-03-31T17:20:03.506" v="447" actId="1076"/>
-          <ac:spMkLst>
-            <pc:docMk/>
-            <pc:sldMk cId="403151843" sldId="491"/>
-            <ac:spMk id="34" creationId="{442A1DB1-BDD0-96C5-CCD0-47094D72A1F3}"/>
-          </ac:spMkLst>
-        </pc:spChg>
-        <pc:picChg chg="add mod">
-          <ac:chgData name="Lines, Todd" userId="afaf7c3a-e8aa-4568-882a-02ad8f9e19b0" providerId="ADAL" clId="{5FF5AC1B-ABA9-43D7-A1E3-2D92732CD6E2}" dt="2026-03-31T18:21:59.592" v="528" actId="1076"/>
+        <pc:picChg chg="mod">
+          <ac:chgData name="Lines, Todd" userId="afaf7c3a-e8aa-4568-882a-02ad8f9e19b0" providerId="ADAL" clId="{5FF5AC1B-ABA9-43D7-A1E3-2D92732CD6E2}" dt="2026-07-10T17:14:52.520" v="564" actId="1076"/>
           <ac:picMkLst>
             <pc:docMk/>
-            <pc:sldMk cId="403151843" sldId="491"/>
-            <ac:picMk id="4" creationId="{08AE5275-D8AC-A14B-69B4-DE5098F75237}"/>
+            <pc:sldMk cId="0" sldId="265"/>
+            <ac:picMk id="7170" creationId="{00000000-0000-0000-0000-000000000000}"/>
           </ac:picMkLst>
         </pc:picChg>
-        <pc:picChg chg="add del mod">
-          <ac:chgData name="Lines, Todd" userId="afaf7c3a-e8aa-4568-882a-02ad8f9e19b0" providerId="ADAL" clId="{5FF5AC1B-ABA9-43D7-A1E3-2D92732CD6E2}" dt="2026-03-31T17:19:45.067" v="443" actId="478"/>
-          <ac:picMkLst>
-            <pc:docMk/>
-            <pc:sldMk cId="403151843" sldId="491"/>
-            <ac:picMk id="5" creationId="{66B6BE6B-BA56-6632-FD7C-A9C11A3EA36D}"/>
-          </ac:picMkLst>
-        </pc:picChg>
-        <pc:picChg chg="add del mod">
-          <ac:chgData name="Lines, Todd" userId="afaf7c3a-e8aa-4568-882a-02ad8f9e19b0" providerId="ADAL" clId="{5FF5AC1B-ABA9-43D7-A1E3-2D92732CD6E2}" dt="2026-03-31T16:55:44.093" v="10" actId="478"/>
-          <ac:picMkLst>
-            <pc:docMk/>
-            <pc:sldMk cId="403151843" sldId="491"/>
-            <ac:picMk id="6" creationId="{843D8325-5718-BCD1-9BE3-31EACC93AA4F}"/>
-          </ac:picMkLst>
-        </pc:picChg>
-        <pc:picChg chg="del mod">
-          <ac:chgData name="Lines, Todd" userId="afaf7c3a-e8aa-4568-882a-02ad8f9e19b0" providerId="ADAL" clId="{5FF5AC1B-ABA9-43D7-A1E3-2D92732CD6E2}" dt="2026-03-31T21:56:13.452" v="557" actId="21"/>
-          <ac:picMkLst>
-            <pc:docMk/>
-            <pc:sldMk cId="403151843" sldId="491"/>
-            <ac:picMk id="9" creationId="{E49870DB-BA70-AFE6-8ED6-DE1760C6DD29}"/>
-          </ac:picMkLst>
-        </pc:picChg>
-        <pc:picChg chg="del mod">
-          <ac:chgData name="Lines, Todd" userId="afaf7c3a-e8aa-4568-882a-02ad8f9e19b0" providerId="ADAL" clId="{5FF5AC1B-ABA9-43D7-A1E3-2D92732CD6E2}" dt="2026-03-31T18:22:14.976" v="530" actId="21"/>
-          <ac:picMkLst>
-            <pc:docMk/>
-            <pc:sldMk cId="403151843" sldId="491"/>
-            <ac:picMk id="18" creationId="{BFDE7A56-A41F-437E-0A2D-B30CEDBCABF4}"/>
-          </ac:picMkLst>
-        </pc:picChg>
-        <pc:picChg chg="del mod">
-          <ac:chgData name="Lines, Todd" userId="afaf7c3a-e8aa-4568-882a-02ad8f9e19b0" providerId="ADAL" clId="{5FF5AC1B-ABA9-43D7-A1E3-2D92732CD6E2}" dt="2026-03-31T19:47:56.233" v="552" actId="21"/>
-          <ac:picMkLst>
-            <pc:docMk/>
-            <pc:sldMk cId="403151843" sldId="491"/>
-            <ac:picMk id="28" creationId="{E26171E3-A344-F12D-1C5D-BA6F92646C09}"/>
-          </ac:picMkLst>
-        </pc:picChg>
-        <pc:cxnChg chg="add del mod">
-          <ac:chgData name="Lines, Todd" userId="afaf7c3a-e8aa-4568-882a-02ad8f9e19b0" providerId="ADAL" clId="{5FF5AC1B-ABA9-43D7-A1E3-2D92732CD6E2}" dt="2026-03-31T17:11:51.655" v="273" actId="478"/>
-          <ac:cxnSpMkLst>
-            <pc:docMk/>
-            <pc:sldMk cId="403151843" sldId="491"/>
-            <ac:cxnSpMk id="29" creationId="{EF50CEA1-0CFE-E702-0FD2-A743EDBFCA7E}"/>
-          </ac:cxnSpMkLst>
-        </pc:cxnChg>
-        <pc:cxnChg chg="add del mod">
-          <ac:chgData name="Lines, Todd" userId="afaf7c3a-e8aa-4568-882a-02ad8f9e19b0" providerId="ADAL" clId="{5FF5AC1B-ABA9-43D7-A1E3-2D92732CD6E2}" dt="2026-03-31T17:11:53.807" v="274" actId="478"/>
-          <ac:cxnSpMkLst>
-            <pc:docMk/>
-            <pc:sldMk cId="403151843" sldId="491"/>
-            <ac:cxnSpMk id="30" creationId="{66BA3B13-CC1B-E51F-54B3-6B87D5BF476A}"/>
-          </ac:cxnSpMkLst>
-        </pc:cxnChg>
-        <pc:cxnChg chg="add del mod">
-          <ac:chgData name="Lines, Todd" userId="afaf7c3a-e8aa-4568-882a-02ad8f9e19b0" providerId="ADAL" clId="{5FF5AC1B-ABA9-43D7-A1E3-2D92732CD6E2}" dt="2026-03-31T17:11:20.669" v="269" actId="478"/>
-          <ac:cxnSpMkLst>
-            <pc:docMk/>
-            <pc:sldMk cId="403151843" sldId="491"/>
-            <ac:cxnSpMk id="31" creationId="{2EA31224-9EF4-EA4F-45E1-6BE7051BBD23}"/>
-          </ac:cxnSpMkLst>
-        </pc:cxnChg>
+      </pc:sldChg>
+      <pc:sldChg chg="ord">
+        <pc:chgData name="Lines, Todd" userId="afaf7c3a-e8aa-4568-882a-02ad8f9e19b0" providerId="ADAL" clId="{5FF5AC1B-ABA9-43D7-A1E3-2D92732CD6E2}" dt="2026-07-13T17:30:58.948" v="703"/>
+        <pc:sldMkLst>
+          <pc:docMk/>
+          <pc:sldMk cId="3786188879" sldId="283"/>
+        </pc:sldMkLst>
+      </pc:sldChg>
+      <pc:sldChg chg="ord">
+        <pc:chgData name="Lines, Todd" userId="afaf7c3a-e8aa-4568-882a-02ad8f9e19b0" providerId="ADAL" clId="{5FF5AC1B-ABA9-43D7-A1E3-2D92732CD6E2}" dt="2026-07-13T17:30:58.948" v="703"/>
+        <pc:sldMkLst>
+          <pc:docMk/>
+          <pc:sldMk cId="0" sldId="285"/>
+        </pc:sldMkLst>
+      </pc:sldChg>
+      <pc:sldChg chg="ord">
+        <pc:chgData name="Lines, Todd" userId="afaf7c3a-e8aa-4568-882a-02ad8f9e19b0" providerId="ADAL" clId="{5FF5AC1B-ABA9-43D7-A1E3-2D92732CD6E2}" dt="2026-07-13T17:30:58.948" v="703"/>
+        <pc:sldMkLst>
+          <pc:docMk/>
+          <pc:sldMk cId="0" sldId="340"/>
+        </pc:sldMkLst>
       </pc:sldChg>
     </pc:docChg>
   </pc:docChgLst>
 </pc:chgInfo>
+</file>
+
+<file path=ppt/notesMasters/notesMaster1.xml><?xml version="1.0" encoding="utf-8"?>
+<p:notesMaster xmlns:a="http://schemas.openxmlformats.org/drawingml/2006/main" xmlns:r="http://schemas.openxmlformats.org/officeDocument/2006/relationships" xmlns:p="http://schemas.openxmlformats.org/presentationml/2006/main">
+  <p:cSld>
+    <p:bg>
+      <p:bgRef idx="1001">
+        <a:schemeClr val="bg1"/>
+      </p:bgRef>
+    </p:bg>
+    <p:spTree>
+      <p:nvGrpSpPr>
+        <p:cNvPr id="1" name=""/>
+        <p:cNvGrpSpPr/>
+        <p:nvPr/>
+      </p:nvGrpSpPr>
+      <p:grpSpPr>
+        <a:xfrm>
+          <a:off x="0" y="0"/>
+          <a:ext cx="0" cy="0"/>
+          <a:chOff x="0" y="0"/>
+          <a:chExt cx="0" cy="0"/>
+        </a:xfrm>
+      </p:grpSpPr>
+      <p:sp>
+        <p:nvSpPr>
+          <p:cNvPr id="2" name="Header Placeholder 1"/>
+          <p:cNvSpPr>
+            <a:spLocks noGrp="1"/>
+          </p:cNvSpPr>
+          <p:nvPr>
+            <p:ph type="hdr" sz="quarter"/>
+          </p:nvPr>
+        </p:nvSpPr>
+        <p:spPr>
+          <a:xfrm>
+            <a:off x="0" y="0"/>
+            <a:ext cx="2971800" cy="458788"/>
+          </a:xfrm>
+          <a:prstGeom prst="rect">
+            <a:avLst/>
+          </a:prstGeom>
+        </p:spPr>
+        <p:txBody>
+          <a:bodyPr vert="horz" lIns="91440" tIns="45720" rIns="91440" bIns="45720" rtlCol="0"/>
+          <a:lstStyle>
+            <a:lvl1pPr algn="l">
+              <a:defRPr sz="1200"/>
+            </a:lvl1pPr>
+          </a:lstStyle>
+          <a:p>
+            <a:endParaRPr lang="en-US"/>
+          </a:p>
+        </p:txBody>
+      </p:sp>
+      <p:sp>
+        <p:nvSpPr>
+          <p:cNvPr id="3" name="Date Placeholder 2"/>
+          <p:cNvSpPr>
+            <a:spLocks noGrp="1"/>
+          </p:cNvSpPr>
+          <p:nvPr>
+            <p:ph type="dt" idx="1"/>
+          </p:nvPr>
+        </p:nvSpPr>
+        <p:spPr>
+          <a:xfrm>
+            <a:off x="3884613" y="0"/>
+            <a:ext cx="2971800" cy="458788"/>
+          </a:xfrm>
+          <a:prstGeom prst="rect">
+            <a:avLst/>
+          </a:prstGeom>
+        </p:spPr>
+        <p:txBody>
+          <a:bodyPr vert="horz" lIns="91440" tIns="45720" rIns="91440" bIns="45720" rtlCol="0"/>
+          <a:lstStyle>
+            <a:lvl1pPr algn="r">
+              <a:defRPr sz="1200"/>
+            </a:lvl1pPr>
+          </a:lstStyle>
+          <a:p>
+            <a:fld id="{8534F4BC-BFC4-40B0-9118-9EF326193A8B}" type="datetimeFigureOut">
+              <a:rPr lang="en-US" smtClean="0"/>
+              <a:t>7/13/2026</a:t>
+            </a:fld>
+            <a:endParaRPr lang="en-US"/>
+          </a:p>
+        </p:txBody>
+      </p:sp>
+      <p:sp>
+        <p:nvSpPr>
+          <p:cNvPr id="4" name="Slide Image Placeholder 3"/>
+          <p:cNvSpPr>
+            <a:spLocks noGrp="1" noRot="1" noChangeAspect="1"/>
+          </p:cNvSpPr>
+          <p:nvPr>
+            <p:ph type="sldImg" idx="2"/>
+          </p:nvPr>
+        </p:nvSpPr>
+        <p:spPr>
+          <a:xfrm>
+            <a:off x="685800" y="1143000"/>
+            <a:ext cx="5486400" cy="3086100"/>
+          </a:xfrm>
+          <a:prstGeom prst="rect">
+            <a:avLst/>
+          </a:prstGeom>
+          <a:noFill/>
+          <a:ln w="12700">
+            <a:solidFill>
+              <a:prstClr val="black"/>
+            </a:solidFill>
+          </a:ln>
+        </p:spPr>
+        <p:txBody>
+          <a:bodyPr vert="horz" lIns="91440" tIns="45720" rIns="91440" bIns="45720" rtlCol="0" anchor="ctr"/>
+          <a:lstStyle/>
+          <a:p>
+            <a:endParaRPr lang="en-US"/>
+          </a:p>
+        </p:txBody>
+      </p:sp>
+      <p:sp>
+        <p:nvSpPr>
+          <p:cNvPr id="5" name="Notes Placeholder 4"/>
+          <p:cNvSpPr>
+            <a:spLocks noGrp="1"/>
+          </p:cNvSpPr>
+          <p:nvPr>
+            <p:ph type="body" sz="quarter" idx="3"/>
+          </p:nvPr>
+        </p:nvSpPr>
+        <p:spPr>
+          <a:xfrm>
+            <a:off x="685800" y="4400550"/>
+            <a:ext cx="5486400" cy="3600450"/>
+          </a:xfrm>
+          <a:prstGeom prst="rect">
+            <a:avLst/>
+          </a:prstGeom>
+        </p:spPr>
+        <p:txBody>
+          <a:bodyPr vert="horz" lIns="91440" tIns="45720" rIns="91440" bIns="45720" rtlCol="0"/>
+          <a:lstStyle/>
+          <a:p>
+            <a:pPr lvl="0"/>
+            <a:r>
+              <a:rPr lang="en-US"/>
+              <a:t>Click to edit Master text styles</a:t>
+            </a:r>
+          </a:p>
+          <a:p>
+            <a:pPr lvl="1"/>
+            <a:r>
+              <a:rPr lang="en-US"/>
+              <a:t>Second level</a:t>
+            </a:r>
+          </a:p>
+          <a:p>
+            <a:pPr lvl="2"/>
+            <a:r>
+              <a:rPr lang="en-US"/>
+              <a:t>Third level</a:t>
+            </a:r>
+          </a:p>
+          <a:p>
+            <a:pPr lvl="3"/>
+            <a:r>
+              <a:rPr lang="en-US"/>
+              <a:t>Fourth level</a:t>
+            </a:r>
+          </a:p>
+          <a:p>
+            <a:pPr lvl="4"/>
+            <a:r>
+              <a:rPr lang="en-US"/>
+              <a:t>Fifth level</a:t>
+            </a:r>
+          </a:p>
+        </p:txBody>
+      </p:sp>
+      <p:sp>
+        <p:nvSpPr>
+          <p:cNvPr id="6" name="Footer Placeholder 5"/>
+          <p:cNvSpPr>
+            <a:spLocks noGrp="1"/>
+          </p:cNvSpPr>
+          <p:nvPr>
+            <p:ph type="ftr" sz="quarter" idx="4"/>
+          </p:nvPr>
+        </p:nvSpPr>
+        <p:spPr>
+          <a:xfrm>
+            <a:off x="0" y="8685213"/>
+            <a:ext cx="2971800" cy="458787"/>
+          </a:xfrm>
+          <a:prstGeom prst="rect">
+            <a:avLst/>
+          </a:prstGeom>
+        </p:spPr>
+        <p:txBody>
+          <a:bodyPr vert="horz" lIns="91440" tIns="45720" rIns="91440" bIns="45720" rtlCol="0" anchor="b"/>
+          <a:lstStyle>
+            <a:lvl1pPr algn="l">
+              <a:defRPr sz="1200"/>
+            </a:lvl1pPr>
+          </a:lstStyle>
+          <a:p>
+            <a:endParaRPr lang="en-US"/>
+          </a:p>
+        </p:txBody>
+      </p:sp>
+      <p:sp>
+        <p:nvSpPr>
+          <p:cNvPr id="7" name="Slide Number Placeholder 6"/>
+          <p:cNvSpPr>
+            <a:spLocks noGrp="1"/>
+          </p:cNvSpPr>
+          <p:nvPr>
+            <p:ph type="sldNum" sz="quarter" idx="5"/>
+          </p:nvPr>
+        </p:nvSpPr>
+        <p:spPr>
+          <a:xfrm>
+            <a:off x="3884613" y="8685213"/>
+            <a:ext cx="2971800" cy="458787"/>
+          </a:xfrm>
+          <a:prstGeom prst="rect">
+            <a:avLst/>
+          </a:prstGeom>
+        </p:spPr>
+        <p:txBody>
+          <a:bodyPr vert="horz" lIns="91440" tIns="45720" rIns="91440" bIns="45720" rtlCol="0" anchor="b"/>
+          <a:lstStyle>
+            <a:lvl1pPr algn="r">
+              <a:defRPr sz="1200"/>
+            </a:lvl1pPr>
+          </a:lstStyle>
+          <a:p>
+            <a:fld id="{394E12B1-5FE8-4BDD-95CE-B4AA6E045624}" type="slidenum">
+              <a:rPr lang="en-US" smtClean="0"/>
+              <a:t>‹#›</a:t>
+            </a:fld>
+            <a:endParaRPr lang="en-US"/>
+          </a:p>
+        </p:txBody>
+      </p:sp>
+    </p:spTree>
+    <p:extLst>
+      <p:ext uri="{BB962C8B-B14F-4D97-AF65-F5344CB8AC3E}">
+        <p14:creationId xmlns:p14="http://schemas.microsoft.com/office/powerpoint/2010/main" val="807937355"/>
+      </p:ext>
+    </p:extLst>
+  </p:cSld>
+  <p:clrMap bg1="lt1" tx1="dk1" bg2="lt2" tx2="dk2" accent1="accent1" accent2="accent2" accent3="accent3" accent4="accent4" accent5="accent5" accent6="accent6" hlink="hlink" folHlink="folHlink"/>
+  <p:notesStyle>
+    <a:lvl1pPr marL="0" algn="l" defTabSz="914400" rtl="0" eaLnBrk="1" latinLnBrk="0" hangingPunct="1">
+      <a:defRPr sz="1200" kern="1200">
+        <a:solidFill>
+          <a:schemeClr val="tx1"/>
+        </a:solidFill>
+        <a:latin typeface="+mn-lt"/>
+        <a:ea typeface="+mn-ea"/>
+        <a:cs typeface="+mn-cs"/>
+      </a:defRPr>
+    </a:lvl1pPr>
+    <a:lvl2pPr marL="457200" algn="l" defTabSz="914400" rtl="0" eaLnBrk="1" latinLnBrk="0" hangingPunct="1">
+      <a:defRPr sz="1200" kern="1200">
+        <a:solidFill>
+          <a:schemeClr val="tx1"/>
+        </a:solidFill>
+        <a:latin typeface="+mn-lt"/>
+        <a:ea typeface="+mn-ea"/>
+        <a:cs typeface="+mn-cs"/>
+      </a:defRPr>
+    </a:lvl2pPr>
+    <a:lvl3pPr marL="914400" algn="l" defTabSz="914400" rtl="0" eaLnBrk="1" latinLnBrk="0" hangingPunct="1">
+      <a:defRPr sz="1200" kern="1200">
+        <a:solidFill>
+          <a:schemeClr val="tx1"/>
+        </a:solidFill>
+        <a:latin typeface="+mn-lt"/>
+        <a:ea typeface="+mn-ea"/>
+        <a:cs typeface="+mn-cs"/>
+      </a:defRPr>
+    </a:lvl3pPr>
+    <a:lvl4pPr marL="1371600" algn="l" defTabSz="914400" rtl="0" eaLnBrk="1" latinLnBrk="0" hangingPunct="1">
+      <a:defRPr sz="1200" kern="1200">
+        <a:solidFill>
+          <a:schemeClr val="tx1"/>
+        </a:solidFill>
+        <a:latin typeface="+mn-lt"/>
+        <a:ea typeface="+mn-ea"/>
+        <a:cs typeface="+mn-cs"/>
+      </a:defRPr>
+    </a:lvl4pPr>
+    <a:lvl5pPr marL="1828800" algn="l" defTabSz="914400" rtl="0" eaLnBrk="1" latinLnBrk="0" hangingPunct="1">
+      <a:defRPr sz="1200" kern="1200">
+        <a:solidFill>
+          <a:schemeClr val="tx1"/>
+        </a:solidFill>
+        <a:latin typeface="+mn-lt"/>
+        <a:ea typeface="+mn-ea"/>
+        <a:cs typeface="+mn-cs"/>
+      </a:defRPr>
+    </a:lvl5pPr>
+    <a:lvl6pPr marL="2286000" algn="l" defTabSz="914400" rtl="0" eaLnBrk="1" latinLnBrk="0" hangingPunct="1">
+      <a:defRPr sz="1200" kern="1200">
+        <a:solidFill>
+          <a:schemeClr val="tx1"/>
+        </a:solidFill>
+        <a:latin typeface="+mn-lt"/>
+        <a:ea typeface="+mn-ea"/>
+        <a:cs typeface="+mn-cs"/>
+      </a:defRPr>
+    </a:lvl6pPr>
+    <a:lvl7pPr marL="2743200" algn="l" defTabSz="914400" rtl="0" eaLnBrk="1" latinLnBrk="0" hangingPunct="1">
+      <a:defRPr sz="1200" kern="1200">
+        <a:solidFill>
+          <a:schemeClr val="tx1"/>
+        </a:solidFill>
+        <a:latin typeface="+mn-lt"/>
+        <a:ea typeface="+mn-ea"/>
+        <a:cs typeface="+mn-cs"/>
+      </a:defRPr>
+    </a:lvl7pPr>
+    <a:lvl8pPr marL="3200400" algn="l" defTabSz="914400" rtl="0" eaLnBrk="1" latinLnBrk="0" hangingPunct="1">
+      <a:defRPr sz="1200" kern="1200">
+        <a:solidFill>
+          <a:schemeClr val="tx1"/>
+        </a:solidFill>
+        <a:latin typeface="+mn-lt"/>
+        <a:ea typeface="+mn-ea"/>
+        <a:cs typeface="+mn-cs"/>
+      </a:defRPr>
+    </a:lvl8pPr>
+    <a:lvl9pPr marL="3657600" algn="l" defTabSz="914400" rtl="0" eaLnBrk="1" latinLnBrk="0" hangingPunct="1">
+      <a:defRPr sz="1200" kern="1200">
+        <a:solidFill>
+          <a:schemeClr val="tx1"/>
+        </a:solidFill>
+        <a:latin typeface="+mn-lt"/>
+        <a:ea typeface="+mn-ea"/>
+        <a:cs typeface="+mn-cs"/>
+      </a:defRPr>
+    </a:lvl9pPr>
+  </p:notesStyle>
+</p:notesMaster>
+</file>
+
+<file path=ppt/notesSlides/notesSlide1.xml><?xml version="1.0" encoding="utf-8"?>
+<p:notes xmlns:a="http://schemas.openxmlformats.org/drawingml/2006/main" xmlns:r="http://schemas.openxmlformats.org/officeDocument/2006/relationships" xmlns:p="http://schemas.openxmlformats.org/presentationml/2006/main">
+  <p:cSld>
+    <p:spTree>
+      <p:nvGrpSpPr>
+        <p:cNvPr id="1" name=""/>
+        <p:cNvGrpSpPr/>
+        <p:nvPr/>
+      </p:nvGrpSpPr>
+      <p:grpSpPr>
+        <a:xfrm>
+          <a:off x="0" y="0"/>
+          <a:ext cx="0" cy="0"/>
+          <a:chOff x="0" y="0"/>
+          <a:chExt cx="0" cy="0"/>
+        </a:xfrm>
+      </p:grpSpPr>
+      <p:sp>
+        <p:nvSpPr>
+          <p:cNvPr id="2" name="Slide Image Placeholder 1"/>
+          <p:cNvSpPr>
+            <a:spLocks noGrp="1" noRot="1" noChangeAspect="1"/>
+          </p:cNvSpPr>
+          <p:nvPr>
+            <p:ph type="sldImg"/>
+          </p:nvPr>
+        </p:nvSpPr>
+        <p:spPr/>
+      </p:sp>
+      <p:sp>
+        <p:nvSpPr>
+          <p:cNvPr id="3" name="Notes Placeholder 2"/>
+          <p:cNvSpPr>
+            <a:spLocks noGrp="1"/>
+          </p:cNvSpPr>
+          <p:nvPr>
+            <p:ph type="body" idx="1"/>
+          </p:nvPr>
+        </p:nvSpPr>
+        <p:spPr/>
+        <p:txBody>
+          <a:bodyPr/>
+          <a:lstStyle/>
+          <a:p>
+            <a:endParaRPr lang="en-US" dirty="0"/>
+          </a:p>
+        </p:txBody>
+      </p:sp>
+      <p:sp>
+        <p:nvSpPr>
+          <p:cNvPr id="4" name="Slide Number Placeholder 3"/>
+          <p:cNvSpPr>
+            <a:spLocks noGrp="1"/>
+          </p:cNvSpPr>
+          <p:nvPr>
+            <p:ph type="sldNum" sz="quarter" idx="5"/>
+          </p:nvPr>
+        </p:nvSpPr>
+        <p:spPr/>
+        <p:txBody>
+          <a:bodyPr/>
+          <a:lstStyle/>
+          <a:p>
+            <a:fld id="{394E12B1-5FE8-4BDD-95CE-B4AA6E045624}" type="slidenum">
+              <a:rPr lang="en-US" smtClean="0"/>
+              <a:t>1</a:t>
+            </a:fld>
+            <a:endParaRPr lang="en-US"/>
+          </a:p>
+        </p:txBody>
+      </p:sp>
+    </p:spTree>
+    <p:extLst>
+      <p:ext uri="{BB962C8B-B14F-4D97-AF65-F5344CB8AC3E}">
+        <p14:creationId xmlns:p14="http://schemas.microsoft.com/office/powerpoint/2010/main" val="404315070"/>
+      </p:ext>
+    </p:extLst>
+  </p:cSld>
+  <p:clrMapOvr>
+    <a:masterClrMapping/>
+  </p:clrMapOvr>
+</p:notes>
 </file>
 
 <file path=ppt/slideLayouts/slideLayout1.xml><?xml version="1.0" encoding="utf-8"?>
@@ -665,7 +778,7 @@
           <a:p>
             <a:fld id="{5D14FE54-3E4B-43AC-AC6A-78E009FC7A62}" type="datetimeFigureOut">
               <a:rPr lang="en-US" smtClean="0"/>
-              <a:t>3/31/2026</a:t>
+              <a:t>7/13/2026</a:t>
             </a:fld>
             <a:endParaRPr lang="en-US"/>
           </a:p>
@@ -863,7 +976,7 @@
           <a:p>
             <a:fld id="{5D14FE54-3E4B-43AC-AC6A-78E009FC7A62}" type="datetimeFigureOut">
               <a:rPr lang="en-US" smtClean="0"/>
-              <a:t>3/31/2026</a:t>
+              <a:t>7/13/2026</a:t>
             </a:fld>
             <a:endParaRPr lang="en-US"/>
           </a:p>
@@ -1071,7 +1184,7 @@
           <a:p>
             <a:fld id="{5D14FE54-3E4B-43AC-AC6A-78E009FC7A62}" type="datetimeFigureOut">
               <a:rPr lang="en-US" smtClean="0"/>
-              <a:t>3/31/2026</a:t>
+              <a:t>7/13/2026</a:t>
             </a:fld>
             <a:endParaRPr lang="en-US"/>
           </a:p>
@@ -1269,7 +1382,7 @@
           <a:p>
             <a:fld id="{5D14FE54-3E4B-43AC-AC6A-78E009FC7A62}" type="datetimeFigureOut">
               <a:rPr lang="en-US" smtClean="0"/>
-              <a:t>3/31/2026</a:t>
+              <a:t>7/13/2026</a:t>
             </a:fld>
             <a:endParaRPr lang="en-US"/>
           </a:p>
@@ -1544,7 +1657,7 @@
           <a:p>
             <a:fld id="{5D14FE54-3E4B-43AC-AC6A-78E009FC7A62}" type="datetimeFigureOut">
               <a:rPr lang="en-US" smtClean="0"/>
-              <a:t>3/31/2026</a:t>
+              <a:t>7/13/2026</a:t>
             </a:fld>
             <a:endParaRPr lang="en-US"/>
           </a:p>
@@ -1809,7 +1922,7 @@
           <a:p>
             <a:fld id="{5D14FE54-3E4B-43AC-AC6A-78E009FC7A62}" type="datetimeFigureOut">
               <a:rPr lang="en-US" smtClean="0"/>
-              <a:t>3/31/2026</a:t>
+              <a:t>7/13/2026</a:t>
             </a:fld>
             <a:endParaRPr lang="en-US"/>
           </a:p>
@@ -2221,7 +2334,7 @@
           <a:p>
             <a:fld id="{5D14FE54-3E4B-43AC-AC6A-78E009FC7A62}" type="datetimeFigureOut">
               <a:rPr lang="en-US" smtClean="0"/>
-              <a:t>3/31/2026</a:t>
+              <a:t>7/13/2026</a:t>
             </a:fld>
             <a:endParaRPr lang="en-US"/>
           </a:p>
@@ -2362,7 +2475,7 @@
           <a:p>
             <a:fld id="{5D14FE54-3E4B-43AC-AC6A-78E009FC7A62}" type="datetimeFigureOut">
               <a:rPr lang="en-US" smtClean="0"/>
-              <a:t>3/31/2026</a:t>
+              <a:t>7/13/2026</a:t>
             </a:fld>
             <a:endParaRPr lang="en-US"/>
           </a:p>
@@ -2475,7 +2588,7 @@
           <a:p>
             <a:fld id="{5D14FE54-3E4B-43AC-AC6A-78E009FC7A62}" type="datetimeFigureOut">
               <a:rPr lang="en-US" smtClean="0"/>
-              <a:t>3/31/2026</a:t>
+              <a:t>7/13/2026</a:t>
             </a:fld>
             <a:endParaRPr lang="en-US"/>
           </a:p>
@@ -2786,7 +2899,7 @@
           <a:p>
             <a:fld id="{5D14FE54-3E4B-43AC-AC6A-78E009FC7A62}" type="datetimeFigureOut">
               <a:rPr lang="en-US" smtClean="0"/>
-              <a:t>3/31/2026</a:t>
+              <a:t>7/13/2026</a:t>
             </a:fld>
             <a:endParaRPr lang="en-US"/>
           </a:p>
@@ -3074,7 +3187,7 @@
           <a:p>
             <a:fld id="{5D14FE54-3E4B-43AC-AC6A-78E009FC7A62}" type="datetimeFigureOut">
               <a:rPr lang="en-US" smtClean="0"/>
-              <a:t>3/31/2026</a:t>
+              <a:t>7/13/2026</a:t>
             </a:fld>
             <a:endParaRPr lang="en-US"/>
           </a:p>
@@ -3315,7 +3428,7 @@
           <a:p>
             <a:fld id="{5D14FE54-3E4B-43AC-AC6A-78E009FC7A62}" type="datetimeFigureOut">
               <a:rPr lang="en-US" smtClean="0"/>
-              <a:t>3/31/2026</a:t>
+              <a:t>7/13/2026</a:t>
             </a:fld>
             <a:endParaRPr lang="en-US"/>
           </a:p>
@@ -3936,25 +4049,6 @@
       </p:grpSpPr>
       <p:sp>
         <p:nvSpPr>
-          <p:cNvPr id="2" name="Title 1"/>
-          <p:cNvSpPr>
-            <a:spLocks noGrp="1"/>
-          </p:cNvSpPr>
-          <p:nvPr>
-            <p:ph type="title"/>
-          </p:nvPr>
-        </p:nvSpPr>
-        <p:spPr/>
-        <p:txBody>
-          <a:bodyPr/>
-          <a:lstStyle/>
-          <a:p>
-            <a:endParaRPr lang="en-US"/>
-          </a:p>
-        </p:txBody>
-      </p:sp>
-      <p:sp>
-        <p:nvSpPr>
           <p:cNvPr id="3" name="Content Placeholder 2"/>
           <p:cNvSpPr>
             <a:spLocks noGrp="1"/>
@@ -3963,12 +4057,44 @@
             <p:ph idx="1"/>
           </p:nvPr>
         </p:nvSpPr>
-        <p:spPr/>
+        <p:spPr>
+          <a:xfrm>
+            <a:off x="589845" y="226305"/>
+            <a:ext cx="4320822" cy="4351338"/>
+          </a:xfrm>
+        </p:spPr>
         <p:txBody>
           <a:bodyPr/>
           <a:lstStyle/>
           <a:p>
-            <a:endParaRPr lang="en-US"/>
+            <a:pPr marL="0" indent="0">
+              <a:buNone/>
+            </a:pPr>
+            <a:r>
+              <a:rPr lang="en-US" dirty="0"/>
+              <a:t>Suppose we change 1mol  of an ideal gas from one state to another by two different paths. The two paths are shown in the figure (one is red and one is blue).</a:t>
+            </a:r>
+          </a:p>
+          <a:p>
+            <a:pPr marL="0" indent="0">
+              <a:buNone/>
+            </a:pPr>
+            <a:endParaRPr lang="en-US" dirty="0"/>
+          </a:p>
+          <a:p>
+            <a:pPr marL="0" indent="0">
+              <a:buNone/>
+            </a:pPr>
+            <a:r>
+              <a:rPr lang="en-US" dirty="0"/>
+              <a:t>Find the work done in the two different paths.</a:t>
+            </a:r>
+          </a:p>
+          <a:p>
+            <a:pPr marL="0" indent="0">
+              <a:buNone/>
+            </a:pPr>
+            <a:endParaRPr lang="en-US" dirty="0"/>
           </a:p>
         </p:txBody>
       </p:sp>
@@ -3989,8 +4115,8 @@
         </p:blipFill>
         <p:spPr bwMode="auto">
           <a:xfrm>
-            <a:off x="1905000" y="642082"/>
-            <a:ext cx="8650174" cy="5758718"/>
+            <a:off x="5416714" y="395111"/>
+            <a:ext cx="5477126" cy="3646311"/>
           </a:xfrm>
           <a:prstGeom prst="rect">
             <a:avLst/>
@@ -4005,6 +4131,247 @@
           <a:effectLst/>
         </p:spPr>
       </p:pic>
+      <mc:AlternateContent xmlns:mc="http://schemas.openxmlformats.org/markup-compatibility/2006" xmlns:a14="http://schemas.microsoft.com/office/drawing/2010/main">
+        <mc:Choice Requires="a14">
+          <p:sp>
+            <p:nvSpPr>
+              <p:cNvPr id="4" name="TextBox 3">
+                <a:extLst>
+                  <a:ext uri="{FF2B5EF4-FFF2-40B4-BE49-F238E27FC236}">
+                    <a16:creationId xmlns:a16="http://schemas.microsoft.com/office/drawing/2014/main" id="{6D22323D-E083-638A-1905-A8424C2B0C3E}"/>
+                  </a:ext>
+                </a:extLst>
+              </p:cNvPr>
+              <p:cNvSpPr txBox="1"/>
+              <p:nvPr/>
+            </p:nvSpPr>
+            <p:spPr>
+              <a:xfrm>
+                <a:off x="6942667" y="4577643"/>
+                <a:ext cx="1741823" cy="1782091"/>
+              </a:xfrm>
+              <a:prstGeom prst="rect">
+                <a:avLst/>
+              </a:prstGeom>
+              <a:noFill/>
+            </p:spPr>
+            <p:txBody>
+              <a:bodyPr wrap="none" rtlCol="0">
+                <a:spAutoFit/>
+              </a:bodyPr>
+              <a:lstStyle/>
+              <a:p>
+                <a:r>
+                  <a:rPr lang="en-US" dirty="0"/>
+                  <a:t>P=378.29Pa</a:t>
+                </a:r>
+              </a:p>
+              <a:p>
+                <a:pPr/>
+                <a14:m>
+                  <m:oMathPara xmlns:m="http://schemas.openxmlformats.org/officeDocument/2006/math">
+                    <m:oMathParaPr>
+                      <m:jc m:val="left"/>
+                    </m:oMathParaPr>
+                    <m:oMath xmlns:m="http://schemas.openxmlformats.org/officeDocument/2006/math">
+                      <m:sSub>
+                        <m:sSubPr>
+                          <m:ctrlPr>
+                            <a:rPr lang="en-US" i="1" smtClean="0">
+                              <a:latin typeface="Cambria Math" panose="02040503050406030204" pitchFamily="18" charset="0"/>
+                            </a:rPr>
+                          </m:ctrlPr>
+                        </m:sSubPr>
+                        <m:e>
+                          <m:r>
+                            <a:rPr lang="en-US" b="0" i="1" smtClean="0">
+                              <a:latin typeface="Cambria Math" panose="02040503050406030204" pitchFamily="18" charset="0"/>
+                            </a:rPr>
+                            <m:t>𝑉</m:t>
+                          </m:r>
+                        </m:e>
+                        <m:sub>
+                          <m:r>
+                            <a:rPr lang="en-US" b="0" i="1" smtClean="0">
+                              <a:latin typeface="Cambria Math" panose="02040503050406030204" pitchFamily="18" charset="0"/>
+                            </a:rPr>
+                            <m:t>𝑖</m:t>
+                          </m:r>
+                        </m:sub>
+                      </m:sSub>
+                      <m:r>
+                        <a:rPr lang="en-US" b="0" i="1" smtClean="0">
+                          <a:latin typeface="Cambria Math" panose="02040503050406030204" pitchFamily="18" charset="0"/>
+                        </a:rPr>
+                        <m:t>=6</m:t>
+                      </m:r>
+                      <m:sSup>
+                        <m:sSupPr>
+                          <m:ctrlPr>
+                            <a:rPr lang="en-US" b="0" i="1" smtClean="0">
+                              <a:latin typeface="Cambria Math" panose="02040503050406030204" pitchFamily="18" charset="0"/>
+                            </a:rPr>
+                          </m:ctrlPr>
+                        </m:sSupPr>
+                        <m:e>
+                          <m:r>
+                            <a:rPr lang="en-US" b="0" i="1" smtClean="0">
+                              <a:latin typeface="Cambria Math" panose="02040503050406030204" pitchFamily="18" charset="0"/>
+                            </a:rPr>
+                            <m:t>𝑚</m:t>
+                          </m:r>
+                        </m:e>
+                        <m:sup>
+                          <m:r>
+                            <a:rPr lang="en-US" b="0" i="1" smtClean="0">
+                              <a:latin typeface="Cambria Math" panose="02040503050406030204" pitchFamily="18" charset="0"/>
+                            </a:rPr>
+                            <m:t>3</m:t>
+                          </m:r>
+                        </m:sup>
+                      </m:sSup>
+                    </m:oMath>
+                  </m:oMathPara>
+                </a14:m>
+                <a:endParaRPr lang="en-US" b="0" i="1" dirty="0">
+                  <a:latin typeface="Cambria Math" panose="02040503050406030204" pitchFamily="18" charset="0"/>
+                </a:endParaRPr>
+              </a:p>
+              <a:p>
+                <a:pPr/>
+                <a14:m>
+                  <m:oMathPara xmlns:m="http://schemas.openxmlformats.org/officeDocument/2006/math">
+                    <m:oMathParaPr>
+                      <m:jc m:val="left"/>
+                    </m:oMathParaPr>
+                    <m:oMath xmlns:m="http://schemas.openxmlformats.org/officeDocument/2006/math">
+                      <m:sSub>
+                        <m:sSubPr>
+                          <m:ctrlPr>
+                            <a:rPr lang="en-US" i="1">
+                              <a:latin typeface="Cambria Math" panose="02040503050406030204" pitchFamily="18" charset="0"/>
+                            </a:rPr>
+                          </m:ctrlPr>
+                        </m:sSubPr>
+                        <m:e>
+                          <m:r>
+                            <a:rPr lang="en-US" i="1">
+                              <a:latin typeface="Cambria Math" panose="02040503050406030204" pitchFamily="18" charset="0"/>
+                            </a:rPr>
+                            <m:t>𝑉</m:t>
+                          </m:r>
+                        </m:e>
+                        <m:sub>
+                          <m:r>
+                            <a:rPr lang="en-US" b="0" i="1" smtClean="0">
+                              <a:latin typeface="Cambria Math" panose="02040503050406030204" pitchFamily="18" charset="0"/>
+                            </a:rPr>
+                            <m:t>𝑓</m:t>
+                          </m:r>
+                        </m:sub>
+                      </m:sSub>
+                      <m:r>
+                        <a:rPr lang="en-US" i="1">
+                          <a:latin typeface="Cambria Math" panose="02040503050406030204" pitchFamily="18" charset="0"/>
+                        </a:rPr>
+                        <m:t>=</m:t>
+                      </m:r>
+                      <m:r>
+                        <a:rPr lang="en-US" b="0" i="1" smtClean="0">
+                          <a:latin typeface="Cambria Math" panose="02040503050406030204" pitchFamily="18" charset="0"/>
+                        </a:rPr>
+                        <m:t>7.5384</m:t>
+                      </m:r>
+                      <m:sSup>
+                        <m:sSupPr>
+                          <m:ctrlPr>
+                            <a:rPr lang="en-US" i="1">
+                              <a:latin typeface="Cambria Math" panose="02040503050406030204" pitchFamily="18" charset="0"/>
+                            </a:rPr>
+                          </m:ctrlPr>
+                        </m:sSupPr>
+                        <m:e>
+                          <m:r>
+                            <a:rPr lang="en-US" i="1">
+                              <a:latin typeface="Cambria Math" panose="02040503050406030204" pitchFamily="18" charset="0"/>
+                            </a:rPr>
+                            <m:t>𝑚</m:t>
+                          </m:r>
+                        </m:e>
+                        <m:sup>
+                          <m:r>
+                            <a:rPr lang="en-US" i="1">
+                              <a:latin typeface="Cambria Math" panose="02040503050406030204" pitchFamily="18" charset="0"/>
+                            </a:rPr>
+                            <m:t>3</m:t>
+                          </m:r>
+                        </m:sup>
+                      </m:sSup>
+                    </m:oMath>
+                  </m:oMathPara>
+                </a14:m>
+                <a:endParaRPr lang="en-US" dirty="0"/>
+              </a:p>
+              <a:p>
+                <a:r>
+                  <a:rPr lang="en-US" dirty="0"/>
+                  <a:t>T=343K</a:t>
+                </a:r>
+              </a:p>
+              <a:p>
+                <a:endParaRPr lang="en-US" dirty="0"/>
+              </a:p>
+              <a:p>
+                <a:endParaRPr lang="en-US" dirty="0"/>
+              </a:p>
+            </p:txBody>
+          </p:sp>
+        </mc:Choice>
+        <mc:Fallback xmlns="">
+          <p:sp>
+            <p:nvSpPr>
+              <p:cNvPr id="4" name="TextBox 3">
+                <a:extLst>
+                  <a:ext uri="{FF2B5EF4-FFF2-40B4-BE49-F238E27FC236}">
+                    <a16:creationId xmlns:a16="http://schemas.microsoft.com/office/drawing/2014/main" id="{6D22323D-E083-638A-1905-A8424C2B0C3E}"/>
+                  </a:ext>
+                </a:extLst>
+              </p:cNvPr>
+              <p:cNvSpPr txBox="1">
+                <a:spLocks noRot="1" noChangeAspect="1" noMove="1" noResize="1" noEditPoints="1" noAdjustHandles="1" noChangeArrowheads="1" noChangeShapeType="1" noTextEdit="1"/>
+              </p:cNvSpPr>
+              <p:nvPr/>
+            </p:nvSpPr>
+            <p:spPr>
+              <a:xfrm>
+                <a:off x="6942667" y="4577643"/>
+                <a:ext cx="1741823" cy="1782091"/>
+              </a:xfrm>
+              <a:prstGeom prst="rect">
+                <a:avLst/>
+              </a:prstGeom>
+              <a:blipFill>
+                <a:blip r:embed="rId3"/>
+                <a:stretch>
+                  <a:fillRect l="-3147" t="-1712"/>
+                </a:stretch>
+              </a:blipFill>
+            </p:spPr>
+            <p:txBody>
+              <a:bodyPr/>
+              <a:lstStyle/>
+              <a:p>
+                <a:r>
+                  <a:rPr lang="en-US">
+                    <a:noFill/>
+                  </a:rPr>
+                  <a:t> </a:t>
+                </a:r>
+              </a:p>
+            </p:txBody>
+          </p:sp>
+        </mc:Fallback>
+      </mc:AlternateContent>
     </p:spTree>
   </p:cSld>
   <p:clrMapOvr>
@@ -4030,1035 +4397,6 @@
           <a:chExt cx="0" cy="0"/>
         </a:xfrm>
       </p:grpSpPr>
-      <p:pic>
-        <p:nvPicPr>
-          <p:cNvPr id="1030" name="Picture 6"/>
-          <p:cNvPicPr>
-            <a:picLocks noChangeAspect="1" noChangeArrowheads="1"/>
-          </p:cNvPicPr>
-          <p:nvPr/>
-        </p:nvPicPr>
-        <p:blipFill>
-          <a:blip r:embed="rId2" cstate="print"/>
-          <a:srcRect/>
-          <a:stretch>
-            <a:fillRect/>
-          </a:stretch>
-        </p:blipFill>
-        <p:spPr bwMode="auto">
-          <a:xfrm>
-            <a:off x="7162801" y="1828800"/>
-            <a:ext cx="1869243" cy="1822450"/>
-          </a:xfrm>
-          <a:prstGeom prst="rect">
-            <a:avLst/>
-          </a:prstGeom>
-          <a:noFill/>
-          <a:ln w="9525">
-            <a:noFill/>
-            <a:miter lim="800000"/>
-            <a:headEnd/>
-            <a:tailEnd/>
-          </a:ln>
-          <a:effectLst/>
-        </p:spPr>
-      </p:pic>
-      <p:sp>
-        <p:nvSpPr>
-          <p:cNvPr id="2" name="Title 1"/>
-          <p:cNvSpPr>
-            <a:spLocks noGrp="1"/>
-          </p:cNvSpPr>
-          <p:nvPr>
-            <p:ph type="title"/>
-          </p:nvPr>
-        </p:nvSpPr>
-        <p:spPr/>
-        <p:txBody>
-          <a:bodyPr/>
-          <a:lstStyle/>
-          <a:p>
-            <a:endParaRPr lang="en-US" dirty="0"/>
-          </a:p>
-        </p:txBody>
-      </p:sp>
-      <p:sp>
-        <p:nvSpPr>
-          <p:cNvPr id="4" name="Rectangle 2"/>
-          <p:cNvSpPr>
-            <a:spLocks noChangeArrowheads="1"/>
-          </p:cNvSpPr>
-          <p:nvPr/>
-        </p:nvSpPr>
-        <p:spPr bwMode="auto">
-          <a:xfrm>
-            <a:off x="2743201" y="3519488"/>
-            <a:ext cx="2511425" cy="1871663"/>
-          </a:xfrm>
-          <a:prstGeom prst="rect">
-            <a:avLst/>
-          </a:prstGeom>
-          <a:gradFill rotWithShape="1">
-            <a:gsLst>
-              <a:gs pos="0">
-                <a:schemeClr val="bg1"/>
-              </a:gs>
-              <a:gs pos="100000">
-                <a:schemeClr val="accent1"/>
-              </a:gs>
-            </a:gsLst>
-            <a:path path="shape">
-              <a:fillToRect l="50000" t="50000" r="50000" b="50000"/>
-            </a:path>
-          </a:gradFill>
-          <a:ln w="9525" algn="ctr">
-            <a:solidFill>
-              <a:schemeClr val="tx1"/>
-            </a:solidFill>
-            <a:miter lim="800000"/>
-            <a:headEnd/>
-            <a:tailEnd/>
-          </a:ln>
-        </p:spPr>
-        <p:txBody>
-          <a:bodyPr wrap="none" anchor="ctr"/>
-          <a:lstStyle/>
-          <a:p>
-            <a:pPr algn="ctr"/>
-            <a:r>
-              <a:rPr lang="en-US"/>
-              <a:t>Gas at T</a:t>
-            </a:r>
-            <a:r>
-              <a:rPr lang="en-US" baseline="-25000"/>
-              <a:t>i</a:t>
-            </a:r>
-          </a:p>
-        </p:txBody>
-      </p:sp>
-      <p:sp>
-        <p:nvSpPr>
-          <p:cNvPr id="5" name="Rectangle 5"/>
-          <p:cNvSpPr>
-            <a:spLocks noChangeArrowheads="1"/>
-          </p:cNvSpPr>
-          <p:nvPr/>
-        </p:nvSpPr>
-        <p:spPr bwMode="auto">
-          <a:xfrm>
-            <a:off x="2743201" y="1676401"/>
-            <a:ext cx="2511425" cy="3730625"/>
-          </a:xfrm>
-          <a:prstGeom prst="rect">
-            <a:avLst/>
-          </a:prstGeom>
-          <a:noFill/>
-          <a:ln w="53975" algn="ctr">
-            <a:solidFill>
-              <a:srgbClr val="FF9900"/>
-            </a:solidFill>
-            <a:miter lim="800000"/>
-            <a:headEnd/>
-            <a:tailEnd/>
-          </a:ln>
-        </p:spPr>
-        <p:txBody>
-          <a:bodyPr wrap="none" anchor="ctr"/>
-          <a:lstStyle/>
-          <a:p>
-            <a:endParaRPr lang="en-US"/>
-          </a:p>
-        </p:txBody>
-      </p:sp>
-      <p:sp>
-        <p:nvSpPr>
-          <p:cNvPr id="6" name="Line 6"/>
-          <p:cNvSpPr>
-            <a:spLocks noChangeShapeType="1"/>
-          </p:cNvSpPr>
-          <p:nvPr/>
-        </p:nvSpPr>
-        <p:spPr bwMode="auto">
-          <a:xfrm>
-            <a:off x="2728913" y="3533775"/>
-            <a:ext cx="2525713" cy="0"/>
-          </a:xfrm>
-          <a:prstGeom prst="line">
-            <a:avLst/>
-          </a:prstGeom>
-          <a:noFill/>
-          <a:ln w="9525">
-            <a:solidFill>
-              <a:srgbClr val="FF0000"/>
-            </a:solidFill>
-            <a:round/>
-            <a:headEnd/>
-            <a:tailEnd/>
-          </a:ln>
-        </p:spPr>
-        <p:txBody>
-          <a:bodyPr wrap="none" anchor="ctr"/>
-          <a:lstStyle/>
-          <a:p>
-            <a:endParaRPr lang="en-US"/>
-          </a:p>
-        </p:txBody>
-      </p:sp>
-      <p:sp>
-        <p:nvSpPr>
-          <p:cNvPr id="7" name="Text Box 7"/>
-          <p:cNvSpPr txBox="1">
-            <a:spLocks noChangeArrowheads="1"/>
-          </p:cNvSpPr>
-          <p:nvPr/>
-        </p:nvSpPr>
-        <p:spPr bwMode="auto">
-          <a:xfrm>
-            <a:off x="3438525" y="2147888"/>
-            <a:ext cx="1136650" cy="366713"/>
-          </a:xfrm>
-          <a:prstGeom prst="rect">
-            <a:avLst/>
-          </a:prstGeom>
-          <a:noFill/>
-          <a:ln w="9525" algn="ctr">
-            <a:noFill/>
-            <a:miter lim="800000"/>
-            <a:headEnd/>
-            <a:tailEnd/>
-          </a:ln>
-        </p:spPr>
-        <p:txBody>
-          <a:bodyPr>
-            <a:spAutoFit/>
-          </a:bodyPr>
-          <a:lstStyle/>
-          <a:p>
-            <a:pPr algn="ctr"/>
-            <a:r>
-              <a:rPr lang="en-US"/>
-              <a:t>Vacuum</a:t>
-            </a:r>
-          </a:p>
-        </p:txBody>
-      </p:sp>
-      <p:sp>
-        <p:nvSpPr>
-          <p:cNvPr id="8" name="Text Box 8"/>
-          <p:cNvSpPr txBox="1">
-            <a:spLocks noChangeArrowheads="1"/>
-          </p:cNvSpPr>
-          <p:nvPr/>
-        </p:nvSpPr>
-        <p:spPr bwMode="auto">
-          <a:xfrm>
-            <a:off x="2619376" y="2954338"/>
-            <a:ext cx="1920875" cy="366713"/>
-          </a:xfrm>
-          <a:prstGeom prst="rect">
-            <a:avLst/>
-          </a:prstGeom>
-          <a:noFill/>
-          <a:ln w="9525" algn="ctr">
-            <a:noFill/>
-            <a:miter lim="800000"/>
-            <a:headEnd/>
-            <a:tailEnd/>
-          </a:ln>
-        </p:spPr>
-        <p:txBody>
-          <a:bodyPr>
-            <a:spAutoFit/>
-          </a:bodyPr>
-          <a:lstStyle/>
-          <a:p>
-            <a:pPr algn="ctr"/>
-            <a:r>
-              <a:rPr lang="en-US"/>
-              <a:t>Membrane</a:t>
-            </a:r>
-          </a:p>
-        </p:txBody>
-      </p:sp>
-      <p:sp>
-        <p:nvSpPr>
-          <p:cNvPr id="9" name="Line 9"/>
-          <p:cNvSpPr>
-            <a:spLocks noChangeShapeType="1"/>
-          </p:cNvSpPr>
-          <p:nvPr/>
-        </p:nvSpPr>
-        <p:spPr bwMode="auto">
-          <a:xfrm flipH="1">
-            <a:off x="3367087" y="3243263"/>
-            <a:ext cx="115888" cy="276225"/>
-          </a:xfrm>
-          <a:prstGeom prst="line">
-            <a:avLst/>
-          </a:prstGeom>
-          <a:noFill/>
-          <a:ln w="9525">
-            <a:solidFill>
-              <a:schemeClr val="tx1"/>
-            </a:solidFill>
-            <a:round/>
-            <a:headEnd/>
-            <a:tailEnd type="triangle" w="med" len="med"/>
-          </a:ln>
-        </p:spPr>
-        <p:txBody>
-          <a:bodyPr wrap="none" anchor="ctr"/>
-          <a:lstStyle/>
-          <a:p>
-            <a:endParaRPr lang="en-US"/>
-          </a:p>
-        </p:txBody>
-      </p:sp>
-      <p:sp>
-        <p:nvSpPr>
-          <p:cNvPr id="11" name="Rectangle 5"/>
-          <p:cNvSpPr>
-            <a:spLocks noChangeArrowheads="1"/>
-          </p:cNvSpPr>
-          <p:nvPr/>
-        </p:nvSpPr>
-        <p:spPr bwMode="auto">
-          <a:xfrm>
-            <a:off x="6629401" y="1676401"/>
-            <a:ext cx="2511425" cy="3730625"/>
-          </a:xfrm>
-          <a:prstGeom prst="rect">
-            <a:avLst/>
-          </a:prstGeom>
-          <a:noFill/>
-          <a:ln w="53975" algn="ctr">
-            <a:solidFill>
-              <a:srgbClr val="FF9900"/>
-            </a:solidFill>
-            <a:miter lim="800000"/>
-            <a:headEnd/>
-            <a:tailEnd/>
-          </a:ln>
-        </p:spPr>
-        <p:txBody>
-          <a:bodyPr wrap="none" anchor="ctr"/>
-          <a:lstStyle/>
-          <a:p>
-            <a:endParaRPr lang="en-US"/>
-          </a:p>
-        </p:txBody>
-      </p:sp>
-      <p:sp>
-        <p:nvSpPr>
-          <p:cNvPr id="12" name="Line 6"/>
-          <p:cNvSpPr>
-            <a:spLocks noChangeShapeType="1"/>
-          </p:cNvSpPr>
-          <p:nvPr/>
-        </p:nvSpPr>
-        <p:spPr bwMode="auto">
-          <a:xfrm>
-            <a:off x="6615113" y="3533775"/>
-            <a:ext cx="2525713" cy="0"/>
-          </a:xfrm>
-          <a:prstGeom prst="line">
-            <a:avLst/>
-          </a:prstGeom>
-          <a:noFill/>
-          <a:ln w="9525">
-            <a:solidFill>
-              <a:srgbClr val="FF0000"/>
-            </a:solidFill>
-            <a:round/>
-            <a:headEnd/>
-            <a:tailEnd/>
-          </a:ln>
-        </p:spPr>
-        <p:txBody>
-          <a:bodyPr wrap="none" anchor="ctr"/>
-          <a:lstStyle/>
-          <a:p>
-            <a:endParaRPr lang="en-US"/>
-          </a:p>
-        </p:txBody>
-      </p:sp>
-      <p:sp>
-        <p:nvSpPr>
-          <p:cNvPr id="14" name="Text Box 8"/>
-          <p:cNvSpPr txBox="1">
-            <a:spLocks noChangeArrowheads="1"/>
-          </p:cNvSpPr>
-          <p:nvPr/>
-        </p:nvSpPr>
-        <p:spPr bwMode="auto">
-          <a:xfrm>
-            <a:off x="6505576" y="2954338"/>
-            <a:ext cx="1920875" cy="366713"/>
-          </a:xfrm>
-          <a:prstGeom prst="rect">
-            <a:avLst/>
-          </a:prstGeom>
-          <a:noFill/>
-          <a:ln w="9525" algn="ctr">
-            <a:noFill/>
-            <a:miter lim="800000"/>
-            <a:headEnd/>
-            <a:tailEnd/>
-          </a:ln>
-        </p:spPr>
-        <p:txBody>
-          <a:bodyPr>
-            <a:spAutoFit/>
-          </a:bodyPr>
-          <a:lstStyle/>
-          <a:p>
-            <a:pPr algn="ctr"/>
-            <a:r>
-              <a:rPr lang="en-US"/>
-              <a:t>Membrane</a:t>
-            </a:r>
-          </a:p>
-        </p:txBody>
-      </p:sp>
-      <p:sp>
-        <p:nvSpPr>
-          <p:cNvPr id="15" name="Line 9"/>
-          <p:cNvSpPr>
-            <a:spLocks noChangeShapeType="1"/>
-          </p:cNvSpPr>
-          <p:nvPr/>
-        </p:nvSpPr>
-        <p:spPr bwMode="auto">
-          <a:xfrm flipH="1">
-            <a:off x="7253287" y="3243263"/>
-            <a:ext cx="115888" cy="276225"/>
-          </a:xfrm>
-          <a:prstGeom prst="line">
-            <a:avLst/>
-          </a:prstGeom>
-          <a:noFill/>
-          <a:ln w="9525">
-            <a:solidFill>
-              <a:schemeClr val="tx1"/>
-            </a:solidFill>
-            <a:round/>
-            <a:headEnd/>
-            <a:tailEnd type="triangle" w="med" len="med"/>
-          </a:ln>
-        </p:spPr>
-        <p:txBody>
-          <a:bodyPr wrap="none" anchor="ctr"/>
-          <a:lstStyle/>
-          <a:p>
-            <a:endParaRPr lang="en-US"/>
-          </a:p>
-        </p:txBody>
-      </p:sp>
-      <p:sp>
-        <p:nvSpPr>
-          <p:cNvPr id="10" name="Rectangle 2"/>
-          <p:cNvSpPr>
-            <a:spLocks noChangeArrowheads="1"/>
-          </p:cNvSpPr>
-          <p:nvPr/>
-        </p:nvSpPr>
-        <p:spPr bwMode="auto">
-          <a:xfrm>
-            <a:off x="6629401" y="3519488"/>
-            <a:ext cx="2511425" cy="1871663"/>
-          </a:xfrm>
-          <a:prstGeom prst="rect">
-            <a:avLst/>
-          </a:prstGeom>
-          <a:gradFill rotWithShape="1">
-            <a:gsLst>
-              <a:gs pos="0">
-                <a:schemeClr val="bg1"/>
-              </a:gs>
-              <a:gs pos="100000">
-                <a:schemeClr val="accent1"/>
-              </a:gs>
-            </a:gsLst>
-            <a:path path="shape">
-              <a:fillToRect l="50000" t="50000" r="50000" b="50000"/>
-            </a:path>
-          </a:gradFill>
-          <a:ln w="9525" algn="ctr">
-            <a:solidFill>
-              <a:schemeClr val="tx1"/>
-            </a:solidFill>
-            <a:miter lim="800000"/>
-            <a:headEnd/>
-            <a:tailEnd/>
-          </a:ln>
-        </p:spPr>
-        <p:txBody>
-          <a:bodyPr wrap="none" anchor="ctr"/>
-          <a:lstStyle/>
-          <a:p>
-            <a:pPr algn="ctr"/>
-            <a:r>
-              <a:rPr lang="en-US"/>
-              <a:t>Gas at T</a:t>
-            </a:r>
-            <a:r>
-              <a:rPr lang="en-US" baseline="-25000"/>
-              <a:t>i</a:t>
-            </a:r>
-          </a:p>
-        </p:txBody>
-      </p:sp>
-      <p:sp>
-        <p:nvSpPr>
-          <p:cNvPr id="16" name="Rectangle 15"/>
-          <p:cNvSpPr/>
-          <p:nvPr/>
-        </p:nvSpPr>
-        <p:spPr>
-          <a:xfrm>
-            <a:off x="8382000" y="3505200"/>
-            <a:ext cx="152400" cy="76200"/>
-          </a:xfrm>
-          <a:prstGeom prst="rect">
-            <a:avLst/>
-          </a:prstGeom>
-          <a:solidFill>
-            <a:schemeClr val="accent1"/>
-          </a:solidFill>
-          <a:ln>
-            <a:noFill/>
-          </a:ln>
-        </p:spPr>
-        <p:style>
-          <a:lnRef idx="2">
-            <a:schemeClr val="accent1">
-              <a:shade val="50000"/>
-            </a:schemeClr>
-          </a:lnRef>
-          <a:fillRef idx="1">
-            <a:schemeClr val="accent1"/>
-          </a:fillRef>
-          <a:effectRef idx="0">
-            <a:schemeClr val="accent1"/>
-          </a:effectRef>
-          <a:fontRef idx="minor">
-            <a:schemeClr val="lt1"/>
-          </a:fontRef>
-        </p:style>
-        <p:txBody>
-          <a:bodyPr rtlCol="0" anchor="ctr"/>
-          <a:lstStyle/>
-          <a:p>
-            <a:pPr algn="ctr"/>
-            <a:endParaRPr lang="en-US"/>
-          </a:p>
-        </p:txBody>
-      </p:sp>
-    </p:spTree>
-  </p:cSld>
-  <p:clrMapOvr>
-    <a:masterClrMapping/>
-  </p:clrMapOvr>
-</p:sld>
-</file>
-
-<file path=ppt/slides/slide13.xml><?xml version="1.0" encoding="utf-8"?>
-<p:sld xmlns:a="http://schemas.openxmlformats.org/drawingml/2006/main" xmlns:r="http://schemas.openxmlformats.org/officeDocument/2006/relationships" xmlns:p="http://schemas.openxmlformats.org/presentationml/2006/main">
-  <p:cSld>
-    <p:spTree>
-      <p:nvGrpSpPr>
-        <p:cNvPr id="1" name=""/>
-        <p:cNvGrpSpPr/>
-        <p:nvPr/>
-      </p:nvGrpSpPr>
-      <p:grpSpPr>
-        <a:xfrm>
-          <a:off x="0" y="0"/>
-          <a:ext cx="0" cy="0"/>
-          <a:chOff x="0" y="0"/>
-          <a:chExt cx="0" cy="0"/>
-        </a:xfrm>
-      </p:grpSpPr>
-      <p:sp>
-        <p:nvSpPr>
-          <p:cNvPr id="2" name="Title 1"/>
-          <p:cNvSpPr>
-            <a:spLocks noGrp="1"/>
-          </p:cNvSpPr>
-          <p:nvPr>
-            <p:ph type="title"/>
-          </p:nvPr>
-        </p:nvSpPr>
-        <p:spPr/>
-        <p:txBody>
-          <a:bodyPr/>
-          <a:lstStyle/>
-          <a:p>
-            <a:endParaRPr lang="en-US"/>
-          </a:p>
-        </p:txBody>
-      </p:sp>
-      <p:sp>
-        <p:nvSpPr>
-          <p:cNvPr id="3" name="Content Placeholder 2"/>
-          <p:cNvSpPr>
-            <a:spLocks noGrp="1"/>
-          </p:cNvSpPr>
-          <p:nvPr>
-            <p:ph idx="1"/>
-          </p:nvPr>
-        </p:nvSpPr>
-        <p:spPr/>
-        <p:txBody>
-          <a:bodyPr/>
-          <a:lstStyle/>
-          <a:p>
-            <a:endParaRPr lang="en-US"/>
-          </a:p>
-        </p:txBody>
-      </p:sp>
-      <p:pic>
-        <p:nvPicPr>
-          <p:cNvPr id="6146" name="Picture 2"/>
-          <p:cNvPicPr>
-            <a:picLocks noChangeAspect="1" noChangeArrowheads="1"/>
-          </p:cNvPicPr>
-          <p:nvPr/>
-        </p:nvPicPr>
-        <p:blipFill>
-          <a:blip r:embed="rId2" cstate="print"/>
-          <a:srcRect/>
-          <a:stretch>
-            <a:fillRect/>
-          </a:stretch>
-        </p:blipFill>
-        <p:spPr bwMode="auto">
-          <a:xfrm>
-            <a:off x="2971800" y="533401"/>
-            <a:ext cx="5181600" cy="5252339"/>
-          </a:xfrm>
-          <a:prstGeom prst="rect">
-            <a:avLst/>
-          </a:prstGeom>
-          <a:noFill/>
-          <a:ln w="9525">
-            <a:noFill/>
-            <a:miter lim="800000"/>
-            <a:headEnd/>
-            <a:tailEnd/>
-          </a:ln>
-          <a:effectLst/>
-        </p:spPr>
-      </p:pic>
-    </p:spTree>
-  </p:cSld>
-  <p:clrMapOvr>
-    <a:masterClrMapping/>
-  </p:clrMapOvr>
-</p:sld>
-</file>
-
-<file path=ppt/slides/slide14.xml><?xml version="1.0" encoding="utf-8"?>
-<p:sld xmlns:a="http://schemas.openxmlformats.org/drawingml/2006/main" xmlns:r="http://schemas.openxmlformats.org/officeDocument/2006/relationships" xmlns:p="http://schemas.openxmlformats.org/presentationml/2006/main">
-  <p:cSld>
-    <p:spTree>
-      <p:nvGrpSpPr>
-        <p:cNvPr id="1" name=""/>
-        <p:cNvGrpSpPr/>
-        <p:nvPr/>
-      </p:nvGrpSpPr>
-      <p:grpSpPr>
-        <a:xfrm>
-          <a:off x="0" y="0"/>
-          <a:ext cx="0" cy="0"/>
-          <a:chOff x="0" y="0"/>
-          <a:chExt cx="0" cy="0"/>
-        </a:xfrm>
-      </p:grpSpPr>
-      <p:sp>
-        <p:nvSpPr>
-          <p:cNvPr id="183298" name="Slide Number Placeholder 5"/>
-          <p:cNvSpPr>
-            <a:spLocks noGrp="1"/>
-          </p:cNvSpPr>
-          <p:nvPr>
-            <p:ph type="sldNum" sz="quarter" idx="12"/>
-          </p:nvPr>
-        </p:nvSpPr>
-        <p:spPr>
-          <a:noFill/>
-        </p:spPr>
-        <p:txBody>
-          <a:bodyPr/>
-          <a:lstStyle/>
-          <a:p>
-            <a:fld id="{C2812B8D-E844-4807-B20D-B92C141DEBC2}" type="slidenum">
-              <a:rPr lang="en-US" smtClean="0"/>
-              <a:pPr/>
-              <a:t>14</a:t>
-            </a:fld>
-            <a:endParaRPr lang="en-US"/>
-          </a:p>
-        </p:txBody>
-      </p:sp>
-      <p:sp>
-        <p:nvSpPr>
-          <p:cNvPr id="183299" name="Rectangle 2"/>
-          <p:cNvSpPr>
-            <a:spLocks noChangeArrowheads="1"/>
-          </p:cNvSpPr>
-          <p:nvPr/>
-        </p:nvSpPr>
-        <p:spPr bwMode="auto">
-          <a:xfrm>
-            <a:off x="7402514" y="3657601"/>
-            <a:ext cx="2511425" cy="1871663"/>
-          </a:xfrm>
-          <a:prstGeom prst="rect">
-            <a:avLst/>
-          </a:prstGeom>
-          <a:gradFill rotWithShape="1">
-            <a:gsLst>
-              <a:gs pos="0">
-                <a:schemeClr val="bg1"/>
-              </a:gs>
-              <a:gs pos="100000">
-                <a:schemeClr val="accent1"/>
-              </a:gs>
-            </a:gsLst>
-            <a:path path="shape">
-              <a:fillToRect l="50000" t="50000" r="50000" b="50000"/>
-            </a:path>
-          </a:gradFill>
-          <a:ln w="9525" algn="ctr">
-            <a:solidFill>
-              <a:schemeClr val="tx1"/>
-            </a:solidFill>
-            <a:miter lim="800000"/>
-            <a:headEnd/>
-            <a:tailEnd/>
-          </a:ln>
-        </p:spPr>
-        <p:txBody>
-          <a:bodyPr wrap="none" anchor="ctr"/>
-          <a:lstStyle/>
-          <a:p>
-            <a:pPr algn="ctr"/>
-            <a:r>
-              <a:rPr lang="en-US"/>
-              <a:t>Gas at T</a:t>
-            </a:r>
-            <a:r>
-              <a:rPr lang="en-US" baseline="-25000"/>
-              <a:t>i</a:t>
-            </a:r>
-          </a:p>
-        </p:txBody>
-      </p:sp>
-      <p:sp>
-        <p:nvSpPr>
-          <p:cNvPr id="183300" name="Rectangle 3"/>
-          <p:cNvSpPr>
-            <a:spLocks noGrp="1" noChangeArrowheads="1"/>
-          </p:cNvSpPr>
-          <p:nvPr>
-            <p:ph type="title"/>
-          </p:nvPr>
-        </p:nvSpPr>
-        <p:spPr/>
-        <p:txBody>
-          <a:bodyPr/>
-          <a:lstStyle/>
-          <a:p>
-            <a:pPr eaLnBrk="1" hangingPunct="1"/>
-            <a:r>
-              <a:rPr lang="en-US"/>
-              <a:t>Question 123.10.7</a:t>
-            </a:r>
-            <a:endParaRPr lang="en-US" dirty="0"/>
-          </a:p>
-        </p:txBody>
-      </p:sp>
-      <p:sp>
-        <p:nvSpPr>
-          <p:cNvPr id="183301" name="Rectangle 4"/>
-          <p:cNvSpPr>
-            <a:spLocks noGrp="1" noChangeArrowheads="1"/>
-          </p:cNvSpPr>
-          <p:nvPr>
-            <p:ph type="body" idx="1"/>
-          </p:nvPr>
-        </p:nvSpPr>
-        <p:spPr>
-          <a:xfrm>
-            <a:off x="1981201" y="1600201"/>
-            <a:ext cx="3978275" cy="4525963"/>
-          </a:xfrm>
-        </p:spPr>
-        <p:txBody>
-          <a:bodyPr/>
-          <a:lstStyle/>
-          <a:p>
-            <a:pPr marL="609600" indent="-609600">
-              <a:lnSpc>
-                <a:spcPct val="80000"/>
-              </a:lnSpc>
-              <a:buNone/>
-            </a:pPr>
-            <a:r>
-              <a:rPr lang="en-US"/>
-              <a:t>The initial state of a system is shown, if the membrane is broken, the gas fills the entire container. Is there work done by the gas in filling the container?</a:t>
-            </a:r>
-          </a:p>
-          <a:p>
-            <a:pPr marL="609600" indent="-609600">
-              <a:lnSpc>
-                <a:spcPct val="80000"/>
-              </a:lnSpc>
-              <a:buFontTx/>
-              <a:buAutoNum type="alphaLcParenR"/>
-            </a:pPr>
-            <a:r>
-              <a:rPr lang="en-US"/>
-              <a:t>Yes</a:t>
-            </a:r>
-          </a:p>
-          <a:p>
-            <a:pPr marL="609600" indent="-609600">
-              <a:lnSpc>
-                <a:spcPct val="80000"/>
-              </a:lnSpc>
-              <a:buFontTx/>
-              <a:buAutoNum type="alphaLcParenR"/>
-            </a:pPr>
-            <a:r>
-              <a:rPr lang="en-US"/>
-              <a:t>No</a:t>
-            </a:r>
-          </a:p>
-          <a:p>
-            <a:pPr marL="609600" indent="-609600">
-              <a:lnSpc>
-                <a:spcPct val="80000"/>
-              </a:lnSpc>
-              <a:buFontTx/>
-              <a:buAutoNum type="alphaLcParenR"/>
-            </a:pPr>
-            <a:r>
-              <a:rPr lang="en-US"/>
-              <a:t>Can’t Tell</a:t>
-            </a:r>
-          </a:p>
-        </p:txBody>
-      </p:sp>
-      <p:sp>
-        <p:nvSpPr>
-          <p:cNvPr id="183302" name="Rectangle 5"/>
-          <p:cNvSpPr>
-            <a:spLocks noChangeArrowheads="1"/>
-          </p:cNvSpPr>
-          <p:nvPr/>
-        </p:nvSpPr>
-        <p:spPr bwMode="auto">
-          <a:xfrm>
-            <a:off x="7402514" y="1814514"/>
-            <a:ext cx="2511425" cy="3730625"/>
-          </a:xfrm>
-          <a:prstGeom prst="rect">
-            <a:avLst/>
-          </a:prstGeom>
-          <a:noFill/>
-          <a:ln w="53975" algn="ctr">
-            <a:solidFill>
-              <a:srgbClr val="FF9900"/>
-            </a:solidFill>
-            <a:miter lim="800000"/>
-            <a:headEnd/>
-            <a:tailEnd/>
-          </a:ln>
-        </p:spPr>
-        <p:txBody>
-          <a:bodyPr wrap="none" anchor="ctr"/>
-          <a:lstStyle/>
-          <a:p>
-            <a:endParaRPr lang="en-US"/>
-          </a:p>
-        </p:txBody>
-      </p:sp>
-      <p:sp>
-        <p:nvSpPr>
-          <p:cNvPr id="183303" name="Line 6"/>
-          <p:cNvSpPr>
-            <a:spLocks noChangeShapeType="1"/>
-          </p:cNvSpPr>
-          <p:nvPr/>
-        </p:nvSpPr>
-        <p:spPr bwMode="auto">
-          <a:xfrm>
-            <a:off x="7388226" y="3671888"/>
-            <a:ext cx="2525713" cy="0"/>
-          </a:xfrm>
-          <a:prstGeom prst="line">
-            <a:avLst/>
-          </a:prstGeom>
-          <a:noFill/>
-          <a:ln w="9525">
-            <a:solidFill>
-              <a:srgbClr val="FF0000"/>
-            </a:solidFill>
-            <a:round/>
-            <a:headEnd/>
-            <a:tailEnd/>
-          </a:ln>
-        </p:spPr>
-        <p:txBody>
-          <a:bodyPr wrap="none" anchor="ctr"/>
-          <a:lstStyle/>
-          <a:p>
-            <a:endParaRPr lang="en-US"/>
-          </a:p>
-        </p:txBody>
-      </p:sp>
-      <p:sp>
-        <p:nvSpPr>
-          <p:cNvPr id="183304" name="Text Box 7"/>
-          <p:cNvSpPr txBox="1">
-            <a:spLocks noChangeArrowheads="1"/>
-          </p:cNvSpPr>
-          <p:nvPr/>
-        </p:nvSpPr>
-        <p:spPr bwMode="auto">
-          <a:xfrm>
-            <a:off x="8097838" y="2286001"/>
-            <a:ext cx="1136650" cy="366713"/>
-          </a:xfrm>
-          <a:prstGeom prst="rect">
-            <a:avLst/>
-          </a:prstGeom>
-          <a:noFill/>
-          <a:ln w="9525" algn="ctr">
-            <a:noFill/>
-            <a:miter lim="800000"/>
-            <a:headEnd/>
-            <a:tailEnd/>
-          </a:ln>
-        </p:spPr>
-        <p:txBody>
-          <a:bodyPr>
-            <a:spAutoFit/>
-          </a:bodyPr>
-          <a:lstStyle/>
-          <a:p>
-            <a:pPr algn="ctr"/>
-            <a:r>
-              <a:rPr lang="en-US"/>
-              <a:t>Vacuum</a:t>
-            </a:r>
-          </a:p>
-        </p:txBody>
-      </p:sp>
-      <p:sp>
-        <p:nvSpPr>
-          <p:cNvPr id="183305" name="Text Box 8"/>
-          <p:cNvSpPr txBox="1">
-            <a:spLocks noChangeArrowheads="1"/>
-          </p:cNvSpPr>
-          <p:nvPr/>
-        </p:nvSpPr>
-        <p:spPr bwMode="auto">
-          <a:xfrm>
-            <a:off x="7278689" y="3092451"/>
-            <a:ext cx="1920875" cy="366713"/>
-          </a:xfrm>
-          <a:prstGeom prst="rect">
-            <a:avLst/>
-          </a:prstGeom>
-          <a:noFill/>
-          <a:ln w="9525" algn="ctr">
-            <a:noFill/>
-            <a:miter lim="800000"/>
-            <a:headEnd/>
-            <a:tailEnd/>
-          </a:ln>
-        </p:spPr>
-        <p:txBody>
-          <a:bodyPr>
-            <a:spAutoFit/>
-          </a:bodyPr>
-          <a:lstStyle/>
-          <a:p>
-            <a:pPr algn="ctr"/>
-            <a:r>
-              <a:rPr lang="en-US"/>
-              <a:t>Membrane</a:t>
-            </a:r>
-          </a:p>
-        </p:txBody>
-      </p:sp>
-      <p:sp>
-        <p:nvSpPr>
-          <p:cNvPr id="183306" name="Line 9"/>
-          <p:cNvSpPr>
-            <a:spLocks noChangeShapeType="1"/>
-          </p:cNvSpPr>
-          <p:nvPr/>
-        </p:nvSpPr>
-        <p:spPr bwMode="auto">
-          <a:xfrm flipH="1">
-            <a:off x="8026400" y="3381376"/>
-            <a:ext cx="115888" cy="276225"/>
-          </a:xfrm>
-          <a:prstGeom prst="line">
-            <a:avLst/>
-          </a:prstGeom>
-          <a:noFill/>
-          <a:ln w="9525">
-            <a:solidFill>
-              <a:schemeClr val="tx1"/>
-            </a:solidFill>
-            <a:round/>
-            <a:headEnd/>
-            <a:tailEnd type="triangle" w="med" len="med"/>
-          </a:ln>
-        </p:spPr>
-        <p:txBody>
-          <a:bodyPr wrap="none" anchor="ctr"/>
-          <a:lstStyle/>
-          <a:p>
-            <a:endParaRPr lang="en-US"/>
-          </a:p>
-        </p:txBody>
-      </p:sp>
-    </p:spTree>
-    <p:extLst>
-      <p:ext uri="{BB962C8B-B14F-4D97-AF65-F5344CB8AC3E}">
-        <p14:creationId xmlns:p14="http://schemas.microsoft.com/office/powerpoint/2010/main" val="3786188879"/>
-      </p:ext>
-    </p:extLst>
-  </p:cSld>
-  <p:clrMapOvr>
-    <a:masterClrMapping/>
-  </p:clrMapOvr>
-</p:sld>
-</file>
-
-<file path=ppt/slides/slide15.xml><?xml version="1.0" encoding="utf-8"?>
-<p:sld xmlns:a="http://schemas.openxmlformats.org/drawingml/2006/main" xmlns:r="http://schemas.openxmlformats.org/officeDocument/2006/relationships" xmlns:p="http://schemas.openxmlformats.org/presentationml/2006/main">
-  <p:cSld>
-    <p:spTree>
-      <p:nvGrpSpPr>
-        <p:cNvPr id="1" name=""/>
-        <p:cNvGrpSpPr/>
-        <p:nvPr/>
-      </p:nvGrpSpPr>
-      <p:grpSpPr>
-        <a:xfrm>
-          <a:off x="0" y="0"/>
-          <a:ext cx="0" cy="0"/>
-          <a:chOff x="0" y="0"/>
-          <a:chExt cx="0" cy="0"/>
-        </a:xfrm>
-      </p:grpSpPr>
       <p:sp>
         <p:nvSpPr>
           <p:cNvPr id="4" name="Cylinder 3">
@@ -5643,7 +4981,7 @@
 </p:sld>
 </file>
 
-<file path=ppt/slides/slide16.xml><?xml version="1.0" encoding="utf-8"?>
+<file path=ppt/slides/slide13.xml><?xml version="1.0" encoding="utf-8"?>
 <p:sld xmlns:a="http://schemas.openxmlformats.org/drawingml/2006/main" xmlns:r="http://schemas.openxmlformats.org/officeDocument/2006/relationships" xmlns:p="http://schemas.openxmlformats.org/presentationml/2006/main">
   <p:cSld>
     <p:spTree>
@@ -6526,7 +5864,7 @@
 </p:sld>
 </file>
 
-<file path=ppt/slides/slide17.xml><?xml version="1.0" encoding="utf-8"?>
+<file path=ppt/slides/slide14.xml><?xml version="1.0" encoding="utf-8"?>
 <p:sld xmlns:a="http://schemas.openxmlformats.org/drawingml/2006/main" xmlns:r="http://schemas.openxmlformats.org/officeDocument/2006/relationships" xmlns:p="http://schemas.openxmlformats.org/presentationml/2006/main">
   <p:cSld>
     <p:spTree>
@@ -7475,6 +6813,734 @@
         <p14:creationId xmlns:p14="http://schemas.microsoft.com/office/powerpoint/2010/main" val="1325716157"/>
       </p:ext>
     </p:extLst>
+  </p:cSld>
+  <p:clrMapOvr>
+    <a:masterClrMapping/>
+  </p:clrMapOvr>
+</p:sld>
+</file>
+
+<file path=ppt/slides/slide15.xml><?xml version="1.0" encoding="utf-8"?>
+<p:sld xmlns:a="http://schemas.openxmlformats.org/drawingml/2006/main" xmlns:r="http://schemas.openxmlformats.org/officeDocument/2006/relationships" xmlns:p="http://schemas.openxmlformats.org/presentationml/2006/main">
+  <p:cSld>
+    <p:spTree>
+      <p:nvGrpSpPr>
+        <p:cNvPr id="1" name=""/>
+        <p:cNvGrpSpPr/>
+        <p:nvPr/>
+      </p:nvGrpSpPr>
+      <p:grpSpPr>
+        <a:xfrm>
+          <a:off x="0" y="0"/>
+          <a:ext cx="0" cy="0"/>
+          <a:chOff x="0" y="0"/>
+          <a:chExt cx="0" cy="0"/>
+        </a:xfrm>
+      </p:grpSpPr>
+      <p:sp>
+        <p:nvSpPr>
+          <p:cNvPr id="4" name="Title 3">
+            <a:extLst>
+              <a:ext uri="{FF2B5EF4-FFF2-40B4-BE49-F238E27FC236}">
+                <a16:creationId xmlns:a16="http://schemas.microsoft.com/office/drawing/2014/main" id="{278E2971-ABB3-3665-9E07-6648A45C5EA1}"/>
+              </a:ext>
+            </a:extLst>
+          </p:cNvPr>
+          <p:cNvSpPr>
+            <a:spLocks noGrp="1"/>
+          </p:cNvSpPr>
+          <p:nvPr>
+            <p:ph type="ctrTitle"/>
+          </p:nvPr>
+        </p:nvSpPr>
+        <p:spPr/>
+        <p:txBody>
+          <a:bodyPr/>
+          <a:lstStyle/>
+          <a:p>
+            <a:r>
+              <a:rPr lang="en-US" dirty="0"/>
+              <a:t>END</a:t>
+            </a:r>
+          </a:p>
+        </p:txBody>
+      </p:sp>
+      <p:sp>
+        <p:nvSpPr>
+          <p:cNvPr id="5" name="Subtitle 4">
+            <a:extLst>
+              <a:ext uri="{FF2B5EF4-FFF2-40B4-BE49-F238E27FC236}">
+                <a16:creationId xmlns:a16="http://schemas.microsoft.com/office/drawing/2014/main" id="{0D541E2D-86A8-F412-3392-CC7332FB94CE}"/>
+              </a:ext>
+            </a:extLst>
+          </p:cNvPr>
+          <p:cNvSpPr>
+            <a:spLocks noGrp="1"/>
+          </p:cNvSpPr>
+          <p:nvPr>
+            <p:ph type="subTitle" idx="1"/>
+          </p:nvPr>
+        </p:nvSpPr>
+        <p:spPr/>
+        <p:txBody>
+          <a:bodyPr/>
+          <a:lstStyle/>
+          <a:p>
+            <a:endParaRPr lang="en-US"/>
+          </a:p>
+        </p:txBody>
+      </p:sp>
+    </p:spTree>
+    <p:extLst>
+      <p:ext uri="{BB962C8B-B14F-4D97-AF65-F5344CB8AC3E}">
+        <p14:creationId xmlns:p14="http://schemas.microsoft.com/office/powerpoint/2010/main" val="1532625996"/>
+      </p:ext>
+    </p:extLst>
+  </p:cSld>
+  <p:clrMapOvr>
+    <a:masterClrMapping/>
+  </p:clrMapOvr>
+</p:sld>
+</file>
+
+<file path=ppt/slides/slide16.xml><?xml version="1.0" encoding="utf-8"?>
+<p:sld xmlns:a="http://schemas.openxmlformats.org/drawingml/2006/main" xmlns:r="http://schemas.openxmlformats.org/officeDocument/2006/relationships" xmlns:p="http://schemas.openxmlformats.org/presentationml/2006/main">
+  <p:cSld>
+    <p:spTree>
+      <p:nvGrpSpPr>
+        <p:cNvPr id="1" name=""/>
+        <p:cNvGrpSpPr/>
+        <p:nvPr/>
+      </p:nvGrpSpPr>
+      <p:grpSpPr>
+        <a:xfrm>
+          <a:off x="0" y="0"/>
+          <a:ext cx="0" cy="0"/>
+          <a:chOff x="0" y="0"/>
+          <a:chExt cx="0" cy="0"/>
+        </a:xfrm>
+      </p:grpSpPr>
+      <p:pic>
+        <p:nvPicPr>
+          <p:cNvPr id="1030" name="Picture 6"/>
+          <p:cNvPicPr>
+            <a:picLocks noChangeAspect="1" noChangeArrowheads="1"/>
+          </p:cNvPicPr>
+          <p:nvPr/>
+        </p:nvPicPr>
+        <p:blipFill>
+          <a:blip r:embed="rId2" cstate="print"/>
+          <a:srcRect/>
+          <a:stretch>
+            <a:fillRect/>
+          </a:stretch>
+        </p:blipFill>
+        <p:spPr bwMode="auto">
+          <a:xfrm>
+            <a:off x="7162801" y="1828800"/>
+            <a:ext cx="1869243" cy="1822450"/>
+          </a:xfrm>
+          <a:prstGeom prst="rect">
+            <a:avLst/>
+          </a:prstGeom>
+          <a:noFill/>
+          <a:ln w="9525">
+            <a:noFill/>
+            <a:miter lim="800000"/>
+            <a:headEnd/>
+            <a:tailEnd/>
+          </a:ln>
+          <a:effectLst/>
+        </p:spPr>
+      </p:pic>
+      <p:sp>
+        <p:nvSpPr>
+          <p:cNvPr id="2" name="Title 1"/>
+          <p:cNvSpPr>
+            <a:spLocks noGrp="1"/>
+          </p:cNvSpPr>
+          <p:nvPr>
+            <p:ph type="title"/>
+          </p:nvPr>
+        </p:nvSpPr>
+        <p:spPr/>
+        <p:txBody>
+          <a:bodyPr/>
+          <a:lstStyle/>
+          <a:p>
+            <a:endParaRPr lang="en-US" dirty="0"/>
+          </a:p>
+        </p:txBody>
+      </p:sp>
+      <p:sp>
+        <p:nvSpPr>
+          <p:cNvPr id="4" name="Rectangle 2"/>
+          <p:cNvSpPr>
+            <a:spLocks noChangeArrowheads="1"/>
+          </p:cNvSpPr>
+          <p:nvPr/>
+        </p:nvSpPr>
+        <p:spPr bwMode="auto">
+          <a:xfrm>
+            <a:off x="2743201" y="3519488"/>
+            <a:ext cx="2511425" cy="1871663"/>
+          </a:xfrm>
+          <a:prstGeom prst="rect">
+            <a:avLst/>
+          </a:prstGeom>
+          <a:gradFill rotWithShape="1">
+            <a:gsLst>
+              <a:gs pos="0">
+                <a:schemeClr val="bg1"/>
+              </a:gs>
+              <a:gs pos="100000">
+                <a:schemeClr val="accent1"/>
+              </a:gs>
+            </a:gsLst>
+            <a:path path="shape">
+              <a:fillToRect l="50000" t="50000" r="50000" b="50000"/>
+            </a:path>
+          </a:gradFill>
+          <a:ln w="9525" algn="ctr">
+            <a:solidFill>
+              <a:schemeClr val="tx1"/>
+            </a:solidFill>
+            <a:miter lim="800000"/>
+            <a:headEnd/>
+            <a:tailEnd/>
+          </a:ln>
+        </p:spPr>
+        <p:txBody>
+          <a:bodyPr wrap="none" anchor="ctr"/>
+          <a:lstStyle/>
+          <a:p>
+            <a:pPr algn="ctr"/>
+            <a:r>
+              <a:rPr lang="en-US"/>
+              <a:t>Gas at T</a:t>
+            </a:r>
+            <a:r>
+              <a:rPr lang="en-US" baseline="-25000"/>
+              <a:t>i</a:t>
+            </a:r>
+          </a:p>
+        </p:txBody>
+      </p:sp>
+      <p:sp>
+        <p:nvSpPr>
+          <p:cNvPr id="5" name="Rectangle 5"/>
+          <p:cNvSpPr>
+            <a:spLocks noChangeArrowheads="1"/>
+          </p:cNvSpPr>
+          <p:nvPr/>
+        </p:nvSpPr>
+        <p:spPr bwMode="auto">
+          <a:xfrm>
+            <a:off x="2743201" y="1676401"/>
+            <a:ext cx="2511425" cy="3730625"/>
+          </a:xfrm>
+          <a:prstGeom prst="rect">
+            <a:avLst/>
+          </a:prstGeom>
+          <a:noFill/>
+          <a:ln w="53975" algn="ctr">
+            <a:solidFill>
+              <a:srgbClr val="FF9900"/>
+            </a:solidFill>
+            <a:miter lim="800000"/>
+            <a:headEnd/>
+            <a:tailEnd/>
+          </a:ln>
+        </p:spPr>
+        <p:txBody>
+          <a:bodyPr wrap="none" anchor="ctr"/>
+          <a:lstStyle/>
+          <a:p>
+            <a:endParaRPr lang="en-US"/>
+          </a:p>
+        </p:txBody>
+      </p:sp>
+      <p:sp>
+        <p:nvSpPr>
+          <p:cNvPr id="6" name="Line 6"/>
+          <p:cNvSpPr>
+            <a:spLocks noChangeShapeType="1"/>
+          </p:cNvSpPr>
+          <p:nvPr/>
+        </p:nvSpPr>
+        <p:spPr bwMode="auto">
+          <a:xfrm>
+            <a:off x="2728913" y="3533775"/>
+            <a:ext cx="2525713" cy="0"/>
+          </a:xfrm>
+          <a:prstGeom prst="line">
+            <a:avLst/>
+          </a:prstGeom>
+          <a:noFill/>
+          <a:ln w="9525">
+            <a:solidFill>
+              <a:srgbClr val="FF0000"/>
+            </a:solidFill>
+            <a:round/>
+            <a:headEnd/>
+            <a:tailEnd/>
+          </a:ln>
+        </p:spPr>
+        <p:txBody>
+          <a:bodyPr wrap="none" anchor="ctr"/>
+          <a:lstStyle/>
+          <a:p>
+            <a:endParaRPr lang="en-US"/>
+          </a:p>
+        </p:txBody>
+      </p:sp>
+      <p:sp>
+        <p:nvSpPr>
+          <p:cNvPr id="7" name="Text Box 7"/>
+          <p:cNvSpPr txBox="1">
+            <a:spLocks noChangeArrowheads="1"/>
+          </p:cNvSpPr>
+          <p:nvPr/>
+        </p:nvSpPr>
+        <p:spPr bwMode="auto">
+          <a:xfrm>
+            <a:off x="3438525" y="2147888"/>
+            <a:ext cx="1136650" cy="366713"/>
+          </a:xfrm>
+          <a:prstGeom prst="rect">
+            <a:avLst/>
+          </a:prstGeom>
+          <a:noFill/>
+          <a:ln w="9525" algn="ctr">
+            <a:noFill/>
+            <a:miter lim="800000"/>
+            <a:headEnd/>
+            <a:tailEnd/>
+          </a:ln>
+        </p:spPr>
+        <p:txBody>
+          <a:bodyPr>
+            <a:spAutoFit/>
+          </a:bodyPr>
+          <a:lstStyle/>
+          <a:p>
+            <a:pPr algn="ctr"/>
+            <a:r>
+              <a:rPr lang="en-US"/>
+              <a:t>Vacuum</a:t>
+            </a:r>
+          </a:p>
+        </p:txBody>
+      </p:sp>
+      <p:sp>
+        <p:nvSpPr>
+          <p:cNvPr id="8" name="Text Box 8"/>
+          <p:cNvSpPr txBox="1">
+            <a:spLocks noChangeArrowheads="1"/>
+          </p:cNvSpPr>
+          <p:nvPr/>
+        </p:nvSpPr>
+        <p:spPr bwMode="auto">
+          <a:xfrm>
+            <a:off x="2619376" y="2954338"/>
+            <a:ext cx="1920875" cy="366713"/>
+          </a:xfrm>
+          <a:prstGeom prst="rect">
+            <a:avLst/>
+          </a:prstGeom>
+          <a:noFill/>
+          <a:ln w="9525" algn="ctr">
+            <a:noFill/>
+            <a:miter lim="800000"/>
+            <a:headEnd/>
+            <a:tailEnd/>
+          </a:ln>
+        </p:spPr>
+        <p:txBody>
+          <a:bodyPr>
+            <a:spAutoFit/>
+          </a:bodyPr>
+          <a:lstStyle/>
+          <a:p>
+            <a:pPr algn="ctr"/>
+            <a:r>
+              <a:rPr lang="en-US"/>
+              <a:t>Membrane</a:t>
+            </a:r>
+          </a:p>
+        </p:txBody>
+      </p:sp>
+      <p:sp>
+        <p:nvSpPr>
+          <p:cNvPr id="9" name="Line 9"/>
+          <p:cNvSpPr>
+            <a:spLocks noChangeShapeType="1"/>
+          </p:cNvSpPr>
+          <p:nvPr/>
+        </p:nvSpPr>
+        <p:spPr bwMode="auto">
+          <a:xfrm flipH="1">
+            <a:off x="3367087" y="3243263"/>
+            <a:ext cx="115888" cy="276225"/>
+          </a:xfrm>
+          <a:prstGeom prst="line">
+            <a:avLst/>
+          </a:prstGeom>
+          <a:noFill/>
+          <a:ln w="9525">
+            <a:solidFill>
+              <a:schemeClr val="tx1"/>
+            </a:solidFill>
+            <a:round/>
+            <a:headEnd/>
+            <a:tailEnd type="triangle" w="med" len="med"/>
+          </a:ln>
+        </p:spPr>
+        <p:txBody>
+          <a:bodyPr wrap="none" anchor="ctr"/>
+          <a:lstStyle/>
+          <a:p>
+            <a:endParaRPr lang="en-US"/>
+          </a:p>
+        </p:txBody>
+      </p:sp>
+      <p:sp>
+        <p:nvSpPr>
+          <p:cNvPr id="11" name="Rectangle 5"/>
+          <p:cNvSpPr>
+            <a:spLocks noChangeArrowheads="1"/>
+          </p:cNvSpPr>
+          <p:nvPr/>
+        </p:nvSpPr>
+        <p:spPr bwMode="auto">
+          <a:xfrm>
+            <a:off x="6629401" y="1676401"/>
+            <a:ext cx="2511425" cy="3730625"/>
+          </a:xfrm>
+          <a:prstGeom prst="rect">
+            <a:avLst/>
+          </a:prstGeom>
+          <a:noFill/>
+          <a:ln w="53975" algn="ctr">
+            <a:solidFill>
+              <a:srgbClr val="FF9900"/>
+            </a:solidFill>
+            <a:miter lim="800000"/>
+            <a:headEnd/>
+            <a:tailEnd/>
+          </a:ln>
+        </p:spPr>
+        <p:txBody>
+          <a:bodyPr wrap="none" anchor="ctr"/>
+          <a:lstStyle/>
+          <a:p>
+            <a:endParaRPr lang="en-US"/>
+          </a:p>
+        </p:txBody>
+      </p:sp>
+      <p:sp>
+        <p:nvSpPr>
+          <p:cNvPr id="12" name="Line 6"/>
+          <p:cNvSpPr>
+            <a:spLocks noChangeShapeType="1"/>
+          </p:cNvSpPr>
+          <p:nvPr/>
+        </p:nvSpPr>
+        <p:spPr bwMode="auto">
+          <a:xfrm>
+            <a:off x="6615113" y="3533775"/>
+            <a:ext cx="2525713" cy="0"/>
+          </a:xfrm>
+          <a:prstGeom prst="line">
+            <a:avLst/>
+          </a:prstGeom>
+          <a:noFill/>
+          <a:ln w="9525">
+            <a:solidFill>
+              <a:srgbClr val="FF0000"/>
+            </a:solidFill>
+            <a:round/>
+            <a:headEnd/>
+            <a:tailEnd/>
+          </a:ln>
+        </p:spPr>
+        <p:txBody>
+          <a:bodyPr wrap="none" anchor="ctr"/>
+          <a:lstStyle/>
+          <a:p>
+            <a:endParaRPr lang="en-US"/>
+          </a:p>
+        </p:txBody>
+      </p:sp>
+      <p:sp>
+        <p:nvSpPr>
+          <p:cNvPr id="14" name="Text Box 8"/>
+          <p:cNvSpPr txBox="1">
+            <a:spLocks noChangeArrowheads="1"/>
+          </p:cNvSpPr>
+          <p:nvPr/>
+        </p:nvSpPr>
+        <p:spPr bwMode="auto">
+          <a:xfrm>
+            <a:off x="6505576" y="2954338"/>
+            <a:ext cx="1920875" cy="366713"/>
+          </a:xfrm>
+          <a:prstGeom prst="rect">
+            <a:avLst/>
+          </a:prstGeom>
+          <a:noFill/>
+          <a:ln w="9525" algn="ctr">
+            <a:noFill/>
+            <a:miter lim="800000"/>
+            <a:headEnd/>
+            <a:tailEnd/>
+          </a:ln>
+        </p:spPr>
+        <p:txBody>
+          <a:bodyPr>
+            <a:spAutoFit/>
+          </a:bodyPr>
+          <a:lstStyle/>
+          <a:p>
+            <a:pPr algn="ctr"/>
+            <a:r>
+              <a:rPr lang="en-US"/>
+              <a:t>Membrane</a:t>
+            </a:r>
+          </a:p>
+        </p:txBody>
+      </p:sp>
+      <p:sp>
+        <p:nvSpPr>
+          <p:cNvPr id="15" name="Line 9"/>
+          <p:cNvSpPr>
+            <a:spLocks noChangeShapeType="1"/>
+          </p:cNvSpPr>
+          <p:nvPr/>
+        </p:nvSpPr>
+        <p:spPr bwMode="auto">
+          <a:xfrm flipH="1">
+            <a:off x="7253287" y="3243263"/>
+            <a:ext cx="115888" cy="276225"/>
+          </a:xfrm>
+          <a:prstGeom prst="line">
+            <a:avLst/>
+          </a:prstGeom>
+          <a:noFill/>
+          <a:ln w="9525">
+            <a:solidFill>
+              <a:schemeClr val="tx1"/>
+            </a:solidFill>
+            <a:round/>
+            <a:headEnd/>
+            <a:tailEnd type="triangle" w="med" len="med"/>
+          </a:ln>
+        </p:spPr>
+        <p:txBody>
+          <a:bodyPr wrap="none" anchor="ctr"/>
+          <a:lstStyle/>
+          <a:p>
+            <a:endParaRPr lang="en-US"/>
+          </a:p>
+        </p:txBody>
+      </p:sp>
+      <p:sp>
+        <p:nvSpPr>
+          <p:cNvPr id="10" name="Rectangle 2"/>
+          <p:cNvSpPr>
+            <a:spLocks noChangeArrowheads="1"/>
+          </p:cNvSpPr>
+          <p:nvPr/>
+        </p:nvSpPr>
+        <p:spPr bwMode="auto">
+          <a:xfrm>
+            <a:off x="6629401" y="3519488"/>
+            <a:ext cx="2511425" cy="1871663"/>
+          </a:xfrm>
+          <a:prstGeom prst="rect">
+            <a:avLst/>
+          </a:prstGeom>
+          <a:gradFill rotWithShape="1">
+            <a:gsLst>
+              <a:gs pos="0">
+                <a:schemeClr val="bg1"/>
+              </a:gs>
+              <a:gs pos="100000">
+                <a:schemeClr val="accent1"/>
+              </a:gs>
+            </a:gsLst>
+            <a:path path="shape">
+              <a:fillToRect l="50000" t="50000" r="50000" b="50000"/>
+            </a:path>
+          </a:gradFill>
+          <a:ln w="9525" algn="ctr">
+            <a:solidFill>
+              <a:schemeClr val="tx1"/>
+            </a:solidFill>
+            <a:miter lim="800000"/>
+            <a:headEnd/>
+            <a:tailEnd/>
+          </a:ln>
+        </p:spPr>
+        <p:txBody>
+          <a:bodyPr wrap="none" anchor="ctr"/>
+          <a:lstStyle/>
+          <a:p>
+            <a:pPr algn="ctr"/>
+            <a:r>
+              <a:rPr lang="en-US"/>
+              <a:t>Gas at T</a:t>
+            </a:r>
+            <a:r>
+              <a:rPr lang="en-US" baseline="-25000"/>
+              <a:t>i</a:t>
+            </a:r>
+          </a:p>
+        </p:txBody>
+      </p:sp>
+      <p:sp>
+        <p:nvSpPr>
+          <p:cNvPr id="16" name="Rectangle 15"/>
+          <p:cNvSpPr/>
+          <p:nvPr/>
+        </p:nvSpPr>
+        <p:spPr>
+          <a:xfrm>
+            <a:off x="8382000" y="3505200"/>
+            <a:ext cx="152400" cy="76200"/>
+          </a:xfrm>
+          <a:prstGeom prst="rect">
+            <a:avLst/>
+          </a:prstGeom>
+          <a:solidFill>
+            <a:schemeClr val="accent1"/>
+          </a:solidFill>
+          <a:ln>
+            <a:noFill/>
+          </a:ln>
+        </p:spPr>
+        <p:style>
+          <a:lnRef idx="2">
+            <a:schemeClr val="accent1">
+              <a:shade val="50000"/>
+            </a:schemeClr>
+          </a:lnRef>
+          <a:fillRef idx="1">
+            <a:schemeClr val="accent1"/>
+          </a:fillRef>
+          <a:effectRef idx="0">
+            <a:schemeClr val="accent1"/>
+          </a:effectRef>
+          <a:fontRef idx="minor">
+            <a:schemeClr val="lt1"/>
+          </a:fontRef>
+        </p:style>
+        <p:txBody>
+          <a:bodyPr rtlCol="0" anchor="ctr"/>
+          <a:lstStyle/>
+          <a:p>
+            <a:pPr algn="ctr"/>
+            <a:endParaRPr lang="en-US"/>
+          </a:p>
+        </p:txBody>
+      </p:sp>
+    </p:spTree>
+  </p:cSld>
+  <p:clrMapOvr>
+    <a:masterClrMapping/>
+  </p:clrMapOvr>
+</p:sld>
+</file>
+
+<file path=ppt/slides/slide17.xml><?xml version="1.0" encoding="utf-8"?>
+<p:sld xmlns:a="http://schemas.openxmlformats.org/drawingml/2006/main" xmlns:r="http://schemas.openxmlformats.org/officeDocument/2006/relationships" xmlns:p="http://schemas.openxmlformats.org/presentationml/2006/main">
+  <p:cSld>
+    <p:spTree>
+      <p:nvGrpSpPr>
+        <p:cNvPr id="1" name=""/>
+        <p:cNvGrpSpPr/>
+        <p:nvPr/>
+      </p:nvGrpSpPr>
+      <p:grpSpPr>
+        <a:xfrm>
+          <a:off x="0" y="0"/>
+          <a:ext cx="0" cy="0"/>
+          <a:chOff x="0" y="0"/>
+          <a:chExt cx="0" cy="0"/>
+        </a:xfrm>
+      </p:grpSpPr>
+      <p:sp>
+        <p:nvSpPr>
+          <p:cNvPr id="2" name="Title 1"/>
+          <p:cNvSpPr>
+            <a:spLocks noGrp="1"/>
+          </p:cNvSpPr>
+          <p:nvPr>
+            <p:ph type="title"/>
+          </p:nvPr>
+        </p:nvSpPr>
+        <p:spPr/>
+        <p:txBody>
+          <a:bodyPr/>
+          <a:lstStyle/>
+          <a:p>
+            <a:endParaRPr lang="en-US"/>
+          </a:p>
+        </p:txBody>
+      </p:sp>
+      <p:sp>
+        <p:nvSpPr>
+          <p:cNvPr id="3" name="Content Placeholder 2"/>
+          <p:cNvSpPr>
+            <a:spLocks noGrp="1"/>
+          </p:cNvSpPr>
+          <p:nvPr>
+            <p:ph idx="1"/>
+          </p:nvPr>
+        </p:nvSpPr>
+        <p:spPr/>
+        <p:txBody>
+          <a:bodyPr/>
+          <a:lstStyle/>
+          <a:p>
+            <a:endParaRPr lang="en-US"/>
+          </a:p>
+        </p:txBody>
+      </p:sp>
+      <p:pic>
+        <p:nvPicPr>
+          <p:cNvPr id="6146" name="Picture 2"/>
+          <p:cNvPicPr>
+            <a:picLocks noChangeAspect="1" noChangeArrowheads="1"/>
+          </p:cNvPicPr>
+          <p:nvPr/>
+        </p:nvPicPr>
+        <p:blipFill>
+          <a:blip r:embed="rId2" cstate="print"/>
+          <a:srcRect/>
+          <a:stretch>
+            <a:fillRect/>
+          </a:stretch>
+        </p:blipFill>
+        <p:spPr bwMode="auto">
+          <a:xfrm>
+            <a:off x="2971800" y="533401"/>
+            <a:ext cx="5181600" cy="5252339"/>
+          </a:xfrm>
+          <a:prstGeom prst="rect">
+            <a:avLst/>
+          </a:prstGeom>
+          <a:noFill/>
+          <a:ln w="9525">
+            <a:noFill/>
+            <a:miter lim="800000"/>
+            <a:headEnd/>
+            <a:tailEnd/>
+          </a:ln>
+          <a:effectLst/>
+        </p:spPr>
+      </p:pic>
+    </p:spTree>
   </p:cSld>
   <p:clrMapOvr>
     <a:masterClrMapping/>
@@ -7501,51 +7567,352 @@
       </p:grpSpPr>
       <p:sp>
         <p:nvSpPr>
-          <p:cNvPr id="4" name="Title 3">
-            <a:extLst>
-              <a:ext uri="{FF2B5EF4-FFF2-40B4-BE49-F238E27FC236}">
-                <a16:creationId xmlns:a16="http://schemas.microsoft.com/office/drawing/2014/main" id="{278E2971-ABB3-3665-9E07-6648A45C5EA1}"/>
-              </a:ext>
-            </a:extLst>
-          </p:cNvPr>
+          <p:cNvPr id="183298" name="Slide Number Placeholder 5"/>
           <p:cNvSpPr>
             <a:spLocks noGrp="1"/>
           </p:cNvSpPr>
           <p:nvPr>
-            <p:ph type="ctrTitle"/>
+            <p:ph type="sldNum" sz="quarter" idx="12"/>
           </p:nvPr>
         </p:nvSpPr>
-        <p:spPr/>
+        <p:spPr>
+          <a:noFill/>
+        </p:spPr>
         <p:txBody>
           <a:bodyPr/>
           <a:lstStyle/>
           <a:p>
-            <a:r>
-              <a:rPr lang="en-US" dirty="0"/>
-              <a:t>END</a:t>
-            </a:r>
-          </a:p>
-        </p:txBody>
-      </p:sp>
-      <p:sp>
-        <p:nvSpPr>
-          <p:cNvPr id="5" name="Subtitle 4">
-            <a:extLst>
-              <a:ext uri="{FF2B5EF4-FFF2-40B4-BE49-F238E27FC236}">
-                <a16:creationId xmlns:a16="http://schemas.microsoft.com/office/drawing/2014/main" id="{0D541E2D-86A8-F412-3392-CC7332FB94CE}"/>
-              </a:ext>
-            </a:extLst>
-          </p:cNvPr>
+            <a:fld id="{C2812B8D-E844-4807-B20D-B92C141DEBC2}" type="slidenum">
+              <a:rPr lang="en-US" smtClean="0"/>
+              <a:pPr/>
+              <a:t>18</a:t>
+            </a:fld>
+            <a:endParaRPr lang="en-US"/>
+          </a:p>
+        </p:txBody>
+      </p:sp>
+      <p:sp>
+        <p:nvSpPr>
+          <p:cNvPr id="183299" name="Rectangle 2"/>
           <p:cNvSpPr>
-            <a:spLocks noGrp="1"/>
+            <a:spLocks noChangeArrowheads="1"/>
+          </p:cNvSpPr>
+          <p:nvPr/>
+        </p:nvSpPr>
+        <p:spPr bwMode="auto">
+          <a:xfrm>
+            <a:off x="7402514" y="3657601"/>
+            <a:ext cx="2511425" cy="1871663"/>
+          </a:xfrm>
+          <a:prstGeom prst="rect">
+            <a:avLst/>
+          </a:prstGeom>
+          <a:gradFill rotWithShape="1">
+            <a:gsLst>
+              <a:gs pos="0">
+                <a:schemeClr val="bg1"/>
+              </a:gs>
+              <a:gs pos="100000">
+                <a:schemeClr val="accent1"/>
+              </a:gs>
+            </a:gsLst>
+            <a:path path="shape">
+              <a:fillToRect l="50000" t="50000" r="50000" b="50000"/>
+            </a:path>
+          </a:gradFill>
+          <a:ln w="9525" algn="ctr">
+            <a:solidFill>
+              <a:schemeClr val="tx1"/>
+            </a:solidFill>
+            <a:miter lim="800000"/>
+            <a:headEnd/>
+            <a:tailEnd/>
+          </a:ln>
+        </p:spPr>
+        <p:txBody>
+          <a:bodyPr wrap="none" anchor="ctr"/>
+          <a:lstStyle/>
+          <a:p>
+            <a:pPr algn="ctr"/>
+            <a:r>
+              <a:rPr lang="en-US"/>
+              <a:t>Gas at T</a:t>
+            </a:r>
+            <a:r>
+              <a:rPr lang="en-US" baseline="-25000"/>
+              <a:t>i</a:t>
+            </a:r>
+          </a:p>
+        </p:txBody>
+      </p:sp>
+      <p:sp>
+        <p:nvSpPr>
+          <p:cNvPr id="183300" name="Rectangle 3"/>
+          <p:cNvSpPr>
+            <a:spLocks noGrp="1" noChangeArrowheads="1"/>
           </p:cNvSpPr>
           <p:nvPr>
-            <p:ph type="subTitle" idx="1"/>
+            <p:ph type="title"/>
           </p:nvPr>
         </p:nvSpPr>
         <p:spPr/>
         <p:txBody>
           <a:bodyPr/>
+          <a:lstStyle/>
+          <a:p>
+            <a:pPr eaLnBrk="1" hangingPunct="1"/>
+            <a:r>
+              <a:rPr lang="en-US"/>
+              <a:t>Question 123.10.7</a:t>
+            </a:r>
+            <a:endParaRPr lang="en-US" dirty="0"/>
+          </a:p>
+        </p:txBody>
+      </p:sp>
+      <p:sp>
+        <p:nvSpPr>
+          <p:cNvPr id="183301" name="Rectangle 4"/>
+          <p:cNvSpPr>
+            <a:spLocks noGrp="1" noChangeArrowheads="1"/>
+          </p:cNvSpPr>
+          <p:nvPr>
+            <p:ph type="body" idx="1"/>
+          </p:nvPr>
+        </p:nvSpPr>
+        <p:spPr>
+          <a:xfrm>
+            <a:off x="1981201" y="1600201"/>
+            <a:ext cx="3978275" cy="4525963"/>
+          </a:xfrm>
+        </p:spPr>
+        <p:txBody>
+          <a:bodyPr/>
+          <a:lstStyle/>
+          <a:p>
+            <a:pPr marL="609600" indent="-609600">
+              <a:lnSpc>
+                <a:spcPct val="80000"/>
+              </a:lnSpc>
+              <a:buNone/>
+            </a:pPr>
+            <a:r>
+              <a:rPr lang="en-US"/>
+              <a:t>The initial state of a system is shown, if the membrane is broken, the gas fills the entire container. Is there work done by the gas in filling the container?</a:t>
+            </a:r>
+          </a:p>
+          <a:p>
+            <a:pPr marL="609600" indent="-609600">
+              <a:lnSpc>
+                <a:spcPct val="80000"/>
+              </a:lnSpc>
+              <a:buFontTx/>
+              <a:buAutoNum type="alphaLcParenR"/>
+            </a:pPr>
+            <a:r>
+              <a:rPr lang="en-US"/>
+              <a:t>Yes</a:t>
+            </a:r>
+          </a:p>
+          <a:p>
+            <a:pPr marL="609600" indent="-609600">
+              <a:lnSpc>
+                <a:spcPct val="80000"/>
+              </a:lnSpc>
+              <a:buFontTx/>
+              <a:buAutoNum type="alphaLcParenR"/>
+            </a:pPr>
+            <a:r>
+              <a:rPr lang="en-US"/>
+              <a:t>No</a:t>
+            </a:r>
+          </a:p>
+          <a:p>
+            <a:pPr marL="609600" indent="-609600">
+              <a:lnSpc>
+                <a:spcPct val="80000"/>
+              </a:lnSpc>
+              <a:buFontTx/>
+              <a:buAutoNum type="alphaLcParenR"/>
+            </a:pPr>
+            <a:r>
+              <a:rPr lang="en-US"/>
+              <a:t>Can’t Tell</a:t>
+            </a:r>
+          </a:p>
+        </p:txBody>
+      </p:sp>
+      <p:sp>
+        <p:nvSpPr>
+          <p:cNvPr id="183302" name="Rectangle 5"/>
+          <p:cNvSpPr>
+            <a:spLocks noChangeArrowheads="1"/>
+          </p:cNvSpPr>
+          <p:nvPr/>
+        </p:nvSpPr>
+        <p:spPr bwMode="auto">
+          <a:xfrm>
+            <a:off x="7402514" y="1814514"/>
+            <a:ext cx="2511425" cy="3730625"/>
+          </a:xfrm>
+          <a:prstGeom prst="rect">
+            <a:avLst/>
+          </a:prstGeom>
+          <a:noFill/>
+          <a:ln w="53975" algn="ctr">
+            <a:solidFill>
+              <a:srgbClr val="FF9900"/>
+            </a:solidFill>
+            <a:miter lim="800000"/>
+            <a:headEnd/>
+            <a:tailEnd/>
+          </a:ln>
+        </p:spPr>
+        <p:txBody>
+          <a:bodyPr wrap="none" anchor="ctr"/>
+          <a:lstStyle/>
+          <a:p>
+            <a:endParaRPr lang="en-US"/>
+          </a:p>
+        </p:txBody>
+      </p:sp>
+      <p:sp>
+        <p:nvSpPr>
+          <p:cNvPr id="183303" name="Line 6"/>
+          <p:cNvSpPr>
+            <a:spLocks noChangeShapeType="1"/>
+          </p:cNvSpPr>
+          <p:nvPr/>
+        </p:nvSpPr>
+        <p:spPr bwMode="auto">
+          <a:xfrm>
+            <a:off x="7388226" y="3671888"/>
+            <a:ext cx="2525713" cy="0"/>
+          </a:xfrm>
+          <a:prstGeom prst="line">
+            <a:avLst/>
+          </a:prstGeom>
+          <a:noFill/>
+          <a:ln w="9525">
+            <a:solidFill>
+              <a:srgbClr val="FF0000"/>
+            </a:solidFill>
+            <a:round/>
+            <a:headEnd/>
+            <a:tailEnd/>
+          </a:ln>
+        </p:spPr>
+        <p:txBody>
+          <a:bodyPr wrap="none" anchor="ctr"/>
+          <a:lstStyle/>
+          <a:p>
+            <a:endParaRPr lang="en-US"/>
+          </a:p>
+        </p:txBody>
+      </p:sp>
+      <p:sp>
+        <p:nvSpPr>
+          <p:cNvPr id="183304" name="Text Box 7"/>
+          <p:cNvSpPr txBox="1">
+            <a:spLocks noChangeArrowheads="1"/>
+          </p:cNvSpPr>
+          <p:nvPr/>
+        </p:nvSpPr>
+        <p:spPr bwMode="auto">
+          <a:xfrm>
+            <a:off x="8097838" y="2286001"/>
+            <a:ext cx="1136650" cy="366713"/>
+          </a:xfrm>
+          <a:prstGeom prst="rect">
+            <a:avLst/>
+          </a:prstGeom>
+          <a:noFill/>
+          <a:ln w="9525" algn="ctr">
+            <a:noFill/>
+            <a:miter lim="800000"/>
+            <a:headEnd/>
+            <a:tailEnd/>
+          </a:ln>
+        </p:spPr>
+        <p:txBody>
+          <a:bodyPr>
+            <a:spAutoFit/>
+          </a:bodyPr>
+          <a:lstStyle/>
+          <a:p>
+            <a:pPr algn="ctr"/>
+            <a:r>
+              <a:rPr lang="en-US"/>
+              <a:t>Vacuum</a:t>
+            </a:r>
+          </a:p>
+        </p:txBody>
+      </p:sp>
+      <p:sp>
+        <p:nvSpPr>
+          <p:cNvPr id="183305" name="Text Box 8"/>
+          <p:cNvSpPr txBox="1">
+            <a:spLocks noChangeArrowheads="1"/>
+          </p:cNvSpPr>
+          <p:nvPr/>
+        </p:nvSpPr>
+        <p:spPr bwMode="auto">
+          <a:xfrm>
+            <a:off x="7278689" y="3092451"/>
+            <a:ext cx="1920875" cy="366713"/>
+          </a:xfrm>
+          <a:prstGeom prst="rect">
+            <a:avLst/>
+          </a:prstGeom>
+          <a:noFill/>
+          <a:ln w="9525" algn="ctr">
+            <a:noFill/>
+            <a:miter lim="800000"/>
+            <a:headEnd/>
+            <a:tailEnd/>
+          </a:ln>
+        </p:spPr>
+        <p:txBody>
+          <a:bodyPr>
+            <a:spAutoFit/>
+          </a:bodyPr>
+          <a:lstStyle/>
+          <a:p>
+            <a:pPr algn="ctr"/>
+            <a:r>
+              <a:rPr lang="en-US"/>
+              <a:t>Membrane</a:t>
+            </a:r>
+          </a:p>
+        </p:txBody>
+      </p:sp>
+      <p:sp>
+        <p:nvSpPr>
+          <p:cNvPr id="183306" name="Line 9"/>
+          <p:cNvSpPr>
+            <a:spLocks noChangeShapeType="1"/>
+          </p:cNvSpPr>
+          <p:nvPr/>
+        </p:nvSpPr>
+        <p:spPr bwMode="auto">
+          <a:xfrm flipH="1">
+            <a:off x="8026400" y="3381376"/>
+            <a:ext cx="115888" cy="276225"/>
+          </a:xfrm>
+          <a:prstGeom prst="line">
+            <a:avLst/>
+          </a:prstGeom>
+          <a:noFill/>
+          <a:ln w="9525">
+            <a:solidFill>
+              <a:schemeClr val="tx1"/>
+            </a:solidFill>
+            <a:round/>
+            <a:headEnd/>
+            <a:tailEnd type="triangle" w="med" len="med"/>
+          </a:ln>
+        </p:spPr>
+        <p:txBody>
+          <a:bodyPr wrap="none" anchor="ctr"/>
           <a:lstStyle/>
           <a:p>
             <a:endParaRPr lang="en-US"/>
@@ -7555,7 +7922,7 @@
     </p:spTree>
     <p:extLst>
       <p:ext uri="{BB962C8B-B14F-4D97-AF65-F5344CB8AC3E}">
-        <p14:creationId xmlns:p14="http://schemas.microsoft.com/office/powerpoint/2010/main" val="1532625996"/>
+        <p14:creationId xmlns:p14="http://schemas.microsoft.com/office/powerpoint/2010/main" val="3786188879"/>
       </p:ext>
     </p:extLst>
   </p:cSld>
@@ -11135,4 +11502,319 @@
     </a:ext>
   </a:extLst>
 </a:theme>
+</file>
+
+<file path=ppt/theme/theme2.xml><?xml version="1.0" encoding="utf-8"?>
+<a:theme xmlns:a="http://schemas.openxmlformats.org/drawingml/2006/main" name="Office Theme">
+  <a:themeElements>
+    <a:clrScheme name="Office">
+      <a:dk1>
+        <a:sysClr val="windowText" lastClr="000000"/>
+      </a:dk1>
+      <a:lt1>
+        <a:sysClr val="window" lastClr="FFFFFF"/>
+      </a:lt1>
+      <a:dk2>
+        <a:srgbClr val="0E2841"/>
+      </a:dk2>
+      <a:lt2>
+        <a:srgbClr val="E8E8E8"/>
+      </a:lt2>
+      <a:accent1>
+        <a:srgbClr val="156082"/>
+      </a:accent1>
+      <a:accent2>
+        <a:srgbClr val="E97132"/>
+      </a:accent2>
+      <a:accent3>
+        <a:srgbClr val="196B24"/>
+      </a:accent3>
+      <a:accent4>
+        <a:srgbClr val="0F9ED5"/>
+      </a:accent4>
+      <a:accent5>
+        <a:srgbClr val="A02B93"/>
+      </a:accent5>
+      <a:accent6>
+        <a:srgbClr val="4EA72E"/>
+      </a:accent6>
+      <a:hlink>
+        <a:srgbClr val="467886"/>
+      </a:hlink>
+      <a:folHlink>
+        <a:srgbClr val="96607D"/>
+      </a:folHlink>
+    </a:clrScheme>
+    <a:fontScheme name="Office">
+      <a:majorFont>
+        <a:latin typeface="Aptos Display" panose="02110004020202020204"/>
+        <a:ea typeface=""/>
+        <a:cs typeface=""/>
+        <a:font script="Jpan" typeface="游ゴシック Light"/>
+        <a:font script="Hang" typeface="맑은 고딕"/>
+        <a:font script="Hans" typeface="等线 Light"/>
+        <a:font script="Hant" typeface="新細明體"/>
+        <a:font script="Arab" typeface="Times New Roman"/>
+        <a:font script="Hebr" typeface="Times New Roman"/>
+        <a:font script="Thai" typeface="Angsana New"/>
+        <a:font script="Ethi" typeface="Nyala"/>
+        <a:font script="Beng" typeface="Vrinda"/>
+        <a:font script="Gujr" typeface="Shruti"/>
+        <a:font script="Khmr" typeface="MoolBoran"/>
+        <a:font script="Knda" typeface="Tunga"/>
+        <a:font script="Guru" typeface="Raavi"/>
+        <a:font script="Cans" typeface="Euphemia"/>
+        <a:font script="Cher" typeface="Plantagenet Cherokee"/>
+        <a:font script="Yiii" typeface="Microsoft Yi Baiti"/>
+        <a:font script="Tibt" typeface="Microsoft Himalaya"/>
+        <a:font script="Thaa" typeface="MV Boli"/>
+        <a:font script="Deva" typeface="Mangal"/>
+        <a:font script="Telu" typeface="Gautami"/>
+        <a:font script="Taml" typeface="Latha"/>
+        <a:font script="Syrc" typeface="Estrangelo Edessa"/>
+        <a:font script="Orya" typeface="Kalinga"/>
+        <a:font script="Mlym" typeface="Kartika"/>
+        <a:font script="Laoo" typeface="DokChampa"/>
+        <a:font script="Sinh" typeface="Iskoola Pota"/>
+        <a:font script="Mong" typeface="Mongolian Baiti"/>
+        <a:font script="Viet" typeface="Times New Roman"/>
+        <a:font script="Uigh" typeface="Microsoft Uighur"/>
+        <a:font script="Geor" typeface="Sylfaen"/>
+        <a:font script="Armn" typeface="Arial"/>
+        <a:font script="Bugi" typeface="Leelawadee UI"/>
+        <a:font script="Bopo" typeface="Microsoft JhengHei"/>
+        <a:font script="Java" typeface="Javanese Text"/>
+        <a:font script="Lisu" typeface="Segoe UI"/>
+        <a:font script="Mymr" typeface="Myanmar Text"/>
+        <a:font script="Nkoo" typeface="Ebrima"/>
+        <a:font script="Olck" typeface="Nirmala UI"/>
+        <a:font script="Osma" typeface="Ebrima"/>
+        <a:font script="Phag" typeface="Phagspa"/>
+        <a:font script="Syrn" typeface="Estrangelo Edessa"/>
+        <a:font script="Syrj" typeface="Estrangelo Edessa"/>
+        <a:font script="Syre" typeface="Estrangelo Edessa"/>
+        <a:font script="Sora" typeface="Nirmala UI"/>
+        <a:font script="Tale" typeface="Microsoft Tai Le"/>
+        <a:font script="Talu" typeface="Microsoft New Tai Lue"/>
+        <a:font script="Tfng" typeface="Ebrima"/>
+      </a:majorFont>
+      <a:minorFont>
+        <a:latin typeface="Aptos" panose="02110004020202020204"/>
+        <a:ea typeface=""/>
+        <a:cs typeface=""/>
+        <a:font script="Jpan" typeface="游ゴシック"/>
+        <a:font script="Hang" typeface="맑은 고딕"/>
+        <a:font script="Hans" typeface="等线"/>
+        <a:font script="Hant" typeface="新細明體"/>
+        <a:font script="Arab" typeface="Arial"/>
+        <a:font script="Hebr" typeface="Arial"/>
+        <a:font script="Thai" typeface="Cordia New"/>
+        <a:font script="Ethi" typeface="Nyala"/>
+        <a:font script="Beng" typeface="Vrinda"/>
+        <a:font script="Gujr" typeface="Shruti"/>
+        <a:font script="Khmr" typeface="DaunPenh"/>
+        <a:font script="Knda" typeface="Tunga"/>
+        <a:font script="Guru" typeface="Raavi"/>
+        <a:font script="Cans" typeface="Euphemia"/>
+        <a:font script="Cher" typeface="Plantagenet Cherokee"/>
+        <a:font script="Yiii" typeface="Microsoft Yi Baiti"/>
+        <a:font script="Tibt" typeface="Microsoft Himalaya"/>
+        <a:font script="Thaa" typeface="MV Boli"/>
+        <a:font script="Deva" typeface="Mangal"/>
+        <a:font script="Telu" typeface="Gautami"/>
+        <a:font script="Taml" typeface="Latha"/>
+        <a:font script="Syrc" typeface="Estrangelo Edessa"/>
+        <a:font script="Orya" typeface="Kalinga"/>
+        <a:font script="Mlym" typeface="Kartika"/>
+        <a:font script="Laoo" typeface="DokChampa"/>
+        <a:font script="Sinh" typeface="Iskoola Pota"/>
+        <a:font script="Mong" typeface="Mongolian Baiti"/>
+        <a:font script="Viet" typeface="Arial"/>
+        <a:font script="Uigh" typeface="Microsoft Uighur"/>
+        <a:font script="Geor" typeface="Sylfaen"/>
+        <a:font script="Armn" typeface="Arial"/>
+        <a:font script="Bugi" typeface="Leelawadee UI"/>
+        <a:font script="Bopo" typeface="Microsoft JhengHei"/>
+        <a:font script="Java" typeface="Javanese Text"/>
+        <a:font script="Lisu" typeface="Segoe UI"/>
+        <a:font script="Mymr" typeface="Myanmar Text"/>
+        <a:font script="Nkoo" typeface="Ebrima"/>
+        <a:font script="Olck" typeface="Nirmala UI"/>
+        <a:font script="Osma" typeface="Ebrima"/>
+        <a:font script="Phag" typeface="Phagspa"/>
+        <a:font script="Syrn" typeface="Estrangelo Edessa"/>
+        <a:font script="Syrj" typeface="Estrangelo Edessa"/>
+        <a:font script="Syre" typeface="Estrangelo Edessa"/>
+        <a:font script="Sora" typeface="Nirmala UI"/>
+        <a:font script="Tale" typeface="Microsoft Tai Le"/>
+        <a:font script="Talu" typeface="Microsoft New Tai Lue"/>
+        <a:font script="Tfng" typeface="Ebrima"/>
+      </a:minorFont>
+    </a:fontScheme>
+    <a:fmtScheme name="Office">
+      <a:fillStyleLst>
+        <a:solidFill>
+          <a:schemeClr val="phClr"/>
+        </a:solidFill>
+        <a:gradFill rotWithShape="1">
+          <a:gsLst>
+            <a:gs pos="0">
+              <a:schemeClr val="phClr">
+                <a:lumMod val="110000"/>
+                <a:satMod val="105000"/>
+                <a:tint val="67000"/>
+              </a:schemeClr>
+            </a:gs>
+            <a:gs pos="50000">
+              <a:schemeClr val="phClr">
+                <a:lumMod val="105000"/>
+                <a:satMod val="103000"/>
+                <a:tint val="73000"/>
+              </a:schemeClr>
+            </a:gs>
+            <a:gs pos="100000">
+              <a:schemeClr val="phClr">
+                <a:lumMod val="105000"/>
+                <a:satMod val="109000"/>
+                <a:tint val="81000"/>
+              </a:schemeClr>
+            </a:gs>
+          </a:gsLst>
+          <a:lin ang="5400000" scaled="0"/>
+        </a:gradFill>
+        <a:gradFill rotWithShape="1">
+          <a:gsLst>
+            <a:gs pos="0">
+              <a:schemeClr val="phClr">
+                <a:satMod val="103000"/>
+                <a:lumMod val="102000"/>
+                <a:tint val="94000"/>
+              </a:schemeClr>
+            </a:gs>
+            <a:gs pos="50000">
+              <a:schemeClr val="phClr">
+                <a:satMod val="110000"/>
+                <a:lumMod val="100000"/>
+                <a:shade val="100000"/>
+              </a:schemeClr>
+            </a:gs>
+            <a:gs pos="100000">
+              <a:schemeClr val="phClr">
+                <a:lumMod val="99000"/>
+                <a:satMod val="120000"/>
+                <a:shade val="78000"/>
+              </a:schemeClr>
+            </a:gs>
+          </a:gsLst>
+          <a:lin ang="5400000" scaled="0"/>
+        </a:gradFill>
+      </a:fillStyleLst>
+      <a:lnStyleLst>
+        <a:ln w="12700" cap="flat" cmpd="sng" algn="ctr">
+          <a:solidFill>
+            <a:schemeClr val="phClr"/>
+          </a:solidFill>
+          <a:prstDash val="solid"/>
+          <a:miter lim="800000"/>
+        </a:ln>
+        <a:ln w="19050" cap="flat" cmpd="sng" algn="ctr">
+          <a:solidFill>
+            <a:schemeClr val="phClr"/>
+          </a:solidFill>
+          <a:prstDash val="solid"/>
+          <a:miter lim="800000"/>
+        </a:ln>
+        <a:ln w="25400" cap="flat" cmpd="sng" algn="ctr">
+          <a:solidFill>
+            <a:schemeClr val="phClr"/>
+          </a:solidFill>
+          <a:prstDash val="solid"/>
+          <a:miter lim="800000"/>
+        </a:ln>
+      </a:lnStyleLst>
+      <a:effectStyleLst>
+        <a:effectStyle>
+          <a:effectLst/>
+        </a:effectStyle>
+        <a:effectStyle>
+          <a:effectLst/>
+        </a:effectStyle>
+        <a:effectStyle>
+          <a:effectLst>
+            <a:outerShdw blurRad="57150" dist="19050" dir="5400000" algn="ctr" rotWithShape="0">
+              <a:srgbClr val="000000">
+                <a:alpha val="63000"/>
+              </a:srgbClr>
+            </a:outerShdw>
+          </a:effectLst>
+        </a:effectStyle>
+      </a:effectStyleLst>
+      <a:bgFillStyleLst>
+        <a:solidFill>
+          <a:schemeClr val="phClr"/>
+        </a:solidFill>
+        <a:solidFill>
+          <a:schemeClr val="phClr">
+            <a:tint val="95000"/>
+            <a:satMod val="170000"/>
+          </a:schemeClr>
+        </a:solidFill>
+        <a:gradFill rotWithShape="1">
+          <a:gsLst>
+            <a:gs pos="0">
+              <a:schemeClr val="phClr">
+                <a:tint val="93000"/>
+                <a:satMod val="150000"/>
+                <a:shade val="98000"/>
+                <a:lumMod val="102000"/>
+              </a:schemeClr>
+            </a:gs>
+            <a:gs pos="50000">
+              <a:schemeClr val="phClr">
+                <a:tint val="98000"/>
+                <a:satMod val="130000"/>
+                <a:shade val="90000"/>
+                <a:lumMod val="103000"/>
+              </a:schemeClr>
+            </a:gs>
+            <a:gs pos="100000">
+              <a:schemeClr val="phClr">
+                <a:shade val="63000"/>
+                <a:satMod val="120000"/>
+              </a:schemeClr>
+            </a:gs>
+          </a:gsLst>
+          <a:lin ang="5400000" scaled="0"/>
+        </a:gradFill>
+      </a:bgFillStyleLst>
+    </a:fmtScheme>
+  </a:themeElements>
+  <a:objectDefaults>
+    <a:lnDef>
+      <a:spPr/>
+      <a:bodyPr/>
+      <a:lstStyle/>
+      <a:style>
+        <a:lnRef idx="2">
+          <a:schemeClr val="accent1"/>
+        </a:lnRef>
+        <a:fillRef idx="0">
+          <a:schemeClr val="accent1"/>
+        </a:fillRef>
+        <a:effectRef idx="1">
+          <a:schemeClr val="accent1"/>
+        </a:effectRef>
+        <a:fontRef idx="minor">
+          <a:schemeClr val="tx1"/>
+        </a:fontRef>
+      </a:style>
+    </a:lnDef>
+  </a:objectDefaults>
+  <a:extraClrSchemeLst/>
+  <a:extLst>
+    <a:ext uri="{05A4C25C-085E-4340-85A3-A5531E510DB2}">
+      <thm15:themeFamily xmlns:thm15="http://schemas.microsoft.com/office/thememl/2012/main" name="Office Theme" id="{2E142A2C-CD16-42D6-873A-C26D2A0506FA}" vid="{1BDDFF52-6CD6-40A5-AB3C-68EB2F1E4D0A}"/>
+    </a:ext>
+  </a:extLst>
+</a:theme>
 </file>